--- a/Airbnb Pricing Deck.pptx
+++ b/Airbnb Pricing Deck.pptx
@@ -7850,7 +7850,7 @@
                 <a:ea typeface="Poppins" pitchFamily="34" charset="-122"/>
                 <a:cs typeface="Poppins" pitchFamily="34" charset="-120"/>
               </a:rPr>
-              <a:t>12 · CHALLENGES &amp; LIMITATIONS</a:t>
+              <a:t>12 · WHAT WE'D DO WITH MORE</a:t>
             </a:r>
             <a:endParaRPr lang="en-US" sz="1200" dirty="0"/>
           </a:p>
@@ -7892,7 +7892,7 @@
                 <a:ea typeface="Poppins" pitchFamily="34" charset="-122"/>
                 <a:cs typeface="Poppins" pitchFamily="34" charset="-120"/>
               </a:rPr>
-              <a:t>What our model can and can't tell us</a:t>
+              <a:t>The number is a floor. Here is what lifts it.</a:t>
             </a:r>
             <a:endParaRPr lang="en-US" sz="2800" dirty="0"/>
           </a:p>
@@ -7934,7 +7934,7 @@
                 <a:ea typeface="Poppins" pitchFamily="34" charset="-122"/>
                 <a:cs typeface="Poppins" pitchFamily="34" charset="-120"/>
               </a:rPr>
-              <a:t>Stated plainly, and paired with the data that would close each gap.</a:t>
+              <a:t>Every unmeasured quantity was resolved against us. Four asks would let us prove how much bigger this is.</a:t>
             </a:r>
             <a:endParaRPr lang="en-US" sz="1450" dirty="0"/>
           </a:p>
@@ -8291,7 +8291,7 @@
                 <a:ea typeface="Poppins" pitchFamily="34" charset="-122"/>
                 <a:cs typeface="Poppins" pitchFamily="34" charset="-120"/>
               </a:rPr>
-              <a:t>Elasticity is a pilot</a:t>
+              <a:t>Give us the full elasticity panel</a:t>
             </a:r>
             <a:endParaRPr lang="en-US" sz="1400" dirty="0"/>
           </a:p>
@@ -8333,7 +8333,7 @@
                 <a:ea typeface="Poppins" pitchFamily="34" charset="-122"/>
                 <a:cs typeface="Poppins" pitchFamily="34" charset="-120"/>
               </a:rPr>
-              <a:t>β = −0.92 is measured on a 64-listing short-stay panel of established hosts. The full AirROI panel would confirm it across every segment and review tier. This is our #1 data ask.</a:t>
+              <a:t>We proved the mechanism on 64 established short-stay listings and measured −0.92. The full panel would confirm it across every segment and review tier — and likely raises the number, since newer listings are more price-sensitive.</a:t>
             </a:r>
             <a:endParaRPr lang="en-US" sz="1180" dirty="0"/>
           </a:p>
@@ -8467,7 +8467,7 @@
                 <a:ea typeface="Poppins" pitchFamily="34" charset="-122"/>
                 <a:cs typeface="Poppins" pitchFamily="34" charset="-120"/>
               </a:rPr>
-              <a:t>Monthly held occupancy-neutral</a:t>
+              <a:t>Let us measure the monthly segment</a:t>
             </a:r>
             <a:endParaRPr lang="en-US" sz="1400" dirty="0"/>
           </a:p>
@@ -8509,7 +8509,7 @@
                 <a:ea typeface="Poppins" pitchFamily="34" charset="-122"/>
                 <a:cs typeface="Poppins" pitchFamily="34" charset="-120"/>
               </a:rPr>
-              <a:t>The monthly segment's elasticity came back statistically insignificant, so we hold it flat rather than guess, which keeps the revenue floor honest but conservative.</a:t>
+              <a:t>No significant price response showed up in the pilot, so we assumed none and let the full price gap flow through. With more within-listing price variation we could measure it properly instead of assuming it.</a:t>
             </a:r>
             <a:endParaRPr lang="en-US" sz="1180" dirty="0"/>
           </a:p>
@@ -8643,7 +8643,7 @@
                 <a:ea typeface="Poppins" pitchFamily="34" charset="-122"/>
                 <a:cs typeface="Poppins" pitchFamily="34" charset="-120"/>
               </a:rPr>
-              <a:t>NYC-only</a:t>
+              <a:t>Open the booking-flow data</a:t>
             </a:r>
             <a:endParaRPr lang="en-US" sz="1400" dirty="0"/>
           </a:p>
@@ -8685,7 +8685,7 @@
                 <a:ea typeface="Poppins" pitchFamily="34" charset="-122"/>
                 <a:cs typeface="Poppins" pitchFamily="34" charset="-120"/>
               </a:rPr>
-              <a:t>Pricing behavior varies by city. Tourism, regulation, local competition and seasonal demand all differ, so the coefficients need re-fitting per market.</a:t>
+              <a:t>We counted zero credit for guests won back from hotels and competitors. Airbnb's own conversion data would price that, along with the churn and lifetime-value effects we can describe but not yet quantify.</a:t>
             </a:r>
             <a:endParaRPr lang="en-US" sz="1180" dirty="0"/>
           </a:p>
@@ -8819,7 +8819,7 @@
                 <a:ea typeface="Poppins" pitchFamily="34" charset="-122"/>
                 <a:cs typeface="Poppins" pitchFamily="34" charset="-120"/>
               </a:rPr>
-              <a:t>No internal booking data</a:t>
+              <a:t>Then take it beyond New York</a:t>
             </a:r>
             <a:endParaRPr lang="en-US" sz="1400" dirty="0"/>
           </a:p>
@@ -8861,7 +8861,7 @@
                 <a:ea typeface="Poppins" pitchFamily="34" charset="-122"/>
                 <a:cs typeface="Poppins" pitchFamily="34" charset="-120"/>
               </a:rPr>
-              <a:t>We lack Airbnb's booking-flow, churn and lifetime-value data, so retention and liquidity upside stays unpriced. This is decision support, not a replacement for host judgment.</a:t>
+              <a:t>Coefficients need re-fitting per market — tourism, regulation and seasonality all differ. The method transfers; these particular numbers are New York's.</a:t>
             </a:r>
             <a:endParaRPr lang="en-US" sz="1180" dirty="0"/>
           </a:p>

--- a/Airbnb Pricing Deck.pptx
+++ b/Airbnb Pricing Deck.pptx
@@ -15608,112 +15608,6 @@
           </a:p>
         </p:txBody>
       </p:sp>
-      <p:sp>
-        <p:nvSpPr>
-          <p:cNvPr id="5" name="Shape 3"/>
-          <p:cNvSpPr/>
-          <p:nvPr/>
-        </p:nvSpPr>
-        <p:spPr>
-          <a:xfrm>
-            <a:off x="9357055" y="475488"/>
-            <a:ext cx="2331720" cy="365760"/>
-          </a:xfrm>
-          <a:prstGeom prst="roundRect">
-            <a:avLst>
-              <a:gd name="adj" fmla="val 50000"/>
-            </a:avLst>
-          </a:prstGeom>
-          <a:solidFill>
-            <a:srgbClr val="F2F3F5"/>
-          </a:solidFill>
-          <a:ln/>
-        </p:spPr>
-        <p:txBody>
-          <a:bodyPr/>
-          <a:lstStyle/>
-          <a:p>
-            <a:endParaRPr lang="en-US"/>
-          </a:p>
-        </p:txBody>
-      </p:sp>
-      <p:sp>
-        <p:nvSpPr>
-          <p:cNvPr id="6" name="Shape 4"/>
-          <p:cNvSpPr/>
-          <p:nvPr/>
-        </p:nvSpPr>
-        <p:spPr>
-          <a:xfrm>
-            <a:off x="9503359" y="585216"/>
-            <a:ext cx="146304" cy="146304"/>
-          </a:xfrm>
-          <a:prstGeom prst="ellipse">
-            <a:avLst/>
-          </a:prstGeom>
-          <a:solidFill>
-            <a:srgbClr val="FF385C"/>
-          </a:solidFill>
-          <a:ln/>
-        </p:spPr>
-        <p:txBody>
-          <a:bodyPr/>
-          <a:lstStyle/>
-          <a:p>
-            <a:endParaRPr lang="en-US"/>
-          </a:p>
-        </p:txBody>
-      </p:sp>
-      <p:sp>
-        <p:nvSpPr>
-          <p:cNvPr id="7" name="Text 5"/>
-          <p:cNvSpPr/>
-          <p:nvPr/>
-        </p:nvSpPr>
-        <p:spPr>
-          <a:xfrm>
-            <a:off x="9667951" y="475488"/>
-            <a:ext cx="1965960" cy="365760"/>
-          </a:xfrm>
-          <a:prstGeom prst="rect">
-            <a:avLst/>
-          </a:prstGeom>
-          <a:noFill/>
-          <a:ln/>
-        </p:spPr>
-        <p:txBody>
-          <a:bodyPr wrap="square" lIns="0" tIns="0" rIns="0" bIns="0" rtlCol="0" anchor="ctr"/>
-          <a:lstStyle/>
-          <a:p>
-            <a:pPr marL="0" indent="0">
-              <a:buNone/>
-            </a:pPr>
-            <a:r>
-              <a:rPr lang="en-US" sz="950" b="1" kern="0" spc="100" dirty="0">
-                <a:solidFill>
-                  <a:srgbClr val="9AA0A6"/>
-                </a:solidFill>
-                <a:latin typeface="Poppins" pitchFamily="34" charset="0"/>
-                <a:ea typeface="Poppins" pitchFamily="34" charset="-122"/>
-                <a:cs typeface="Poppins" pitchFamily="34" charset="-120"/>
-              </a:rPr>
-              <a:t>PRESENTS  </a:t>
-            </a:r>
-            <a:r>
-              <a:rPr lang="en-US" sz="950" b="1" dirty="0">
-                <a:solidFill>
-                  <a:srgbClr val="222222"/>
-                </a:solidFill>
-                <a:latin typeface="Poppins" pitchFamily="34" charset="0"/>
-                <a:ea typeface="Poppins" pitchFamily="34" charset="-122"/>
-                <a:cs typeface="Poppins" pitchFamily="34" charset="-120"/>
-              </a:rPr>
-              <a:t>Rachael</a:t>
-            </a:r>
-            <a:endParaRPr lang="en-US" sz="950" dirty="0"/>
-          </a:p>
-        </p:txBody>
-      </p:sp>
       <p:pic>
         <p:nvPicPr>
           <p:cNvPr id="8" name="Image 0" descr="/sessions/dreamy-trusting-noether/mnt/outputs/build/assets/cornell_dark.png"/>

--- a/Airbnb Pricing Deck.pptx
+++ b/Airbnb Pricing Deck.pptx
@@ -17658,7 +17658,7 @@
                 <a:ea typeface="Poppins" pitchFamily="34" charset="-122"/>
                 <a:cs typeface="Poppins" pitchFamily="34" charset="-120"/>
               </a:rPr>
-              <a:t>The pricing problem — and our answer</a:t>
+              <a:t>$1.17M a year, for a $65K build</a:t>
             </a:r>
             <a:endParaRPr lang="en-US" sz="2900" dirty="0"/>
           </a:p>
@@ -17700,7 +17700,7 @@
                 <a:ea typeface="Poppins" pitchFamily="34" charset="-122"/>
                 <a:cs typeface="Poppins" pitchFamily="34" charset="-120"/>
               </a:rPr>
-              <a:t>Hosts want to maximize revenue, but pricing is hard and today's help is a black box.</a:t>
+              <a:t>Half of NYC's listings are priced wrong. We show hosts by how much and why — and Airbnb earns on every correction.</a:t>
             </a:r>
             <a:endParaRPr lang="en-US" sz="1450" dirty="0"/>
           </a:p>
@@ -18096,7 +18096,7 @@
                 <a:ea typeface="Poppins" pitchFamily="34" charset="-122"/>
                 <a:cs typeface="Poppins" pitchFamily="34" charset="-120"/>
               </a:rPr>
-              <a:t>Smart Pricing hands hosts a number with no “why” — no comparable listings, no drivers, no room to explore. So hosts either ignore it or follow it blindly.</a:t>
+              <a:t>Smart Pricing hands hosts a number with no reasoning — no comparables, no drivers, nothing to explore. So hosts ignore it, or follow it blindly.</a:t>
             </a:r>
             <a:endParaRPr lang="en-US" sz="1200" dirty="0"/>
           </a:p>
@@ -18269,7 +18269,7 @@
                 <a:ea typeface="Poppins" pitchFamily="34" charset="-122"/>
                 <a:cs typeface="Poppins" pitchFamily="34" charset="-120"/>
               </a:rPr>
-              <a:t>A platform that pairs a machine-learning fair price with comparable listings and an interactive dashboard — so hosts understand and trust the recommendation, not just receive it.</a:t>
+              <a:t>A fair price a host can actually interrogate: the comparable listings behind it, the amenity gaps against high performers, and a slider to test any price.</a:t>
             </a:r>
             <a:endParaRPr lang="en-US" sz="1200" dirty="0"/>
           </a:p>
@@ -18318,65 +18318,14 @@
       </p:sp>
       <p:sp>
         <p:nvSpPr>
-          <p:cNvPr id="23" name="Shape 17"/>
-          <p:cNvSpPr/>
-          <p:nvPr/>
-        </p:nvSpPr>
-        <p:spPr>
-          <a:xfrm>
-            <a:off x="740664" y="4434840"/>
-            <a:ext cx="548640" cy="548640"/>
-          </a:xfrm>
-          <a:prstGeom prst="ellipse">
-            <a:avLst/>
-          </a:prstGeom>
-          <a:solidFill>
-            <a:srgbClr val="FFEEF2"/>
-          </a:solidFill>
-          <a:ln/>
-        </p:spPr>
-        <p:txBody>
-          <a:bodyPr/>
-          <a:lstStyle/>
-          <a:p>
-            <a:endParaRPr lang="en-US"/>
-          </a:p>
-        </p:txBody>
-      </p:sp>
-      <p:pic>
-        <p:nvPicPr>
-          <p:cNvPr id="24" name="Image 4" descr="/sessions/dreamy-trusting-noether/mnt/outputs/build/assets/cpu_coral.png"/>
-          <p:cNvPicPr>
-            <a:picLocks noChangeAspect="1"/>
-          </p:cNvPicPr>
-          <p:nvPr/>
-        </p:nvPicPr>
-        <p:blipFill>
-          <a:blip r:embed="rId7"/>
-          <a:stretch>
-            <a:fillRect/>
-          </a:stretch>
-        </p:blipFill>
-        <p:spPr>
-          <a:xfrm>
-            <a:off x="872338" y="4566514"/>
-            <a:ext cx="285293" cy="285293"/>
-          </a:xfrm>
-          <a:prstGeom prst="rect">
-            <a:avLst/>
-          </a:prstGeom>
-        </p:spPr>
-      </p:pic>
-      <p:sp>
-        <p:nvSpPr>
           <p:cNvPr id="25" name="Text 18"/>
           <p:cNvSpPr/>
           <p:nvPr/>
         </p:nvSpPr>
         <p:spPr>
           <a:xfrm>
-            <a:off x="1399032" y="4489704"/>
-            <a:ext cx="2557272" cy="365760"/>
+            <a:off x="758952" y="4462272"/>
+            <a:ext cx="3054096" cy="548640"/>
           </a:xfrm>
           <a:prstGeom prst="rect">
             <a:avLst/>
@@ -18392,15 +18341,15 @@
               <a:buNone/>
             </a:pPr>
             <a:r>
-              <a:rPr lang="en-US" sz="1500" b="1" dirty="0">
-                <a:solidFill>
-                  <a:srgbClr val="FF385C"/>
-                </a:solidFill>
-                <a:latin typeface="Poppins" pitchFamily="34" charset="0"/>
-                <a:ea typeface="Poppins" pitchFamily="34" charset="-122"/>
-                <a:cs typeface="Poppins" pitchFamily="34" charset="-120"/>
-              </a:rPr>
-              <a:t>Predict</a:t>
+              <a:rPr lang="en-US" sz="3000" b="1" dirty="0">
+                <a:solidFill>
+                  <a:srgbClr val="222222"/>
+                </a:solidFill>
+                <a:latin typeface="Poppins" pitchFamily="34" charset="0"/>
+                <a:ea typeface="Poppins" pitchFamily="34" charset="-122"/>
+                <a:cs typeface="Poppins" pitchFamily="34" charset="-120"/>
+              </a:rPr>
+              <a:t>$1.17M</a:t>
             </a:r>
             <a:endParaRPr lang="en-US" sz="1500" dirty="0"/>
           </a:p>
@@ -18414,8 +18363,8 @@
         </p:nvSpPr>
         <p:spPr>
           <a:xfrm>
-            <a:off x="758952" y="5038344"/>
-            <a:ext cx="3051048" cy="502920"/>
+            <a:off x="758952" y="5047488"/>
+            <a:ext cx="3054096" cy="548640"/>
           </a:xfrm>
           <a:prstGeom prst="rect">
             <a:avLst/>
@@ -18434,7 +18383,7 @@
               <a:buNone/>
             </a:pPr>
             <a:r>
-              <a:rPr lang="en-US" sz="1100" dirty="0">
+              <a:rPr lang="en-US" sz="1100" dirty="0" b="0">
                 <a:solidFill>
                   <a:srgbClr val="717171"/>
                 </a:solidFill>
@@ -18442,7 +18391,7 @@
                 <a:ea typeface="Poppins" pitchFamily="34" charset="-122"/>
                 <a:cs typeface="Poppins" pitchFamily="34" charset="-120"/>
               </a:rPr>
-              <a:t>A calibrated fair nightly price from a gradient-boosting model.</a:t>
+              <a:t>a year in new Airbnb fees, from the NYC pilot alone</a:t>
             </a:r>
             <a:endParaRPr lang="en-US" sz="1100" dirty="0"/>
           </a:p>
@@ -18491,65 +18440,14 @@
       </p:sp>
       <p:sp>
         <p:nvSpPr>
-          <p:cNvPr id="28" name="Shape 21"/>
-          <p:cNvSpPr/>
-          <p:nvPr/>
-        </p:nvSpPr>
-        <p:spPr>
-          <a:xfrm>
-            <a:off x="4550664" y="4434840"/>
-            <a:ext cx="548640" cy="548640"/>
-          </a:xfrm>
-          <a:prstGeom prst="ellipse">
-            <a:avLst/>
-          </a:prstGeom>
-          <a:solidFill>
-            <a:srgbClr val="E6F6F4"/>
-          </a:solidFill>
-          <a:ln/>
-        </p:spPr>
-        <p:txBody>
-          <a:bodyPr/>
-          <a:lstStyle/>
-          <a:p>
-            <a:endParaRPr lang="en-US"/>
-          </a:p>
-        </p:txBody>
-      </p:sp>
-      <p:pic>
-        <p:nvPicPr>
-          <p:cNvPr id="29" name="Image 5" descr="/sessions/dreamy-trusting-noether/mnt/outputs/build/assets/search_teal.png"/>
-          <p:cNvPicPr>
-            <a:picLocks noChangeAspect="1"/>
-          </p:cNvPicPr>
-          <p:nvPr/>
-        </p:nvPicPr>
-        <p:blipFill>
-          <a:blip r:embed="rId8"/>
-          <a:stretch>
-            <a:fillRect/>
-          </a:stretch>
-        </p:blipFill>
-        <p:spPr>
-          <a:xfrm>
-            <a:off x="4682338" y="4566514"/>
-            <a:ext cx="285293" cy="285293"/>
-          </a:xfrm>
-          <a:prstGeom prst="rect">
-            <a:avLst/>
-          </a:prstGeom>
-        </p:spPr>
-      </p:pic>
-      <p:sp>
-        <p:nvSpPr>
           <p:cNvPr id="30" name="Text 22"/>
           <p:cNvSpPr/>
           <p:nvPr/>
         </p:nvSpPr>
         <p:spPr>
           <a:xfrm>
-            <a:off x="5209032" y="4489704"/>
-            <a:ext cx="2557272" cy="365760"/>
+            <a:off x="4572000" y="4462272"/>
+            <a:ext cx="3054096" cy="548640"/>
           </a:xfrm>
           <a:prstGeom prst="rect">
             <a:avLst/>
@@ -18565,15 +18463,15 @@
               <a:buNone/>
             </a:pPr>
             <a:r>
-              <a:rPr lang="en-US" sz="1500" b="1" dirty="0">
-                <a:solidFill>
-                  <a:srgbClr val="007A73"/>
-                </a:solidFill>
-                <a:latin typeface="Poppins" pitchFamily="34" charset="0"/>
-                <a:ea typeface="Poppins" pitchFamily="34" charset="-122"/>
-                <a:cs typeface="Poppins" pitchFamily="34" charset="-120"/>
-              </a:rPr>
-              <a:t>Explain</a:t>
+              <a:rPr lang="en-US" sz="3000" b="1" dirty="0">
+                <a:solidFill>
+                  <a:srgbClr val="222222"/>
+                </a:solidFill>
+                <a:latin typeface="Poppins" pitchFamily="34" charset="0"/>
+                <a:ea typeface="Poppins" pitchFamily="34" charset="-122"/>
+                <a:cs typeface="Poppins" pitchFamily="34" charset="-120"/>
+              </a:rPr>
+              <a:t>~3 months</a:t>
             </a:r>
             <a:endParaRPr lang="en-US" sz="1500" dirty="0"/>
           </a:p>
@@ -18587,8 +18485,8 @@
         </p:nvSpPr>
         <p:spPr>
           <a:xfrm>
-            <a:off x="4568952" y="5038344"/>
-            <a:ext cx="3051048" cy="502920"/>
+            <a:off x="4572000" y="5047488"/>
+            <a:ext cx="3054096" cy="548640"/>
           </a:xfrm>
           <a:prstGeom prst="rect">
             <a:avLst/>
@@ -18607,7 +18505,7 @@
               <a:buNone/>
             </a:pPr>
             <a:r>
-              <a:rPr lang="en-US" sz="1100" dirty="0">
+              <a:rPr lang="en-US" sz="1100" dirty="0" b="0">
                 <a:solidFill>
                   <a:srgbClr val="717171"/>
                 </a:solidFill>
@@ -18615,7 +18513,7 @@
                 <a:ea typeface="Poppins" pitchFamily="34" charset="-122"/>
                 <a:cs typeface="Poppins" pitchFamily="34" charset="-120"/>
               </a:rPr>
-              <a:t>The comparable listings and features behind that number.</a:t>
+              <a:t>to pay the build back, at a realistic 35% adoption</a:t>
             </a:r>
             <a:endParaRPr lang="en-US" sz="1100" dirty="0"/>
           </a:p>
@@ -18664,65 +18562,14 @@
       </p:sp>
       <p:sp>
         <p:nvSpPr>
-          <p:cNvPr id="33" name="Shape 25"/>
-          <p:cNvSpPr/>
-          <p:nvPr/>
-        </p:nvSpPr>
-        <p:spPr>
-          <a:xfrm>
-            <a:off x="8360664" y="4434840"/>
-            <a:ext cx="548640" cy="548640"/>
-          </a:xfrm>
-          <a:prstGeom prst="ellipse">
-            <a:avLst/>
-          </a:prstGeom>
-          <a:solidFill>
-            <a:srgbClr val="FFEEF2"/>
-          </a:solidFill>
-          <a:ln/>
-        </p:spPr>
-        <p:txBody>
-          <a:bodyPr/>
-          <a:lstStyle/>
-          <a:p>
-            <a:endParaRPr lang="en-US"/>
-          </a:p>
-        </p:txBody>
-      </p:sp>
-      <p:pic>
-        <p:nvPicPr>
-          <p:cNvPr id="34" name="Image 6" descr="/sessions/dreamy-trusting-noether/mnt/outputs/build/assets/trend_coral.png"/>
-          <p:cNvPicPr>
-            <a:picLocks noChangeAspect="1"/>
-          </p:cNvPicPr>
-          <p:nvPr/>
-        </p:nvPicPr>
-        <p:blipFill>
-          <a:blip r:embed="rId9"/>
-          <a:stretch>
-            <a:fillRect/>
-          </a:stretch>
-        </p:blipFill>
-        <p:spPr>
-          <a:xfrm>
-            <a:off x="8492338" y="4566514"/>
-            <a:ext cx="285293" cy="285293"/>
-          </a:xfrm>
-          <a:prstGeom prst="rect">
-            <a:avLst/>
-          </a:prstGeom>
-        </p:spPr>
-      </p:pic>
-      <p:sp>
-        <p:nvSpPr>
           <p:cNvPr id="35" name="Text 26"/>
           <p:cNvSpPr/>
           <p:nvPr/>
         </p:nvSpPr>
         <p:spPr>
           <a:xfrm>
-            <a:off x="9019032" y="4489704"/>
-            <a:ext cx="2557272" cy="365760"/>
+            <a:off x="8375904" y="4462272"/>
+            <a:ext cx="3054096" cy="548640"/>
           </a:xfrm>
           <a:prstGeom prst="rect">
             <a:avLst/>
@@ -18738,15 +18585,15 @@
               <a:buNone/>
             </a:pPr>
             <a:r>
-              <a:rPr lang="en-US" sz="1500" b="1" dirty="0">
-                <a:solidFill>
-                  <a:srgbClr val="FF385C"/>
-                </a:solidFill>
-                <a:latin typeface="Poppins" pitchFamily="34" charset="0"/>
-                <a:ea typeface="Poppins" pitchFamily="34" charset="-122"/>
-                <a:cs typeface="Poppins" pitchFamily="34" charset="-120"/>
-              </a:rPr>
-              <a:t>Act</a:t>
+              <a:rPr lang="en-US" sz="3000" b="1" dirty="0">
+                <a:solidFill>
+                  <a:srgbClr val="222222"/>
+                </a:solidFill>
+                <a:latin typeface="Poppins" pitchFamily="34" charset="0"/>
+                <a:ea typeface="Poppins" pitchFamily="34" charset="-122"/>
+                <a:cs typeface="Poppins" pitchFamily="34" charset="-120"/>
+              </a:rPr>
+              <a:t>$65K</a:t>
             </a:r>
             <a:endParaRPr lang="en-US" sz="1500" dirty="0"/>
           </a:p>
@@ -18760,8 +18607,8 @@
         </p:nvSpPr>
         <p:spPr>
           <a:xfrm>
-            <a:off x="8378952" y="5038344"/>
-            <a:ext cx="3051048" cy="502920"/>
+            <a:off x="8375904" y="5047488"/>
+            <a:ext cx="3054096" cy="548640"/>
           </a:xfrm>
           <a:prstGeom prst="rect">
             <a:avLst/>
@@ -18780,7 +18627,7 @@
               <a:buNone/>
             </a:pPr>
             <a:r>
-              <a:rPr lang="en-US" sz="1100" dirty="0">
+              <a:rPr lang="en-US" sz="1100" dirty="0" b="0">
                 <a:solidFill>
                   <a:srgbClr val="717171"/>
                 </a:solidFill>
@@ -18788,7 +18635,7 @@
                 <a:ea typeface="Poppins" pitchFamily="34" charset="-122"/>
                 <a:cs typeface="Poppins" pitchFamily="34" charset="-120"/>
               </a:rPr>
-              <a:t>A what-if view of how price changes affect projected revenue.</a:t>
+              <a:t>one-time build, then $30K a year to run</a:t>
             </a:r>
             <a:endParaRPr lang="en-US" sz="1100" dirty="0"/>
           </a:p>
@@ -18827,7 +18674,7 @@
                 <a:ea typeface="Poppins" pitchFamily="34" charset="-122"/>
                 <a:cs typeface="Poppins" pitchFamily="34" charset="-120"/>
               </a:rPr>
-              <a:t>Our goal isn't to replace Smart Pricing — it's to make pricing recommendations transparent and easy to act on.</a:t>
+              <a:t>Every underpriced night costs the host and Airbnb both. We build on Smart Pricing, not replace it.</a:t>
             </a:r>
             <a:endParaRPr lang="en-US" sz="1250" dirty="0"/>
           </a:p>

--- a/Airbnb Pricing Deck.pptx
+++ b/Airbnb Pricing Deck.pptx
@@ -138,6 +138,14 @@
     </p:ext>
   </p:extLst>
 </p:presentation>
+</file>
+
+<file path=ppt/revisionInfo.xml><?xml version="1.0" encoding="utf-8"?>
+<p1510:revInfo xmlns:a="http://schemas.openxmlformats.org/drawingml/2006/main" xmlns:r="http://schemas.openxmlformats.org/officeDocument/2006/relationships" xmlns:p1510="http://schemas.microsoft.com/office/powerpoint/2015/10/main">
+  <p1510:revLst>
+    <p1510:client id="{F4459766-7F3D-414A-BF06-80034270BD7A}" v="1" dt="2026-08-01T13:59:40.735"/>
+  </p1510:revLst>
+</p1510:revInfo>
 </file>
 
 <file path=ppt/notesMasters/notesMaster1.xml><?xml version="1.0" encoding="utf-8"?>
@@ -312,7 +320,15 @@
             <a:r>
               <a:rPr lang="en-US" dirty="0"/>
               <a:t>SPEAKER: Brendan (~45s).
-"Good afternoon everyone, and thank you for being here. We're Team 6, and today we'll present our capstone project, Airbnb Pricing Intelligence. Over the past few months we've looked at one question that sounds simple but is genuinely hard: how do you know if an Airbnb listing is priced correctly? The deeper we dug, the clearer it got that this isn't only a machine-learning problem — it's a business problem and a trust problem. Today we'll walk you through what we found, how we approached it, the product we built, and the impact it could have for Airbnb and its hosts."
+"Good afternoon everyone, and thank you for being here. We're Team 6, and today we'll present our capstone project, Airbnb Pricing Intelligence. Over the past few months we've looked at one question that sounds simple but is genuinely hard: how do you know if an Airbnb listing is priced correctly? The deeper we dug, the clearer it got that this isn't only a machine-learning </a:t>
+            </a:r>
+            <a:r>
+              <a:rPr lang="en-US"/>
+              <a:t>problem ,  </a:t>
+            </a:r>
+            <a:r>
+              <a:rPr lang="en-US" dirty="0"/>
+              <a:t>it's a business problem and a trust problem. Today we'll walk you through what we found, how we approached it, the product we built, and the impact it could have for Airbnb and its hosts."
 TRANSITION: "So let's start with the problem we set out to solve." [Brendan continues to Slide 2]</a:t>
             </a:r>
           </a:p>
@@ -757,7 +773,31 @@
             <a:r>
               <a:rPr lang="en-US" dirty="0"/>
               <a:t>SPEAKER: Francois (~1.5 min), then team fields Q&amp;A.
-"Our recommendation isn't to replace Smart Pricing — it's to build on it. The opportunity isn't simply another price recommendation; it's helping hosts understand, trust and act on it. As a next step we'd launch this as a pilot in a single market, measuring how hosts interact with the platform, how often they adopt the recommendations, and how pricing changes influence occupancy and revenue. Those real-world results would let Airbnb keep improving the model before expanding to more cities. Looking back, the biggest lesson is that successful analytics isn't just about accurate models — it's about solving the right business problem and presenting insights people are willing to use. For us this project combined machine learning, product thinking, business strategy and data storytelling. Thank you for your time — we'd be happy to take questions."
+"Our recommendation isn't to replace Smart </a:t>
+            </a:r>
+            <a:r>
+              <a:rPr lang="en-US"/>
+              <a:t>Pricing ,  </a:t>
+            </a:r>
+            <a:r>
+              <a:rPr lang="en-US" dirty="0"/>
+              <a:t>it's to build on it. The opportunity isn't simply another price recommendation; it's helping hosts understand, trust and act on it. As a next step we'd launch this as a pilot in a single market, measuring how hosts interact with the platform, how often they adopt the recommendations, and how pricing changes influence occupancy and revenue. Those real-world results would let Airbnb keep improving the model before expanding to more cities. Looking back, the biggest lesson is that successful analytics isn't just about accurate </a:t>
+            </a:r>
+            <a:r>
+              <a:rPr lang="en-US"/>
+              <a:t>models ,  </a:t>
+            </a:r>
+            <a:r>
+              <a:rPr lang="en-US" dirty="0"/>
+              <a:t>it's about solving the right business problem and presenting insights people are willing to use. For us this project combined machine learning, product thinking, business strategy and data storytelling. Thank you for your </a:t>
+            </a:r>
+            <a:r>
+              <a:rPr lang="en-US"/>
+              <a:t>time ,  </a:t>
+            </a:r>
+            <a:r>
+              <a:rPr lang="en-US" dirty="0"/>
+              <a:t>we'd be happy to take questions."
 Q&amp;A: Brendan moderates; each owner takes their section. Appendix has the model bake-off, coefficients, financial assumptions, methodology and glossary.</a:t>
             </a:r>
           </a:p>
@@ -844,8 +884,12 @@
           <a:lstStyle/>
           <a:p>
             <a:r>
+              <a:rPr lang="en-US"/>
+              <a:t>Appendix ,  </a:t>
+            </a:r>
+            <a:r>
               <a:rPr lang="en-US" dirty="0"/>
-              <a:t>Appendix — reference only. Jump here during Q&amp;A as needed.</a:t>
+              <a:t>reference only. Jump here during Q&amp;A as needed.</a:t>
             </a:r>
           </a:p>
         </p:txBody>
@@ -1101,7 +1145,15 @@
             <a:r>
               <a:rPr lang="en-US" dirty="0"/>
               <a:t>SPEAKER: Rachael (~1.5 min).
-"Before building any models, we wanted to understand what drives price. We looked at location, property type, bedrooms and bathrooms, amenities, host experience, review scores and availability. Some variables matter far more than others: Manhattan listings command much higher rates than the outer boroughs, entire homes price above private rooms, and quality signals like cleanliness and self check-in carry clear premiums. But the big realization was that no single feature explains price on its own — two listings can look almost identical and still charge very different prices. Pricing is driven by a combination of factors working together, which gave us confidence that a machine-learning approach would beat a simple formula."
+"Before building any models, we wanted to understand what drives price. We looked at location, property type, bedrooms and bathrooms, amenities, host experience, review scores and availability. Some variables matter far more than others: Manhattan listings command much higher rates than the outer boroughs, entire homes price above private rooms, and quality signals like cleanliness and self check-in carry clear premiums. But the big realization was that no single feature explains price on its </a:t>
+            </a:r>
+            <a:r>
+              <a:rPr lang="en-US"/>
+              <a:t>own ,  </a:t>
+            </a:r>
+            <a:r>
+              <a:rPr lang="en-US" dirty="0"/>
+              <a:t>two listings can look almost identical and still charge very different prices. Pricing is driven by a combination of factors working together, which gave us confidence that a machine-learning approach would beat a simple formula."
 TRANSITION: "Once we understood the variables, we wanted to see how hosts were actually performing." [Rachael continues to Slide 6]</a:t>
             </a:r>
           </a:p>
@@ -1274,7 +1326,23 @@
             <a:r>
               <a:rPr lang="en-US" dirty="0"/>
               <a:t>SPEAKER: Brendan (~1.5 min).
-"Most Airbnb hosts want to maximize revenue, but pricing isn't easy. Some price on experience, some copy nearby listings, some use Airbnb's Smart Pricing. The catch: Smart Pricing gives a recommendation but doesn't really explain why — you're expected to trust a number without knowing which comparable listings were used, what features drove it, or whether you have room to charge more. So we asked: could we build a pricing tool that not only predicts a fair price, but helps hosts understand and trust it? Our answer combines machine learning with comparable listings, pricing insights, and an interactive dashboard. The goal isn't to replace Smart Pricing — it's to make it transparent and easy to act on."
+"Most Airbnb hosts want to maximize revenue, but pricing isn't easy. Some price on experience, some copy nearby listings, some use Airbnb's Smart Pricing. The catch: Smart Pricing gives a recommendation but doesn't really explain </a:t>
+            </a:r>
+            <a:r>
+              <a:rPr lang="en-US"/>
+              <a:t>why ,  </a:t>
+            </a:r>
+            <a:r>
+              <a:rPr lang="en-US" dirty="0"/>
+              <a:t>you're expected to trust a number without knowing which comparable listings were used, what features drove it, or whether you have room to charge more. So we asked: could we build a pricing tool that not only predicts a fair price, but helps hosts understand and trust it? Our answer combines machine learning with comparable listings, pricing insights, and an interactive dashboard. The goal isn't to replace Smart </a:t>
+            </a:r>
+            <a:r>
+              <a:rPr lang="en-US"/>
+              <a:t>Pricing ,  </a:t>
+            </a:r>
+            <a:r>
+              <a:rPr lang="en-US" dirty="0"/>
+              <a:t>it's to make it transparent and easy to act on."
 TRANSITION: "Before we show how we built it, let's look at why this problem exists. I'll hand to Jai." [Hand to Jai]</a:t>
             </a:r>
           </a:p>
@@ -1447,7 +1515,15 @@
             <a:r>
               <a:rPr lang="en-US" dirty="0"/>
               <a:t>SPEAKER: Jai (~1.5 min).
-"Airbnb is one of the largest marketplaces in the world, connecting millions of guests with millions of hosts. Pricing matters to both sides: guests want competitive prices, hosts want to maximize revenue without pricing themselves out. Airbnb helps through Smart Pricing, but from a host's view there's still a missing piece — you get a recommended price but don't know where it came from. There's little transparency, so some hosts ignore it and others follow it blindly. So instead of asking whether we could build another pricing model, we asked something different: can we help hosts make better pricing decisions by combining accurate recommendations with clear explanations and real market comparisons? That became our focus."
+"Airbnb is one of the largest marketplaces in the world, connecting millions of guests with millions of hosts. Pricing matters to both sides: guests want competitive prices, hosts want to maximize revenue without pricing themselves out. Airbnb helps through Smart Pricing, but from a host's view there's still a missing </a:t>
+            </a:r>
+            <a:r>
+              <a:rPr lang="en-US"/>
+              <a:t>piece ,  </a:t>
+            </a:r>
+            <a:r>
+              <a:rPr lang="en-US" dirty="0"/>
+              <a:t>you get a recommended price but don't know where it came from. There's little transparency, so some hosts ignore it and others follow it blindly. So instead of asking whether we could build another pricing model, we asked something different: can we help hosts make better pricing decisions by combining accurate recommendations with clear explanations and real market comparisons? That became our focus."
 TRANSITION: "To answer that, the first step was finding the right data." [Jai continues to Slide 4]</a:t>
             </a:r>
           </a:p>
@@ -1536,7 +1612,23 @@
             <a:r>
               <a:rPr lang="en-US" dirty="0"/>
               <a:t>SPEAKER: Jai (~1.5 min).
-"We intentionally focused on New York City. Rather than model Airbnb's entire global marketplace, we wanted one market where we could build, test and evaluate. We used the public Inside Airbnb dataset — nearly 9,800 active listings with nightly price, availability, reviews, amenities, location and host characteristics. We cleaned the data, handled missing values, engineered features, and prepared it for analysis. Then, importantly, we didn't jump straight into machine learning — we first wanted to understand the data: which variables mattered, what relationships already existed, and what they told us about how listings are priced. That's where our exploratory analysis began."
+"We intentionally focused on New York City. Rather than model Airbnb's entire global marketplace, we wanted one market where we could build, test and evaluate. We used the public Inside Airbnb </a:t>
+            </a:r>
+            <a:r>
+              <a:rPr lang="en-US"/>
+              <a:t>dataset ,  </a:t>
+            </a:r>
+            <a:r>
+              <a:rPr lang="en-US" dirty="0"/>
+              <a:t>nearly 9,800 active listings with nightly price, availability, reviews, amenities, location and host characteristics. We cleaned the data, handled missing values, engineered features, and prepared it for analysis. Then, importantly, we didn't jump straight into machine </a:t>
+            </a:r>
+            <a:r>
+              <a:rPr lang="en-US"/>
+              <a:t>learning ,  </a:t>
+            </a:r>
+            <a:r>
+              <a:rPr lang="en-US" dirty="0"/>
+              <a:t>we first wanted to understand the data: which variables mattered, what relationships already existed, and what they told us about how listings are priced. That's where our exploratory analysis began."
 TRANSITION: "And that brings us to the first insights in the data. I'll hand to Rachael." [Hand to Rachael]</a:t>
             </a:r>
           </a:p>
@@ -1625,7 +1717,15 @@
             <a:r>
               <a:rPr lang="en-US" dirty="0"/>
               <a:t>SPEAKER: Rachael (~1.5 min).
-"Before building any models, we wanted to understand what drives price. We looked at location, property type, bedrooms and bathrooms, amenities, host experience, review scores and availability. Some variables matter far more than others: Manhattan listings command much higher rates than the outer boroughs, entire homes price above private rooms, and quality signals like cleanliness and self check-in carry clear premiums. But the big realization was that no single feature explains price on its own — two listings can look almost identical and still charge very different prices. Pricing is driven by a combination of factors working together, which gave us confidence that a machine-learning approach would beat a simple formula."
+"Before building any models, we wanted to understand what drives price. We looked at location, property type, bedrooms and bathrooms, amenities, host experience, review scores and availability. Some variables matter far more than others: Manhattan listings command much higher rates than the outer boroughs, entire homes price above private rooms, and quality signals like cleanliness and self check-in carry clear premiums. But the big realization was that no single feature explains price on its </a:t>
+            </a:r>
+            <a:r>
+              <a:rPr lang="en-US"/>
+              <a:t>own ,  </a:t>
+            </a:r>
+            <a:r>
+              <a:rPr lang="en-US" dirty="0"/>
+              <a:t>two listings can look almost identical and still charge very different prices. Pricing is driven by a combination of factors working together, which gave us confidence that a machine-learning approach would beat a simple formula."
 TRANSITION: "Once we understood the variables, we wanted to see how hosts were actually performing." [Rachael continues to Slide 6]</a:t>
             </a:r>
           </a:p>
@@ -1714,7 +1814,23 @@
             <a:r>
               <a:rPr lang="en-US" dirty="0"/>
               <a:t>SPEAKER: Rachael (~1.5 min).
-"One of the most interesting relationships was between host quality and occupancy. More experienced, highly reviewed hosts maintain noticeably higher occupancy — listings with 51+ reviews average about 42% occupancy versus 34% for those with under ten, and superhosts run higher than regular hosts. That tells us pricing isn't the only thing driving demand — reviews, reputation and listing quality matter too, so we shouldn't treat price as the only lever. We also saw that some listings were priced close to what we'd expect while others were clearly above or below similar properties. That raised the real question: instead of asking whether a listing is expensive or cheap, could we estimate what a fair market price should be? Answering that became the focus of our model."
+"One of the most interesting relationships was between host quality and occupancy. More experienced, highly reviewed hosts maintain noticeably higher </a:t>
+            </a:r>
+            <a:r>
+              <a:rPr lang="en-US"/>
+              <a:t>occupancy ,  </a:t>
+            </a:r>
+            <a:r>
+              <a:rPr lang="en-US" dirty="0"/>
+              <a:t>listings with 51+ reviews average about 42% occupancy versus 34% for those with under ten, and superhosts run higher than regular hosts. That tells us pricing isn't the only thing driving </a:t>
+            </a:r>
+            <a:r>
+              <a:rPr lang="en-US"/>
+              <a:t>demand ,  </a:t>
+            </a:r>
+            <a:r>
+              <a:rPr lang="en-US" dirty="0"/>
+              <a:t>reviews, reputation and listing quality matter too, so we shouldn't treat price as the only lever. We also saw that some listings were priced close to what we'd expect while others were clearly above or below similar properties. That raised the real question: instead of asking whether a listing is expensive or cheap, could we estimate what a fair market price should be? Answering that became the focus of our model."
 TRANSITION: "So we moved from exploration to building the product itself. Over to Manas." [Hand to Manas]</a:t>
             </a:r>
           </a:p>
@@ -1803,8 +1919,40 @@
             <a:r>
               <a:rPr lang="en-US" dirty="0"/>
               <a:t>SPEAKER: Manas (~1.5 min).
-"Our goal wasn't to build another pricing calculator — Airbnb already has one. It was to help hosts understand the recommendation they're given. If someone tells you to change your price, your first question is usually 'why?' Our product answers that: instead of a single number, it gives a recommended fair value, shows comparable listings that support it, highlights amenity differences, and lets the host explore how changing price could affect revenue. One idea from our coach really shaped this — Commander's Intent: people make better decisions when they understand the reasoning, not when they're just told what to do. That applies perfectly here. So the product isn't only about predicting a price — it's about helping hosts price with confidence."
-TRANSITION: "Of course, that only works if the recommendation is accurate — so next I'll walk through how we generated it." [Manas continues to Slide 8]</a:t>
+"Our goal wasn't to build another pricing </a:t>
+            </a:r>
+            <a:r>
+              <a:rPr lang="en-US"/>
+              <a:t>calculator ,  </a:t>
+            </a:r>
+            <a:r>
+              <a:rPr lang="en-US" dirty="0"/>
+              <a:t>Airbnb already has one. It was to help hosts understand the recommendation they're given. If someone tells you to change your price, your first question is usually 'why?' Our product answers that: instead of a single number, it gives a recommended fair value, shows comparable listings that support it, highlights amenity differences, and lets the host explore how changing price could affect revenue. One idea from our coach really shaped </a:t>
+            </a:r>
+            <a:r>
+              <a:rPr lang="en-US"/>
+              <a:t>this ,  </a:t>
+            </a:r>
+            <a:r>
+              <a:rPr lang="en-US" dirty="0"/>
+              <a:t>Commander's Intent: people make better decisions when they understand the reasoning, not when they're just told what to do. That applies perfectly here. So the product isn't only about predicting a </a:t>
+            </a:r>
+            <a:r>
+              <a:rPr lang="en-US"/>
+              <a:t>price ,  </a:t>
+            </a:r>
+            <a:r>
+              <a:rPr lang="en-US" dirty="0"/>
+              <a:t>it's about helping hosts price with confidence."
+TRANSITION: "Of course, that only works if the recommendation is </a:t>
+            </a:r>
+            <a:r>
+              <a:rPr lang="en-US"/>
+              <a:t>accurate ,  </a:t>
+            </a:r>
+            <a:r>
+              <a:rPr lang="en-US" dirty="0"/>
+              <a:t>so next I'll walk through how we generated it." [Manas continues to Slide 8]</a:t>
             </a:r>
           </a:p>
         </p:txBody>
@@ -5759,7 +5907,7 @@
         </p:nvGraphicFramePr>
         <p:xfrm>
           <a:off x="502920" y="2377440"/>
-          <a:ext cx="6858000" cy="914400"/>
+          <a:ext cx="6858000" cy="2688336"/>
         </p:xfrm>
         <a:graphic>
           <a:graphicData uri="http://schemas.openxmlformats.org/drawingml/2006/table">
@@ -8333,7 +8481,7 @@
                 <a:ea typeface="Poppins" pitchFamily="34" charset="-122"/>
                 <a:cs typeface="Poppins" pitchFamily="34" charset="-120"/>
               </a:rPr>
-              <a:t>We proved the mechanism on 64 established short-stay listings and measured −0.92. The full panel would confirm it across every segment and review tier — and likely raises the number, since newer listings are more price-sensitive.</a:t>
+              <a:t>We proved the mechanism on 64 established short-stay listings and measured −0.92. The full panel would confirm it across every segment and review tier, and likely raises the number, since newer listings are more price-sensitive.</a:t>
             </a:r>
             <a:endParaRPr lang="en-US" sz="1180" dirty="0"/>
           </a:p>
@@ -8861,7 +9009,7 @@
                 <a:ea typeface="Poppins" pitchFamily="34" charset="-122"/>
                 <a:cs typeface="Poppins" pitchFamily="34" charset="-120"/>
               </a:rPr>
-              <a:t>Coefficients need re-fitting per market — tourism, regulation and seasonality all differ. The method transfers; these particular numbers are New York's.</a:t>
+              <a:t>Coefficients need re-fitting per market: tourism, regulation and seasonality all differ. The method transfers; these particular numbers are New York's.</a:t>
             </a:r>
             <a:endParaRPr lang="en-US" sz="1180" dirty="0"/>
           </a:p>
@@ -8975,7 +9123,7 @@
                 <a:ea typeface="Poppins" pitchFamily="34" charset="-122"/>
                 <a:cs typeface="Poppins" pitchFamily="34" charset="-120"/>
               </a:rPr>
-              <a:t>Build on Smart Pricing — don't replace it</a:t>
+              <a:t>Build on Smart Pricing, don't replace it</a:t>
             </a:r>
             <a:endParaRPr lang="en-US" sz="2800" dirty="0"/>
           </a:p>
@@ -9986,7 +10134,7 @@
                 <a:ea typeface="Poppins" pitchFamily="34" charset="-122"/>
                 <a:cs typeface="Poppins" pitchFamily="34" charset="-120"/>
               </a:rPr>
-              <a:t>Good analytics isn't only accurate models — it's solving the right business problem and presenting insight people will actually use. This project brought together machine learning, product thinking, business strategy and data storytelling in one solution — skills that carry directly into our careers.</a:t>
+              <a:t>Good analytics means more than accurate models. It means solving the right business problem and presenting insight people will actually use. This project brought together machine learning, product thinking, business strategy and data storytelling in one solution, skills that carry directly into our careers.</a:t>
             </a:r>
             <a:endParaRPr lang="en-US" sz="1180" dirty="0"/>
           </a:p>
@@ -10375,7 +10523,7 @@
                 <a:ea typeface="Poppins" pitchFamily="34" charset="-122"/>
                 <a:cs typeface="Poppins" pitchFamily="34" charset="-120"/>
               </a:rPr>
-              <a:t>Not presented — held in reserve to answer questions. The full technical write-up lives in the appendix document.</a:t>
+              <a:t>Not presented; held in reserve to answer questions. The full technical write-up lives in the appendix document.</a:t>
             </a:r>
             <a:endParaRPr lang="en-US" sz="1700" dirty="0"/>
           </a:p>
@@ -14441,7 +14589,7 @@
                 <a:ea typeface="Poppins" pitchFamily="34" charset="-122"/>
                 <a:cs typeface="Poppins" pitchFamily="34" charset="-120"/>
               </a:rPr>
-              <a:t>The V1 and V2 rows are pooled across both segments; the production GBM is fitted per segment, so compare like with like — V2 Ridge scored 25.1% on short-stay alone and 20.9% on monthly. Two distinct stages of gain: richer features took pooled error from 39.2% to 23.7%, then the segment-split GBM took short-stay to 19.2% and monthly to 15.2%.</a:t>
+              <a:t>The V1 and V2 rows are pooled across both segments; the production GBM is fitted per segment, so compare like with like: V2 Ridge scored 25.1% on short-stay alone and 20.9% on monthly. Two distinct stages of gain: richer features took pooled error from 39.2% to 23.7%, then the segment-split GBM took short-stay to 19.2% and monthly to 15.2%.</a:t>
             </a:r>
             <a:endParaRPr lang="en-US" sz="1100" dirty="0"/>
           </a:p>
@@ -15446,7 +15594,7 @@
                 <a:ea typeface="Poppins" pitchFamily="34" charset="-122"/>
                 <a:cs typeface="Poppins" pitchFamily="34" charset="-120"/>
               </a:rPr>
-              <a:t>No overpriced upside — we book its loss, not its potential gain. No hotel win-back nights, no churn / LTV, no cross-market scaling. Every input rounds against us, so the real return is higher.</a:t>
+              <a:t>No overpriced upside: we book its loss, not its potential gain. No hotel win-back nights, no churn / LTV, no cross-market scaling. Every input rounds against us, so the real return is higher.</a:t>
             </a:r>
             <a:endParaRPr lang="en-US" sz="1080" dirty="0"/>
           </a:p>
@@ -15945,7 +16093,7 @@
                 <a:ea typeface="Poppins" pitchFamily="34" charset="-122"/>
                 <a:cs typeface="Poppins" pitchFamily="34" charset="-120"/>
               </a:rPr>
-              <a:t>Revenue elasticity is (1+β), so the price gain and the occupancy loss cancel exactly. We assume nothing — we claim nothing.</a:t>
+              <a:t>Revenue elasticity is (1+β), so the price gain and the occupancy loss cancel exactly. We assume nothing; we claim nothing.</a:t>
             </a:r>
             <a:endParaRPr lang="en-US" sz="1250" dirty="0"/>
           </a:p>
@@ -16147,7 +16295,7 @@
         <p:spPr>
           <a:xfrm>
             <a:off x="932688" y="4242816"/>
-            <a:ext cx="2743200" cy="256032"/>
+            <a:ext cx="2743200" cy="169277"/>
           </a:xfrm>
           <a:prstGeom prst="rect">
             <a:avLst/>
@@ -16162,13 +16310,31 @@
           <a:p>
             <a:pPr algn="l"/>
             <a:r>
-              <a:rPr sz="1100" b="0">
+              <a:rPr sz="1100" b="0" dirty="0">
                 <a:solidFill>
                   <a:srgbClr val="717171"/>
                 </a:solidFill>
                 <a:latin typeface="Poppins"/>
               </a:rPr>
-              <a:t>measured elasticity — applied</a:t>
+              <a:t>measured elasticity</a:t>
+            </a:r>
+            <a:r>
+              <a:rPr lang="en-US" sz="1100" b="0" dirty="0">
+                <a:solidFill>
+                  <a:srgbClr val="717171"/>
+                </a:solidFill>
+                <a:latin typeface="Poppins"/>
+              </a:rPr>
+              <a:t>, </a:t>
+            </a:r>
+            <a:r>
+              <a:rPr sz="1100" b="0" dirty="0">
+                <a:solidFill>
+                  <a:srgbClr val="717171"/>
+                </a:solidFill>
+                <a:latin typeface="Poppins"/>
+              </a:rPr>
+              <a:t>applied</a:t>
             </a:r>
           </a:p>
         </p:txBody>
@@ -16369,7 +16535,7 @@
         <p:spPr>
           <a:xfrm>
             <a:off x="4544568" y="3456432"/>
-            <a:ext cx="2743200" cy="256032"/>
+            <a:ext cx="2743200" cy="169277"/>
           </a:xfrm>
           <a:prstGeom prst="rect">
             <a:avLst/>
@@ -16384,13 +16550,31 @@
           <a:p>
             <a:pPr algn="l"/>
             <a:r>
-              <a:rPr sz="1100" b="0">
+              <a:rPr sz="1100" b="0" dirty="0">
                 <a:solidFill>
                   <a:srgbClr val="717171"/>
                 </a:solidFill>
                 <a:latin typeface="Poppins"/>
               </a:rPr>
-              <a:t>underpriced short-stay listings — 76%</a:t>
+              <a:t>underpriced short-stay listings</a:t>
+            </a:r>
+            <a:r>
+              <a:rPr lang="en-US" sz="1100" b="0" dirty="0">
+                <a:solidFill>
+                  <a:srgbClr val="717171"/>
+                </a:solidFill>
+                <a:latin typeface="Poppins"/>
+              </a:rPr>
+              <a:t>, </a:t>
+            </a:r>
+            <a:r>
+              <a:rPr sz="1100" b="0" dirty="0">
+                <a:solidFill>
+                  <a:srgbClr val="717171"/>
+                </a:solidFill>
+                <a:latin typeface="Poppins"/>
+              </a:rPr>
+              <a:t>76%</a:t>
             </a:r>
           </a:p>
         </p:txBody>
@@ -16439,7 +16623,7 @@
         <p:spPr>
           <a:xfrm>
             <a:off x="4544568" y="4242816"/>
-            <a:ext cx="2743200" cy="256032"/>
+            <a:ext cx="2743200" cy="169277"/>
           </a:xfrm>
           <a:prstGeom prst="rect">
             <a:avLst/>
@@ -16454,13 +16638,31 @@
           <a:p>
             <a:pPr algn="l"/>
             <a:r>
-              <a:rPr sz="1100" b="0">
+              <a:rPr sz="1100" b="0" dirty="0">
                 <a:solidFill>
                   <a:srgbClr val="717171"/>
                 </a:solidFill>
                 <a:latin typeface="Poppins"/>
               </a:rPr>
-              <a:t>breakeven assumed — not measured</a:t>
+              <a:t>breakeven assumed</a:t>
+            </a:r>
+            <a:r>
+              <a:rPr lang="en-US" sz="1100" b="0" dirty="0">
+                <a:solidFill>
+                  <a:srgbClr val="717171"/>
+                </a:solidFill>
+                <a:latin typeface="Poppins"/>
+              </a:rPr>
+              <a:t>, </a:t>
+            </a:r>
+            <a:r>
+              <a:rPr sz="1100" b="0" dirty="0">
+                <a:solidFill>
+                  <a:srgbClr val="717171"/>
+                </a:solidFill>
+                <a:latin typeface="Poppins"/>
+              </a:rPr>
+              <a:t>not measured</a:t>
             </a:r>
           </a:p>
         </p:txBody>
@@ -16509,7 +16711,7 @@
         <p:spPr>
           <a:xfrm>
             <a:off x="4544568" y="5029200"/>
-            <a:ext cx="2743200" cy="256032"/>
+            <a:ext cx="2743200" cy="169277"/>
           </a:xfrm>
           <a:prstGeom prst="rect">
             <a:avLst/>
@@ -16524,13 +16726,31 @@
           <a:p>
             <a:pPr algn="l"/>
             <a:r>
-              <a:rPr sz="1100" b="0">
+              <a:rPr sz="1100" b="0" dirty="0">
                 <a:solidFill>
                   <a:srgbClr val="717171"/>
                 </a:solidFill>
                 <a:latin typeface="Poppins"/>
               </a:rPr>
-              <a:t>revenue contribution — claimed nothing</a:t>
+              <a:t>revenue contribution</a:t>
+            </a:r>
+            <a:r>
+              <a:rPr lang="en-US" sz="1100" b="0" dirty="0">
+                <a:solidFill>
+                  <a:srgbClr val="717171"/>
+                </a:solidFill>
+                <a:latin typeface="Poppins"/>
+              </a:rPr>
+              <a:t>, </a:t>
+            </a:r>
+            <a:r>
+              <a:rPr sz="1100" b="0" dirty="0">
+                <a:solidFill>
+                  <a:srgbClr val="717171"/>
+                </a:solidFill>
+                <a:latin typeface="Poppins"/>
+              </a:rPr>
+              <a:t>claimed nothing</a:t>
             </a:r>
           </a:p>
         </p:txBody>
@@ -16929,7 +17149,7 @@
                 <a:ea typeface="Poppins" pitchFamily="34" charset="-122"/>
                 <a:cs typeface="Poppins" pitchFamily="34" charset="-120"/>
               </a:rPr>
-              <a:t>449 listings — the model puts their price entirely below its calibrated band. Worth +$2.79M in host GBV.</a:t>
+              <a:t>449 listings: the model puts their price entirely below its calibrated band. Worth +$2.79M in host GBV.</a:t>
             </a:r>
             <a:endParaRPr lang="en-US" sz="1080" dirty="0"/>
           </a:p>
@@ -17173,7 +17393,7 @@
                 <a:ea typeface="Poppins" pitchFamily="34" charset="-122"/>
                 <a:cs typeface="Poppins" pitchFamily="34" charset="-120"/>
               </a:rPr>
-              <a:t>3,192 listings whose current price sits inside the band. Worth +$5.21M — 69% of the total.</a:t>
+              <a:t>3,192 listings whose current price sits inside the band. Worth +$5.21M, 69% of the total.</a:t>
             </a:r>
             <a:endParaRPr lang="en-US" sz="1080" dirty="0"/>
           </a:p>
@@ -17539,7 +17759,7 @@
                 <a:ea typeface="Poppins" pitchFamily="34" charset="-122"/>
                 <a:cs typeface="Poppins" pitchFamily="34" charset="-120"/>
               </a:rPr>
-              <a:t>Not absence of signal. The price is inside the interval, but q50 remains the best point estimate — and the model-noise discount already haircuts it.</a:t>
+              <a:t>Not absence of signal. The price is inside the interval, but q50 remains the best point estimate, and the model-noise discount already haircuts it.</a:t>
             </a:r>
             <a:endParaRPr lang="en-US" sz="1080" dirty="0"/>
           </a:p>
@@ -17700,7 +17920,7 @@
                 <a:ea typeface="Poppins" pitchFamily="34" charset="-122"/>
                 <a:cs typeface="Poppins" pitchFamily="34" charset="-120"/>
               </a:rPr>
-              <a:t>Half of NYC's listings are priced wrong. We show hosts by how much and why — and Airbnb earns on every correction.</a:t>
+              <a:t>Half of NYC’s listings are priced wrong. We show hosts by how much and why, and Airbnb earns on every correction.</a:t>
             </a:r>
             <a:endParaRPr lang="en-US" sz="1450" dirty="0"/>
           </a:p>
@@ -17978,7 +18198,7 @@
         </p:nvSpPr>
         <p:spPr>
           <a:xfrm>
-            <a:off x="777240" y="2560320"/>
+            <a:off x="632399" y="2373783"/>
             <a:ext cx="603504" cy="603504"/>
           </a:xfrm>
           <a:prstGeom prst="ellipse">
@@ -18013,7 +18233,7 @@
         </p:blipFill>
         <p:spPr>
           <a:xfrm>
-            <a:off x="922081" y="2705161"/>
+            <a:off x="777875" y="2507102"/>
             <a:ext cx="313822" cy="313822"/>
           </a:xfrm>
           <a:prstGeom prst="rect">
@@ -18096,7 +18316,7 @@
                 <a:ea typeface="Poppins" pitchFamily="34" charset="-122"/>
                 <a:cs typeface="Poppins" pitchFamily="34" charset="-120"/>
               </a:rPr>
-              <a:t>Smart Pricing hands hosts a number with no reasoning — no comparables, no drivers, nothing to explore. So hosts ignore it, or follow it blindly.</a:t>
+              <a:t>Smart Pricing hands hosts a number with no reasoning: no comparables, no drivers, nothing to explore. So hosts ignore it, or follow it blindly.</a:t>
             </a:r>
             <a:endParaRPr lang="en-US" sz="1200" dirty="0"/>
           </a:p>
@@ -18151,7 +18371,7 @@
         </p:nvSpPr>
         <p:spPr>
           <a:xfrm>
-            <a:off x="6492240" y="2560320"/>
+            <a:off x="6335329" y="2373783"/>
             <a:ext cx="603504" cy="603504"/>
           </a:xfrm>
           <a:prstGeom prst="ellipse">
@@ -18186,7 +18406,7 @@
         </p:blipFill>
         <p:spPr>
           <a:xfrm>
-            <a:off x="6637081" y="2705161"/>
+            <a:off x="6492240" y="2518624"/>
             <a:ext cx="313822" cy="313822"/>
           </a:xfrm>
           <a:prstGeom prst="rect">
@@ -18284,7 +18504,7 @@
         <p:spPr>
           <a:xfrm>
             <a:off x="502920" y="4160520"/>
-            <a:ext cx="3563112" cy="1417320"/>
+            <a:ext cx="3566160" cy="1417320"/>
           </a:xfrm>
           <a:prstGeom prst="roundRect">
             <a:avLst>
@@ -18405,8 +18625,8 @@
         </p:nvSpPr>
         <p:spPr>
           <a:xfrm>
-            <a:off x="4312920" y="4160520"/>
-            <a:ext cx="3563112" cy="1417320"/>
+            <a:off x="4315968" y="4160520"/>
+            <a:ext cx="3566160" cy="1417320"/>
           </a:xfrm>
           <a:prstGeom prst="roundRect">
             <a:avLst>
@@ -18527,8 +18747,8 @@
         </p:nvSpPr>
         <p:spPr>
           <a:xfrm>
-            <a:off x="8122920" y="4160520"/>
-            <a:ext cx="3563112" cy="1417320"/>
+            <a:off x="8119872" y="4160520"/>
+            <a:ext cx="3566160" cy="1417320"/>
           </a:xfrm>
           <a:prstGeom prst="roundRect">
             <a:avLst>
@@ -18643,7 +18863,7 @@
       </p:sp>
       <p:sp>
         <p:nvSpPr>
-          <p:cNvPr id="37" name="Text 28"/>
+          <p:cNvPr id="4" name="Text 28"/>
           <p:cNvSpPr/>
           <p:nvPr/>
         </p:nvSpPr>
@@ -18663,10 +18883,13 @@
           <a:lstStyle/>
           <a:p>
             <a:pPr marL="0" indent="0" algn="ctr">
+              <a:lnSpc>
+                <a:spcPct val="105000"/>
+              </a:lnSpc>
               <a:buNone/>
             </a:pPr>
             <a:r>
-              <a:rPr lang="en-US" sz="1250" b="1" i="1" dirty="0">
+              <a:rPr lang="en-US" sz="1250" dirty="0" b="1" i="1">
                 <a:solidFill>
                   <a:srgbClr val="FF385C"/>
                 </a:solidFill>
@@ -18676,7 +18899,7 @@
               </a:rPr>
               <a:t>Every underpriced night costs the host and Airbnb both. We build on Smart Pricing, not replace it.</a:t>
             </a:r>
-            <a:endParaRPr lang="en-US" sz="1250" dirty="0"/>
+            <a:endParaRPr lang="en-US" sz="1450" dirty="0"/>
           </a:p>
         </p:txBody>
       </p:sp>
@@ -19123,7 +19346,7 @@
                 <a:ea typeface="Poppins" pitchFamily="34" charset="-122"/>
                 <a:cs typeface="Poppins" pitchFamily="34" charset="-120"/>
               </a:rPr>
-              <a:t>Every listing scored by a model that never trained on it — genuinely out-of-sample.</a:t>
+              <a:t>Every listing scored by a model that never trained on it, genuinely out-of-sample.</a:t>
             </a:r>
             <a:endParaRPr lang="en-US" sz="1050" dirty="0"/>
           </a:p>
@@ -20159,7 +20382,7 @@
                 <a:ea typeface="Poppins" pitchFamily="34" charset="-122"/>
                 <a:cs typeface="Poppins" pitchFamily="34" charset="-120"/>
               </a:rPr>
-              <a:t>Airbnb connects millions of hosts and guests — and pricing moves both sides of the market.</a:t>
+              <a:t>Airbnb connects millions of hosts and guests, and pricing moves both sides of the market.</a:t>
             </a:r>
             <a:endParaRPr lang="en-US" sz="1450" dirty="0"/>
           </a:p>
@@ -20445,7 +20668,7 @@
         </p:blipFill>
         <p:spPr>
           <a:xfrm>
-            <a:off x="704088" y="2414016"/>
+            <a:off x="619209" y="2281428"/>
             <a:ext cx="384048" cy="384048"/>
           </a:xfrm>
           <a:prstGeom prst="rect">
@@ -20500,7 +20723,7 @@
         </p:nvSpPr>
         <p:spPr>
           <a:xfrm>
-            <a:off x="685800" y="2843784"/>
+            <a:off x="649224" y="3218688"/>
             <a:ext cx="2281428" cy="713232"/>
           </a:xfrm>
           <a:prstGeom prst="rect">
@@ -20591,7 +20814,7 @@
         </p:blipFill>
         <p:spPr>
           <a:xfrm>
-            <a:off x="3561588" y="2414016"/>
+            <a:off x="3495294" y="2278815"/>
             <a:ext cx="384048" cy="384048"/>
           </a:xfrm>
           <a:prstGeom prst="rect">
@@ -20646,7 +20869,7 @@
         </p:nvSpPr>
         <p:spPr>
           <a:xfrm>
-            <a:off x="3543300" y="2843784"/>
+            <a:off x="3543300" y="3204413"/>
             <a:ext cx="2281428" cy="713232"/>
           </a:xfrm>
           <a:prstGeom prst="rect">
@@ -20737,7 +20960,7 @@
         </p:blipFill>
         <p:spPr>
           <a:xfrm>
-            <a:off x="6419088" y="2414016"/>
+            <a:off x="6298877" y="2281428"/>
             <a:ext cx="384048" cy="384048"/>
           </a:xfrm>
           <a:prstGeom prst="rect">
@@ -20792,7 +21015,7 @@
         </p:nvSpPr>
         <p:spPr>
           <a:xfrm>
-            <a:off x="6400800" y="2843784"/>
+            <a:off x="6455664" y="3205345"/>
             <a:ext cx="2281428" cy="713232"/>
           </a:xfrm>
           <a:prstGeom prst="rect">
@@ -20883,7 +21106,7 @@
         </p:blipFill>
         <p:spPr>
           <a:xfrm>
-            <a:off x="9276588" y="2414016"/>
+            <a:off x="9165031" y="2274803"/>
             <a:ext cx="384048" cy="384048"/>
           </a:xfrm>
           <a:prstGeom prst="rect">
@@ -20938,7 +21161,7 @@
         </p:nvSpPr>
         <p:spPr>
           <a:xfrm>
-            <a:off x="9258300" y="2843784"/>
+            <a:off x="9261348" y="3201519"/>
             <a:ext cx="2281428" cy="713232"/>
           </a:xfrm>
           <a:prstGeom prst="rect">
@@ -20980,7 +21203,7 @@
         </p:nvSpPr>
         <p:spPr>
           <a:xfrm>
-            <a:off x="502920" y="3931920"/>
+            <a:off x="502920" y="3947969"/>
             <a:ext cx="5468112" cy="2103120"/>
           </a:xfrm>
           <a:prstGeom prst="roundRect">
@@ -21111,7 +21334,7 @@
         </p:nvSpPr>
         <p:spPr>
           <a:xfrm>
-            <a:off x="777240" y="4828032"/>
+            <a:off x="768096" y="4908089"/>
             <a:ext cx="4937760" cy="1005840"/>
           </a:xfrm>
           <a:prstGeom prst="rect">
@@ -21270,7 +21493,7 @@
                 <a:ea typeface="Poppins" pitchFamily="34" charset="-122"/>
                 <a:cs typeface="Poppins" pitchFamily="34" charset="-120"/>
               </a:rPr>
-              <a:t>So we reframed the question</a:t>
+              <a:t>We reframed the question</a:t>
             </a:r>
             <a:endParaRPr lang="en-US" sz="1500" dirty="0"/>
           </a:p>
@@ -21284,7 +21507,7 @@
         </p:nvSpPr>
         <p:spPr>
           <a:xfrm>
-            <a:off x="6492240" y="4828032"/>
+            <a:off x="6492240" y="4903237"/>
             <a:ext cx="4937760" cy="1051560"/>
           </a:xfrm>
           <a:prstGeom prst="rect">
@@ -21468,7 +21691,7 @@
                 <a:ea typeface="Poppins" pitchFamily="34" charset="-122"/>
                 <a:cs typeface="Poppins" pitchFamily="34" charset="-120"/>
               </a:rPr>
-              <a:t>Inside Airbnb — public, open-source data. We chose one market to build, test and evaluate.</a:t>
+              <a:t>Inside Airbnb: public, open-source data. We chose one market to build, test and evaluate.</a:t>
             </a:r>
             <a:endParaRPr lang="en-US" sz="1450" dirty="0"/>
           </a:p>
@@ -22659,7 +22882,7 @@
                 <a:ea typeface="Poppins" pitchFamily="34" charset="-122"/>
                 <a:cs typeface="Poppins" pitchFamily="34" charset="-120"/>
               </a:rPr>
-              <a:t>Only once we understood the data did we move to machine learning — starting with EDA.</a:t>
+              <a:t>Only once we understood the data did we move to machine learning, starting with EDA.</a:t>
             </a:r>
             <a:endParaRPr lang="en-US" sz="1100" dirty="0"/>
           </a:p>
@@ -22815,7 +23038,7 @@
                 <a:ea typeface="Poppins" pitchFamily="34" charset="-122"/>
                 <a:cs typeface="Poppins" pitchFamily="34" charset="-120"/>
               </a:rPr>
-              <a:t>The dataset splits almost evenly — and the two halves behave nothing alike.</a:t>
+              <a:t>The dataset splits almost evenly, and the two halves behave nothing alike.</a:t>
             </a:r>
             <a:endParaRPr lang="en-US" sz="1450" dirty="0"/>
           </a:p>
@@ -23536,7 +23759,7 @@
         <p:spPr>
           <a:xfrm>
             <a:off x="932688" y="5029200"/>
-            <a:ext cx="2743200" cy="256032"/>
+            <a:ext cx="2743200" cy="169277"/>
           </a:xfrm>
           <a:prstGeom prst="rect">
             <a:avLst/>
@@ -23551,13 +23774,31 @@
           <a:p>
             <a:pPr algn="l"/>
             <a:r>
-              <a:rPr sz="1100" b="0">
+              <a:rPr sz="1100" b="0" dirty="0">
                 <a:solidFill>
                   <a:srgbClr val="717171"/>
                 </a:solidFill>
                 <a:latin typeface="Poppins"/>
               </a:rPr>
-              <a:t>price elasticity — measured</a:t>
+              <a:t>price elasticity</a:t>
+            </a:r>
+            <a:r>
+              <a:rPr lang="en-US" sz="1100" b="0" dirty="0">
+                <a:solidFill>
+                  <a:srgbClr val="717171"/>
+                </a:solidFill>
+                <a:latin typeface="Poppins"/>
+              </a:rPr>
+              <a:t>, </a:t>
+            </a:r>
+            <a:r>
+              <a:rPr sz="1100" b="0" dirty="0">
+                <a:solidFill>
+                  <a:srgbClr val="717171"/>
+                </a:solidFill>
+                <a:latin typeface="Poppins"/>
+              </a:rPr>
+              <a:t>measured</a:t>
             </a:r>
           </a:p>
         </p:txBody>
@@ -24004,7 +24245,7 @@
                 <a:ea typeface="Poppins" pitchFamily="34" charset="-122"/>
                 <a:cs typeface="Poppins" pitchFamily="34" charset="-120"/>
               </a:rPr>
-              <a:t>Reputation and quality move occupancy too — so we shouldn't treat price as the only lever.</a:t>
+              <a:t>Reputation and quality move occupancy too, so we shouldn't treat price as the only lever.</a:t>
             </a:r>
             <a:endParaRPr lang="en-US" sz="1450" dirty="0"/>
           </a:p>
@@ -24909,7 +25150,7 @@
                 <a:ea typeface="Poppins" pitchFamily="34" charset="-122"/>
                 <a:cs typeface="Poppins" pitchFamily="34" charset="-120"/>
               </a:rPr>
-              <a:t>Reviews, reputation and listing quality all shape whether guests book — not just price. And when we looked at the market, some listings sat close to what we'd expect while others were clearly above or below similar properties.</a:t>
+              <a:t>Reviews, reputation and listing quality all shape whether guests book, not just price. And when we looked at the market, some listings sat close to what we'd expect while others were clearly above or below similar properties.</a:t>
             </a:r>
             <a:endParaRPr lang="en-US" sz="1250" dirty="0"/>
           </a:p>
@@ -25094,7 +25335,7 @@
                 <a:ea typeface="Poppins" pitchFamily="34" charset="-122"/>
                 <a:cs typeface="Poppins" pitchFamily="34" charset="-120"/>
               </a:rPr>
-              <a:t>Not another calculator — an explanation</a:t>
+              <a:t>Not another calculator: an explanation</a:t>
             </a:r>
             <a:endParaRPr lang="en-US" sz="2900" dirty="0"/>
           </a:p>
@@ -26236,7 +26477,7 @@
                 <a:ea typeface="Poppins" pitchFamily="34" charset="-122"/>
                 <a:cs typeface="Poppins" pitchFamily="34" charset="-120"/>
               </a:rPr>
-              <a:t>An idea from our coach: people make better decisions when they understand the reasoning — not when they're simply told what to do.</a:t>
+              <a:t>An idea from our coach: people make better decisions when they understand the reasoning, not when they're simply told what to do.</a:t>
             </a:r>
             <a:endParaRPr lang="en-US" sz="1250" dirty="0"/>
           </a:p>
@@ -26278,7 +26519,7 @@
                 <a:ea typeface="Poppins" pitchFamily="34" charset="-122"/>
                 <a:cs typeface="Poppins" pitchFamily="34" charset="-120"/>
               </a:rPr>
-              <a:t>Hosts trust and act on a recommendation when they understand where it came from. So this is about pricing with confidence — not just predicting a price.</a:t>
+              <a:t>Hosts trust and act on a recommendation when they understand where it came from. So this is about pricing with confidence, not just predicting a price.</a:t>
             </a:r>
             <a:endParaRPr lang="en-US" sz="1250" dirty="0"/>
           </a:p>
@@ -26871,7 +27112,7 @@
                 <a:ea typeface="Poppins" pitchFamily="34" charset="-122"/>
                 <a:cs typeface="Poppins" pitchFamily="34" charset="-120"/>
               </a:rPr>
-              <a:t>Gradient boosting captures nonlinear interactions between location, amenities, property type and host — and returns a fair price with a confidence interval.</a:t>
+              <a:t>Gradient boosting captures nonlinear interactions between location, amenities, property type and host, then returns a fair price with a confidence interval.</a:t>
             </a:r>
             <a:endParaRPr lang="en-US" sz="1150" dirty="0"/>
           </a:p>
@@ -27085,7 +27326,7 @@
                 <a:ea typeface="Poppins" pitchFamily="34" charset="-122"/>
                 <a:cs typeface="Poppins" pitchFamily="34" charset="-120"/>
               </a:rPr>
-              <a:t>So the price isn't a black box: nearest-neighbors surfaces the similar listings — and their amenities — that stand behind each recommendation.</a:t>
+              <a:t>The price isn't a black box: nearest-neighbors surfaces the similar listings, and their amenities, that stand behind each recommendation.</a:t>
             </a:r>
             <a:endParaRPr lang="en-US" sz="1150" dirty="0"/>
           </a:p>
@@ -27207,7 +27448,7 @@
                 <a:ea typeface="Poppins" pitchFamily="34" charset="-122"/>
                 <a:cs typeface="Poppins" pitchFamily="34" charset="-120"/>
               </a:rPr>
-              <a:t>median error — roughly half the error of a plain regression</a:t>
+              <a:t>median error, roughly half the error of a plain regression</a:t>
             </a:r>
             <a:endParaRPr lang="en-US" sz="1050" dirty="0"/>
           </a:p>
@@ -27279,7 +27520,7 @@
                 <a:ea typeface="Poppins" pitchFamily="34" charset="-122"/>
                 <a:cs typeface="Poppins" pitchFamily="34" charset="-120"/>
               </a:rPr>
-              <a:t>Two halves, and both pay off — differently.  </a:t>
+              <a:t>Two halves, and both pay off differently.  </a:t>
             </a:r>
             <a:r>
               <a:rPr lang="en-US" sz="1150" dirty="0">
@@ -27290,7 +27531,7 @@
                 <a:ea typeface="Poppins" pitchFamily="34" charset="-122"/>
                 <a:cs typeface="Poppins" pitchFamily="34" charset="-120"/>
               </a:rPr>
-              <a:t>Roughly half of listings read underpriced against fair value and half overpriced. Raising an underpriced listing adds margin. Cutting an overpriced one adds volume — it fills nights that were sitting empty. Our number counts both.</a:t>
+              <a:t>Roughly half of listings read underpriced against fair value and half overpriced. Raising an underpriced listing adds margin. Cutting an overpriced one adds volume: it fills nights that were sitting empty. Our number counts both.</a:t>
             </a:r>
             <a:endParaRPr lang="en-US" sz="1150" dirty="0"/>
           </a:p>
@@ -28007,7 +28248,7 @@
                 <a:ea typeface="Poppins" pitchFamily="34" charset="-122"/>
                 <a:cs typeface="Poppins" pitchFamily="34" charset="-120"/>
               </a:rPr>
-              <a:t>PROJECTED REVENUE — DRAG TO EXPLORE</a:t>
+              <a:t>PROJECTED REVENUE · DRAG TO EXPLORE</a:t>
             </a:r>
             <a:endParaRPr lang="en-US" sz="1000" dirty="0"/>
           </a:p>

--- a/Airbnb Pricing Deck.pptx
+++ b/Airbnb Pricing Deck.pptx
@@ -33,7 +33,7 @@
   <p:notesSz cx="6858000" cy="12192000"/>
   <p:embeddedFontLst>
     <p:embeddedFont>
-      <p:font typeface="Poppins" panose="00000500000000000000" pitchFamily="2" charset="0"/>
+      <p:font typeface="Poppins"/>
       <p:regular r:id="rId23"/>
       <p:bold r:id="rId24"/>
       <p:italic r:id="rId25"/>
@@ -132,20 +132,315 @@
       </a:defRPr>
     </a:lvl9pPr>
   </p:defaultTextStyle>
-  <p:extLst>
-    <p:ext uri="{EFAFB233-063F-42B5-8137-9DF3F51BA10A}">
-      <p15:sldGuideLst xmlns:p15="http://schemas.microsoft.com/office/powerpoint/2012/main"/>
-    </p:ext>
-  </p:extLst>
 </p:presentation>
 </file>
 
 <file path=ppt/revisionInfo.xml><?xml version="1.0" encoding="utf-8"?>
 <p1510:revInfo xmlns:a="http://schemas.openxmlformats.org/drawingml/2006/main" xmlns:r="http://schemas.openxmlformats.org/officeDocument/2006/relationships" xmlns:p1510="http://schemas.microsoft.com/office/powerpoint/2015/10/main">
   <p1510:revLst>
+    <p1510:client id="{067ED431-A36E-5246-BA68-9A28E96FD5F9}" v="187" dt="2026-08-01T15:54:40.285"/>
+    <p1510:client id="{1190C936-1C69-D525-5532-20334E3615C6}" v="46" dt="2026-08-01T14:40:37.824"/>
+    <p1510:client id="{51B8CC3D-048D-53CB-B45F-0DB0D9AB71BE}" v="242" dt="2026-08-01T15:42:01.386"/>
+    <p1510:client id="{5966FAF6-CDAA-5149-9790-274323ABB908}" v="99" dt="2026-08-01T14:40:22.027"/>
     <p1510:client id="{F4459766-7F3D-414A-BF06-80034270BD7A}" v="1" dt="2026-08-01T13:59:40.735"/>
   </p1510:revLst>
 </p1510:revInfo>
+</file>
+
+<file path=ppt/changesInfos/changesInfo1.xml><?xml version="1.0" encoding="utf-8"?>
+<pc:chgInfo xmlns:a="http://schemas.openxmlformats.org/drawingml/2006/main" xmlns:r="http://schemas.openxmlformats.org/officeDocument/2006/relationships" xmlns:ac="http://schemas.microsoft.com/office/drawing/2013/main/command" xmlns:pc="http://schemas.microsoft.com/office/powerpoint/2013/main/command">
+  <pc:docChgLst>
+    <pc:chgData name="Guest User" providerId="Windows Live" clId="Web-{5966FAF6-CDAA-5149-9790-274323ABB908}"/>
+    <pc:docChg chg="modSld">
+      <pc:chgData name="Guest User" userId="" providerId="Windows Live" clId="Web-{5966FAF6-CDAA-5149-9790-274323ABB908}" dt="2026-08-01T14:40:18.168" v="96" actId="20577"/>
+      <pc:docMkLst>
+        <pc:docMk/>
+      </pc:docMkLst>
+      <pc:sldChg chg="modSp">
+        <pc:chgData name="Guest User" userId="" providerId="Windows Live" clId="Web-{5966FAF6-CDAA-5149-9790-274323ABB908}" dt="2026-08-01T14:40:18.168" v="96" actId="20577"/>
+        <pc:sldMkLst>
+          <pc:docMk/>
+          <pc:sldMk cId="0" sldId="258"/>
+        </pc:sldMkLst>
+        <pc:spChg chg="mod">
+          <ac:chgData name="Guest User" userId="" providerId="Windows Live" clId="Web-{5966FAF6-CDAA-5149-9790-274323ABB908}" dt="2026-08-01T14:40:18.168" v="96" actId="20577"/>
+          <ac:spMkLst>
+            <pc:docMk/>
+            <pc:sldMk cId="0" sldId="258"/>
+            <ac:spMk id="32" creationId="{00000000-0000-0000-0000-000000000000}"/>
+          </ac:spMkLst>
+        </pc:spChg>
+      </pc:sldChg>
+    </pc:docChg>
+  </pc:docChgLst>
+  <pc:docChgLst>
+    <pc:chgData name="Guest User" providerId="Windows Live" clId="Web-{1190C936-1C69-D525-5532-20334E3615C6}"/>
+    <pc:docChg chg="modSld">
+      <pc:chgData name="Guest User" userId="" providerId="Windows Live" clId="Web-{1190C936-1C69-D525-5532-20334E3615C6}" dt="2026-08-01T14:40:37.824" v="44" actId="1076"/>
+      <pc:docMkLst>
+        <pc:docMk/>
+      </pc:docMkLst>
+      <pc:sldChg chg="delSp modSp">
+        <pc:chgData name="Guest User" userId="" providerId="Windows Live" clId="Web-{1190C936-1C69-D525-5532-20334E3615C6}" dt="2026-08-01T14:26:52.623" v="6"/>
+        <pc:sldMkLst>
+          <pc:docMk/>
+          <pc:sldMk cId="0" sldId="257"/>
+        </pc:sldMkLst>
+        <pc:spChg chg="mod">
+          <ac:chgData name="Guest User" userId="" providerId="Windows Live" clId="Web-{1190C936-1C69-D525-5532-20334E3615C6}" dt="2026-08-01T14:25:51.415" v="0" actId="20577"/>
+          <ac:spMkLst>
+            <pc:docMk/>
+            <pc:sldMk cId="0" sldId="257"/>
+            <ac:spMk id="3" creationId="{00000000-0000-0000-0000-000000000000}"/>
+          </ac:spMkLst>
+        </pc:spChg>
+        <pc:spChg chg="mod">
+          <ac:chgData name="Guest User" userId="" providerId="Windows Live" clId="Web-{1190C936-1C69-D525-5532-20334E3615C6}" dt="2026-08-01T14:26:46.888" v="5" actId="20577"/>
+          <ac:spMkLst>
+            <pc:docMk/>
+            <pc:sldMk cId="0" sldId="257"/>
+            <ac:spMk id="16" creationId="{00000000-0000-0000-0000-000000000000}"/>
+          </ac:spMkLst>
+        </pc:spChg>
+        <pc:spChg chg="del">
+          <ac:chgData name="Guest User" userId="" providerId="Windows Live" clId="Web-{1190C936-1C69-D525-5532-20334E3615C6}" dt="2026-08-01T14:26:52.623" v="6"/>
+          <ac:spMkLst>
+            <pc:docMk/>
+            <pc:sldMk cId="0" sldId="257"/>
+            <ac:spMk id="23" creationId="{00000000-0000-0000-0000-000000000000}"/>
+          </ac:spMkLst>
+        </pc:spChg>
+      </pc:sldChg>
+      <pc:sldChg chg="modSp">
+        <pc:chgData name="Guest User" userId="" providerId="Windows Live" clId="Web-{1190C936-1C69-D525-5532-20334E3615C6}" dt="2026-08-01T14:40:37.824" v="44" actId="1076"/>
+        <pc:sldMkLst>
+          <pc:docMk/>
+          <pc:sldMk cId="0" sldId="258"/>
+        </pc:sldMkLst>
+        <pc:spChg chg="mod">
+          <ac:chgData name="Guest User" userId="" providerId="Windows Live" clId="Web-{1190C936-1C69-D525-5532-20334E3615C6}" dt="2026-08-01T14:40:37.824" v="44" actId="1076"/>
+          <ac:spMkLst>
+            <pc:docMk/>
+            <pc:sldMk cId="0" sldId="258"/>
+            <ac:spMk id="28" creationId="{00000000-0000-0000-0000-000000000000}"/>
+          </ac:spMkLst>
+        </pc:spChg>
+        <pc:spChg chg="mod">
+          <ac:chgData name="Guest User" userId="" providerId="Windows Live" clId="Web-{1190C936-1C69-D525-5532-20334E3615C6}" dt="2026-08-01T14:40:14.571" v="43" actId="20577"/>
+          <ac:spMkLst>
+            <pc:docMk/>
+            <pc:sldMk cId="0" sldId="258"/>
+            <ac:spMk id="32" creationId="{00000000-0000-0000-0000-000000000000}"/>
+          </ac:spMkLst>
+        </pc:spChg>
+        <pc:spChg chg="mod">
+          <ac:chgData name="Guest User" userId="" providerId="Windows Live" clId="Web-{1190C936-1C69-D525-5532-20334E3615C6}" dt="2026-08-01T14:35:47.686" v="36" actId="20577"/>
+          <ac:spMkLst>
+            <pc:docMk/>
+            <pc:sldMk cId="0" sldId="258"/>
+            <ac:spMk id="37" creationId="{00000000-0000-0000-0000-000000000000}"/>
+          </ac:spMkLst>
+        </pc:spChg>
+      </pc:sldChg>
+    </pc:docChg>
+  </pc:docChgLst>
+  <pc:docChgLst>
+    <pc:chgData name="Guest User" providerId="Windows Live" clId="Web-{51B8CC3D-048D-53CB-B45F-0DB0D9AB71BE}"/>
+    <pc:docChg chg="modSld">
+      <pc:chgData name="Guest User" userId="" providerId="Windows Live" clId="Web-{51B8CC3D-048D-53CB-B45F-0DB0D9AB71BE}" dt="2026-08-01T15:42:01.386" v="240" actId="20577"/>
+      <pc:docMkLst>
+        <pc:docMk/>
+      </pc:docMkLst>
+      <pc:sldChg chg="modSp">
+        <pc:chgData name="Guest User" userId="" providerId="Windows Live" clId="Web-{51B8CC3D-048D-53CB-B45F-0DB0D9AB71BE}" dt="2026-08-01T14:42:45.200" v="24" actId="1076"/>
+        <pc:sldMkLst>
+          <pc:docMk/>
+          <pc:sldMk cId="0" sldId="258"/>
+        </pc:sldMkLst>
+        <pc:spChg chg="mod">
+          <ac:chgData name="Guest User" userId="" providerId="Windows Live" clId="Web-{51B8CC3D-048D-53CB-B45F-0DB0D9AB71BE}" dt="2026-08-01T14:42:45.200" v="24" actId="1076"/>
+          <ac:spMkLst>
+            <pc:docMk/>
+            <pc:sldMk cId="0" sldId="258"/>
+            <ac:spMk id="32" creationId="{00000000-0000-0000-0000-000000000000}"/>
+          </ac:spMkLst>
+        </pc:spChg>
+      </pc:sldChg>
+      <pc:sldChg chg="modSp">
+        <pc:chgData name="Guest User" userId="" providerId="Windows Live" clId="Web-{51B8CC3D-048D-53CB-B45F-0DB0D9AB71BE}" dt="2026-08-01T14:44:03.343" v="42" actId="20577"/>
+        <pc:sldMkLst>
+          <pc:docMk/>
+          <pc:sldMk cId="0" sldId="259"/>
+        </pc:sldMkLst>
+        <pc:spChg chg="mod">
+          <ac:chgData name="Guest User" userId="" providerId="Windows Live" clId="Web-{51B8CC3D-048D-53CB-B45F-0DB0D9AB71BE}" dt="2026-08-01T14:44:03.343" v="42" actId="20577"/>
+          <ac:spMkLst>
+            <pc:docMk/>
+            <pc:sldMk cId="0" sldId="259"/>
+            <ac:spMk id="3" creationId="{00000000-0000-0000-0000-000000000000}"/>
+          </ac:spMkLst>
+        </pc:spChg>
+      </pc:sldChg>
+      <pc:sldChg chg="delSp modSp">
+        <pc:chgData name="Guest User" userId="" providerId="Windows Live" clId="Web-{51B8CC3D-048D-53CB-B45F-0DB0D9AB71BE}" dt="2026-08-01T15:42:01.386" v="240" actId="20577"/>
+        <pc:sldMkLst>
+          <pc:docMk/>
+          <pc:sldMk cId="0" sldId="260"/>
+        </pc:sldMkLst>
+        <pc:spChg chg="mod">
+          <ac:chgData name="Guest User" userId="" providerId="Windows Live" clId="Web-{51B8CC3D-048D-53CB-B45F-0DB0D9AB71BE}" dt="2026-08-01T14:48:03.164" v="117" actId="20577"/>
+          <ac:spMkLst>
+            <pc:docMk/>
+            <pc:sldMk cId="0" sldId="260"/>
+            <ac:spMk id="3" creationId="{00000000-0000-0000-0000-000000000000}"/>
+          </ac:spMkLst>
+        </pc:spChg>
+        <pc:spChg chg="mod">
+          <ac:chgData name="Guest User" userId="" providerId="Windows Live" clId="Web-{51B8CC3D-048D-53CB-B45F-0DB0D9AB71BE}" dt="2026-08-01T15:37:26.469" v="200" actId="20577"/>
+          <ac:spMkLst>
+            <pc:docMk/>
+            <pc:sldMk cId="0" sldId="260"/>
+            <ac:spMk id="4" creationId="{00000000-0000-0000-0000-000000000000}"/>
+          </ac:spMkLst>
+        </pc:spChg>
+        <pc:spChg chg="del mod">
+          <ac:chgData name="Guest User" userId="" providerId="Windows Live" clId="Web-{51B8CC3D-048D-53CB-B45F-0DB0D9AB71BE}" dt="2026-08-01T15:40:32.149" v="233"/>
+          <ac:spMkLst>
+            <pc:docMk/>
+            <pc:sldMk cId="0" sldId="260"/>
+            <ac:spMk id="37" creationId="{00000000-0000-0000-0000-000000000000}"/>
+          </ac:spMkLst>
+        </pc:spChg>
+        <pc:spChg chg="del">
+          <ac:chgData name="Guest User" userId="" providerId="Windows Live" clId="Web-{51B8CC3D-048D-53CB-B45F-0DB0D9AB71BE}" dt="2026-08-01T15:37:34.235" v="202"/>
+          <ac:spMkLst>
+            <pc:docMk/>
+            <pc:sldMk cId="0" sldId="260"/>
+            <ac:spMk id="41" creationId="{00000000-0000-0000-0000-000000000000}"/>
+          </ac:spMkLst>
+        </pc:spChg>
+        <pc:spChg chg="mod">
+          <ac:chgData name="Guest User" userId="" providerId="Windows Live" clId="Web-{51B8CC3D-048D-53CB-B45F-0DB0D9AB71BE}" dt="2026-08-01T15:42:01.386" v="240" actId="20577"/>
+          <ac:spMkLst>
+            <pc:docMk/>
+            <pc:sldMk cId="0" sldId="260"/>
+            <ac:spMk id="42" creationId="{00000000-0000-0000-0000-000000000000}"/>
+          </ac:spMkLst>
+        </pc:spChg>
+      </pc:sldChg>
+      <pc:sldChg chg="modSp">
+        <pc:chgData name="Guest User" userId="" providerId="Windows Live" clId="Web-{51B8CC3D-048D-53CB-B45F-0DB0D9AB71BE}" dt="2026-08-01T15:26:14.365" v="160" actId="20577"/>
+        <pc:sldMkLst>
+          <pc:docMk/>
+          <pc:sldMk cId="0" sldId="261"/>
+        </pc:sldMkLst>
+        <pc:spChg chg="mod">
+          <ac:chgData name="Guest User" userId="" providerId="Windows Live" clId="Web-{51B8CC3D-048D-53CB-B45F-0DB0D9AB71BE}" dt="2026-08-01T15:26:14.365" v="160" actId="20577"/>
+          <ac:spMkLst>
+            <pc:docMk/>
+            <pc:sldMk cId="0" sldId="261"/>
+            <ac:spMk id="4" creationId="{00000000-0000-0000-0000-000000000000}"/>
+          </ac:spMkLst>
+        </pc:spChg>
+        <pc:spChg chg="mod">
+          <ac:chgData name="Guest User" userId="" providerId="Windows Live" clId="Web-{51B8CC3D-048D-53CB-B45F-0DB0D9AB71BE}" dt="2026-08-01T15:25:34.567" v="155" actId="20577"/>
+          <ac:spMkLst>
+            <pc:docMk/>
+            <pc:sldMk cId="0" sldId="261"/>
+            <ac:spMk id="28" creationId="{00000000-0000-0000-0000-000000000000}"/>
+          </ac:spMkLst>
+        </pc:spChg>
+      </pc:sldChg>
+    </pc:docChg>
+  </pc:docChgLst>
+  <pc:docChgLst>
+    <pc:chgData name="Guest User" providerId="Windows Live" clId="Web-{067ED431-A36E-5246-BA68-9A28E96FD5F9}"/>
+    <pc:docChg chg="modSld">
+      <pc:chgData name="Guest User" userId="" providerId="Windows Live" clId="Web-{067ED431-A36E-5246-BA68-9A28E96FD5F9}" dt="2026-08-01T15:54:40.285" v="185" actId="20577"/>
+      <pc:docMkLst>
+        <pc:docMk/>
+      </pc:docMkLst>
+      <pc:sldChg chg="addSp delSp modSp">
+        <pc:chgData name="Guest User" userId="" providerId="Windows Live" clId="Web-{067ED431-A36E-5246-BA68-9A28E96FD5F9}" dt="2026-08-01T15:45:18.609" v="47" actId="20577"/>
+        <pc:sldMkLst>
+          <pc:docMk/>
+          <pc:sldMk cId="0" sldId="260"/>
+        </pc:sldMkLst>
+        <pc:spChg chg="add del">
+          <ac:chgData name="Guest User" userId="" providerId="Windows Live" clId="Web-{067ED431-A36E-5246-BA68-9A28E96FD5F9}" dt="2026-08-01T15:42:58.729" v="4"/>
+          <ac:spMkLst>
+            <pc:docMk/>
+            <pc:sldMk cId="0" sldId="260"/>
+            <ac:spMk id="12" creationId="{4386B7B6-217F-B2A2-D7D0-DC7A7F3F890F}"/>
+          </ac:spMkLst>
+        </pc:spChg>
+        <pc:spChg chg="mod">
+          <ac:chgData name="Guest User" userId="" providerId="Windows Live" clId="Web-{067ED431-A36E-5246-BA68-9A28E96FD5F9}" dt="2026-08-01T15:44:27.404" v="36" actId="20577"/>
+          <ac:spMkLst>
+            <pc:docMk/>
+            <pc:sldMk cId="0" sldId="260"/>
+            <ac:spMk id="40" creationId="{00000000-0000-0000-0000-000000000000}"/>
+          </ac:spMkLst>
+        </pc:spChg>
+        <pc:spChg chg="mod">
+          <ac:chgData name="Guest User" userId="" providerId="Windows Live" clId="Web-{067ED431-A36E-5246-BA68-9A28E96FD5F9}" dt="2026-08-01T15:45:18.609" v="47" actId="20577"/>
+          <ac:spMkLst>
+            <pc:docMk/>
+            <pc:sldMk cId="0" sldId="260"/>
+            <ac:spMk id="42" creationId="{00000000-0000-0000-0000-000000000000}"/>
+          </ac:spMkLst>
+        </pc:spChg>
+        <pc:picChg chg="mod">
+          <ac:chgData name="Guest User" userId="" providerId="Windows Live" clId="Web-{067ED431-A36E-5246-BA68-9A28E96FD5F9}" dt="2026-08-01T15:44:30.514" v="37" actId="1076"/>
+          <ac:picMkLst>
+            <pc:docMk/>
+            <pc:sldMk cId="0" sldId="260"/>
+            <ac:picMk id="39" creationId="{00000000-0000-0000-0000-000000000000}"/>
+          </ac:picMkLst>
+        </pc:picChg>
+      </pc:sldChg>
+      <pc:sldChg chg="addSp delSp modSp">
+        <pc:chgData name="Guest User" userId="" providerId="Windows Live" clId="Web-{067ED431-A36E-5246-BA68-9A28E96FD5F9}" dt="2026-08-01T15:54:40.285" v="185" actId="20577"/>
+        <pc:sldMkLst>
+          <pc:docMk/>
+          <pc:sldMk cId="0" sldId="261"/>
+        </pc:sldMkLst>
+        <pc:spChg chg="mod">
+          <ac:chgData name="Guest User" userId="" providerId="Windows Live" clId="Web-{067ED431-A36E-5246-BA68-9A28E96FD5F9}" dt="2026-08-01T15:47:31.348" v="66" actId="1076"/>
+          <ac:spMkLst>
+            <pc:docMk/>
+            <pc:sldMk cId="0" sldId="261"/>
+            <ac:spMk id="3" creationId="{00000000-0000-0000-0000-000000000000}"/>
+          </ac:spMkLst>
+        </pc:spChg>
+        <pc:spChg chg="add del mod">
+          <ac:chgData name="Guest User" userId="" providerId="Windows Live" clId="Web-{067ED431-A36E-5246-BA68-9A28E96FD5F9}" dt="2026-08-01T15:52:35.218" v="148" actId="20577"/>
+          <ac:spMkLst>
+            <pc:docMk/>
+            <pc:sldMk cId="0" sldId="261"/>
+            <ac:spMk id="4" creationId="{00000000-0000-0000-0000-000000000000}"/>
+          </ac:spMkLst>
+        </pc:spChg>
+        <pc:spChg chg="mod">
+          <ac:chgData name="Guest User" userId="" providerId="Windows Live" clId="Web-{067ED431-A36E-5246-BA68-9A28E96FD5F9}" dt="2026-08-01T15:54:40.285" v="185" actId="20577"/>
+          <ac:spMkLst>
+            <pc:docMk/>
+            <pc:sldMk cId="0" sldId="261"/>
+            <ac:spMk id="27" creationId="{00000000-0000-0000-0000-000000000000}"/>
+          </ac:spMkLst>
+        </pc:spChg>
+        <pc:spChg chg="mod">
+          <ac:chgData name="Guest User" userId="" providerId="Windows Live" clId="Web-{067ED431-A36E-5246-BA68-9A28E96FD5F9}" dt="2026-08-01T15:54:06.644" v="173" actId="20577"/>
+          <ac:spMkLst>
+            <pc:docMk/>
+            <pc:sldMk cId="0" sldId="261"/>
+            <ac:spMk id="30" creationId="{00000000-0000-0000-0000-000000000000}"/>
+          </ac:spMkLst>
+        </pc:spChg>
+      </pc:sldChg>
+    </pc:docChg>
+  </pc:docChgLst>
+</pc:chgInfo>
 </file>
 
 <file path=ppt/notesMasters/notesMaster1.xml><?xml version="1.0" encoding="utf-8"?>
@@ -318,17 +613,9 @@
           <a:lstStyle/>
           <a:p>
             <a:r>
-              <a:rPr lang="en-US" dirty="0"/>
+              <a:rPr lang="en-US"/>
               <a:t>SPEAKER: Brendan (~45s).
-"Good afternoon everyone, and thank you for being here. We're Team 6, and today we'll present our capstone project, Airbnb Pricing Intelligence. Over the past few months we've looked at one question that sounds simple but is genuinely hard: how do you know if an Airbnb listing is priced correctly? The deeper we dug, the clearer it got that this isn't only a machine-learning </a:t>
-            </a:r>
-            <a:r>
-              <a:rPr lang="en-US"/>
-              <a:t>problem ,  </a:t>
-            </a:r>
-            <a:r>
-              <a:rPr lang="en-US" dirty="0"/>
-              <a:t>it's a business problem and a trust problem. Today we'll walk you through what we found, how we approached it, the product we built, and the impact it could have for Airbnb and its hosts."
+"Good afternoon everyone, and thank you for being here. We're Team 6, and today we'll present our capstone project, Airbnb Pricing Intelligence. Over the past few months we've looked at one question that sounds simple but is genuinely hard: how do you know if an Airbnb listing is priced correctly? The deeper we dug, the clearer it got that this isn't only a machine-learning problem ,  it's a business problem and a trust problem. Today we'll walk you through what we found, how we approached it, the product we built, and the impact it could have for Airbnb and its hosts."
 TRANSITION: "So let's start with the problem we set out to solve." [Brendan continues to Slide 2]</a:t>
             </a:r>
           </a:p>
@@ -415,7 +702,7 @@
           <a:lstStyle/>
           <a:p>
             <a:r>
-              <a:rPr lang="en-US" dirty="0"/>
+              <a:rPr lang="en-US"/>
               <a:t>SPEAKER: Jai (~1.5–2 min). This is our strongest analytical piece, so slow down.
 "The model tells a host their fair price, but does moving toward it actually make money? To answer that we needed the price elasticity of demand, and we measured it directly. Using a third-party occupancy panel, we ran a two-way fixed-effects regression, controlling for each listing and each month, and got an elasticity of −0.92, with a 95% confidence interval of −1.30 to −0.54. In plain terms: a 1% price increase is associated with about a 0.92% drop in occupancy. Here is why that number is the whole game. Revenue elasticity is one plus beta, which is about 0.08, so demand is almost exactly unit-elastic. The breakeven is minus one: below it, cutting price wins; above it, raising price wins. Our estimate sits just on the inelastic side, which is why raising underpriced listings adds revenue while cutting overpriced ones is basically a wash for the host. Honest caveat: this is a 64-listing short-stay pilot of established listings, and the monthly segment was statistically insignificant so we hold it occupancy-neutral. Getting the full AirROI panel is our number-one data ask."
 TRANSITION: "That measured elasticity is what lets Francois put an honest dollar figure on the opportunity." [Hand to Francois]</a:t>
@@ -504,7 +791,7 @@
           <a:lstStyle/>
           <a:p>
             <a:r>
-              <a:rPr lang="en-US" dirty="0"/>
+              <a:rPr lang="en-US"/>
               <a:t>SPEAKER: Francois (~1.5 min).
 "Now the money, and we lead with the conservative floor, every assumption rounded against us. On the measured −0.92 elasticity, the underpriced opportunity is about $7.6M in host gross booking value a year. Airbnb monetizes 15.5% of that, so roughly $1.17M a year in incremental fees. That is our headline floor. The occupancy-neutral ceiling, if prices moved with no demand response, is about $4.15M in fees from roughly $26.8M in GBV, and we show that as upside, not the headline. On cost, the important move is that we cost this as an incremental feature on infrastructure Airbnb already owns, not a greenfield rebuild: about $65K of one-time engineering and about $30K a year to run, roughly $215K over five years. For honesty we also show the full standalone greenfield figure, about $190K plus $105K a year, but only as a worst-case."
 TRANSITION: "So does that pay back? Yes, and fast." [Francois continues to Slide 12]</a:t>
@@ -593,7 +880,7 @@
           <a:lstStyle/>
           <a:p>
             <a:r>
-              <a:rPr lang="en-US" dirty="0"/>
+              <a:rPr lang="en-US"/>
               <a:t>SPEAKER: Francois (~1.5 min).
 "Does it pay back? We ran the ROI on the conservative $1.17M fee floor against the incremental cost, presented as an adoption sensitivity rather than one invented adoption number. Read the middle rows, our conservative and expected cases: at 25% adoption it pays back in about four months and returns roughly 580% over five years; at 35% it is about three months and 850%. Even at a pessimistic 15% it clears 300% and pays back in about six months. And we are honest about time value: we discount at 10%, so the five-year net of $5.63M nominal becomes $4.26M in present value, about a 24% haircut, and it is still net-positive in Year 1. Separately, repricing the overpriced side fills about 77,606 booked nights a year. That is close to revenue-neutral for hosts but real liquidity and retention for Airbnb, and it is already baked into the floor."
 TRANSITION: "Now, what our model can and cannot tell us." [Francois continues to Slide 13]</a:t>
@@ -682,7 +969,7 @@
           <a:lstStyle/>
           <a:p>
             <a:r>
-              <a:rPr lang="en-US" dirty="0"/>
+              <a:rPr lang="en-US"/>
               <a:t>SPEAKER: Francois (~1.5 min).
 "We front-load our limits because it builds credibility. First, the elasticity is a pilot: β=−0.92 is measured on a 64-listing short-stay panel of established hosts, so the honest next step is the full AirROI panel to confirm it across every segment and review tier. Second, the monthly segment's elasticity came back statistically insignificant, so we hold it occupancy-neutral rather than invent a number, which keeps the floor conservative. Third, we are NYC-only, and pricing behavior varies by city, so the coefficients need re-fitting per market. And fourth, we do not have Airbnb's internal booking, churn, or lifetime-value data, so the retention and liquidity upside stays unpriced. That is exactly why we call this decision support, not a replacement for host judgment."
 TRANSITION: "So with those limits in mind, what would we actually recommend Airbnb do?" [Francois continues to Slide 14]</a:t>
@@ -771,33 +1058,9 @@
           <a:lstStyle/>
           <a:p>
             <a:r>
-              <a:rPr lang="en-US" dirty="0"/>
+              <a:rPr lang="en-US"/>
               <a:t>SPEAKER: Francois (~1.5 min), then team fields Q&amp;A.
-"Our recommendation isn't to replace Smart </a:t>
-            </a:r>
-            <a:r>
-              <a:rPr lang="en-US"/>
-              <a:t>Pricing ,  </a:t>
-            </a:r>
-            <a:r>
-              <a:rPr lang="en-US" dirty="0"/>
-              <a:t>it's to build on it. The opportunity isn't simply another price recommendation; it's helping hosts understand, trust and act on it. As a next step we'd launch this as a pilot in a single market, measuring how hosts interact with the platform, how often they adopt the recommendations, and how pricing changes influence occupancy and revenue. Those real-world results would let Airbnb keep improving the model before expanding to more cities. Looking back, the biggest lesson is that successful analytics isn't just about accurate </a:t>
-            </a:r>
-            <a:r>
-              <a:rPr lang="en-US"/>
-              <a:t>models ,  </a:t>
-            </a:r>
-            <a:r>
-              <a:rPr lang="en-US" dirty="0"/>
-              <a:t>it's about solving the right business problem and presenting insights people are willing to use. For us this project combined machine learning, product thinking, business strategy and data storytelling. Thank you for your </a:t>
-            </a:r>
-            <a:r>
-              <a:rPr lang="en-US"/>
-              <a:t>time ,  </a:t>
-            </a:r>
-            <a:r>
-              <a:rPr lang="en-US" dirty="0"/>
-              <a:t>we'd be happy to take questions."
+"Our recommendation isn't to replace Smart Pricing ,  it's to build on it. The opportunity isn't simply another price recommendation; it's helping hosts understand, trust and act on it. As a next step we'd launch this as a pilot in a single market, measuring how hosts interact with the platform, how often they adopt the recommendations, and how pricing changes influence occupancy and revenue. Those real-world results would let Airbnb keep improving the model before expanding to more cities. Looking back, the biggest lesson is that successful analytics isn't just about accurate models ,  it's about solving the right business problem and presenting insights people are willing to use. For us this project combined machine learning, product thinking, business strategy and data storytelling. Thank you for your time ,  we'd be happy to take questions."
 Q&amp;A: Brendan moderates; each owner takes their section. Appendix has the model bake-off, coefficients, financial assumptions, methodology and glossary.</a:t>
             </a:r>
           </a:p>
@@ -885,11 +1148,7 @@
           <a:p>
             <a:r>
               <a:rPr lang="en-US"/>
-              <a:t>Appendix ,  </a:t>
-            </a:r>
-            <a:r>
-              <a:rPr lang="en-US" dirty="0"/>
-              <a:t>reference only. Jump here during Q&amp;A as needed.</a:t>
+              <a:t>Appendix ,  reference only. Jump here during Q&amp;A as needed.</a:t>
             </a:r>
           </a:p>
         </p:txBody>
@@ -974,7 +1233,7 @@
           <a:bodyPr/>
           <a:lstStyle/>
           <a:p>
-            <a:endParaRPr lang="en-US" dirty="0"/>
+            <a:endParaRPr lang="en-US"/>
           </a:p>
         </p:txBody>
       </p:sp>
@@ -1058,7 +1317,7 @@
           <a:bodyPr/>
           <a:lstStyle/>
           <a:p>
-            <a:endParaRPr lang="en-US" dirty="0"/>
+            <a:endParaRPr lang="en-US"/>
           </a:p>
         </p:txBody>
       </p:sp>
@@ -1143,17 +1402,9 @@
           <a:lstStyle/>
           <a:p>
             <a:r>
-              <a:rPr lang="en-US" dirty="0"/>
+              <a:rPr lang="en-US"/>
               <a:t>SPEAKER: Rachael (~1.5 min).
-"Before building any models, we wanted to understand what drives price. We looked at location, property type, bedrooms and bathrooms, amenities, host experience, review scores and availability. Some variables matter far more than others: Manhattan listings command much higher rates than the outer boroughs, entire homes price above private rooms, and quality signals like cleanliness and self check-in carry clear premiums. But the big realization was that no single feature explains price on its </a:t>
-            </a:r>
-            <a:r>
-              <a:rPr lang="en-US"/>
-              <a:t>own ,  </a:t>
-            </a:r>
-            <a:r>
-              <a:rPr lang="en-US" dirty="0"/>
-              <a:t>two listings can look almost identical and still charge very different prices. Pricing is driven by a combination of factors working together, which gave us confidence that a machine-learning approach would beat a simple formula."
+"Before building any models, we wanted to understand what drives price. We looked at location, property type, bedrooms and bathrooms, amenities, host experience, review scores and availability. Some variables matter far more than others: Manhattan listings command much higher rates than the outer boroughs, entire homes price above private rooms, and quality signals like cleanliness and self check-in carry clear premiums. But the big realization was that no single feature explains price on its own ,  two listings can look almost identical and still charge very different prices. Pricing is driven by a combination of factors working together, which gave us confidence that a machine-learning approach would beat a simple formula."
 TRANSITION: "Once we understood the variables, we wanted to see how hosts were actually performing." [Rachael continues to Slide 6]</a:t>
             </a:r>
           </a:p>
@@ -1239,7 +1490,7 @@
           <a:bodyPr/>
           <a:lstStyle/>
           <a:p>
-            <a:endParaRPr lang="en-US" dirty="0"/>
+            <a:endParaRPr lang="en-US"/>
           </a:p>
         </p:txBody>
       </p:sp>
@@ -1324,25 +1575,9 @@
           <a:lstStyle/>
           <a:p>
             <a:r>
-              <a:rPr lang="en-US" dirty="0"/>
+              <a:rPr lang="en-US"/>
               <a:t>SPEAKER: Brendan (~1.5 min).
-"Most Airbnb hosts want to maximize revenue, but pricing isn't easy. Some price on experience, some copy nearby listings, some use Airbnb's Smart Pricing. The catch: Smart Pricing gives a recommendation but doesn't really explain </a:t>
-            </a:r>
-            <a:r>
-              <a:rPr lang="en-US"/>
-              <a:t>why ,  </a:t>
-            </a:r>
-            <a:r>
-              <a:rPr lang="en-US" dirty="0"/>
-              <a:t>you're expected to trust a number without knowing which comparable listings were used, what features drove it, or whether you have room to charge more. So we asked: could we build a pricing tool that not only predicts a fair price, but helps hosts understand and trust it? Our answer combines machine learning with comparable listings, pricing insights, and an interactive dashboard. The goal isn't to replace Smart </a:t>
-            </a:r>
-            <a:r>
-              <a:rPr lang="en-US"/>
-              <a:t>Pricing ,  </a:t>
-            </a:r>
-            <a:r>
-              <a:rPr lang="en-US" dirty="0"/>
-              <a:t>it's to make it transparent and easy to act on."
+"Most Airbnb hosts want to maximize revenue, but pricing isn't easy. Some price on experience, some copy nearby listings, some use Airbnb's Smart Pricing. The catch: Smart Pricing gives a recommendation but doesn't really explain why ,  you're expected to trust a number without knowing which comparable listings were used, what features drove it, or whether you have room to charge more. So we asked: could we build a pricing tool that not only predicts a fair price, but helps hosts understand and trust it? Our answer combines machine learning with comparable listings, pricing insights, and an interactive dashboard. The goal isn't to replace Smart Pricing ,  it's to make it transparent and easy to act on."
 TRANSITION: "Before we show how we built it, let's look at why this problem exists. I'll hand to Jai." [Hand to Jai]</a:t>
             </a:r>
           </a:p>
@@ -1428,7 +1663,7 @@
           <a:bodyPr/>
           <a:lstStyle/>
           <a:p>
-            <a:endParaRPr lang="en-US" dirty="0"/>
+            <a:endParaRPr lang="en-US"/>
           </a:p>
         </p:txBody>
       </p:sp>
@@ -1513,17 +1748,9 @@
           <a:lstStyle/>
           <a:p>
             <a:r>
-              <a:rPr lang="en-US" dirty="0"/>
+              <a:rPr lang="en-US"/>
               <a:t>SPEAKER: Jai (~1.5 min).
-"Airbnb is one of the largest marketplaces in the world, connecting millions of guests with millions of hosts. Pricing matters to both sides: guests want competitive prices, hosts want to maximize revenue without pricing themselves out. Airbnb helps through Smart Pricing, but from a host's view there's still a missing </a:t>
-            </a:r>
-            <a:r>
-              <a:rPr lang="en-US"/>
-              <a:t>piece ,  </a:t>
-            </a:r>
-            <a:r>
-              <a:rPr lang="en-US" dirty="0"/>
-              <a:t>you get a recommended price but don't know where it came from. There's little transparency, so some hosts ignore it and others follow it blindly. So instead of asking whether we could build another pricing model, we asked something different: can we help hosts make better pricing decisions by combining accurate recommendations with clear explanations and real market comparisons? That became our focus."
+"Airbnb is one of the largest marketplaces in the world, connecting millions of guests with millions of hosts. Pricing matters to both sides: guests want competitive prices, hosts want to maximize revenue without pricing themselves out. Airbnb helps through Smart Pricing, but from a host's view there's still a missing piece ,  you get a recommended price but don't know where it came from. There's little transparency, so some hosts ignore it and others follow it blindly. So instead of asking whether we could build another pricing model, we asked something different: can we help hosts make better pricing decisions by combining accurate recommendations with clear explanations and real market comparisons? That became our focus."
 TRANSITION: "To answer that, the first step was finding the right data." [Jai continues to Slide 4]</a:t>
             </a:r>
           </a:p>
@@ -1610,25 +1837,9 @@
           <a:lstStyle/>
           <a:p>
             <a:r>
-              <a:rPr lang="en-US" dirty="0"/>
+              <a:rPr lang="en-US"/>
               <a:t>SPEAKER: Jai (~1.5 min).
-"We intentionally focused on New York City. Rather than model Airbnb's entire global marketplace, we wanted one market where we could build, test and evaluate. We used the public Inside Airbnb </a:t>
-            </a:r>
-            <a:r>
-              <a:rPr lang="en-US"/>
-              <a:t>dataset ,  </a:t>
-            </a:r>
-            <a:r>
-              <a:rPr lang="en-US" dirty="0"/>
-              <a:t>nearly 9,800 active listings with nightly price, availability, reviews, amenities, location and host characteristics. We cleaned the data, handled missing values, engineered features, and prepared it for analysis. Then, importantly, we didn't jump straight into machine </a:t>
-            </a:r>
-            <a:r>
-              <a:rPr lang="en-US"/>
-              <a:t>learning ,  </a:t>
-            </a:r>
-            <a:r>
-              <a:rPr lang="en-US" dirty="0"/>
-              <a:t>we first wanted to understand the data: which variables mattered, what relationships already existed, and what they told us about how listings are priced. That's where our exploratory analysis began."
+"We intentionally focused on New York City. Rather than model Airbnb's entire global marketplace, we wanted one market where we could build, test and evaluate. We used the public Inside Airbnb dataset ,  nearly 9,800 active listings with nightly price, availability, reviews, amenities, location and host characteristics. We cleaned the data, handled missing values, engineered features, and prepared it for analysis. Then, importantly, we didn't jump straight into machine learning ,  we first wanted to understand the data: which variables mattered, what relationships already existed, and what they told us about how listings are priced. That's where our exploratory analysis began."
 TRANSITION: "And that brings us to the first insights in the data. I'll hand to Rachael." [Hand to Rachael]</a:t>
             </a:r>
           </a:p>
@@ -1715,17 +1926,9 @@
           <a:lstStyle/>
           <a:p>
             <a:r>
-              <a:rPr lang="en-US" dirty="0"/>
+              <a:rPr lang="en-US"/>
               <a:t>SPEAKER: Rachael (~1.5 min).
-"Before building any models, we wanted to understand what drives price. We looked at location, property type, bedrooms and bathrooms, amenities, host experience, review scores and availability. Some variables matter far more than others: Manhattan listings command much higher rates than the outer boroughs, entire homes price above private rooms, and quality signals like cleanliness and self check-in carry clear premiums. But the big realization was that no single feature explains price on its </a:t>
-            </a:r>
-            <a:r>
-              <a:rPr lang="en-US"/>
-              <a:t>own ,  </a:t>
-            </a:r>
-            <a:r>
-              <a:rPr lang="en-US" dirty="0"/>
-              <a:t>two listings can look almost identical and still charge very different prices. Pricing is driven by a combination of factors working together, which gave us confidence that a machine-learning approach would beat a simple formula."
+"Before building any models, we wanted to understand what drives price. We looked at location, property type, bedrooms and bathrooms, amenities, host experience, review scores and availability. Some variables matter far more than others: Manhattan listings command much higher rates than the outer boroughs, entire homes price above private rooms, and quality signals like cleanliness and self check-in carry clear premiums. But the big realization was that no single feature explains price on its own ,  two listings can look almost identical and still charge very different prices. Pricing is driven by a combination of factors working together, which gave us confidence that a machine-learning approach would beat a simple formula."
 TRANSITION: "Once we understood the variables, we wanted to see how hosts were actually performing." [Rachael continues to Slide 6]</a:t>
             </a:r>
           </a:p>
@@ -1812,25 +2015,9 @@
           <a:lstStyle/>
           <a:p>
             <a:r>
-              <a:rPr lang="en-US" dirty="0"/>
+              <a:rPr lang="en-US"/>
               <a:t>SPEAKER: Rachael (~1.5 min).
-"One of the most interesting relationships was between host quality and occupancy. More experienced, highly reviewed hosts maintain noticeably higher </a:t>
-            </a:r>
-            <a:r>
-              <a:rPr lang="en-US"/>
-              <a:t>occupancy ,  </a:t>
-            </a:r>
-            <a:r>
-              <a:rPr lang="en-US" dirty="0"/>
-              <a:t>listings with 51+ reviews average about 42% occupancy versus 34% for those with under ten, and superhosts run higher than regular hosts. That tells us pricing isn't the only thing driving </a:t>
-            </a:r>
-            <a:r>
-              <a:rPr lang="en-US"/>
-              <a:t>demand ,  </a:t>
-            </a:r>
-            <a:r>
-              <a:rPr lang="en-US" dirty="0"/>
-              <a:t>reviews, reputation and listing quality matter too, so we shouldn't treat price as the only lever. We also saw that some listings were priced close to what we'd expect while others were clearly above or below similar properties. That raised the real question: instead of asking whether a listing is expensive or cheap, could we estimate what a fair market price should be? Answering that became the focus of our model."
+"One of the most interesting relationships was between host quality and occupancy. More experienced, highly reviewed hosts maintain noticeably higher occupancy ,  listings with 51+ reviews average about 42% occupancy versus 34% for those with under ten, and superhosts run higher than regular hosts. That tells us pricing isn't the only thing driving demand ,  reviews, reputation and listing quality matter too, so we shouldn't treat price as the only lever. We also saw that some listings were priced close to what we'd expect while others were clearly above or below similar properties. That raised the real question: instead of asking whether a listing is expensive or cheap, could we estimate what a fair market price should be? Answering that became the focus of our model."
 TRANSITION: "So we moved from exploration to building the product itself. Over to Manas." [Hand to Manas]</a:t>
             </a:r>
           </a:p>
@@ -1917,42 +2104,10 @@
           <a:lstStyle/>
           <a:p>
             <a:r>
-              <a:rPr lang="en-US" dirty="0"/>
+              <a:rPr lang="en-US"/>
               <a:t>SPEAKER: Manas (~1.5 min).
-"Our goal wasn't to build another pricing </a:t>
-            </a:r>
-            <a:r>
-              <a:rPr lang="en-US"/>
-              <a:t>calculator ,  </a:t>
-            </a:r>
-            <a:r>
-              <a:rPr lang="en-US" dirty="0"/>
-              <a:t>Airbnb already has one. It was to help hosts understand the recommendation they're given. If someone tells you to change your price, your first question is usually 'why?' Our product answers that: instead of a single number, it gives a recommended fair value, shows comparable listings that support it, highlights amenity differences, and lets the host explore how changing price could affect revenue. One idea from our coach really shaped </a:t>
-            </a:r>
-            <a:r>
-              <a:rPr lang="en-US"/>
-              <a:t>this ,  </a:t>
-            </a:r>
-            <a:r>
-              <a:rPr lang="en-US" dirty="0"/>
-              <a:t>Commander's Intent: people make better decisions when they understand the reasoning, not when they're just told what to do. That applies perfectly here. So the product isn't only about predicting a </a:t>
-            </a:r>
-            <a:r>
-              <a:rPr lang="en-US"/>
-              <a:t>price ,  </a:t>
-            </a:r>
-            <a:r>
-              <a:rPr lang="en-US" dirty="0"/>
-              <a:t>it's about helping hosts price with confidence."
-TRANSITION: "Of course, that only works if the recommendation is </a:t>
-            </a:r>
-            <a:r>
-              <a:rPr lang="en-US"/>
-              <a:t>accurate ,  </a:t>
-            </a:r>
-            <a:r>
-              <a:rPr lang="en-US" dirty="0"/>
-              <a:t>so next I'll walk through how we generated it." [Manas continues to Slide 8]</a:t>
+"Our goal wasn't to build another pricing calculator ,  Airbnb already has one. It was to help hosts understand the recommendation they're given. If someone tells you to change your price, your first question is usually 'why?' Our product answers that: instead of a single number, it gives a recommended fair value, shows comparable listings that support it, highlights amenity differences, and lets the host explore how changing price could affect revenue. One idea from our coach really shaped this ,  Commander's Intent: people make better decisions when they understand the reasoning, not when they're just told what to do. That applies perfectly here. So the product isn't only about predicting a price ,  it's about helping hosts price with confidence."
+TRANSITION: "Of course, that only works if the recommendation is accurate ,  so next I'll walk through how we generated it." [Manas continues to Slide 8]</a:t>
             </a:r>
           </a:p>
         </p:txBody>
@@ -2038,7 +2193,7 @@
           <a:lstStyle/>
           <a:p>
             <a:r>
-              <a:rPr lang="en-US" dirty="0"/>
+              <a:rPr lang="en-US"/>
               <a:t>SPEAKER: Manas (~2 min).
 "To estimate fair market value we used a Gradient Boosting Machine, a GBM, because it performs well when many variables interact. Unlike a simple regression it captures nonlinear relationships between location, amenities, property type and host, and for each listing it predicts a fair price with a confidence interval. We did not want a black box, so alongside it we used a K-nearest-neighbors model to find similar listings, which lets us show hosts the comparable properties and amenities behind the price. It is also about twice as accurate as a plain regression. One important nuance on the split: about half of listings read underpriced and about half overpriced, but the two halves are NOT symmetric. Because demand is close to unit-elastic, cutting price on the overpriced side is actually revenue-negative for the host, so we treat that half as a fairness and peer-benchmarking signal, not a second revenue lever. The real revenue opportunity is the underpriced side, and Jai will show the elasticity work that proves it."
 TRANSITION: "First let me walk you through the dashboard itself." [Manas continues to Slide 9]</a:t>
@@ -2127,7 +2282,7 @@
           <a:lstStyle/>
           <a:p>
             <a:r>
-              <a:rPr lang="en-US" dirty="0"/>
+              <a:rPr lang="en-US"/>
               <a:t>SPEAKER: Manas, PRE-RECORDED WALKTHROUGH (~2 min). We play a short pre-recorded clip of the dashboard (built by Rachael in Tableau), narrated live. Keep it to two or three moves so the story stays clear: the recommendation, why it is there, and what happens if the host acts.
 1) Open a single listing and show its recommended fair value with the confidence interval around it.
 2) Show the comparable listings the model surfaced, and point out how their amenities differ from this one.
@@ -2715,7 +2870,7 @@
               <a:buNone/>
             </a:pPr>
             <a:r>
-              <a:rPr lang="en-US" sz="1200" b="1" kern="0" spc="150" dirty="0">
+              <a:rPr lang="en-US" sz="1200" b="1" kern="0" spc="150">
                 <a:solidFill>
                   <a:srgbClr val="FFFFFF"/>
                 </a:solidFill>
@@ -2725,7 +2880,7 @@
               </a:rPr>
               <a:t>BANA 5160 CAPSTONE  ·  CORNELL UNIVERSITY  ·  TEAM 6</a:t>
             </a:r>
-            <a:endParaRPr lang="en-US" sz="1200" dirty="0"/>
+            <a:endParaRPr lang="en-US" sz="1200"/>
           </a:p>
         </p:txBody>
       </p:sp>
@@ -2757,7 +2912,7 @@
               <a:buNone/>
             </a:pPr>
             <a:r>
-              <a:rPr lang="en-US" sz="5600" b="1" dirty="0">
+              <a:rPr lang="en-US" sz="5600" b="1">
                 <a:solidFill>
                   <a:srgbClr val="FFFFFF"/>
                 </a:solidFill>
@@ -2767,7 +2922,7 @@
               </a:rPr>
               <a:t>Airbnb Pricing</a:t>
             </a:r>
-            <a:endParaRPr lang="en-US" sz="5600" dirty="0"/>
+            <a:endParaRPr lang="en-US" sz="5600"/>
           </a:p>
           <a:p>
             <a:pPr marL="0" indent="0">
@@ -2777,7 +2932,7 @@
               <a:buNone/>
             </a:pPr>
             <a:r>
-              <a:rPr lang="en-US" sz="5600" b="1" dirty="0">
+              <a:rPr lang="en-US" sz="5600" b="1">
                 <a:solidFill>
                   <a:srgbClr val="FFFFFF"/>
                 </a:solidFill>
@@ -2787,7 +2942,7 @@
               </a:rPr>
               <a:t>Intelligence</a:t>
             </a:r>
-            <a:endParaRPr lang="en-US" sz="5600" dirty="0"/>
+            <a:endParaRPr lang="en-US" sz="5600"/>
           </a:p>
         </p:txBody>
       </p:sp>
@@ -2816,7 +2971,7 @@
               <a:buNone/>
             </a:pPr>
             <a:r>
-              <a:rPr lang="en-US" sz="1800" dirty="0">
+              <a:rPr lang="en-US" sz="1800">
                 <a:solidFill>
                   <a:srgbClr val="FFFFFF">
                     <a:alpha val="94000"/>
@@ -2828,7 +2983,7 @@
               </a:rPr>
               <a:t>A fair-price tool hosts can actually understand and trust.</a:t>
             </a:r>
-            <a:endParaRPr lang="en-US" sz="1800" dirty="0"/>
+            <a:endParaRPr lang="en-US" sz="1800"/>
           </a:p>
         </p:txBody>
       </p:sp>
@@ -2857,7 +3012,7 @@
               <a:buNone/>
             </a:pPr>
             <a:r>
-              <a:rPr lang="en-US" sz="1250" b="1" dirty="0">
+              <a:rPr lang="en-US" sz="1250" b="1">
                 <a:solidFill>
                   <a:srgbClr val="FFFFFF"/>
                 </a:solidFill>
@@ -2868,7 +3023,7 @@
               <a:t>Brendan Meara </a:t>
             </a:r>
             <a:r>
-              <a:rPr lang="en-US" sz="1250" dirty="0">
+              <a:rPr lang="en-US" sz="1250">
                 <a:solidFill>
                   <a:srgbClr val="FFFFFF">
                     <a:alpha val="78000"/>
@@ -2881,7 +3036,7 @@
               <a:t>(PM)     </a:t>
             </a:r>
             <a:r>
-              <a:rPr lang="en-US" sz="1250" b="1" dirty="0">
+              <a:rPr lang="en-US" sz="1250" b="1">
                 <a:solidFill>
                   <a:srgbClr val="FFFFFF"/>
                 </a:solidFill>
@@ -2892,7 +3047,7 @@
               <a:t>Jai Manikandan </a:t>
             </a:r>
             <a:r>
-              <a:rPr lang="en-US" sz="1250" dirty="0">
+              <a:rPr lang="en-US" sz="1250">
                 <a:solidFill>
                   <a:srgbClr val="FFFFFF">
                     <a:alpha val="78000"/>
@@ -2905,7 +3060,7 @@
               <a:t>(Data)     </a:t>
             </a:r>
             <a:r>
-              <a:rPr lang="en-US" sz="1250" b="1" dirty="0">
+              <a:rPr lang="en-US" sz="1250" b="1">
                 <a:solidFill>
                   <a:srgbClr val="FFFFFF"/>
                 </a:solidFill>
@@ -2916,7 +3071,7 @@
               <a:t>Manas Manu </a:t>
             </a:r>
             <a:r>
-              <a:rPr lang="en-US" sz="1250" dirty="0">
+              <a:rPr lang="en-US" sz="1250">
                 <a:solidFill>
                   <a:srgbClr val="FFFFFF">
                     <a:alpha val="78000"/>
@@ -2929,7 +3084,7 @@
               <a:t>(Modeling)     </a:t>
             </a:r>
             <a:r>
-              <a:rPr lang="en-US" sz="1250" b="1" dirty="0">
+              <a:rPr lang="en-US" sz="1250" b="1">
                 <a:solidFill>
                   <a:srgbClr val="FFFFFF"/>
                 </a:solidFill>
@@ -2940,7 +3095,7 @@
               <a:t>Rachael Chin </a:t>
             </a:r>
             <a:r>
-              <a:rPr lang="en-US" sz="1250" dirty="0">
+              <a:rPr lang="en-US" sz="1250">
                 <a:solidFill>
                   <a:srgbClr val="FFFFFF">
                     <a:alpha val="78000"/>
@@ -2952,7 +3107,7 @@
               </a:rPr>
               <a:t>(Visualization)</a:t>
             </a:r>
-            <a:endParaRPr lang="en-US" sz="1250" dirty="0"/>
+            <a:endParaRPr lang="en-US" sz="1250"/>
           </a:p>
         </p:txBody>
       </p:sp>
@@ -2981,7 +3136,7 @@
               <a:buNone/>
             </a:pPr>
             <a:r>
-              <a:rPr lang="en-US" sz="1250" b="1" dirty="0">
+              <a:rPr lang="en-US" sz="1250" b="1">
                 <a:solidFill>
                   <a:srgbClr val="FFFFFF"/>
                 </a:solidFill>
@@ -2992,7 +3147,7 @@
               <a:t>Francois Miaule </a:t>
             </a:r>
             <a:r>
-              <a:rPr lang="en-US" sz="1250" dirty="0">
+              <a:rPr lang="en-US" sz="1250">
                 <a:solidFill>
                   <a:srgbClr val="FFFFFF">
                     <a:alpha val="78000"/>
@@ -3005,7 +3160,7 @@
               <a:t>(Insights &amp; Presentation)      Industry Coach: </a:t>
             </a:r>
             <a:r>
-              <a:rPr lang="en-US" sz="1250" b="1" dirty="0">
+              <a:rPr lang="en-US" sz="1250" b="1">
                 <a:solidFill>
                   <a:srgbClr val="FFFFFF"/>
                 </a:solidFill>
@@ -3015,7 +3170,7 @@
               </a:rPr>
               <a:t>Stan</a:t>
             </a:r>
-            <a:endParaRPr lang="en-US" sz="1250" dirty="0"/>
+            <a:endParaRPr lang="en-US" sz="1250"/>
           </a:p>
         </p:txBody>
       </p:sp>
@@ -3044,7 +3199,7 @@
               <a:buNone/>
             </a:pPr>
             <a:r>
-              <a:rPr lang="en-US" sz="1150" dirty="0">
+              <a:rPr lang="en-US" sz="1150">
                 <a:solidFill>
                   <a:srgbClr val="FFFFFF">
                     <a:alpha val="88000"/>
@@ -3056,7 +3211,7 @@
               </a:rPr>
               <a:t>Dataset: Inside Airbnb NYC  ·  9,752 active listings  ·  snapshot Jun 14, 2026</a:t>
             </a:r>
-            <a:endParaRPr lang="en-US" sz="1150" dirty="0"/>
+            <a:endParaRPr lang="en-US" sz="1150"/>
           </a:p>
         </p:txBody>
       </p:sp>
@@ -3085,7 +3240,7 @@
               <a:buNone/>
             </a:pPr>
             <a:r>
-              <a:rPr lang="en-US" sz="950" i="1" dirty="0">
+              <a:rPr lang="en-US" sz="950" i="1">
                 <a:solidFill>
                   <a:srgbClr val="FFFFFF">
                     <a:alpha val="78000"/>
@@ -3097,7 +3252,7 @@
               </a:rPr>
               <a:t>Independent academic analysis of public Inside Airbnb data. Not affiliated with or endorsed by Airbnb.</a:t>
             </a:r>
-            <a:endParaRPr lang="en-US" sz="950" dirty="0"/>
+            <a:endParaRPr lang="en-US" sz="950"/>
           </a:p>
         </p:txBody>
       </p:sp>
@@ -3159,7 +3314,7 @@
               <a:buNone/>
             </a:pPr>
             <a:r>
-              <a:rPr lang="en-US" sz="1200" b="1" kern="0" spc="200" dirty="0">
+              <a:rPr lang="en-US" sz="1200" b="1" kern="0" spc="200">
                 <a:solidFill>
                   <a:srgbClr val="FF385C"/>
                 </a:solidFill>
@@ -3169,7 +3324,7 @@
               </a:rPr>
               <a:t>09 · FROM PRICE TO REVENUE</a:t>
             </a:r>
-            <a:endParaRPr lang="en-US" sz="1200" dirty="0"/>
+            <a:endParaRPr lang="en-US" sz="1200"/>
           </a:p>
         </p:txBody>
       </p:sp>
@@ -3201,7 +3356,7 @@
               <a:buNone/>
             </a:pPr>
             <a:r>
-              <a:rPr lang="en-US" sz="2700" b="1" dirty="0">
+              <a:rPr lang="en-US" sz="2700" b="1">
                 <a:solidFill>
                   <a:srgbClr val="222222"/>
                 </a:solidFill>
@@ -3211,7 +3366,7 @@
               </a:rPr>
               <a:t>Does moving the price actually make money?</a:t>
             </a:r>
-            <a:endParaRPr lang="en-US" sz="2700" dirty="0"/>
+            <a:endParaRPr lang="en-US" sz="2700"/>
           </a:p>
         </p:txBody>
       </p:sp>
@@ -3243,7 +3398,7 @@
               <a:buNone/>
             </a:pPr>
             <a:r>
-              <a:rPr lang="en-US" sz="1450" dirty="0">
+              <a:rPr lang="en-US" sz="1450">
                 <a:solidFill>
                   <a:srgbClr val="717171"/>
                 </a:solidFill>
@@ -3253,7 +3408,7 @@
               </a:rPr>
               <a:t>Our most rigorous piece of analysis: we measured price sensitivity directly, on real third-party data.</a:t>
             </a:r>
-            <a:endParaRPr lang="en-US" sz="1450" dirty="0"/>
+            <a:endParaRPr lang="en-US" sz="1450"/>
           </a:p>
         </p:txBody>
       </p:sp>
@@ -3338,7 +3493,7 @@
               <a:buNone/>
             </a:pPr>
             <a:r>
-              <a:rPr lang="en-US" sz="950" b="1" kern="0" spc="100" dirty="0">
+              <a:rPr lang="en-US" sz="950" b="1" kern="0" spc="100">
                 <a:solidFill>
                   <a:srgbClr val="9AA0A6"/>
                 </a:solidFill>
@@ -3349,7 +3504,7 @@
               <a:t>PRESENTS  </a:t>
             </a:r>
             <a:r>
-              <a:rPr lang="en-US" sz="950" b="1" dirty="0">
+              <a:rPr lang="en-US" sz="950" b="1">
                 <a:solidFill>
                   <a:srgbClr val="222222"/>
                 </a:solidFill>
@@ -3359,7 +3514,7 @@
               </a:rPr>
               <a:t>Jai</a:t>
             </a:r>
-            <a:endParaRPr lang="en-US" sz="950" dirty="0"/>
+            <a:endParaRPr lang="en-US" sz="950"/>
           </a:p>
         </p:txBody>
       </p:sp>
@@ -3466,7 +3621,7 @@
               <a:buNone/>
             </a:pPr>
             <a:r>
-              <a:rPr lang="en-US" sz="900" b="1" dirty="0">
+              <a:rPr lang="en-US" sz="900" b="1">
                 <a:solidFill>
                   <a:srgbClr val="9AA0A6"/>
                 </a:solidFill>
@@ -3476,7 +3631,7 @@
               </a:rPr>
               <a:t>10</a:t>
             </a:r>
-            <a:endParaRPr lang="en-US" sz="900" dirty="0"/>
+            <a:endParaRPr lang="en-US" sz="900"/>
           </a:p>
         </p:txBody>
       </p:sp>
@@ -3597,7 +3752,7 @@
               <a:buNone/>
             </a:pPr>
             <a:r>
-              <a:rPr lang="en-US" sz="1050" b="1" kern="0" spc="100" dirty="0">
+              <a:rPr lang="en-US" sz="1050" b="1" kern="0" spc="100">
                 <a:solidFill>
                   <a:srgbClr val="007A73"/>
                 </a:solidFill>
@@ -3607,7 +3762,7 @@
               </a:rPr>
               <a:t>THE MEASUREMENT</a:t>
             </a:r>
-            <a:endParaRPr lang="en-US" sz="1050" dirty="0"/>
+            <a:endParaRPr lang="en-US" sz="1050"/>
           </a:p>
         </p:txBody>
       </p:sp>
@@ -3636,7 +3791,7 @@
               <a:buNone/>
             </a:pPr>
             <a:r>
-              <a:rPr lang="en-US" sz="2900" b="1" dirty="0">
+              <a:rPr lang="en-US" sz="2900" b="1">
                 <a:solidFill>
                   <a:srgbClr val="007A73"/>
                 </a:solidFill>
@@ -3647,7 +3802,7 @@
               <a:t>β = −0.92</a:t>
             </a:r>
             <a:r>
-              <a:rPr lang="en-US" sz="1150" dirty="0">
+              <a:rPr lang="en-US" sz="1150">
                 <a:solidFill>
                   <a:srgbClr val="4A4A4A"/>
                 </a:solidFill>
@@ -3657,7 +3812,7 @@
               </a:rPr>
               <a:t>    95% CI  −1.30 to −0.54</a:t>
             </a:r>
-            <a:endParaRPr lang="en-US" sz="2900" dirty="0"/>
+            <a:endParaRPr lang="en-US" sz="2900"/>
           </a:p>
         </p:txBody>
       </p:sp>
@@ -3689,7 +3844,7 @@
               <a:buNone/>
             </a:pPr>
             <a:r>
-              <a:rPr lang="en-US" sz="1100" dirty="0">
+              <a:rPr lang="en-US" sz="1100">
                 <a:solidFill>
                   <a:srgbClr val="4A4A4A"/>
                 </a:solidFill>
@@ -3699,7 +3854,7 @@
               </a:rPr>
               <a:t>A two-way fixed-effects regression on a third-party occupancy panel, controlling for each listing and each month. A +1% change in price maps to a −0.92% change in booked occupancy.</a:t>
             </a:r>
-            <a:endParaRPr lang="en-US" sz="1100" dirty="0"/>
+            <a:endParaRPr lang="en-US" sz="1100"/>
           </a:p>
         </p:txBody>
       </p:sp>
@@ -3820,7 +3975,7 @@
               <a:buNone/>
             </a:pPr>
             <a:r>
-              <a:rPr lang="en-US" sz="1050" b="1" kern="0" spc="100" dirty="0">
+              <a:rPr lang="en-US" sz="1050" b="1" kern="0" spc="100">
                 <a:solidFill>
                   <a:srgbClr val="FF385C"/>
                 </a:solidFill>
@@ -3830,7 +3985,7 @@
               </a:rPr>
               <a:t>WHAT IT MEANS FOR REVENUE</a:t>
             </a:r>
-            <a:endParaRPr lang="en-US" sz="1050" dirty="0"/>
+            <a:endParaRPr lang="en-US" sz="1050"/>
           </a:p>
         </p:txBody>
       </p:sp>
@@ -3859,7 +4014,7 @@
               <a:buNone/>
             </a:pPr>
             <a:r>
-              <a:rPr lang="en-US" sz="2000" b="1" dirty="0">
+              <a:rPr lang="en-US" sz="2000" b="1">
                 <a:solidFill>
                   <a:srgbClr val="FF385C"/>
                 </a:solidFill>
@@ -3869,7 +4024,7 @@
               </a:rPr>
               <a:t>revenue elasticity = 1 + β ≈ 0.08</a:t>
             </a:r>
-            <a:endParaRPr lang="en-US" sz="2000" dirty="0"/>
+            <a:endParaRPr lang="en-US" sz="2000"/>
           </a:p>
         </p:txBody>
       </p:sp>
@@ -3901,7 +4056,7 @@
               <a:buNone/>
             </a:pPr>
             <a:r>
-              <a:rPr lang="en-US" sz="1100" dirty="0">
+              <a:rPr lang="en-US" sz="1100">
                 <a:solidFill>
                   <a:srgbClr val="4A4A4A"/>
                 </a:solidFill>
@@ -3911,7 +4066,7 @@
               </a:rPr>
               <a:t>Revenue barely moves with price at the margin. Breakeven is β = −1.0: cutting price only wins if demand is more elastic than that. So the real lift is raising underpriced listings; cutting overpriced ones is near revenue-neutral for the host.</a:t>
             </a:r>
-            <a:endParaRPr lang="en-US" sz="1100" dirty="0"/>
+            <a:endParaRPr lang="en-US" sz="1100"/>
           </a:p>
         </p:txBody>
       </p:sp>
@@ -3981,7 +4136,7 @@
               <a:buNone/>
             </a:pPr>
             <a:r>
-              <a:rPr lang="en-US" sz="1200" b="1" dirty="0">
+              <a:rPr lang="en-US" sz="1200" b="1">
                 <a:solidFill>
                   <a:srgbClr val="222222"/>
                 </a:solidFill>
@@ -3991,7 +4146,7 @@
               </a:rPr>
               <a:t>Where our estimate sits on the elasticity line</a:t>
             </a:r>
-            <a:endParaRPr lang="en-US" sz="1200" dirty="0"/>
+            <a:endParaRPr lang="en-US" sz="1200"/>
           </a:p>
         </p:txBody>
       </p:sp>
@@ -4138,7 +4293,7 @@
               <a:buNone/>
             </a:pPr>
             <a:r>
-              <a:rPr lang="en-US" sz="950" b="1" dirty="0">
+              <a:rPr lang="en-US" sz="950" b="1">
                 <a:solidFill>
                   <a:srgbClr val="222222"/>
                 </a:solidFill>
@@ -4148,7 +4303,7 @@
               </a:rPr>
               <a:t>breakeven −1.0</a:t>
             </a:r>
-            <a:endParaRPr lang="en-US" sz="950" dirty="0"/>
+            <a:endParaRPr lang="en-US" sz="950"/>
           </a:p>
         </p:txBody>
       </p:sp>
@@ -4209,7 +4364,7 @@
               <a:buNone/>
             </a:pPr>
             <a:r>
-              <a:rPr lang="en-US" sz="950" b="1" dirty="0">
+              <a:rPr lang="en-US" sz="950" b="1">
                 <a:solidFill>
                   <a:srgbClr val="FF385C"/>
                 </a:solidFill>
@@ -4219,7 +4374,7 @@
               </a:rPr>
               <a:t>our estimate  β = −0.92</a:t>
             </a:r>
-            <a:endParaRPr lang="en-US" sz="950" dirty="0"/>
+            <a:endParaRPr lang="en-US" sz="950"/>
           </a:p>
         </p:txBody>
       </p:sp>
@@ -4248,7 +4403,7 @@
               <a:buNone/>
             </a:pPr>
             <a:r>
-              <a:rPr lang="en-US" sz="900" dirty="0">
+              <a:rPr lang="en-US" sz="900">
                 <a:solidFill>
                   <a:srgbClr val="007A73"/>
                 </a:solidFill>
@@ -4258,7 +4413,7 @@
               </a:rPr>
               <a:t>ELASTIC  ·  cutting price adds revenue</a:t>
             </a:r>
-            <a:endParaRPr lang="en-US" sz="900" dirty="0"/>
+            <a:endParaRPr lang="en-US" sz="900"/>
           </a:p>
         </p:txBody>
       </p:sp>
@@ -4287,7 +4442,7 @@
               <a:buNone/>
             </a:pPr>
             <a:r>
-              <a:rPr lang="en-US" sz="900" dirty="0">
+              <a:rPr lang="en-US" sz="900">
                 <a:solidFill>
                   <a:srgbClr val="FF385C"/>
                 </a:solidFill>
@@ -4297,7 +4452,7 @@
               </a:rPr>
               <a:t>INELASTIC  ·  raising price adds revenue</a:t>
             </a:r>
-            <a:endParaRPr lang="en-US" sz="900" dirty="0"/>
+            <a:endParaRPr lang="en-US" sz="900"/>
           </a:p>
         </p:txBody>
       </p:sp>
@@ -4326,7 +4481,7 @@
               <a:buNone/>
             </a:pPr>
             <a:r>
-              <a:rPr lang="en-US" sz="900" dirty="0">
+              <a:rPr lang="en-US" sz="900">
                 <a:solidFill>
                   <a:srgbClr val="9AA0A6"/>
                 </a:solidFill>
@@ -4336,7 +4491,7 @@
               </a:rPr>
               <a:t>−2</a:t>
             </a:r>
-            <a:endParaRPr lang="en-US" sz="900" dirty="0"/>
+            <a:endParaRPr lang="en-US" sz="900"/>
           </a:p>
         </p:txBody>
       </p:sp>
@@ -4365,7 +4520,7 @@
               <a:buNone/>
             </a:pPr>
             <a:r>
-              <a:rPr lang="en-US" sz="900" dirty="0">
+              <a:rPr lang="en-US" sz="900">
                 <a:solidFill>
                   <a:srgbClr val="9AA0A6"/>
                 </a:solidFill>
@@ -4375,7 +4530,7 @@
               </a:rPr>
               <a:t>10</a:t>
             </a:r>
-            <a:endParaRPr lang="en-US" sz="900" dirty="0"/>
+            <a:endParaRPr lang="en-US" sz="900"/>
           </a:p>
         </p:txBody>
       </p:sp>
@@ -4407,7 +4562,7 @@
               <a:buNone/>
             </a:pPr>
             <a:r>
-              <a:rPr lang="en-US" sz="950" b="1" i="1" dirty="0">
+              <a:rPr lang="en-US" sz="950" b="1" i="1">
                 <a:solidFill>
                   <a:srgbClr val="717171"/>
                 </a:solidFill>
@@ -4418,7 +4573,7 @@
               <a:t>Honest caveat:  </a:t>
             </a:r>
             <a:r>
-              <a:rPr lang="en-US" sz="950" i="1" dirty="0">
+              <a:rPr lang="en-US" sz="950" i="1">
                 <a:solidFill>
                   <a:srgbClr val="9AA0A6"/>
                 </a:solidFill>
@@ -4428,7 +4583,7 @@
               </a:rPr>
               <a:t>measured on a 64-listing short-stay pilot of established listings (median 142 reviews). The monthly segment came back statistically insignificant (β=+0.084, p=0.73), so we hold it occupancy-neutral. Broadening this across every segment is exactly our AirROI data ask.</a:t>
             </a:r>
-            <a:endParaRPr lang="en-US" sz="950" dirty="0"/>
+            <a:endParaRPr lang="en-US" sz="950"/>
           </a:p>
         </p:txBody>
       </p:sp>
@@ -4490,7 +4645,7 @@
               <a:buNone/>
             </a:pPr>
             <a:r>
-              <a:rPr lang="en-US" sz="1200" b="1" kern="0" spc="200" dirty="0">
+              <a:rPr lang="en-US" sz="1200" b="1" kern="0" spc="200">
                 <a:solidFill>
                   <a:srgbClr val="FF385C"/>
                 </a:solidFill>
@@ -4500,7 +4655,7 @@
               </a:rPr>
               <a:t>10 · THE FINANCIAL CASE</a:t>
             </a:r>
-            <a:endParaRPr lang="en-US" sz="1200" dirty="0"/>
+            <a:endParaRPr lang="en-US" sz="1200"/>
           </a:p>
         </p:txBody>
       </p:sp>
@@ -4532,7 +4687,7 @@
               <a:buNone/>
             </a:pPr>
             <a:r>
-              <a:rPr lang="en-US" sz="2900" b="1" dirty="0">
+              <a:rPr lang="en-US" sz="2900" b="1">
                 <a:solidFill>
                   <a:srgbClr val="222222"/>
                 </a:solidFill>
@@ -4542,7 +4697,7 @@
               </a:rPr>
               <a:t>What it is worth, and what it costs</a:t>
             </a:r>
-            <a:endParaRPr lang="en-US" sz="2900" dirty="0"/>
+            <a:endParaRPr lang="en-US" sz="2900"/>
           </a:p>
         </p:txBody>
       </p:sp>
@@ -4574,7 +4729,7 @@
               <a:buNone/>
             </a:pPr>
             <a:r>
-              <a:rPr lang="en-US" sz="1450" dirty="0">
+              <a:rPr lang="en-US" sz="1450">
                 <a:solidFill>
                   <a:srgbClr val="717171"/>
                 </a:solidFill>
@@ -4584,7 +4739,7 @@
               </a:rPr>
               <a:t>We lead with the conservative floor, every assumption rounded against us, and show the ceiling as upside.</a:t>
             </a:r>
-            <a:endParaRPr lang="en-US" sz="1450" dirty="0"/>
+            <a:endParaRPr lang="en-US" sz="1450"/>
           </a:p>
         </p:txBody>
       </p:sp>
@@ -4669,7 +4824,7 @@
               <a:buNone/>
             </a:pPr>
             <a:r>
-              <a:rPr lang="en-US" sz="950" b="1" kern="0" spc="100" dirty="0">
+              <a:rPr lang="en-US" sz="950" b="1" kern="0" spc="100">
                 <a:solidFill>
                   <a:srgbClr val="9AA0A6"/>
                 </a:solidFill>
@@ -4680,7 +4835,7 @@
               <a:t>PRESENTS  </a:t>
             </a:r>
             <a:r>
-              <a:rPr lang="en-US" sz="950" b="1" dirty="0">
+              <a:rPr lang="en-US" sz="950" b="1">
                 <a:solidFill>
                   <a:srgbClr val="222222"/>
                 </a:solidFill>
@@ -4690,7 +4845,7 @@
               </a:rPr>
               <a:t>Francois</a:t>
             </a:r>
-            <a:endParaRPr lang="en-US" sz="950" dirty="0"/>
+            <a:endParaRPr lang="en-US" sz="950"/>
           </a:p>
         </p:txBody>
       </p:sp>
@@ -4797,7 +4952,7 @@
               <a:buNone/>
             </a:pPr>
             <a:r>
-              <a:rPr lang="en-US" sz="900" b="1" dirty="0">
+              <a:rPr lang="en-US" sz="900" b="1">
                 <a:solidFill>
                   <a:srgbClr val="9AA0A6"/>
                 </a:solidFill>
@@ -4807,7 +4962,7 @@
               </a:rPr>
               <a:t>11</a:t>
             </a:r>
-            <a:endParaRPr lang="en-US" sz="900" dirty="0"/>
+            <a:endParaRPr lang="en-US" sz="900"/>
           </a:p>
         </p:txBody>
       </p:sp>
@@ -4877,7 +5032,7 @@
               <a:buNone/>
             </a:pPr>
             <a:r>
-              <a:rPr lang="en-US" sz="1100" b="1" kern="0" spc="50" dirty="0">
+              <a:rPr lang="en-US" sz="1100" b="1" kern="0" spc="50">
                 <a:solidFill>
                   <a:srgbClr val="FF385C"/>
                 </a:solidFill>
@@ -4887,7 +5042,7 @@
               </a:rPr>
               <a:t>CONSERVATIVE REVENUE FLOOR  ·  NYC, built on the measured −0.92 elasticity</a:t>
             </a:r>
-            <a:endParaRPr lang="en-US" sz="1100" dirty="0"/>
+            <a:endParaRPr lang="en-US" sz="1100"/>
           </a:p>
         </p:txBody>
       </p:sp>
@@ -4916,7 +5071,7 @@
               <a:buNone/>
             </a:pPr>
             <a:r>
-              <a:rPr lang="en-US" sz="2900" b="1" dirty="0">
+              <a:rPr lang="en-US" sz="2900" b="1">
                 <a:solidFill>
                   <a:srgbClr val="222222"/>
                 </a:solidFill>
@@ -4927,7 +5082,7 @@
               <a:t>~$7.6M</a:t>
             </a:r>
             <a:r>
-              <a:rPr lang="en-US" sz="1300" dirty="0">
+              <a:rPr lang="en-US" sz="1300">
                 <a:solidFill>
                   <a:srgbClr val="4A4A4A"/>
                 </a:solidFill>
@@ -4938,7 +5093,7 @@
               <a:t> host GBV</a:t>
             </a:r>
             <a:r>
-              <a:rPr lang="en-US" sz="1250" dirty="0">
+              <a:rPr lang="en-US" sz="1250">
                 <a:solidFill>
                   <a:srgbClr val="9AA0A6"/>
                 </a:solidFill>
@@ -4949,7 +5104,7 @@
               <a:t>      ×15.5%  →      </a:t>
             </a:r>
             <a:r>
-              <a:rPr lang="en-US" sz="2900" b="1" dirty="0">
+              <a:rPr lang="en-US" sz="2900" b="1">
                 <a:solidFill>
                   <a:srgbClr val="FF385C"/>
                 </a:solidFill>
@@ -4960,7 +5115,7 @@
               <a:t>$1.17M</a:t>
             </a:r>
             <a:r>
-              <a:rPr lang="en-US" sz="1300" dirty="0">
+              <a:rPr lang="en-US" sz="1300">
                 <a:solidFill>
                   <a:srgbClr val="4A4A4A"/>
                 </a:solidFill>
@@ -4970,7 +5125,7 @@
               </a:rPr>
               <a:t> / yr Airbnb fee</a:t>
             </a:r>
-            <a:endParaRPr lang="en-US" sz="2900" dirty="0"/>
+            <a:endParaRPr lang="en-US" sz="2900"/>
           </a:p>
         </p:txBody>
       </p:sp>
@@ -5032,7 +5187,7 @@
               <a:buNone/>
             </a:pPr>
             <a:r>
-              <a:rPr lang="en-US" sz="1050" b="1" dirty="0">
+              <a:rPr lang="en-US" sz="1050" b="1">
                 <a:solidFill>
                   <a:srgbClr val="222222"/>
                 </a:solidFill>
@@ -5043,7 +5198,7 @@
               <a:t>Ceiling (upside): </a:t>
             </a:r>
             <a:r>
-              <a:rPr lang="en-US" sz="1050" dirty="0">
+              <a:rPr lang="en-US" sz="1050">
                 <a:solidFill>
                   <a:srgbClr val="4A4A4A"/>
                 </a:solidFill>
@@ -5053,7 +5208,7 @@
               </a:rPr>
               <a:t>~$4.15M/yr fees, from ~$26.8M GBV, occupancy-neutral. Shown as upside, not the headline.</a:t>
             </a:r>
-            <a:endParaRPr lang="en-US" sz="1050" dirty="0"/>
+            <a:endParaRPr lang="en-US" sz="1050"/>
           </a:p>
         </p:txBody>
       </p:sp>
@@ -5135,7 +5290,7 @@
               <a:buNone/>
             </a:pPr>
             <a:r>
-              <a:rPr lang="en-US" sz="2500" b="1" dirty="0">
+              <a:rPr lang="en-US" sz="2500" b="1">
                 <a:solidFill>
                   <a:srgbClr val="007A73"/>
                 </a:solidFill>
@@ -5145,7 +5300,7 @@
               </a:rPr>
               <a:t>$65K</a:t>
             </a:r>
-            <a:endParaRPr lang="en-US" sz="2500" dirty="0"/>
+            <a:endParaRPr lang="en-US" sz="2500"/>
           </a:p>
         </p:txBody>
       </p:sp>
@@ -5177,7 +5332,7 @@
               <a:buNone/>
             </a:pPr>
             <a:r>
-              <a:rPr lang="en-US" sz="1000" dirty="0">
+              <a:rPr lang="en-US" sz="1000">
                 <a:solidFill>
                   <a:srgbClr val="4A4A4A"/>
                 </a:solidFill>
@@ -5187,7 +5342,7 @@
               </a:rPr>
               <a:t>one-time build (incremental engineering on Airbnb's existing stack)</a:t>
             </a:r>
-            <a:endParaRPr lang="en-US" sz="1000" dirty="0"/>
+            <a:endParaRPr lang="en-US" sz="1000"/>
           </a:p>
         </p:txBody>
       </p:sp>
@@ -5269,7 +5424,7 @@
               <a:buNone/>
             </a:pPr>
             <a:r>
-              <a:rPr lang="en-US" sz="2500" b="1" dirty="0">
+              <a:rPr lang="en-US" sz="2500" b="1">
                 <a:solidFill>
                   <a:srgbClr val="FF385C"/>
                 </a:solidFill>
@@ -5279,7 +5434,7 @@
               </a:rPr>
               <a:t>$30K / yr</a:t>
             </a:r>
-            <a:endParaRPr lang="en-US" sz="2500" dirty="0"/>
+            <a:endParaRPr lang="en-US" sz="2500"/>
           </a:p>
         </p:txBody>
       </p:sp>
@@ -5311,7 +5466,7 @@
               <a:buNone/>
             </a:pPr>
             <a:r>
-              <a:rPr lang="en-US" sz="1000" dirty="0">
+              <a:rPr lang="en-US" sz="1000">
                 <a:solidFill>
                   <a:srgbClr val="4A4A4A"/>
                 </a:solidFill>
@@ -5321,7 +5476,7 @@
               </a:rPr>
               <a:t>to run (retraining, monitoring, ~$3K infra)</a:t>
             </a:r>
-            <a:endParaRPr lang="en-US" sz="1000" dirty="0"/>
+            <a:endParaRPr lang="en-US" sz="1000"/>
           </a:p>
         </p:txBody>
       </p:sp>
@@ -5403,7 +5558,7 @@
               <a:buNone/>
             </a:pPr>
             <a:r>
-              <a:rPr lang="en-US" sz="2500" b="1" dirty="0">
+              <a:rPr lang="en-US" sz="2500" b="1">
                 <a:solidFill>
                   <a:srgbClr val="007A73"/>
                 </a:solidFill>
@@ -5413,7 +5568,7 @@
               </a:rPr>
               <a:t>~$215K</a:t>
             </a:r>
-            <a:endParaRPr lang="en-US" sz="2500" dirty="0"/>
+            <a:endParaRPr lang="en-US" sz="2500"/>
           </a:p>
         </p:txBody>
       </p:sp>
@@ -5445,7 +5600,7 @@
               <a:buNone/>
             </a:pPr>
             <a:r>
-              <a:rPr lang="en-US" sz="1000" dirty="0">
+              <a:rPr lang="en-US" sz="1000">
                 <a:solidFill>
                   <a:srgbClr val="4A4A4A"/>
                 </a:solidFill>
@@ -5455,7 +5610,7 @@
               </a:rPr>
               <a:t>total 5-year cost of ownership</a:t>
             </a:r>
-            <a:endParaRPr lang="en-US" sz="1000" dirty="0"/>
+            <a:endParaRPr lang="en-US" sz="1000"/>
           </a:p>
         </p:txBody>
       </p:sp>
@@ -5487,7 +5642,7 @@
               <a:buNone/>
             </a:pPr>
             <a:r>
-              <a:rPr lang="en-US" sz="1050" dirty="0">
+              <a:rPr lang="en-US" sz="1050">
                 <a:solidFill>
                   <a:srgbClr val="4A4A4A"/>
                 </a:solidFill>
@@ -5498,7 +5653,7 @@
               <a:t>Costed as an incremental feature on infrastructure Airbnb already owns (model-serving, pricing, A/B testing). </a:t>
             </a:r>
             <a:r>
-              <a:rPr lang="en-US" sz="1050" i="1" dirty="0">
+              <a:rPr lang="en-US" sz="1050" i="1">
                 <a:solidFill>
                   <a:srgbClr val="9AA0A6"/>
                 </a:solidFill>
@@ -5508,7 +5663,7 @@
               </a:rPr>
               <a:t>A full greenfield build (~$190K + $105K/yr) is shown only as a worst-case if built standalone.</a:t>
             </a:r>
-            <a:endParaRPr lang="en-US" sz="1050" dirty="0"/>
+            <a:endParaRPr lang="en-US" sz="1050"/>
           </a:p>
         </p:txBody>
       </p:sp>
@@ -5570,7 +5725,7 @@
               <a:buNone/>
             </a:pPr>
             <a:r>
-              <a:rPr lang="en-US" sz="1200" b="1" kern="0" spc="200" dirty="0">
+              <a:rPr lang="en-US" sz="1200" b="1" kern="0" spc="200">
                 <a:solidFill>
                   <a:srgbClr val="FF385C"/>
                 </a:solidFill>
@@ -5580,7 +5735,7 @@
               </a:rPr>
               <a:t>11 · ROI &amp; FINANCIAL TIMELINE</a:t>
             </a:r>
-            <a:endParaRPr lang="en-US" sz="1200" dirty="0"/>
+            <a:endParaRPr lang="en-US" sz="1200"/>
           </a:p>
         </p:txBody>
       </p:sp>
@@ -5612,7 +5767,7 @@
               <a:buNone/>
             </a:pPr>
             <a:r>
-              <a:rPr lang="en-US" sz="2800" b="1" dirty="0">
+              <a:rPr lang="en-US" sz="2800" b="1">
                 <a:solidFill>
                   <a:srgbClr val="222222"/>
                 </a:solidFill>
@@ -5622,7 +5777,7 @@
               </a:rPr>
               <a:t>Payback in months, not years</a:t>
             </a:r>
-            <a:endParaRPr lang="en-US" sz="2800" dirty="0"/>
+            <a:endParaRPr lang="en-US" sz="2800"/>
           </a:p>
         </p:txBody>
       </p:sp>
@@ -5654,7 +5809,7 @@
               <a:buNone/>
             </a:pPr>
             <a:r>
-              <a:rPr lang="en-US" sz="1450" dirty="0">
+              <a:rPr lang="en-US" sz="1450">
                 <a:solidFill>
                   <a:srgbClr val="717171"/>
                 </a:solidFill>
@@ -5664,7 +5819,7 @@
               </a:rPr>
               <a:t>Adoption sensitivity on the $1.17M floor and the incremental cost. Even 15% adoption clears 300% ROI.</a:t>
             </a:r>
-            <a:endParaRPr lang="en-US" sz="1450" dirty="0"/>
+            <a:endParaRPr lang="en-US" sz="1450"/>
           </a:p>
         </p:txBody>
       </p:sp>
@@ -5749,7 +5904,7 @@
               <a:buNone/>
             </a:pPr>
             <a:r>
-              <a:rPr lang="en-US" sz="950" b="1" kern="0" spc="100" dirty="0">
+              <a:rPr lang="en-US" sz="950" b="1" kern="0" spc="100">
                 <a:solidFill>
                   <a:srgbClr val="9AA0A6"/>
                 </a:solidFill>
@@ -5760,7 +5915,7 @@
               <a:t>PRESENTS  </a:t>
             </a:r>
             <a:r>
-              <a:rPr lang="en-US" sz="950" b="1" dirty="0">
+              <a:rPr lang="en-US" sz="950" b="1">
                 <a:solidFill>
                   <a:srgbClr val="222222"/>
                 </a:solidFill>
@@ -5770,7 +5925,7 @@
               </a:rPr>
               <a:t>Francois</a:t>
             </a:r>
-            <a:endParaRPr lang="en-US" sz="950" dirty="0"/>
+            <a:endParaRPr lang="en-US" sz="950"/>
           </a:p>
         </p:txBody>
       </p:sp>
@@ -5877,7 +6032,7 @@
               <a:buNone/>
             </a:pPr>
             <a:r>
-              <a:rPr lang="en-US" sz="900" b="1" dirty="0">
+              <a:rPr lang="en-US" sz="900" b="1">
                 <a:solidFill>
                   <a:srgbClr val="9AA0A6"/>
                 </a:solidFill>
@@ -5887,7 +6042,7 @@
               </a:rPr>
               <a:t>12</a:t>
             </a:r>
-            <a:endParaRPr lang="en-US" sz="900" dirty="0"/>
+            <a:endParaRPr lang="en-US" sz="900"/>
           </a:p>
         </p:txBody>
       </p:sp>
@@ -5953,7 +6108,7 @@
                         <a:buNone/>
                       </a:pPr>
                       <a:r>
-                        <a:rPr lang="en-US" sz="1200" b="1" dirty="0">
+                        <a:rPr lang="en-US" sz="1200" b="1">
                           <a:solidFill>
                             <a:srgbClr val="FFFFFF"/>
                           </a:solidFill>
@@ -5963,7 +6118,7 @@
                         </a:rPr>
                         <a:t>Adoption</a:t>
                       </a:r>
-                      <a:endParaRPr lang="en-US" sz="1200" dirty="0">
+                      <a:endParaRPr lang="en-US" sz="1200">
                         <a:latin typeface="Poppins" charset="0"/>
                         <a:ea typeface="Poppins" charset="0"/>
                         <a:cs typeface="Poppins" charset="0"/>
@@ -6021,7 +6176,7 @@
                         <a:buNone/>
                       </a:pPr>
                       <a:r>
-                        <a:rPr lang="en-US" sz="1200" b="1" dirty="0">
+                        <a:rPr lang="en-US" sz="1200" b="1">
                           <a:solidFill>
                             <a:srgbClr val="FFFFFF"/>
                           </a:solidFill>
@@ -6031,7 +6186,7 @@
                         </a:rPr>
                         <a:t>Airbnb fee / yr</a:t>
                       </a:r>
-                      <a:endParaRPr lang="en-US" sz="1200" dirty="0">
+                      <a:endParaRPr lang="en-US" sz="1200">
                         <a:latin typeface="Poppins" charset="0"/>
                         <a:ea typeface="Poppins" charset="0"/>
                         <a:cs typeface="Poppins" charset="0"/>
@@ -6089,7 +6244,7 @@
                         <a:buNone/>
                       </a:pPr>
                       <a:r>
-                        <a:rPr lang="en-US" sz="1200" b="1" dirty="0">
+                        <a:rPr lang="en-US" sz="1200" b="1">
                           <a:solidFill>
                             <a:srgbClr val="FFFFFF"/>
                           </a:solidFill>
@@ -6099,7 +6254,7 @@
                         </a:rPr>
                         <a:t>Payback</a:t>
                       </a:r>
-                      <a:endParaRPr lang="en-US" sz="1200" dirty="0">
+                      <a:endParaRPr lang="en-US" sz="1200">
                         <a:latin typeface="Poppins" charset="0"/>
                         <a:ea typeface="Poppins" charset="0"/>
                         <a:cs typeface="Poppins" charset="0"/>
@@ -6157,7 +6312,7 @@
                         <a:buNone/>
                       </a:pPr>
                       <a:r>
-                        <a:rPr lang="en-US" sz="1200" b="1" dirty="0">
+                        <a:rPr lang="en-US" sz="1200" b="1">
                           <a:solidFill>
                             <a:srgbClr val="FFFFFF"/>
                           </a:solidFill>
@@ -6167,7 +6322,7 @@
                         </a:rPr>
                         <a:t>5-yr ROI</a:t>
                       </a:r>
-                      <a:endParaRPr lang="en-US" sz="1200" dirty="0">
+                      <a:endParaRPr lang="en-US" sz="1200">
                         <a:latin typeface="Poppins" charset="0"/>
                         <a:ea typeface="Poppins" charset="0"/>
                         <a:cs typeface="Poppins" charset="0"/>
@@ -6232,7 +6387,7 @@
                         <a:buNone/>
                       </a:pPr>
                       <a:r>
-                        <a:rPr lang="en-US" sz="1200" b="1" dirty="0">
+                        <a:rPr lang="en-US" sz="1200" b="1">
                           <a:solidFill>
                             <a:srgbClr val="222222"/>
                           </a:solidFill>
@@ -6242,7 +6397,7 @@
                         </a:rPr>
                         <a:t>15%</a:t>
                       </a:r>
-                      <a:endParaRPr lang="en-US" sz="1200" dirty="0">
+                      <a:endParaRPr lang="en-US" sz="1200">
                         <a:latin typeface="Poppins" charset="0"/>
                         <a:ea typeface="Poppins" charset="0"/>
                         <a:cs typeface="Poppins" charset="0"/>
@@ -6300,7 +6455,7 @@
                         <a:buNone/>
                       </a:pPr>
                       <a:r>
-                        <a:rPr lang="en-US" sz="1200" dirty="0">
+                        <a:rPr lang="en-US" sz="1200">
                           <a:solidFill>
                             <a:srgbClr val="4A4A4A"/>
                           </a:solidFill>
@@ -6310,7 +6465,7 @@
                         </a:rPr>
                         <a:t>$176K</a:t>
                       </a:r>
-                      <a:endParaRPr lang="en-US" sz="1200" dirty="0">
+                      <a:endParaRPr lang="en-US" sz="1200">
                         <a:latin typeface="Poppins" charset="0"/>
                         <a:ea typeface="Poppins" charset="0"/>
                         <a:cs typeface="Poppins" charset="0"/>
@@ -6368,7 +6523,7 @@
                         <a:buNone/>
                       </a:pPr>
                       <a:r>
-                        <a:rPr lang="en-US" sz="1200" dirty="0">
+                        <a:rPr lang="en-US" sz="1200">
                           <a:solidFill>
                             <a:srgbClr val="4A4A4A"/>
                           </a:solidFill>
@@ -6378,7 +6533,7 @@
                         </a:rPr>
                         <a:t>~6 mo</a:t>
                       </a:r>
-                      <a:endParaRPr lang="en-US" sz="1200" dirty="0">
+                      <a:endParaRPr lang="en-US" sz="1200">
                         <a:latin typeface="Poppins" charset="0"/>
                         <a:ea typeface="Poppins" charset="0"/>
                         <a:cs typeface="Poppins" charset="0"/>
@@ -6436,7 +6591,7 @@
                         <a:buNone/>
                       </a:pPr>
                       <a:r>
-                        <a:rPr lang="en-US" sz="1200" b="1" dirty="0">
+                        <a:rPr lang="en-US" sz="1200" b="1">
                           <a:solidFill>
                             <a:srgbClr val="4A4A4A"/>
                           </a:solidFill>
@@ -6446,7 +6601,7 @@
                         </a:rPr>
                         <a:t>308%</a:t>
                       </a:r>
-                      <a:endParaRPr lang="en-US" sz="1200" dirty="0">
+                      <a:endParaRPr lang="en-US" sz="1200">
                         <a:latin typeface="Poppins" charset="0"/>
                         <a:ea typeface="Poppins" charset="0"/>
                         <a:cs typeface="Poppins" charset="0"/>
@@ -6511,7 +6666,7 @@
                         <a:buNone/>
                       </a:pPr>
                       <a:r>
-                        <a:rPr lang="en-US" sz="1200" b="1" dirty="0">
+                        <a:rPr lang="en-US" sz="1200" b="1">
                           <a:solidFill>
                             <a:srgbClr val="222222"/>
                           </a:solidFill>
@@ -6521,7 +6676,7 @@
                         </a:rPr>
                         <a:t>25%</a:t>
                       </a:r>
-                      <a:endParaRPr lang="en-US" sz="1200" dirty="0">
+                      <a:endParaRPr lang="en-US" sz="1200">
                         <a:latin typeface="Poppins" charset="0"/>
                         <a:ea typeface="Poppins" charset="0"/>
                         <a:cs typeface="Poppins" charset="0"/>
@@ -6579,7 +6734,7 @@
                         <a:buNone/>
                       </a:pPr>
                       <a:r>
-                        <a:rPr lang="en-US" sz="1200" dirty="0">
+                        <a:rPr lang="en-US" sz="1200">
                           <a:solidFill>
                             <a:srgbClr val="4A4A4A"/>
                           </a:solidFill>
@@ -6589,7 +6744,7 @@
                         </a:rPr>
                         <a:t>$292K</a:t>
                       </a:r>
-                      <a:endParaRPr lang="en-US" sz="1200" dirty="0">
+                      <a:endParaRPr lang="en-US" sz="1200">
                         <a:latin typeface="Poppins" charset="0"/>
                         <a:ea typeface="Poppins" charset="0"/>
                         <a:cs typeface="Poppins" charset="0"/>
@@ -6647,7 +6802,7 @@
                         <a:buNone/>
                       </a:pPr>
                       <a:r>
-                        <a:rPr lang="en-US" sz="1200" dirty="0">
+                        <a:rPr lang="en-US" sz="1200">
                           <a:solidFill>
                             <a:srgbClr val="4A4A4A"/>
                           </a:solidFill>
@@ -6657,7 +6812,7 @@
                         </a:rPr>
                         <a:t>~4 mo</a:t>
                       </a:r>
-                      <a:endParaRPr lang="en-US" sz="1200" dirty="0">
+                      <a:endParaRPr lang="en-US" sz="1200">
                         <a:latin typeface="Poppins" charset="0"/>
                         <a:ea typeface="Poppins" charset="0"/>
                         <a:cs typeface="Poppins" charset="0"/>
@@ -6715,7 +6870,7 @@
                         <a:buNone/>
                       </a:pPr>
                       <a:r>
-                        <a:rPr lang="en-US" sz="1200" b="1" dirty="0">
+                        <a:rPr lang="en-US" sz="1200" b="1">
                           <a:solidFill>
                             <a:srgbClr val="4A4A4A"/>
                           </a:solidFill>
@@ -6725,7 +6880,7 @@
                         </a:rPr>
                         <a:t>580%</a:t>
                       </a:r>
-                      <a:endParaRPr lang="en-US" sz="1200" dirty="0">
+                      <a:endParaRPr lang="en-US" sz="1200">
                         <a:latin typeface="Poppins" charset="0"/>
                         <a:ea typeface="Poppins" charset="0"/>
                         <a:cs typeface="Poppins" charset="0"/>
@@ -6790,7 +6945,7 @@
                         <a:buNone/>
                       </a:pPr>
                       <a:r>
-                        <a:rPr lang="en-US" sz="1200" b="1" dirty="0">
+                        <a:rPr lang="en-US" sz="1200" b="1">
                           <a:solidFill>
                             <a:srgbClr val="222222"/>
                           </a:solidFill>
@@ -6800,7 +6955,7 @@
                         </a:rPr>
                         <a:t>35%</a:t>
                       </a:r>
-                      <a:endParaRPr lang="en-US" sz="1200" dirty="0">
+                      <a:endParaRPr lang="en-US" sz="1200">
                         <a:latin typeface="Poppins" charset="0"/>
                         <a:ea typeface="Poppins" charset="0"/>
                         <a:cs typeface="Poppins" charset="0"/>
@@ -6858,7 +7013,7 @@
                         <a:buNone/>
                       </a:pPr>
                       <a:r>
-                        <a:rPr lang="en-US" sz="1200" dirty="0">
+                        <a:rPr lang="en-US" sz="1200">
                           <a:solidFill>
                             <a:srgbClr val="4A4A4A"/>
                           </a:solidFill>
@@ -6868,7 +7023,7 @@
                         </a:rPr>
                         <a:t>$410K</a:t>
                       </a:r>
-                      <a:endParaRPr lang="en-US" sz="1200" dirty="0">
+                      <a:endParaRPr lang="en-US" sz="1200">
                         <a:latin typeface="Poppins" charset="0"/>
                         <a:ea typeface="Poppins" charset="0"/>
                         <a:cs typeface="Poppins" charset="0"/>
@@ -6926,7 +7081,7 @@
                         <a:buNone/>
                       </a:pPr>
                       <a:r>
-                        <a:rPr lang="en-US" sz="1200" dirty="0">
+                        <a:rPr lang="en-US" sz="1200">
                           <a:solidFill>
                             <a:srgbClr val="4A4A4A"/>
                           </a:solidFill>
@@ -6936,7 +7091,7 @@
                         </a:rPr>
                         <a:t>~3 mo</a:t>
                       </a:r>
-                      <a:endParaRPr lang="en-US" sz="1200" dirty="0">
+                      <a:endParaRPr lang="en-US" sz="1200">
                         <a:latin typeface="Poppins" charset="0"/>
                         <a:ea typeface="Poppins" charset="0"/>
                         <a:cs typeface="Poppins" charset="0"/>
@@ -6994,7 +7149,7 @@
                         <a:buNone/>
                       </a:pPr>
                       <a:r>
-                        <a:rPr lang="en-US" sz="1200" b="1" dirty="0">
+                        <a:rPr lang="en-US" sz="1200" b="1">
                           <a:solidFill>
                             <a:srgbClr val="4A4A4A"/>
                           </a:solidFill>
@@ -7004,7 +7159,7 @@
                         </a:rPr>
                         <a:t>852%</a:t>
                       </a:r>
-                      <a:endParaRPr lang="en-US" sz="1200" dirty="0">
+                      <a:endParaRPr lang="en-US" sz="1200">
                         <a:latin typeface="Poppins" charset="0"/>
                         <a:ea typeface="Poppins" charset="0"/>
                         <a:cs typeface="Poppins" charset="0"/>
@@ -7069,7 +7224,7 @@
                         <a:buNone/>
                       </a:pPr>
                       <a:r>
-                        <a:rPr lang="en-US" sz="1200" b="1" dirty="0">
+                        <a:rPr lang="en-US" sz="1200" b="1">
                           <a:solidFill>
                             <a:srgbClr val="222222"/>
                           </a:solidFill>
@@ -7079,7 +7234,7 @@
                         </a:rPr>
                         <a:t>50%</a:t>
                       </a:r>
-                      <a:endParaRPr lang="en-US" sz="1200" dirty="0">
+                      <a:endParaRPr lang="en-US" sz="1200">
                         <a:latin typeface="Poppins" charset="0"/>
                         <a:ea typeface="Poppins" charset="0"/>
                         <a:cs typeface="Poppins" charset="0"/>
@@ -7137,7 +7292,7 @@
                         <a:buNone/>
                       </a:pPr>
                       <a:r>
-                        <a:rPr lang="en-US" sz="1200" dirty="0">
+                        <a:rPr lang="en-US" sz="1200">
                           <a:solidFill>
                             <a:srgbClr val="4A4A4A"/>
                           </a:solidFill>
@@ -7147,7 +7302,7 @@
                         </a:rPr>
                         <a:t>$585K</a:t>
                       </a:r>
-                      <a:endParaRPr lang="en-US" sz="1200" dirty="0">
+                      <a:endParaRPr lang="en-US" sz="1200">
                         <a:latin typeface="Poppins" charset="0"/>
                         <a:ea typeface="Poppins" charset="0"/>
                         <a:cs typeface="Poppins" charset="0"/>
@@ -7205,7 +7360,7 @@
                         <a:buNone/>
                       </a:pPr>
                       <a:r>
-                        <a:rPr lang="en-US" sz="1200" dirty="0">
+                        <a:rPr lang="en-US" sz="1200">
                           <a:solidFill>
                             <a:srgbClr val="4A4A4A"/>
                           </a:solidFill>
@@ -7215,7 +7370,7 @@
                         </a:rPr>
                         <a:t>~2 mo</a:t>
                       </a:r>
-                      <a:endParaRPr lang="en-US" sz="1200" dirty="0">
+                      <a:endParaRPr lang="en-US" sz="1200">
                         <a:latin typeface="Poppins" charset="0"/>
                         <a:ea typeface="Poppins" charset="0"/>
                         <a:cs typeface="Poppins" charset="0"/>
@@ -7273,7 +7428,7 @@
                         <a:buNone/>
                       </a:pPr>
                       <a:r>
-                        <a:rPr lang="en-US" sz="1200" b="1" dirty="0">
+                        <a:rPr lang="en-US" sz="1200" b="1">
                           <a:solidFill>
                             <a:srgbClr val="4A4A4A"/>
                           </a:solidFill>
@@ -7283,7 +7438,7 @@
                         </a:rPr>
                         <a:t>1,260%</a:t>
                       </a:r>
-                      <a:endParaRPr lang="en-US" sz="1200" dirty="0">
+                      <a:endParaRPr lang="en-US" sz="1200">
                         <a:latin typeface="Poppins" charset="0"/>
                         <a:ea typeface="Poppins" charset="0"/>
                         <a:cs typeface="Poppins" charset="0"/>
@@ -7348,7 +7503,7 @@
                         <a:buNone/>
                       </a:pPr>
                       <a:r>
-                        <a:rPr lang="en-US" sz="1200" b="1" dirty="0">
+                        <a:rPr lang="en-US" sz="1200" b="1">
                           <a:solidFill>
                             <a:srgbClr val="222222"/>
                           </a:solidFill>
@@ -7358,7 +7513,7 @@
                         </a:rPr>
                         <a:t>75%</a:t>
                       </a:r>
-                      <a:endParaRPr lang="en-US" sz="1200" dirty="0">
+                      <a:endParaRPr lang="en-US" sz="1200">
                         <a:latin typeface="Poppins" charset="0"/>
                         <a:ea typeface="Poppins" charset="0"/>
                         <a:cs typeface="Poppins" charset="0"/>
@@ -7416,7 +7571,7 @@
                         <a:buNone/>
                       </a:pPr>
                       <a:r>
-                        <a:rPr lang="en-US" sz="1200" dirty="0">
+                        <a:rPr lang="en-US" sz="1200">
                           <a:solidFill>
                             <a:srgbClr val="4A4A4A"/>
                           </a:solidFill>
@@ -7426,7 +7581,7 @@
                         </a:rPr>
                         <a:t>$878K</a:t>
                       </a:r>
-                      <a:endParaRPr lang="en-US" sz="1200" dirty="0">
+                      <a:endParaRPr lang="en-US" sz="1200">
                         <a:latin typeface="Poppins" charset="0"/>
                         <a:ea typeface="Poppins" charset="0"/>
                         <a:cs typeface="Poppins" charset="0"/>
@@ -7484,7 +7639,7 @@
                         <a:buNone/>
                       </a:pPr>
                       <a:r>
-                        <a:rPr lang="en-US" sz="1200" dirty="0">
+                        <a:rPr lang="en-US" sz="1200">
                           <a:solidFill>
                             <a:srgbClr val="4A4A4A"/>
                           </a:solidFill>
@@ -7494,7 +7649,7 @@
                         </a:rPr>
                         <a:t>~1 mo</a:t>
                       </a:r>
-                      <a:endParaRPr lang="en-US" sz="1200" dirty="0">
+                      <a:endParaRPr lang="en-US" sz="1200">
                         <a:latin typeface="Poppins" charset="0"/>
                         <a:ea typeface="Poppins" charset="0"/>
                         <a:cs typeface="Poppins" charset="0"/>
@@ -7552,7 +7707,7 @@
                         <a:buNone/>
                       </a:pPr>
                       <a:r>
-                        <a:rPr lang="en-US" sz="1200" b="1" dirty="0">
+                        <a:rPr lang="en-US" sz="1200" b="1">
                           <a:solidFill>
                             <a:srgbClr val="4A4A4A"/>
                           </a:solidFill>
@@ -7562,7 +7717,7 @@
                         </a:rPr>
                         <a:t>1,941%</a:t>
                       </a:r>
-                      <a:endParaRPr lang="en-US" sz="1200" dirty="0">
+                      <a:endParaRPr lang="en-US" sz="1200">
                         <a:latin typeface="Poppins" charset="0"/>
                         <a:ea typeface="Poppins" charset="0"/>
                         <a:cs typeface="Poppins" charset="0"/>
@@ -7646,7 +7801,7 @@
               <a:buNone/>
             </a:pPr>
             <a:r>
-              <a:rPr lang="en-US" sz="1050" i="1" dirty="0">
+              <a:rPr lang="en-US" sz="1050" i="1">
                 <a:solidFill>
                   <a:srgbClr val="9AA0A6"/>
                 </a:solidFill>
@@ -7656,7 +7811,7 @@
               </a:rPr>
               <a:t>We headline the 25% and 35% rows: the conservative and expected cases.</a:t>
             </a:r>
-            <a:endParaRPr lang="en-US" sz="1050" dirty="0"/>
+            <a:endParaRPr lang="en-US" sz="1050"/>
           </a:p>
         </p:txBody>
       </p:sp>
@@ -7777,7 +7932,7 @@
               <a:buNone/>
             </a:pPr>
             <a:r>
-              <a:rPr lang="en-US" sz="1400" b="1" dirty="0">
+              <a:rPr lang="en-US" sz="1400" b="1">
                 <a:solidFill>
                   <a:srgbClr val="222222"/>
                 </a:solidFill>
@@ -7787,7 +7942,7 @@
               </a:rPr>
               <a:t>Honest about time value</a:t>
             </a:r>
-            <a:endParaRPr lang="en-US" sz="1400" dirty="0"/>
+            <a:endParaRPr lang="en-US" sz="1400"/>
           </a:p>
         </p:txBody>
       </p:sp>
@@ -7819,7 +7974,7 @@
               <a:buNone/>
             </a:pPr>
             <a:r>
-              <a:rPr lang="en-US" sz="1150" b="1" dirty="0">
+              <a:rPr lang="en-US" sz="1150" b="1">
                 <a:solidFill>
                   <a:srgbClr val="FF385C"/>
                 </a:solidFill>
@@ -7830,7 +7985,7 @@
               <a:t>Net-positive in Year 1</a:t>
             </a:r>
             <a:r>
-              <a:rPr lang="en-US" sz="1150" dirty="0">
+              <a:rPr lang="en-US" sz="1150">
                 <a:solidFill>
                   <a:srgbClr val="4A4A4A"/>
                 </a:solidFill>
@@ -7842,7 +7997,7 @@
 5-year net: </a:t>
             </a:r>
             <a:r>
-              <a:rPr lang="en-US" sz="1150" b="1" dirty="0">
+              <a:rPr lang="en-US" sz="1150" b="1">
                 <a:solidFill>
                   <a:srgbClr val="222222"/>
                 </a:solidFill>
@@ -7853,7 +8008,7 @@
               <a:t>$5.63M nominal → $4.26M NPV</a:t>
             </a:r>
             <a:r>
-              <a:rPr lang="en-US" sz="1150" dirty="0">
+              <a:rPr lang="en-US" sz="1150">
                 <a:solidFill>
                   <a:srgbClr val="4A4A4A"/>
                 </a:solidFill>
@@ -7865,7 +8020,7 @@
 </a:t>
             </a:r>
             <a:r>
-              <a:rPr lang="en-US" sz="1150" dirty="0">
+              <a:rPr lang="en-US" sz="1150">
                 <a:solidFill>
                   <a:srgbClr val="717171"/>
                 </a:solidFill>
@@ -7875,7 +8030,7 @@
               </a:rPr>
               <a:t>We discount at 10% and show both, rather than present nominal sums under an NPV banner.</a:t>
             </a:r>
-            <a:endParaRPr lang="en-US" sz="1150" dirty="0"/>
+            <a:endParaRPr lang="en-US" sz="1150"/>
           </a:p>
         </p:txBody>
       </p:sp>
@@ -7907,7 +8062,7 @@
               <a:buNone/>
             </a:pPr>
             <a:r>
-              <a:rPr lang="en-US" sz="1050" b="1" dirty="0">
+              <a:rPr lang="en-US" sz="1050" b="1">
                 <a:solidFill>
                   <a:srgbClr val="222222"/>
                 </a:solidFill>
@@ -7918,7 +8073,7 @@
               <a:t>And on the overpriced side: </a:t>
             </a:r>
             <a:r>
-              <a:rPr lang="en-US" sz="1050" dirty="0">
+              <a:rPr lang="en-US" sz="1050">
                 <a:solidFill>
                   <a:srgbClr val="4A4A4A"/>
                 </a:solidFill>
@@ -7928,7 +8083,7 @@
               </a:rPr>
               <a:t>repricing unlocks ~77,606 booked nights/yr. Near revenue-neutral for hosts, but real marketplace liquidity and host retention for Airbnb (already inside the floor).</a:t>
             </a:r>
-            <a:endParaRPr lang="en-US" sz="1050" dirty="0"/>
+            <a:endParaRPr lang="en-US" sz="1050"/>
           </a:p>
         </p:txBody>
       </p:sp>
@@ -7990,7 +8145,7 @@
               <a:buNone/>
             </a:pPr>
             <a:r>
-              <a:rPr lang="en-US" sz="1200" b="1" kern="0" spc="200" dirty="0">
+              <a:rPr lang="en-US" sz="1200" b="1" kern="0" spc="200">
                 <a:solidFill>
                   <a:srgbClr val="FF385C"/>
                 </a:solidFill>
@@ -8000,7 +8155,7 @@
               </a:rPr>
               <a:t>12 · WHAT WE'D DO WITH MORE</a:t>
             </a:r>
-            <a:endParaRPr lang="en-US" sz="1200" dirty="0"/>
+            <a:endParaRPr lang="en-US" sz="1200"/>
           </a:p>
         </p:txBody>
       </p:sp>
@@ -8032,7 +8187,7 @@
               <a:buNone/>
             </a:pPr>
             <a:r>
-              <a:rPr lang="en-US" sz="2800" b="1" dirty="0">
+              <a:rPr lang="en-US" sz="2800" b="1">
                 <a:solidFill>
                   <a:srgbClr val="222222"/>
                 </a:solidFill>
@@ -8042,7 +8197,7 @@
               </a:rPr>
               <a:t>The number is a floor. Here is what lifts it.</a:t>
             </a:r>
-            <a:endParaRPr lang="en-US" sz="2800" dirty="0"/>
+            <a:endParaRPr lang="en-US" sz="2800"/>
           </a:p>
         </p:txBody>
       </p:sp>
@@ -8074,7 +8229,7 @@
               <a:buNone/>
             </a:pPr>
             <a:r>
-              <a:rPr lang="en-US" sz="1450" dirty="0">
+              <a:rPr lang="en-US" sz="1450">
                 <a:solidFill>
                   <a:srgbClr val="717171"/>
                 </a:solidFill>
@@ -8084,7 +8239,7 @@
               </a:rPr>
               <a:t>Every unmeasured quantity was resolved against us. Four asks would let us prove how much bigger this is.</a:t>
             </a:r>
-            <a:endParaRPr lang="en-US" sz="1450" dirty="0"/>
+            <a:endParaRPr lang="en-US" sz="1450"/>
           </a:p>
         </p:txBody>
       </p:sp>
@@ -8169,7 +8324,7 @@
               <a:buNone/>
             </a:pPr>
             <a:r>
-              <a:rPr lang="en-US" sz="950" b="1" kern="0" spc="100" dirty="0">
+              <a:rPr lang="en-US" sz="950" b="1" kern="0" spc="100">
                 <a:solidFill>
                   <a:srgbClr val="9AA0A6"/>
                 </a:solidFill>
@@ -8180,7 +8335,7 @@
               <a:t>PRESENTS  </a:t>
             </a:r>
             <a:r>
-              <a:rPr lang="en-US" sz="950" b="1" dirty="0">
+              <a:rPr lang="en-US" sz="950" b="1">
                 <a:solidFill>
                   <a:srgbClr val="222222"/>
                 </a:solidFill>
@@ -8190,7 +8345,7 @@
               </a:rPr>
               <a:t>Francois</a:t>
             </a:r>
-            <a:endParaRPr lang="en-US" sz="950" dirty="0"/>
+            <a:endParaRPr lang="en-US" sz="950"/>
           </a:p>
         </p:txBody>
       </p:sp>
@@ -8297,7 +8452,7 @@
               <a:buNone/>
             </a:pPr>
             <a:r>
-              <a:rPr lang="en-US" sz="900" b="1" dirty="0">
+              <a:rPr lang="en-US" sz="900" b="1">
                 <a:solidFill>
                   <a:srgbClr val="9AA0A6"/>
                 </a:solidFill>
@@ -8307,7 +8462,7 @@
               </a:rPr>
               <a:t>13</a:t>
             </a:r>
-            <a:endParaRPr lang="en-US" sz="900" dirty="0"/>
+            <a:endParaRPr lang="en-US" sz="900"/>
           </a:p>
         </p:txBody>
       </p:sp>
@@ -8431,7 +8586,7 @@
               <a:buNone/>
             </a:pPr>
             <a:r>
-              <a:rPr lang="en-US" sz="1400" b="1" dirty="0">
+              <a:rPr lang="en-US" sz="1400" b="1">
                 <a:solidFill>
                   <a:srgbClr val="222222"/>
                 </a:solidFill>
@@ -8441,7 +8596,7 @@
               </a:rPr>
               <a:t>Give us the full elasticity panel</a:t>
             </a:r>
-            <a:endParaRPr lang="en-US" sz="1400" dirty="0"/>
+            <a:endParaRPr lang="en-US" sz="1400"/>
           </a:p>
         </p:txBody>
       </p:sp>
@@ -8473,7 +8628,7 @@
               <a:buNone/>
             </a:pPr>
             <a:r>
-              <a:rPr lang="en-US" sz="1180" dirty="0">
+              <a:rPr lang="en-US" sz="1180">
                 <a:solidFill>
                   <a:srgbClr val="4A4A4A"/>
                 </a:solidFill>
@@ -8483,7 +8638,7 @@
               </a:rPr>
               <a:t>We proved the mechanism on 64 established short-stay listings and measured −0.92. The full panel would confirm it across every segment and review tier, and likely raises the number, since newer listings are more price-sensitive.</a:t>
             </a:r>
-            <a:endParaRPr lang="en-US" sz="1180" dirty="0"/>
+            <a:endParaRPr lang="en-US" sz="1180"/>
           </a:p>
         </p:txBody>
       </p:sp>
@@ -8607,7 +8762,7 @@
               <a:buNone/>
             </a:pPr>
             <a:r>
-              <a:rPr lang="en-US" sz="1400" b="1" dirty="0">
+              <a:rPr lang="en-US" sz="1400" b="1">
                 <a:solidFill>
                   <a:srgbClr val="222222"/>
                 </a:solidFill>
@@ -8617,7 +8772,7 @@
               </a:rPr>
               <a:t>Let us measure the monthly segment</a:t>
             </a:r>
-            <a:endParaRPr lang="en-US" sz="1400" dirty="0"/>
+            <a:endParaRPr lang="en-US" sz="1400"/>
           </a:p>
         </p:txBody>
       </p:sp>
@@ -8649,7 +8804,7 @@
               <a:buNone/>
             </a:pPr>
             <a:r>
-              <a:rPr lang="en-US" sz="1180" dirty="0">
+              <a:rPr lang="en-US" sz="1180">
                 <a:solidFill>
                   <a:srgbClr val="4A4A4A"/>
                 </a:solidFill>
@@ -8659,7 +8814,7 @@
               </a:rPr>
               <a:t>No significant price response showed up in the pilot, so we assumed none and let the full price gap flow through. With more within-listing price variation we could measure it properly instead of assuming it.</a:t>
             </a:r>
-            <a:endParaRPr lang="en-US" sz="1180" dirty="0"/>
+            <a:endParaRPr lang="en-US" sz="1180"/>
           </a:p>
         </p:txBody>
       </p:sp>
@@ -8783,7 +8938,7 @@
               <a:buNone/>
             </a:pPr>
             <a:r>
-              <a:rPr lang="en-US" sz="1400" b="1" dirty="0">
+              <a:rPr lang="en-US" sz="1400" b="1">
                 <a:solidFill>
                   <a:srgbClr val="222222"/>
                 </a:solidFill>
@@ -8793,7 +8948,7 @@
               </a:rPr>
               <a:t>Open the booking-flow data</a:t>
             </a:r>
-            <a:endParaRPr lang="en-US" sz="1400" dirty="0"/>
+            <a:endParaRPr lang="en-US" sz="1400"/>
           </a:p>
         </p:txBody>
       </p:sp>
@@ -8825,7 +8980,7 @@
               <a:buNone/>
             </a:pPr>
             <a:r>
-              <a:rPr lang="en-US" sz="1180" dirty="0">
+              <a:rPr lang="en-US" sz="1180">
                 <a:solidFill>
                   <a:srgbClr val="4A4A4A"/>
                 </a:solidFill>
@@ -8835,7 +8990,7 @@
               </a:rPr>
               <a:t>We counted zero credit for guests won back from hotels and competitors. Airbnb's own conversion data would price that, along with the churn and lifetime-value effects we can describe but not yet quantify.</a:t>
             </a:r>
-            <a:endParaRPr lang="en-US" sz="1180" dirty="0"/>
+            <a:endParaRPr lang="en-US" sz="1180"/>
           </a:p>
         </p:txBody>
       </p:sp>
@@ -8959,7 +9114,7 @@
               <a:buNone/>
             </a:pPr>
             <a:r>
-              <a:rPr lang="en-US" sz="1400" b="1" dirty="0">
+              <a:rPr lang="en-US" sz="1400" b="1">
                 <a:solidFill>
                   <a:srgbClr val="222222"/>
                 </a:solidFill>
@@ -8969,7 +9124,7 @@
               </a:rPr>
               <a:t>Then take it beyond New York</a:t>
             </a:r>
-            <a:endParaRPr lang="en-US" sz="1400" dirty="0"/>
+            <a:endParaRPr lang="en-US" sz="1400"/>
           </a:p>
         </p:txBody>
       </p:sp>
@@ -9001,7 +9156,7 @@
               <a:buNone/>
             </a:pPr>
             <a:r>
-              <a:rPr lang="en-US" sz="1180" dirty="0">
+              <a:rPr lang="en-US" sz="1180">
                 <a:solidFill>
                   <a:srgbClr val="4A4A4A"/>
                 </a:solidFill>
@@ -9011,7 +9166,7 @@
               </a:rPr>
               <a:t>Coefficients need re-fitting per market: tourism, regulation and seasonality all differ. The method transfers; these particular numbers are New York's.</a:t>
             </a:r>
-            <a:endParaRPr lang="en-US" sz="1180" dirty="0"/>
+            <a:endParaRPr lang="en-US" sz="1180"/>
           </a:p>
         </p:txBody>
       </p:sp>
@@ -9073,7 +9228,7 @@
               <a:buNone/>
             </a:pPr>
             <a:r>
-              <a:rPr lang="en-US" sz="1200" b="1" kern="0" spc="200" dirty="0">
+              <a:rPr lang="en-US" sz="1200" b="1" kern="0" spc="200">
                 <a:solidFill>
                   <a:srgbClr val="FF385C"/>
                 </a:solidFill>
@@ -9083,7 +9238,7 @@
               </a:rPr>
               <a:t>13 · RECOMMENDATIONS &amp; CLOSING</a:t>
             </a:r>
-            <a:endParaRPr lang="en-US" sz="1200" dirty="0"/>
+            <a:endParaRPr lang="en-US" sz="1200"/>
           </a:p>
         </p:txBody>
       </p:sp>
@@ -9115,7 +9270,7 @@
               <a:buNone/>
             </a:pPr>
             <a:r>
-              <a:rPr lang="en-US" sz="2800" b="1" dirty="0">
+              <a:rPr lang="en-US" sz="2800" b="1">
                 <a:solidFill>
                   <a:srgbClr val="222222"/>
                 </a:solidFill>
@@ -9125,7 +9280,7 @@
               </a:rPr>
               <a:t>Build on Smart Pricing, don't replace it</a:t>
             </a:r>
-            <a:endParaRPr lang="en-US" sz="2800" dirty="0"/>
+            <a:endParaRPr lang="en-US" sz="2800"/>
           </a:p>
         </p:txBody>
       </p:sp>
@@ -9157,7 +9312,7 @@
               <a:buNone/>
             </a:pPr>
             <a:r>
-              <a:rPr lang="en-US" sz="1450" dirty="0">
+              <a:rPr lang="en-US" sz="1450">
                 <a:solidFill>
                   <a:srgbClr val="717171"/>
                 </a:solidFill>
@@ -9167,7 +9322,7 @@
               </a:rPr>
               <a:t>The opportunity isn't another number. It's helping hosts understand, trust and act on it.</a:t>
             </a:r>
-            <a:endParaRPr lang="en-US" sz="1450" dirty="0"/>
+            <a:endParaRPr lang="en-US" sz="1450"/>
           </a:p>
         </p:txBody>
       </p:sp>
@@ -9252,7 +9407,7 @@
               <a:buNone/>
             </a:pPr>
             <a:r>
-              <a:rPr lang="en-US" sz="950" b="1" kern="0" spc="100" dirty="0">
+              <a:rPr lang="en-US" sz="950" b="1" kern="0" spc="100">
                 <a:solidFill>
                   <a:srgbClr val="9AA0A6"/>
                 </a:solidFill>
@@ -9263,7 +9418,7 @@
               <a:t>PRESENTS  </a:t>
             </a:r>
             <a:r>
-              <a:rPr lang="en-US" sz="950" b="1" dirty="0">
+              <a:rPr lang="en-US" sz="950" b="1">
                 <a:solidFill>
                   <a:srgbClr val="222222"/>
                 </a:solidFill>
@@ -9273,7 +9428,7 @@
               </a:rPr>
               <a:t>Francois</a:t>
             </a:r>
-            <a:endParaRPr lang="en-US" sz="950" dirty="0"/>
+            <a:endParaRPr lang="en-US" sz="950"/>
           </a:p>
         </p:txBody>
       </p:sp>
@@ -9380,7 +9535,7 @@
               <a:buNone/>
             </a:pPr>
             <a:r>
-              <a:rPr lang="en-US" sz="900" b="1" dirty="0">
+              <a:rPr lang="en-US" sz="900" b="1">
                 <a:solidFill>
                   <a:srgbClr val="9AA0A6"/>
                 </a:solidFill>
@@ -9390,7 +9545,7 @@
               </a:rPr>
               <a:t>14</a:t>
             </a:r>
-            <a:endParaRPr lang="en-US" sz="900" dirty="0"/>
+            <a:endParaRPr lang="en-US" sz="900"/>
           </a:p>
         </p:txBody>
       </p:sp>
@@ -9487,7 +9642,7 @@
               <a:buNone/>
             </a:pPr>
             <a:r>
-              <a:rPr lang="en-US" sz="2000" b="1" dirty="0">
+              <a:rPr lang="en-US" sz="2000" b="1">
                 <a:solidFill>
                   <a:srgbClr val="FFFFFF"/>
                 </a:solidFill>
@@ -9497,7 +9652,7 @@
               </a:rPr>
               <a:t>1</a:t>
             </a:r>
-            <a:endParaRPr lang="en-US" sz="2000" dirty="0"/>
+            <a:endParaRPr lang="en-US" sz="2000"/>
           </a:p>
         </p:txBody>
       </p:sp>
@@ -9529,7 +9684,7 @@
               <a:buNone/>
             </a:pPr>
             <a:r>
-              <a:rPr lang="en-US" sz="1350" b="1" dirty="0">
+              <a:rPr lang="en-US" sz="1350" b="1">
                 <a:solidFill>
                   <a:srgbClr val="222222"/>
                 </a:solidFill>
@@ -9539,7 +9694,7 @@
               </a:rPr>
               <a:t>Enhance, don't replace</a:t>
             </a:r>
-            <a:endParaRPr lang="en-US" sz="1350" dirty="0"/>
+            <a:endParaRPr lang="en-US" sz="1350"/>
           </a:p>
         </p:txBody>
       </p:sp>
@@ -9571,7 +9726,7 @@
               <a:buNone/>
             </a:pPr>
             <a:r>
-              <a:rPr lang="en-US" sz="1100" dirty="0">
+              <a:rPr lang="en-US" sz="1100">
                 <a:solidFill>
                   <a:srgbClr val="717171"/>
                 </a:solidFill>
@@ -9581,7 +9736,7 @@
               </a:rPr>
               <a:t>Layer explanations and comparables onto the existing Smart Pricing hosts already know.</a:t>
             </a:r>
-            <a:endParaRPr lang="en-US" sz="1100" dirty="0"/>
+            <a:endParaRPr lang="en-US" sz="1100"/>
           </a:p>
         </p:txBody>
       </p:sp>
@@ -9678,7 +9833,7 @@
               <a:buNone/>
             </a:pPr>
             <a:r>
-              <a:rPr lang="en-US" sz="2000" b="1" dirty="0">
+              <a:rPr lang="en-US" sz="2000" b="1">
                 <a:solidFill>
                   <a:srgbClr val="FFFFFF"/>
                 </a:solidFill>
@@ -9688,7 +9843,7 @@
               </a:rPr>
               <a:t>2</a:t>
             </a:r>
-            <a:endParaRPr lang="en-US" sz="2000" dirty="0"/>
+            <a:endParaRPr lang="en-US" sz="2000"/>
           </a:p>
         </p:txBody>
       </p:sp>
@@ -9720,7 +9875,7 @@
               <a:buNone/>
             </a:pPr>
             <a:r>
-              <a:rPr lang="en-US" sz="1350" b="1" dirty="0">
+              <a:rPr lang="en-US" sz="1350" b="1">
                 <a:solidFill>
                   <a:srgbClr val="222222"/>
                 </a:solidFill>
@@ -9730,7 +9885,7 @@
               </a:rPr>
               <a:t>Pilot in one market</a:t>
             </a:r>
-            <a:endParaRPr lang="en-US" sz="1350" dirty="0"/>
+            <a:endParaRPr lang="en-US" sz="1350"/>
           </a:p>
         </p:txBody>
       </p:sp>
@@ -9762,7 +9917,7 @@
               <a:buNone/>
             </a:pPr>
             <a:r>
-              <a:rPr lang="en-US" sz="1100" dirty="0">
+              <a:rPr lang="en-US" sz="1100">
                 <a:solidFill>
                   <a:srgbClr val="717171"/>
                 </a:solidFill>
@@ -9772,7 +9927,7 @@
               </a:rPr>
               <a:t>Measure adoption and how pricing changes move both occupancy and revenue.</a:t>
             </a:r>
-            <a:endParaRPr lang="en-US" sz="1100" dirty="0"/>
+            <a:endParaRPr lang="en-US" sz="1100"/>
           </a:p>
         </p:txBody>
       </p:sp>
@@ -9869,7 +10024,7 @@
               <a:buNone/>
             </a:pPr>
             <a:r>
-              <a:rPr lang="en-US" sz="2000" b="1" dirty="0">
+              <a:rPr lang="en-US" sz="2000" b="1">
                 <a:solidFill>
                   <a:srgbClr val="FFFFFF"/>
                 </a:solidFill>
@@ -9879,7 +10034,7 @@
               </a:rPr>
               <a:t>3</a:t>
             </a:r>
-            <a:endParaRPr lang="en-US" sz="2000" dirty="0"/>
+            <a:endParaRPr lang="en-US" sz="2000"/>
           </a:p>
         </p:txBody>
       </p:sp>
@@ -9911,7 +10066,7 @@
               <a:buNone/>
             </a:pPr>
             <a:r>
-              <a:rPr lang="en-US" sz="1350" b="1" dirty="0">
+              <a:rPr lang="en-US" sz="1350" b="1">
                 <a:solidFill>
                   <a:srgbClr val="222222"/>
                 </a:solidFill>
@@ -9921,7 +10076,7 @@
               </a:rPr>
               <a:t>Learn, then scale</a:t>
             </a:r>
-            <a:endParaRPr lang="en-US" sz="1350" dirty="0"/>
+            <a:endParaRPr lang="en-US" sz="1350"/>
           </a:p>
         </p:txBody>
       </p:sp>
@@ -9953,7 +10108,7 @@
               <a:buNone/>
             </a:pPr>
             <a:r>
-              <a:rPr lang="en-US" sz="1100" dirty="0">
+              <a:rPr lang="en-US" sz="1100">
                 <a:solidFill>
                   <a:srgbClr val="717171"/>
                 </a:solidFill>
@@ -9963,7 +10118,7 @@
               </a:rPr>
               <a:t>Use real-world results to improve the model before expanding to more cities.</a:t>
             </a:r>
-            <a:endParaRPr lang="en-US" sz="1100" dirty="0"/>
+            <a:endParaRPr lang="en-US" sz="1100"/>
           </a:p>
         </p:txBody>
       </p:sp>
@@ -10084,7 +10239,7 @@
               <a:buNone/>
             </a:pPr>
             <a:r>
-              <a:rPr lang="en-US" sz="1400" b="1" dirty="0">
+              <a:rPr lang="en-US" sz="1400" b="1">
                 <a:solidFill>
                   <a:srgbClr val="222222"/>
                 </a:solidFill>
@@ -10094,7 +10249,7 @@
               </a:rPr>
               <a:t>The bigger lesson</a:t>
             </a:r>
-            <a:endParaRPr lang="en-US" sz="1400" dirty="0"/>
+            <a:endParaRPr lang="en-US" sz="1400"/>
           </a:p>
         </p:txBody>
       </p:sp>
@@ -10126,7 +10281,7 @@
               <a:buNone/>
             </a:pPr>
             <a:r>
-              <a:rPr lang="en-US" sz="1180" dirty="0">
+              <a:rPr lang="en-US" sz="1180">
                 <a:solidFill>
                   <a:srgbClr val="4A4A4A"/>
                 </a:solidFill>
@@ -10136,7 +10291,7 @@
               </a:rPr>
               <a:t>Good analytics means more than accurate models. It means solving the right business problem and presenting insight people will actually use. This project brought together machine learning, product thinking, business strategy and data storytelling in one solution, skills that carry directly into our careers.</a:t>
             </a:r>
-            <a:endParaRPr lang="en-US" sz="1180" dirty="0"/>
+            <a:endParaRPr lang="en-US" sz="1180"/>
           </a:p>
         </p:txBody>
       </p:sp>
@@ -10194,7 +10349,7 @@
               <a:buNone/>
             </a:pPr>
             <a:r>
-              <a:rPr lang="en-US" sz="2600" b="1" dirty="0">
+              <a:rPr lang="en-US" sz="2600" b="1">
                 <a:solidFill>
                   <a:srgbClr val="FFFFFF"/>
                 </a:solidFill>
@@ -10204,7 +10359,7 @@
               </a:rPr>
               <a:t>Thank you</a:t>
             </a:r>
-            <a:endParaRPr lang="en-US" sz="2600" dirty="0"/>
+            <a:endParaRPr lang="en-US" sz="2600"/>
           </a:p>
         </p:txBody>
       </p:sp>
@@ -10233,7 +10388,7 @@
               <a:buNone/>
             </a:pPr>
             <a:r>
-              <a:rPr lang="en-US" sz="1250" dirty="0">
+              <a:rPr lang="en-US" sz="1250">
                 <a:solidFill>
                   <a:srgbClr val="FFFFFF"/>
                 </a:solidFill>
@@ -10243,7 +10398,7 @@
               </a:rPr>
               <a:t>We'd be happy to answer any questions.</a:t>
             </a:r>
-            <a:endParaRPr lang="en-US" sz="1250" dirty="0"/>
+            <a:endParaRPr lang="en-US" sz="1250"/>
           </a:p>
         </p:txBody>
       </p:sp>
@@ -10272,7 +10427,7 @@
               <a:buNone/>
             </a:pPr>
             <a:r>
-              <a:rPr lang="en-US" sz="1000" b="1" dirty="0">
+              <a:rPr lang="en-US" sz="1000" b="1">
                 <a:solidFill>
                   <a:srgbClr val="FFFFFF"/>
                 </a:solidFill>
@@ -10282,7 +10437,7 @@
               </a:rPr>
               <a:t>GitHub: mkdn007/Cornell-Airbnb-Capstone</a:t>
             </a:r>
-            <a:endParaRPr lang="en-US" sz="1000" dirty="0"/>
+            <a:endParaRPr lang="en-US" sz="1000"/>
           </a:p>
         </p:txBody>
       </p:sp>
@@ -10474,7 +10629,7 @@
               <a:buNone/>
             </a:pPr>
             <a:r>
-              <a:rPr lang="en-US" sz="6000" b="1" dirty="0">
+              <a:rPr lang="en-US" sz="6000" b="1">
                 <a:solidFill>
                   <a:srgbClr val="FFFFFF"/>
                 </a:solidFill>
@@ -10484,7 +10639,7 @@
               </a:rPr>
               <a:t>BACKUP</a:t>
             </a:r>
-            <a:endParaRPr lang="en-US" sz="6000" dirty="0"/>
+            <a:endParaRPr lang="en-US" sz="6000"/>
           </a:p>
         </p:txBody>
       </p:sp>
@@ -10513,7 +10668,7 @@
               <a:buNone/>
             </a:pPr>
             <a:r>
-              <a:rPr lang="en-US" sz="1700" dirty="0">
+              <a:rPr lang="en-US" sz="1700">
                 <a:solidFill>
                   <a:srgbClr val="FFFFFF">
                     <a:alpha val="92000"/>
@@ -10525,7 +10680,7 @@
               </a:rPr>
               <a:t>Not presented; held in reserve to answer questions. The full technical write-up lives in the appendix document.</a:t>
             </a:r>
-            <a:endParaRPr lang="en-US" sz="1700" dirty="0"/>
+            <a:endParaRPr lang="en-US" sz="1700"/>
           </a:p>
         </p:txBody>
       </p:sp>
@@ -10585,7 +10740,7 @@
               <a:buNone/>
             </a:pPr>
             <a:r>
-              <a:rPr lang="en-US" sz="1100" b="1" dirty="0">
+              <a:rPr lang="en-US" sz="1100" b="1">
                 <a:solidFill>
                   <a:srgbClr val="FFFFFF"/>
                 </a:solidFill>
@@ -10595,7 +10750,7 @@
               </a:rPr>
               <a:t>B1  Model bake-off</a:t>
             </a:r>
-            <a:endParaRPr lang="en-US" sz="1100" dirty="0"/>
+            <a:endParaRPr lang="en-US" sz="1100"/>
           </a:p>
         </p:txBody>
       </p:sp>
@@ -10655,7 +10810,7 @@
               <a:buNone/>
             </a:pPr>
             <a:r>
-              <a:rPr lang="en-US" sz="1100" b="1" dirty="0">
+              <a:rPr lang="en-US" sz="1100" b="1">
                 <a:solidFill>
                   <a:srgbClr val="FFFFFF"/>
                 </a:solidFill>
@@ -10665,7 +10820,7 @@
               </a:rPr>
               <a:t>B2  How the $7.6M is built</a:t>
             </a:r>
-            <a:endParaRPr lang="en-US" sz="1100" dirty="0"/>
+            <a:endParaRPr lang="en-US" sz="1100"/>
           </a:p>
         </p:txBody>
       </p:sp>
@@ -10725,7 +10880,7 @@
               <a:buNone/>
             </a:pPr>
             <a:r>
-              <a:rPr lang="en-US" sz="1100" b="1" dirty="0">
+              <a:rPr lang="en-US" sz="1100" b="1">
                 <a:solidFill>
                   <a:srgbClr val="FFFFFF"/>
                 </a:solidFill>
@@ -10735,7 +10890,7 @@
               </a:rPr>
               <a:t>B3  Why we split at 142 reviews</a:t>
             </a:r>
-            <a:endParaRPr lang="en-US" sz="1100" dirty="0"/>
+            <a:endParaRPr lang="en-US" sz="1100"/>
           </a:p>
         </p:txBody>
       </p:sp>
@@ -10795,7 +10950,7 @@
               <a:buNone/>
             </a:pPr>
             <a:r>
-              <a:rPr lang="en-US" sz="1100" b="1" dirty="0">
+              <a:rPr lang="en-US" sz="1100" b="1">
                 <a:solidFill>
                   <a:srgbClr val="FFFFFF"/>
                 </a:solidFill>
@@ -10805,7 +10960,7 @@
               </a:rPr>
               <a:t>B4  Revenue by confidence</a:t>
             </a:r>
-            <a:endParaRPr lang="en-US" sz="1100" dirty="0"/>
+            <a:endParaRPr lang="en-US" sz="1100"/>
           </a:p>
         </p:txBody>
       </p:sp>
@@ -10865,7 +11020,7 @@
               <a:buNone/>
             </a:pPr>
             <a:r>
-              <a:rPr lang="en-US" sz="1100" b="1" dirty="0">
+              <a:rPr lang="en-US" sz="1100" b="1">
                 <a:solidFill>
                   <a:srgbClr val="FFFFFF"/>
                 </a:solidFill>
@@ -10875,7 +11030,7 @@
               </a:rPr>
               <a:t>B5  Validation &amp; methodology</a:t>
             </a:r>
-            <a:endParaRPr lang="en-US" sz="1100" dirty="0"/>
+            <a:endParaRPr lang="en-US" sz="1100"/>
           </a:p>
         </p:txBody>
       </p:sp>
@@ -10937,7 +11092,7 @@
               <a:buNone/>
             </a:pPr>
             <a:r>
-              <a:rPr lang="en-US" sz="1200" b="1" kern="0" spc="200" dirty="0">
+              <a:rPr lang="en-US" sz="1200" b="1" kern="0" spc="200">
                 <a:solidFill>
                   <a:srgbClr val="FF385C"/>
                 </a:solidFill>
@@ -10947,7 +11102,7 @@
               </a:rPr>
               <a:t>BACKUP B1 · MODEL BAKE-OFF</a:t>
             </a:r>
-            <a:endParaRPr lang="en-US" sz="1200" dirty="0"/>
+            <a:endParaRPr lang="en-US" sz="1200"/>
           </a:p>
         </p:txBody>
       </p:sp>
@@ -10979,7 +11134,7 @@
               <a:buNone/>
             </a:pPr>
             <a:r>
-              <a:rPr lang="en-US" sz="2800" b="1" dirty="0">
+              <a:rPr lang="en-US" sz="2800" b="1">
                 <a:solidFill>
                   <a:srgbClr val="222222"/>
                 </a:solidFill>
@@ -10989,7 +11144,7 @@
               </a:rPr>
               <a:t>Models tested, held-out performance</a:t>
             </a:r>
-            <a:endParaRPr lang="en-US" sz="2800" dirty="0"/>
+            <a:endParaRPr lang="en-US" sz="2800"/>
           </a:p>
         </p:txBody>
       </p:sp>
@@ -11021,7 +11176,7 @@
               <a:buNone/>
             </a:pPr>
             <a:r>
-              <a:rPr lang="en-US" sz="1450" dirty="0">
+              <a:rPr lang="en-US" sz="1450">
                 <a:solidFill>
                   <a:srgbClr val="717171"/>
                 </a:solidFill>
@@ -11031,7 +11186,7 @@
               </a:rPr>
               <a:t>What each model scored, and exactly where the number comes from.</a:t>
             </a:r>
-            <a:endParaRPr lang="en-US" sz="1450" dirty="0"/>
+            <a:endParaRPr lang="en-US" sz="1450"/>
           </a:p>
         </p:txBody>
       </p:sp>
@@ -11138,7 +11293,7 @@
               <a:buNone/>
             </a:pPr>
             <a:r>
-              <a:rPr lang="en-US" sz="900" b="1" dirty="0">
+              <a:rPr lang="en-US" sz="900" b="1">
                 <a:solidFill>
                   <a:srgbClr val="9AA0A6"/>
                 </a:solidFill>
@@ -11148,7 +11303,7 @@
               </a:rPr>
               <a:t>16</a:t>
             </a:r>
-            <a:endParaRPr lang="en-US" sz="900" dirty="0"/>
+            <a:endParaRPr lang="en-US" sz="900"/>
           </a:p>
         </p:txBody>
       </p:sp>
@@ -11228,7 +11383,7 @@
                         <a:buNone/>
                       </a:pPr>
                       <a:r>
-                        <a:rPr lang="en-US" sz="1100" b="1" dirty="0">
+                        <a:rPr lang="en-US" sz="1100" b="1">
                           <a:solidFill>
                             <a:srgbClr val="FFFFFF"/>
                           </a:solidFill>
@@ -11238,7 +11393,7 @@
                         </a:rPr>
                         <a:t>Model</a:t>
                       </a:r>
-                      <a:endParaRPr lang="en-US" sz="1100" dirty="0">
+                      <a:endParaRPr lang="en-US" sz="1100">
                         <a:latin typeface="Poppins" charset="0"/>
                         <a:ea typeface="Poppins" charset="0"/>
                         <a:cs typeface="Poppins" charset="0"/>
@@ -11296,7 +11451,7 @@
                         <a:buNone/>
                       </a:pPr>
                       <a:r>
-                        <a:rPr lang="en-US" sz="1100" b="1" dirty="0">
+                        <a:rPr lang="en-US" sz="1100" b="1">
                           <a:solidFill>
                             <a:srgbClr val="FFFFFF"/>
                           </a:solidFill>
@@ -11306,7 +11461,7 @@
                         </a:rPr>
                         <a:t>Median APE</a:t>
                       </a:r>
-                      <a:endParaRPr lang="en-US" sz="1100" dirty="0">
+                      <a:endParaRPr lang="en-US" sz="1100">
                         <a:latin typeface="Poppins" charset="0"/>
                         <a:ea typeface="Poppins" charset="0"/>
                         <a:cs typeface="Poppins" charset="0"/>
@@ -11364,7 +11519,7 @@
                         <a:buNone/>
                       </a:pPr>
                       <a:r>
-                        <a:rPr lang="en-US" sz="1100" b="1" dirty="0">
+                        <a:rPr lang="en-US" sz="1100" b="1">
                           <a:solidFill>
                             <a:srgbClr val="FFFFFF"/>
                           </a:solidFill>
@@ -11374,7 +11529,7 @@
                         </a:rPr>
                         <a:t>MAE</a:t>
                       </a:r>
-                      <a:endParaRPr lang="en-US" sz="1100" dirty="0">
+                      <a:endParaRPr lang="en-US" sz="1100">
                         <a:latin typeface="Poppins" charset="0"/>
                         <a:ea typeface="Poppins" charset="0"/>
                         <a:cs typeface="Poppins" charset="0"/>
@@ -11432,7 +11587,7 @@
                         <a:buNone/>
                       </a:pPr>
                       <a:r>
-                        <a:rPr lang="en-US" sz="1100" b="1" dirty="0">
+                        <a:rPr lang="en-US" sz="1100" b="1">
                           <a:solidFill>
                             <a:srgbClr val="FFFFFF"/>
                           </a:solidFill>
@@ -11442,7 +11597,7 @@
                         </a:rPr>
                         <a:t>R² (price)</a:t>
                       </a:r>
-                      <a:endParaRPr lang="en-US" sz="1100" dirty="0">
+                      <a:endParaRPr lang="en-US" sz="1100">
                         <a:latin typeface="Poppins" charset="0"/>
                         <a:ea typeface="Poppins" charset="0"/>
                         <a:cs typeface="Poppins" charset="0"/>
@@ -11500,7 +11655,7 @@
                         <a:buNone/>
                       </a:pPr>
                       <a:r>
-                        <a:rPr lang="en-US" sz="1100" b="1" dirty="0">
+                        <a:rPr lang="en-US" sz="1100" b="1">
                           <a:solidFill>
                             <a:srgbClr val="FFFFFF"/>
                           </a:solidFill>
@@ -11510,7 +11665,7 @@
                         </a:rPr>
                         <a:t>R² (log)</a:t>
                       </a:r>
-                      <a:endParaRPr lang="en-US" sz="1100" dirty="0">
+                      <a:endParaRPr lang="en-US" sz="1100">
                         <a:latin typeface="Poppins" charset="0"/>
                         <a:ea typeface="Poppins" charset="0"/>
                         <a:cs typeface="Poppins" charset="0"/>
@@ -11568,7 +11723,7 @@
                         <a:buNone/>
                       </a:pPr>
                       <a:r>
-                        <a:rPr lang="en-US" sz="1100" b="1" dirty="0">
+                        <a:rPr lang="en-US" sz="1100" b="1">
                           <a:solidFill>
                             <a:srgbClr val="FFFFFF"/>
                           </a:solidFill>
@@ -11578,7 +11733,7 @@
                         </a:rPr>
                         <a:t>Source</a:t>
                       </a:r>
-                      <a:endParaRPr lang="en-US" sz="1100" dirty="0">
+                      <a:endParaRPr lang="en-US" sz="1100">
                         <a:latin typeface="Poppins" charset="0"/>
                         <a:ea typeface="Poppins" charset="0"/>
                         <a:cs typeface="Poppins" charset="0"/>
@@ -11643,7 +11798,7 @@
                         <a:buNone/>
                       </a:pPr>
                       <a:r>
-                        <a:rPr lang="en-US" sz="1100" b="1" dirty="0">
+                        <a:rPr lang="en-US" sz="1100" b="1">
                           <a:solidFill>
                             <a:srgbClr val="222222"/>
                           </a:solidFill>
@@ -11653,7 +11808,7 @@
                         </a:rPr>
                         <a:t>V1  Log-linear OLS (baseline)</a:t>
                       </a:r>
-                      <a:endParaRPr lang="en-US" sz="1100" dirty="0">
+                      <a:endParaRPr lang="en-US" sz="1100">
                         <a:latin typeface="Poppins" charset="0"/>
                         <a:ea typeface="Poppins" charset="0"/>
                         <a:cs typeface="Poppins" charset="0"/>
@@ -11711,7 +11866,7 @@
                         <a:buNone/>
                       </a:pPr>
                       <a:r>
-                        <a:rPr lang="en-US" sz="1100" b="1" dirty="0">
+                        <a:rPr lang="en-US" sz="1100" b="1">
                           <a:solidFill>
                             <a:srgbClr val="4A4A4A"/>
                           </a:solidFill>
@@ -11721,7 +11876,7 @@
                         </a:rPr>
                         <a:t>39.2%</a:t>
                       </a:r>
-                      <a:endParaRPr lang="en-US" sz="1100" dirty="0">
+                      <a:endParaRPr lang="en-US" sz="1100">
                         <a:latin typeface="Poppins" charset="0"/>
                         <a:ea typeface="Poppins" charset="0"/>
                         <a:cs typeface="Poppins" charset="0"/>
@@ -11779,7 +11934,7 @@
                         <a:buNone/>
                       </a:pPr>
                       <a:r>
-                        <a:rPr lang="en-US" sz="1100" dirty="0">
+                        <a:rPr lang="en-US" sz="1100">
                           <a:solidFill>
                             <a:srgbClr val="4A4A4A"/>
                           </a:solidFill>
@@ -11789,7 +11944,7 @@
                         </a:rPr>
                         <a:t>$113.22</a:t>
                       </a:r>
-                      <a:endParaRPr lang="en-US" sz="1100" dirty="0">
+                      <a:endParaRPr lang="en-US" sz="1100">
                         <a:latin typeface="Poppins" charset="0"/>
                         <a:ea typeface="Poppins" charset="0"/>
                         <a:cs typeface="Poppins" charset="0"/>
@@ -11847,7 +12002,7 @@
                         <a:buNone/>
                       </a:pPr>
                       <a:r>
-                        <a:rPr lang="en-US" sz="1100" dirty="0">
+                        <a:rPr lang="en-US" sz="1100">
                           <a:solidFill>
                             <a:srgbClr val="4A4A4A"/>
                           </a:solidFill>
@@ -11857,7 +12012,7 @@
                         </a:rPr>
                         <a:t>0.243</a:t>
                       </a:r>
-                      <a:endParaRPr lang="en-US" sz="1100" dirty="0">
+                      <a:endParaRPr lang="en-US" sz="1100">
                         <a:latin typeface="Poppins" charset="0"/>
                         <a:ea typeface="Poppins" charset="0"/>
                         <a:cs typeface="Poppins" charset="0"/>
@@ -11915,7 +12070,7 @@
                         <a:buNone/>
                       </a:pPr>
                       <a:r>
-                        <a:rPr lang="en-US" sz="1100" dirty="0">
+                        <a:rPr lang="en-US" sz="1100">
                           <a:solidFill>
                             <a:srgbClr val="4A4A4A"/>
                           </a:solidFill>
@@ -11925,7 +12080,7 @@
                         </a:rPr>
                         <a:t>0.486</a:t>
                       </a:r>
-                      <a:endParaRPr lang="en-US" sz="1100" dirty="0">
+                      <a:endParaRPr lang="en-US" sz="1100">
                         <a:latin typeface="Poppins" charset="0"/>
                         <a:ea typeface="Poppins" charset="0"/>
                         <a:cs typeface="Poppins" charset="0"/>
@@ -11983,7 +12138,7 @@
                         <a:buNone/>
                       </a:pPr>
                       <a:r>
-                        <a:rPr lang="en-US" sz="1100" dirty="0">
+                        <a:rPr lang="en-US" sz="1100">
                           <a:solidFill>
                             <a:srgbClr val="4A4A4A"/>
                           </a:solidFill>
@@ -11993,7 +12148,7 @@
                         </a:rPr>
                         <a:t>manas_model_metrics.csv</a:t>
                       </a:r>
-                      <a:endParaRPr lang="en-US" sz="1100" dirty="0">
+                      <a:endParaRPr lang="en-US" sz="1100">
                         <a:latin typeface="Poppins" charset="0"/>
                         <a:ea typeface="Poppins" charset="0"/>
                         <a:cs typeface="Poppins" charset="0"/>
@@ -12058,7 +12213,7 @@
                         <a:buNone/>
                       </a:pPr>
                       <a:r>
-                        <a:rPr lang="en-US" sz="1100" b="1" dirty="0">
+                        <a:rPr lang="en-US" sz="1100" b="1">
                           <a:solidFill>
                             <a:srgbClr val="222222"/>
                           </a:solidFill>
@@ -12068,7 +12223,7 @@
                         </a:rPr>
                         <a:t>V1  Random Forest</a:t>
                       </a:r>
-                      <a:endParaRPr lang="en-US" sz="1100" dirty="0">
+                      <a:endParaRPr lang="en-US" sz="1100">
                         <a:latin typeface="Poppins" charset="0"/>
                         <a:ea typeface="Poppins" charset="0"/>
                         <a:cs typeface="Poppins" charset="0"/>
@@ -12126,7 +12281,7 @@
                         <a:buNone/>
                       </a:pPr>
                       <a:r>
-                        <a:rPr lang="en-US" sz="1100" b="1" dirty="0">
+                        <a:rPr lang="en-US" sz="1100" b="1">
                           <a:solidFill>
                             <a:srgbClr val="4A4A4A"/>
                           </a:solidFill>
@@ -12136,7 +12291,7 @@
                         </a:rPr>
                         <a:t>29.3%</a:t>
                       </a:r>
-                      <a:endParaRPr lang="en-US" sz="1100" dirty="0">
+                      <a:endParaRPr lang="en-US" sz="1100">
                         <a:latin typeface="Poppins" charset="0"/>
                         <a:ea typeface="Poppins" charset="0"/>
                         <a:cs typeface="Poppins" charset="0"/>
@@ -12194,7 +12349,7 @@
                         <a:buNone/>
                       </a:pPr>
                       <a:r>
-                        <a:rPr lang="en-US" sz="1100" dirty="0">
+                        <a:rPr lang="en-US" sz="1100">
                           <a:solidFill>
                             <a:srgbClr val="4A4A4A"/>
                           </a:solidFill>
@@ -12204,7 +12359,7 @@
                         </a:rPr>
                         <a:t>$92.94</a:t>
                       </a:r>
-                      <a:endParaRPr lang="en-US" sz="1100" dirty="0">
+                      <a:endParaRPr lang="en-US" sz="1100">
                         <a:latin typeface="Poppins" charset="0"/>
                         <a:ea typeface="Poppins" charset="0"/>
                         <a:cs typeface="Poppins" charset="0"/>
@@ -12262,7 +12417,7 @@
                         <a:buNone/>
                       </a:pPr>
                       <a:r>
-                        <a:rPr lang="en-US" sz="1100" dirty="0">
+                        <a:rPr lang="en-US" sz="1100">
                           <a:solidFill>
                             <a:srgbClr val="4A4A4A"/>
                           </a:solidFill>
@@ -12272,7 +12427,7 @@
                         </a:rPr>
                         <a:t>0.506</a:t>
                       </a:r>
-                      <a:endParaRPr lang="en-US" sz="1100" dirty="0">
+                      <a:endParaRPr lang="en-US" sz="1100">
                         <a:latin typeface="Poppins" charset="0"/>
                         <a:ea typeface="Poppins" charset="0"/>
                         <a:cs typeface="Poppins" charset="0"/>
@@ -12330,7 +12485,7 @@
                         <a:buNone/>
                       </a:pPr>
                       <a:r>
-                        <a:rPr lang="en-US" sz="1100" dirty="0">
+                        <a:rPr lang="en-US" sz="1100">
                           <a:solidFill>
                             <a:srgbClr val="4A4A4A"/>
                           </a:solidFill>
@@ -12340,7 +12495,7 @@
                         </a:rPr>
                         <a:t>0.619</a:t>
                       </a:r>
-                      <a:endParaRPr lang="en-US" sz="1100" dirty="0">
+                      <a:endParaRPr lang="en-US" sz="1100">
                         <a:latin typeface="Poppins" charset="0"/>
                         <a:ea typeface="Poppins" charset="0"/>
                         <a:cs typeface="Poppins" charset="0"/>
@@ -12398,7 +12553,7 @@
                         <a:buNone/>
                       </a:pPr>
                       <a:r>
-                        <a:rPr lang="en-US" sz="1100" dirty="0">
+                        <a:rPr lang="en-US" sz="1100">
                           <a:solidFill>
                             <a:srgbClr val="4A4A4A"/>
                           </a:solidFill>
@@ -12408,7 +12563,7 @@
                         </a:rPr>
                         <a:t>manas_model_metrics.csv</a:t>
                       </a:r>
-                      <a:endParaRPr lang="en-US" sz="1100" dirty="0">
+                      <a:endParaRPr lang="en-US" sz="1100">
                         <a:latin typeface="Poppins" charset="0"/>
                         <a:ea typeface="Poppins" charset="0"/>
                         <a:cs typeface="Poppins" charset="0"/>
@@ -12473,7 +12628,7 @@
                         <a:buNone/>
                       </a:pPr>
                       <a:r>
-                        <a:rPr lang="en-US" sz="1100" b="1" dirty="0">
+                        <a:rPr lang="en-US" sz="1100" b="1">
                           <a:solidFill>
                             <a:srgbClr val="222222"/>
                           </a:solidFill>
@@ -12483,7 +12638,7 @@
                         </a:rPr>
                         <a:t>V2  OLS (expanded features)</a:t>
                       </a:r>
-                      <a:endParaRPr lang="en-US" sz="1100" dirty="0">
+                      <a:endParaRPr lang="en-US" sz="1100">
                         <a:latin typeface="Poppins" charset="0"/>
                         <a:ea typeface="Poppins" charset="0"/>
                         <a:cs typeface="Poppins" charset="0"/>
@@ -12541,7 +12696,7 @@
                         <a:buNone/>
                       </a:pPr>
                       <a:r>
-                        <a:rPr lang="en-US" sz="1100" b="1" dirty="0">
+                        <a:rPr lang="en-US" sz="1100" b="1">
                           <a:solidFill>
                             <a:srgbClr val="4A4A4A"/>
                           </a:solidFill>
@@ -12551,7 +12706,7 @@
                         </a:rPr>
                         <a:t>23.7%</a:t>
                       </a:r>
-                      <a:endParaRPr lang="en-US" sz="1100" dirty="0">
+                      <a:endParaRPr lang="en-US" sz="1100">
                         <a:latin typeface="Poppins" charset="0"/>
                         <a:ea typeface="Poppins" charset="0"/>
                         <a:cs typeface="Poppins" charset="0"/>
@@ -12609,7 +12764,7 @@
                         <a:buNone/>
                       </a:pPr>
                       <a:r>
-                        <a:rPr lang="en-US" sz="1100" dirty="0">
+                        <a:rPr lang="en-US" sz="1100">
                           <a:solidFill>
                             <a:srgbClr val="4A4A4A"/>
                           </a:solidFill>
@@ -12619,7 +12774,7 @@
                         </a:rPr>
                         <a:t>$81.20</a:t>
                       </a:r>
-                      <a:endParaRPr lang="en-US" sz="1100" dirty="0">
+                      <a:endParaRPr lang="en-US" sz="1100">
                         <a:latin typeface="Poppins" charset="0"/>
                         <a:ea typeface="Poppins" charset="0"/>
                         <a:cs typeface="Poppins" charset="0"/>
@@ -12677,7 +12832,7 @@
                         <a:buNone/>
                       </a:pPr>
                       <a:r>
-                        <a:rPr lang="en-US" sz="1100" dirty="0">
+                        <a:rPr lang="en-US" sz="1100">
                           <a:solidFill>
                             <a:srgbClr val="4A4A4A"/>
                           </a:solidFill>
@@ -12687,7 +12842,7 @@
                         </a:rPr>
                         <a:t>0.539</a:t>
                       </a:r>
-                      <a:endParaRPr lang="en-US" sz="1100" dirty="0">
+                      <a:endParaRPr lang="en-US" sz="1100">
                         <a:latin typeface="Poppins" charset="0"/>
                         <a:ea typeface="Poppins" charset="0"/>
                         <a:cs typeface="Poppins" charset="0"/>
@@ -12745,7 +12900,7 @@
                         <a:buNone/>
                       </a:pPr>
                       <a:r>
-                        <a:rPr lang="en-US" sz="1100" dirty="0">
+                        <a:rPr lang="en-US" sz="1100">
                           <a:solidFill>
                             <a:srgbClr val="4A4A4A"/>
                           </a:solidFill>
@@ -12755,7 +12910,7 @@
                         </a:rPr>
                         <a:t>0.751</a:t>
                       </a:r>
-                      <a:endParaRPr lang="en-US" sz="1100" dirty="0">
+                      <a:endParaRPr lang="en-US" sz="1100">
                         <a:latin typeface="Poppins" charset="0"/>
                         <a:ea typeface="Poppins" charset="0"/>
                         <a:cs typeface="Poppins" charset="0"/>
@@ -12813,7 +12968,7 @@
                         <a:buNone/>
                       </a:pPr>
                       <a:r>
-                        <a:rPr lang="en-US" sz="1100" dirty="0">
+                        <a:rPr lang="en-US" sz="1100">
                           <a:solidFill>
                             <a:srgbClr val="4A4A4A"/>
                           </a:solidFill>
@@ -12823,7 +12978,7 @@
                         </a:rPr>
                         <a:t>master_metrics.csv</a:t>
                       </a:r>
-                      <a:endParaRPr lang="en-US" sz="1100" dirty="0">
+                      <a:endParaRPr lang="en-US" sz="1100">
                         <a:latin typeface="Poppins" charset="0"/>
                         <a:ea typeface="Poppins" charset="0"/>
                         <a:cs typeface="Poppins" charset="0"/>
@@ -12888,7 +13043,7 @@
                         <a:buNone/>
                       </a:pPr>
                       <a:r>
-                        <a:rPr lang="en-US" sz="1100" b="1" dirty="0">
+                        <a:rPr lang="en-US" sz="1100" b="1">
                           <a:solidFill>
                             <a:srgbClr val="222222"/>
                           </a:solidFill>
@@ -12898,7 +13053,7 @@
                         </a:rPr>
                         <a:t>V2  Ridge</a:t>
                       </a:r>
-                      <a:endParaRPr lang="en-US" sz="1100" dirty="0">
+                      <a:endParaRPr lang="en-US" sz="1100">
                         <a:latin typeface="Poppins" charset="0"/>
                         <a:ea typeface="Poppins" charset="0"/>
                         <a:cs typeface="Poppins" charset="0"/>
@@ -12956,7 +13111,7 @@
                         <a:buNone/>
                       </a:pPr>
                       <a:r>
-                        <a:rPr lang="en-US" sz="1100" b="1" dirty="0">
+                        <a:rPr lang="en-US" sz="1100" b="1">
                           <a:solidFill>
                             <a:srgbClr val="4A4A4A"/>
                           </a:solidFill>
@@ -12966,7 +13121,7 @@
                         </a:rPr>
                         <a:t>23.8%</a:t>
                       </a:r>
-                      <a:endParaRPr lang="en-US" sz="1100" dirty="0">
+                      <a:endParaRPr lang="en-US" sz="1100">
                         <a:latin typeface="Poppins" charset="0"/>
                         <a:ea typeface="Poppins" charset="0"/>
                         <a:cs typeface="Poppins" charset="0"/>
@@ -13024,7 +13179,7 @@
                         <a:buNone/>
                       </a:pPr>
                       <a:r>
-                        <a:rPr lang="en-US" sz="1100" dirty="0">
+                        <a:rPr lang="en-US" sz="1100">
                           <a:solidFill>
                             <a:srgbClr val="4A4A4A"/>
                           </a:solidFill>
@@ -13034,7 +13189,7 @@
                         </a:rPr>
                         <a:t>$81.03</a:t>
                       </a:r>
-                      <a:endParaRPr lang="en-US" sz="1100" dirty="0">
+                      <a:endParaRPr lang="en-US" sz="1100">
                         <a:latin typeface="Poppins" charset="0"/>
                         <a:ea typeface="Poppins" charset="0"/>
                         <a:cs typeface="Poppins" charset="0"/>
@@ -13092,7 +13247,7 @@
                         <a:buNone/>
                       </a:pPr>
                       <a:r>
-                        <a:rPr lang="en-US" sz="1100" dirty="0">
+                        <a:rPr lang="en-US" sz="1100">
                           <a:solidFill>
                             <a:srgbClr val="4A4A4A"/>
                           </a:solidFill>
@@ -13102,7 +13257,7 @@
                         </a:rPr>
                         <a:t>0.539</a:t>
                       </a:r>
-                      <a:endParaRPr lang="en-US" sz="1100" dirty="0">
+                      <a:endParaRPr lang="en-US" sz="1100">
                         <a:latin typeface="Poppins" charset="0"/>
                         <a:ea typeface="Poppins" charset="0"/>
                         <a:cs typeface="Poppins" charset="0"/>
@@ -13160,7 +13315,7 @@
                         <a:buNone/>
                       </a:pPr>
                       <a:r>
-                        <a:rPr lang="en-US" sz="1100" dirty="0">
+                        <a:rPr lang="en-US" sz="1100">
                           <a:solidFill>
                             <a:srgbClr val="4A4A4A"/>
                           </a:solidFill>
@@ -13170,7 +13325,7 @@
                         </a:rPr>
                         <a:t>0.752</a:t>
                       </a:r>
-                      <a:endParaRPr lang="en-US" sz="1100" dirty="0">
+                      <a:endParaRPr lang="en-US" sz="1100">
                         <a:latin typeface="Poppins" charset="0"/>
                         <a:ea typeface="Poppins" charset="0"/>
                         <a:cs typeface="Poppins" charset="0"/>
@@ -13228,7 +13383,7 @@
                         <a:buNone/>
                       </a:pPr>
                       <a:r>
-                        <a:rPr lang="en-US" sz="1100" dirty="0">
+                        <a:rPr lang="en-US" sz="1100">
                           <a:solidFill>
                             <a:srgbClr val="4A4A4A"/>
                           </a:solidFill>
@@ -13238,7 +13393,7 @@
                         </a:rPr>
                         <a:t>master_metrics.csv</a:t>
                       </a:r>
-                      <a:endParaRPr lang="en-US" sz="1100" dirty="0">
+                      <a:endParaRPr lang="en-US" sz="1100">
                         <a:latin typeface="Poppins" charset="0"/>
                         <a:ea typeface="Poppins" charset="0"/>
                         <a:cs typeface="Poppins" charset="0"/>
@@ -13303,7 +13458,7 @@
                         <a:buNone/>
                       </a:pPr>
                       <a:r>
-                        <a:rPr lang="en-US" sz="1100" b="1" dirty="0">
+                        <a:rPr lang="en-US" sz="1100" b="1">
                           <a:solidFill>
                             <a:srgbClr val="222222"/>
                           </a:solidFill>
@@ -13313,7 +13468,7 @@
                         </a:rPr>
                         <a:t>V2  Random Forest</a:t>
                       </a:r>
-                      <a:endParaRPr lang="en-US" sz="1100" dirty="0">
+                      <a:endParaRPr lang="en-US" sz="1100">
                         <a:latin typeface="Poppins" charset="0"/>
                         <a:ea typeface="Poppins" charset="0"/>
                         <a:cs typeface="Poppins" charset="0"/>
@@ -13371,7 +13526,7 @@
                         <a:buNone/>
                       </a:pPr>
                       <a:r>
-                        <a:rPr lang="en-US" sz="1100" b="1" dirty="0">
+                        <a:rPr lang="en-US" sz="1100" b="1">
                           <a:solidFill>
                             <a:srgbClr val="4A4A4A"/>
                           </a:solidFill>
@@ -13381,7 +13536,7 @@
                         </a:rPr>
                         <a:t>20.8%</a:t>
                       </a:r>
-                      <a:endParaRPr lang="en-US" sz="1100" dirty="0">
+                      <a:endParaRPr lang="en-US" sz="1100">
                         <a:latin typeface="Poppins" charset="0"/>
                         <a:ea typeface="Poppins" charset="0"/>
                         <a:cs typeface="Poppins" charset="0"/>
@@ -13439,7 +13594,7 @@
                         <a:buNone/>
                       </a:pPr>
                       <a:r>
-                        <a:rPr lang="en-US" sz="1100" dirty="0">
+                        <a:rPr lang="en-US" sz="1100">
                           <a:solidFill>
                             <a:srgbClr val="4A4A4A"/>
                           </a:solidFill>
@@ -13449,7 +13604,7 @@
                         </a:rPr>
                         <a:t>$75.07</a:t>
                       </a:r>
-                      <a:endParaRPr lang="en-US" sz="1100" dirty="0">
+                      <a:endParaRPr lang="en-US" sz="1100">
                         <a:latin typeface="Poppins" charset="0"/>
                         <a:ea typeface="Poppins" charset="0"/>
                         <a:cs typeface="Poppins" charset="0"/>
@@ -13507,7 +13662,7 @@
                         <a:buNone/>
                       </a:pPr>
                       <a:r>
-                        <a:rPr lang="en-US" sz="1100" dirty="0">
+                        <a:rPr lang="en-US" sz="1100">
                           <a:solidFill>
                             <a:srgbClr val="4A4A4A"/>
                           </a:solidFill>
@@ -13517,7 +13672,7 @@
                         </a:rPr>
                         <a:t>0.574</a:t>
                       </a:r>
-                      <a:endParaRPr lang="en-US" sz="1100" dirty="0">
+                      <a:endParaRPr lang="en-US" sz="1100">
                         <a:latin typeface="Poppins" charset="0"/>
                         <a:ea typeface="Poppins" charset="0"/>
                         <a:cs typeface="Poppins" charset="0"/>
@@ -13575,7 +13730,7 @@
                         <a:buNone/>
                       </a:pPr>
                       <a:r>
-                        <a:rPr lang="en-US" sz="1100" dirty="0">
+                        <a:rPr lang="en-US" sz="1100">
                           <a:solidFill>
                             <a:srgbClr val="4A4A4A"/>
                           </a:solidFill>
@@ -13585,7 +13740,7 @@
                         </a:rPr>
                         <a:t>0.782</a:t>
                       </a:r>
-                      <a:endParaRPr lang="en-US" sz="1100" dirty="0">
+                      <a:endParaRPr lang="en-US" sz="1100">
                         <a:latin typeface="Poppins" charset="0"/>
                         <a:ea typeface="Poppins" charset="0"/>
                         <a:cs typeface="Poppins" charset="0"/>
@@ -13643,7 +13798,7 @@
                         <a:buNone/>
                       </a:pPr>
                       <a:r>
-                        <a:rPr lang="en-US" sz="1100" dirty="0">
+                        <a:rPr lang="en-US" sz="1100">
                           <a:solidFill>
                             <a:srgbClr val="4A4A4A"/>
                           </a:solidFill>
@@ -13653,7 +13808,7 @@
                         </a:rPr>
                         <a:t>master_metrics.csv</a:t>
                       </a:r>
-                      <a:endParaRPr lang="en-US" sz="1100" dirty="0">
+                      <a:endParaRPr lang="en-US" sz="1100">
                         <a:latin typeface="Poppins" charset="0"/>
                         <a:ea typeface="Poppins" charset="0"/>
                         <a:cs typeface="Poppins" charset="0"/>
@@ -13718,7 +13873,7 @@
                         <a:buNone/>
                       </a:pPr>
                       <a:r>
-                        <a:rPr lang="en-US" sz="1100" b="1" dirty="0">
+                        <a:rPr lang="en-US" sz="1100" b="1">
                           <a:solidFill>
                             <a:srgbClr val="222222"/>
                           </a:solidFill>
@@ -13728,7 +13883,7 @@
                         </a:rPr>
                         <a:t>V4  GBM short-stay (prod.)</a:t>
                       </a:r>
-                      <a:endParaRPr lang="en-US" sz="1100" dirty="0">
+                      <a:endParaRPr lang="en-US" sz="1100">
                         <a:latin typeface="Poppins" charset="0"/>
                         <a:ea typeface="Poppins" charset="0"/>
                         <a:cs typeface="Poppins" charset="0"/>
@@ -13786,7 +13941,7 @@
                         <a:buNone/>
                       </a:pPr>
                       <a:r>
-                        <a:rPr lang="en-US" sz="1100" b="1" dirty="0">
+                        <a:rPr lang="en-US" sz="1100" b="1">
                           <a:solidFill>
                             <a:srgbClr val="4A4A4A"/>
                           </a:solidFill>
@@ -13796,7 +13951,7 @@
                         </a:rPr>
                         <a:t>19.2%</a:t>
                       </a:r>
-                      <a:endParaRPr lang="en-US" sz="1100" dirty="0">
+                      <a:endParaRPr lang="en-US" sz="1100">
                         <a:latin typeface="Poppins" charset="0"/>
                         <a:ea typeface="Poppins" charset="0"/>
                         <a:cs typeface="Poppins" charset="0"/>
@@ -13854,7 +14009,7 @@
                         <a:buNone/>
                       </a:pPr>
                       <a:r>
-                        <a:rPr lang="en-US" sz="1100" dirty="0">
+                        <a:rPr lang="en-US" sz="1100">
                           <a:solidFill>
                             <a:srgbClr val="4A4A4A"/>
                           </a:solidFill>
@@ -13864,7 +14019,7 @@
                         </a:rPr>
                         <a:t>$102.81</a:t>
                       </a:r>
-                      <a:endParaRPr lang="en-US" sz="1100" dirty="0">
+                      <a:endParaRPr lang="en-US" sz="1100">
                         <a:latin typeface="Poppins" charset="0"/>
                         <a:ea typeface="Poppins" charset="0"/>
                         <a:cs typeface="Poppins" charset="0"/>
@@ -13922,7 +14077,7 @@
                         <a:buNone/>
                       </a:pPr>
                       <a:r>
-                        <a:rPr lang="en-US" sz="1100" dirty="0">
+                        <a:rPr lang="en-US" sz="1100">
                           <a:solidFill>
                             <a:srgbClr val="4A4A4A"/>
                           </a:solidFill>
@@ -13932,7 +14087,7 @@
                         </a:rPr>
                         <a:t>0.528</a:t>
                       </a:r>
-                      <a:endParaRPr lang="en-US" sz="1100" dirty="0">
+                      <a:endParaRPr lang="en-US" sz="1100">
                         <a:latin typeface="Poppins" charset="0"/>
                         <a:ea typeface="Poppins" charset="0"/>
                         <a:cs typeface="Poppins" charset="0"/>
@@ -13990,7 +14145,7 @@
                         <a:buNone/>
                       </a:pPr>
                       <a:r>
-                        <a:rPr lang="en-US" sz="1100" dirty="0">
+                        <a:rPr lang="en-US" sz="1100">
                           <a:solidFill>
                             <a:srgbClr val="4A4A4A"/>
                           </a:solidFill>
@@ -14000,7 +14155,7 @@
                         </a:rPr>
                         <a:t>0.714</a:t>
                       </a:r>
-                      <a:endParaRPr lang="en-US" sz="1100" dirty="0">
+                      <a:endParaRPr lang="en-US" sz="1100">
                         <a:latin typeface="Poppins" charset="0"/>
                         <a:ea typeface="Poppins" charset="0"/>
                         <a:cs typeface="Poppins" charset="0"/>
@@ -14058,7 +14213,7 @@
                         <a:buNone/>
                       </a:pPr>
                       <a:r>
-                        <a:rPr lang="en-US" sz="1100" dirty="0">
+                        <a:rPr lang="en-US" sz="1100">
                           <a:solidFill>
                             <a:srgbClr val="4A4A4A"/>
                           </a:solidFill>
@@ -14068,7 +14223,7 @@
                         </a:rPr>
                         <a:t>v3_gbm_segment_metrics.csv</a:t>
                       </a:r>
-                      <a:endParaRPr lang="en-US" sz="1100" dirty="0">
+                      <a:endParaRPr lang="en-US" sz="1100">
                         <a:latin typeface="Poppins" charset="0"/>
                         <a:ea typeface="Poppins" charset="0"/>
                         <a:cs typeface="Poppins" charset="0"/>
@@ -14133,7 +14288,7 @@
                         <a:buNone/>
                       </a:pPr>
                       <a:r>
-                        <a:rPr lang="en-US" sz="1100" b="1" dirty="0">
+                        <a:rPr lang="en-US" sz="1100" b="1">
                           <a:solidFill>
                             <a:srgbClr val="222222"/>
                           </a:solidFill>
@@ -14143,7 +14298,7 @@
                         </a:rPr>
                         <a:t>V4  GBM monthly (prod.)</a:t>
                       </a:r>
-                      <a:endParaRPr lang="en-US" sz="1100" dirty="0">
+                      <a:endParaRPr lang="en-US" sz="1100">
                         <a:latin typeface="Poppins" charset="0"/>
                         <a:ea typeface="Poppins" charset="0"/>
                         <a:cs typeface="Poppins" charset="0"/>
@@ -14201,7 +14356,7 @@
                         <a:buNone/>
                       </a:pPr>
                       <a:r>
-                        <a:rPr lang="en-US" sz="1100" b="1" dirty="0">
+                        <a:rPr lang="en-US" sz="1100" b="1">
                           <a:solidFill>
                             <a:srgbClr val="4A4A4A"/>
                           </a:solidFill>
@@ -14211,7 +14366,7 @@
                         </a:rPr>
                         <a:t>15.2%</a:t>
                       </a:r>
-                      <a:endParaRPr lang="en-US" sz="1100" dirty="0">
+                      <a:endParaRPr lang="en-US" sz="1100">
                         <a:latin typeface="Poppins" charset="0"/>
                         <a:ea typeface="Poppins" charset="0"/>
                         <a:cs typeface="Poppins" charset="0"/>
@@ -14269,7 +14424,7 @@
                         <a:buNone/>
                       </a:pPr>
                       <a:r>
-                        <a:rPr lang="en-US" sz="1100" dirty="0">
+                        <a:rPr lang="en-US" sz="1100">
                           <a:solidFill>
                             <a:srgbClr val="4A4A4A"/>
                           </a:solidFill>
@@ -14279,7 +14434,7 @@
                         </a:rPr>
                         <a:t>$39.92</a:t>
                       </a:r>
-                      <a:endParaRPr lang="en-US" sz="1100" dirty="0">
+                      <a:endParaRPr lang="en-US" sz="1100">
                         <a:latin typeface="Poppins" charset="0"/>
                         <a:ea typeface="Poppins" charset="0"/>
                         <a:cs typeface="Poppins" charset="0"/>
@@ -14337,7 +14492,7 @@
                         <a:buNone/>
                       </a:pPr>
                       <a:r>
-                        <a:rPr lang="en-US" sz="1100" dirty="0">
+                        <a:rPr lang="en-US" sz="1100">
                           <a:solidFill>
                             <a:srgbClr val="4A4A4A"/>
                           </a:solidFill>
@@ -14347,7 +14502,7 @@
                         </a:rPr>
                         <a:t>0.532</a:t>
                       </a:r>
-                      <a:endParaRPr lang="en-US" sz="1100" dirty="0">
+                      <a:endParaRPr lang="en-US" sz="1100">
                         <a:latin typeface="Poppins" charset="0"/>
                         <a:ea typeface="Poppins" charset="0"/>
                         <a:cs typeface="Poppins" charset="0"/>
@@ -14405,7 +14560,7 @@
                         <a:buNone/>
                       </a:pPr>
                       <a:r>
-                        <a:rPr lang="en-US" sz="1100" dirty="0">
+                        <a:rPr lang="en-US" sz="1100">
                           <a:solidFill>
                             <a:srgbClr val="4A4A4A"/>
                           </a:solidFill>
@@ -14415,7 +14570,7 @@
                         </a:rPr>
                         <a:t>0.777</a:t>
                       </a:r>
-                      <a:endParaRPr lang="en-US" sz="1100" dirty="0">
+                      <a:endParaRPr lang="en-US" sz="1100">
                         <a:latin typeface="Poppins" charset="0"/>
                         <a:ea typeface="Poppins" charset="0"/>
                         <a:cs typeface="Poppins" charset="0"/>
@@ -14473,7 +14628,7 @@
                         <a:buNone/>
                       </a:pPr>
                       <a:r>
-                        <a:rPr lang="en-US" sz="1100" dirty="0">
+                        <a:rPr lang="en-US" sz="1100">
                           <a:solidFill>
                             <a:srgbClr val="4A4A4A"/>
                           </a:solidFill>
@@ -14483,7 +14638,7 @@
                         </a:rPr>
                         <a:t>v3_gbm_segment_metrics.csv</a:t>
                       </a:r>
-                      <a:endParaRPr lang="en-US" sz="1100" dirty="0">
+                      <a:endParaRPr lang="en-US" sz="1100">
                         <a:latin typeface="Poppins" charset="0"/>
                         <a:ea typeface="Poppins" charset="0"/>
                         <a:cs typeface="Poppins" charset="0"/>
@@ -14570,7 +14725,7 @@
               <a:buNone/>
             </a:pPr>
             <a:r>
-              <a:rPr lang="en-US" sz="1100" b="1" dirty="0">
+              <a:rPr lang="en-US" sz="1100" b="1">
                 <a:solidFill>
                   <a:srgbClr val="222222"/>
                 </a:solidFill>
@@ -14581,7 +14736,7 @@
               <a:t>How to read it.  </a:t>
             </a:r>
             <a:r>
-              <a:rPr lang="en-US" sz="1100" dirty="0">
+              <a:rPr lang="en-US" sz="1100">
                 <a:solidFill>
                   <a:srgbClr val="4A4A4A"/>
                 </a:solidFill>
@@ -14591,7 +14746,7 @@
               </a:rPr>
               <a:t>The V1 and V2 rows are pooled across both segments; the production GBM is fitted per segment, so compare like with like: V2 Ridge scored 25.1% on short-stay alone and 20.9% on monthly. Two distinct stages of gain: richer features took pooled error from 39.2% to 23.7%, then the segment-split GBM took short-stay to 19.2% and monthly to 15.2%.</a:t>
             </a:r>
-            <a:endParaRPr lang="en-US" sz="1100" dirty="0"/>
+            <a:endParaRPr lang="en-US" sz="1100"/>
           </a:p>
         </p:txBody>
       </p:sp>
@@ -14653,7 +14808,7 @@
               <a:buNone/>
             </a:pPr>
             <a:r>
-              <a:rPr lang="en-US" sz="1200" b="1" kern="0" spc="200" dirty="0">
+              <a:rPr lang="en-US" sz="1200" b="1" kern="0" spc="200">
                 <a:solidFill>
                   <a:srgbClr val="FF385C"/>
                 </a:solidFill>
@@ -14663,7 +14818,7 @@
               </a:rPr>
               <a:t>BACKUP B2 · HOW THE $7.6M IS BUILT</a:t>
             </a:r>
-            <a:endParaRPr lang="en-US" sz="1200" dirty="0"/>
+            <a:endParaRPr lang="en-US" sz="1200"/>
           </a:p>
         </p:txBody>
       </p:sp>
@@ -14695,7 +14850,7 @@
               <a:buNone/>
             </a:pPr>
             <a:r>
-              <a:rPr lang="en-US" sz="2800" b="1" dirty="0">
+              <a:rPr lang="en-US" sz="2800" b="1">
                 <a:solidFill>
                   <a:srgbClr val="222222"/>
                 </a:solidFill>
@@ -14705,7 +14860,7 @@
               </a:rPr>
               <a:t>How we built the business case</a:t>
             </a:r>
-            <a:endParaRPr lang="en-US" sz="2800" dirty="0"/>
+            <a:endParaRPr lang="en-US" sz="2800"/>
           </a:p>
         </p:txBody>
       </p:sp>
@@ -14737,7 +14892,7 @@
               <a:buNone/>
             </a:pPr>
             <a:r>
-              <a:rPr lang="en-US" sz="1450" dirty="0">
+              <a:rPr lang="en-US" sz="1450">
                 <a:solidFill>
                   <a:srgbClr val="717171"/>
                 </a:solidFill>
@@ -14747,7 +14902,7 @@
               </a:rPr>
               <a:t>Deliberately conservative. These are our model assumptions, not outputs of the Inside Airbnb data.</a:t>
             </a:r>
-            <a:endParaRPr lang="en-US" sz="1450" dirty="0"/>
+            <a:endParaRPr lang="en-US" sz="1450"/>
           </a:p>
         </p:txBody>
       </p:sp>
@@ -14854,7 +15009,7 @@
               <a:buNone/>
             </a:pPr>
             <a:r>
-              <a:rPr lang="en-US" sz="900" b="1" dirty="0">
+              <a:rPr lang="en-US" sz="900" b="1">
                 <a:solidFill>
                   <a:srgbClr val="9AA0A6"/>
                 </a:solidFill>
@@ -14864,7 +15019,7 @@
               </a:rPr>
               <a:t>17</a:t>
             </a:r>
-            <a:endParaRPr lang="en-US" sz="900" dirty="0"/>
+            <a:endParaRPr lang="en-US" sz="900"/>
           </a:p>
         </p:txBody>
       </p:sp>
@@ -14934,7 +15089,7 @@
               <a:buNone/>
             </a:pPr>
             <a:r>
-              <a:rPr lang="en-US" sz="1300" b="1" dirty="0">
+              <a:rPr lang="en-US" sz="1300" b="1">
                 <a:solidFill>
                   <a:srgbClr val="FF385C"/>
                 </a:solidFill>
@@ -14944,7 +15099,7 @@
               </a:rPr>
               <a:t>Revenue floor</a:t>
             </a:r>
-            <a:endParaRPr lang="en-US" sz="1300" dirty="0"/>
+            <a:endParaRPr lang="en-US" sz="1300"/>
           </a:p>
         </p:txBody>
       </p:sp>
@@ -14976,7 +15131,7 @@
               <a:buNone/>
             </a:pPr>
             <a:r>
-              <a:rPr lang="en-US" sz="1080" dirty="0">
+              <a:rPr lang="en-US" sz="1080">
                 <a:solidFill>
                   <a:srgbClr val="4A4A4A"/>
                 </a:solidFill>
@@ -14986,7 +15141,7 @@
               </a:rPr>
               <a:t>Combined host GBV: underpriced +$8.27M less overpriced −$0.70M → ~$7.6M/yr. Measured −0.92 elasticity for established listings, breakeven below the 142-review panel median. Airbnb's 15.5% = ~$1.17M/yr.</a:t>
             </a:r>
-            <a:endParaRPr lang="en-US" sz="1080" dirty="0"/>
+            <a:endParaRPr lang="en-US" sz="1080"/>
           </a:p>
         </p:txBody>
       </p:sp>
@@ -15056,7 +15211,7 @@
               <a:buNone/>
             </a:pPr>
             <a:r>
-              <a:rPr lang="en-US" sz="1300" b="1" dirty="0">
+              <a:rPr lang="en-US" sz="1300" b="1">
                 <a:solidFill>
                   <a:srgbClr val="FF385C"/>
                 </a:solidFill>
@@ -15066,7 +15221,7 @@
               </a:rPr>
               <a:t>Ceiling (upside)</a:t>
             </a:r>
-            <a:endParaRPr lang="en-US" sz="1300" dirty="0"/>
+            <a:endParaRPr lang="en-US" sz="1300"/>
           </a:p>
         </p:txBody>
       </p:sp>
@@ -15098,7 +15253,7 @@
               <a:buNone/>
             </a:pPr>
             <a:r>
-              <a:rPr lang="en-US" sz="1080" dirty="0">
+              <a:rPr lang="en-US" sz="1080">
                 <a:solidFill>
                   <a:srgbClr val="4A4A4A"/>
                 </a:solidFill>
@@ -15108,7 +15263,7 @@
               </a:rPr>
               <a:t>β = 0 occupancy-neutral, underpriced only → ~$26.8M GBV / ~$4.15M fee. Shown as upside; it ignores overpriced revenue, so even the ceiling is understated.</a:t>
             </a:r>
-            <a:endParaRPr lang="en-US" sz="1080" dirty="0"/>
+            <a:endParaRPr lang="en-US" sz="1080"/>
           </a:p>
         </p:txBody>
       </p:sp>
@@ -15178,7 +15333,7 @@
               <a:buNone/>
             </a:pPr>
             <a:r>
-              <a:rPr lang="en-US" sz="1300" b="1" dirty="0">
+              <a:rPr lang="en-US" sz="1300" b="1">
                 <a:solidFill>
                   <a:srgbClr val="FF385C"/>
                 </a:solidFill>
@@ -15188,7 +15343,7 @@
               </a:rPr>
               <a:t>Incremental cost</a:t>
             </a:r>
-            <a:endParaRPr lang="en-US" sz="1300" dirty="0"/>
+            <a:endParaRPr lang="en-US" sz="1300"/>
           </a:p>
         </p:txBody>
       </p:sp>
@@ -15220,7 +15375,7 @@
               <a:buNone/>
             </a:pPr>
             <a:r>
-              <a:rPr lang="en-US" sz="1080" dirty="0">
+              <a:rPr lang="en-US" sz="1080">
                 <a:solidFill>
                   <a:srgbClr val="4A4A4A"/>
                 </a:solidFill>
@@ -15230,7 +15385,7 @@
               </a:rPr>
               <a:t>~$65K one-time build + ~$30K/yr run (~$215K over 5 yrs), because Airbnb already owns model-serving, pricing and A/B infra. Greenfield (~$190K + $105K/yr) is worst-case-if-standalone only.</a:t>
             </a:r>
-            <a:endParaRPr lang="en-US" sz="1080" dirty="0"/>
+            <a:endParaRPr lang="en-US" sz="1080"/>
           </a:p>
         </p:txBody>
       </p:sp>
@@ -15300,7 +15455,7 @@
               <a:buNone/>
             </a:pPr>
             <a:r>
-              <a:rPr lang="en-US" sz="1300" b="1" dirty="0">
+              <a:rPr lang="en-US" sz="1300" b="1">
                 <a:solidFill>
                   <a:srgbClr val="FF385C"/>
                 </a:solidFill>
@@ -15310,7 +15465,7 @@
               </a:rPr>
               <a:t>ROI &amp; payback</a:t>
             </a:r>
-            <a:endParaRPr lang="en-US" sz="1300" dirty="0"/>
+            <a:endParaRPr lang="en-US" sz="1300"/>
           </a:p>
         </p:txBody>
       </p:sp>
@@ -15342,7 +15497,7 @@
               <a:buNone/>
             </a:pPr>
             <a:r>
-              <a:rPr lang="en-US" sz="1080" dirty="0">
+              <a:rPr lang="en-US" sz="1080">
                 <a:solidFill>
                   <a:srgbClr val="4A4A4A"/>
                 </a:solidFill>
@@ -15352,7 +15507,7 @@
               </a:rPr>
               <a:t>On the $1.17M floor: 25% adoption → ~4 mo payback, 580% 5-yr ROI; 35% → ~3 mo, 852%. Even 15% pays back in ~6 mo and clears 300%.</a:t>
             </a:r>
-            <a:endParaRPr lang="en-US" sz="1080" dirty="0"/>
+            <a:endParaRPr lang="en-US" sz="1080"/>
           </a:p>
         </p:txBody>
       </p:sp>
@@ -15422,7 +15577,7 @@
               <a:buNone/>
             </a:pPr>
             <a:r>
-              <a:rPr lang="en-US" sz="1300" b="1" dirty="0">
+              <a:rPr lang="en-US" sz="1300" b="1">
                 <a:solidFill>
                   <a:srgbClr val="FF385C"/>
                 </a:solidFill>
@@ -15432,7 +15587,7 @@
               </a:rPr>
               <a:t>NPV-honest</a:t>
             </a:r>
-            <a:endParaRPr lang="en-US" sz="1300" dirty="0"/>
+            <a:endParaRPr lang="en-US" sz="1300"/>
           </a:p>
         </p:txBody>
       </p:sp>
@@ -15464,7 +15619,7 @@
               <a:buNone/>
             </a:pPr>
             <a:r>
-              <a:rPr lang="en-US" sz="1080" dirty="0">
+              <a:rPr lang="en-US" sz="1080">
                 <a:solidFill>
                   <a:srgbClr val="4A4A4A"/>
                 </a:solidFill>
@@ -15474,7 +15629,7 @@
               </a:rPr>
               <a:t>Discounted at 10% (CFI standard). 5-yr net $5.63M nominal → $4.26M NPV (~24% haircut), still net-positive in Year 1. We show both.</a:t>
             </a:r>
-            <a:endParaRPr lang="en-US" sz="1080" dirty="0"/>
+            <a:endParaRPr lang="en-US" sz="1080"/>
           </a:p>
         </p:txBody>
       </p:sp>
@@ -15544,7 +15699,7 @@
               <a:buNone/>
             </a:pPr>
             <a:r>
-              <a:rPr lang="en-US" sz="1300" b="1" dirty="0">
+              <a:rPr lang="en-US" sz="1300" b="1">
                 <a:solidFill>
                   <a:srgbClr val="007A73"/>
                 </a:solidFill>
@@ -15554,7 +15709,7 @@
               </a:rPr>
               <a:t>Floor of the floor</a:t>
             </a:r>
-            <a:endParaRPr lang="en-US" sz="1300" dirty="0"/>
+            <a:endParaRPr lang="en-US" sz="1300"/>
           </a:p>
         </p:txBody>
       </p:sp>
@@ -15586,7 +15741,7 @@
               <a:buNone/>
             </a:pPr>
             <a:r>
-              <a:rPr lang="en-US" sz="1080" dirty="0">
+              <a:rPr lang="en-US" sz="1080">
                 <a:solidFill>
                   <a:srgbClr val="4A4A4A"/>
                 </a:solidFill>
@@ -15596,7 +15751,7 @@
               </a:rPr>
               <a:t>No overpriced upside: we book its loss, not its potential gain. No hotel win-back nights, no churn / LTV, no cross-market scaling. Every input rounds against us, so the real return is higher.</a:t>
             </a:r>
-            <a:endParaRPr lang="en-US" sz="1080" dirty="0"/>
+            <a:endParaRPr lang="en-US" sz="1080"/>
           </a:p>
         </p:txBody>
       </p:sp>
@@ -15658,7 +15813,7 @@
               <a:buNone/>
             </a:pPr>
             <a:r>
-              <a:rPr lang="en-US" sz="1200" b="1" kern="0" spc="200" dirty="0">
+              <a:rPr lang="en-US" sz="1200" b="1" kern="0" spc="200">
                 <a:solidFill>
                   <a:srgbClr val="FF385C"/>
                 </a:solidFill>
@@ -15668,7 +15823,7 @@
               </a:rPr>
               <a:t>BACKUP B3 · WHY WE SPLIT AT 142 REVIEWS</a:t>
             </a:r>
-            <a:endParaRPr lang="en-US" sz="1200" dirty="0"/>
+            <a:endParaRPr lang="en-US" sz="1200"/>
           </a:p>
         </p:txBody>
       </p:sp>
@@ -15700,7 +15855,7 @@
               <a:buNone/>
             </a:pPr>
             <a:r>
-              <a:rPr lang="en-US" sz="2900" b="1" dirty="0">
+              <a:rPr lang="en-US" sz="2900" b="1">
                 <a:solidFill>
                   <a:srgbClr val="222222"/>
                 </a:solidFill>
@@ -15710,7 +15865,7 @@
               </a:rPr>
               <a:t>We apply the coefficient only where we measured it</a:t>
             </a:r>
-            <a:endParaRPr lang="en-US" sz="2900" dirty="0"/>
+            <a:endParaRPr lang="en-US" sz="2900"/>
           </a:p>
         </p:txBody>
       </p:sp>
@@ -15742,7 +15897,7 @@
               <a:buNone/>
             </a:pPr>
             <a:r>
-              <a:rPr lang="en-US" sz="1450" dirty="0">
+              <a:rPr lang="en-US" sz="1450">
                 <a:solidFill>
                   <a:srgbClr val="717171"/>
                 </a:solidFill>
@@ -15752,7 +15907,7 @@
               </a:rPr>
               <a:t>β = −0.92 came from established hosts. Most listings are not.</a:t>
             </a:r>
-            <a:endParaRPr lang="en-US" sz="1450" dirty="0"/>
+            <a:endParaRPr lang="en-US" sz="1450"/>
           </a:p>
         </p:txBody>
       </p:sp>
@@ -15859,7 +16014,7 @@
               <a:buNone/>
             </a:pPr>
             <a:r>
-              <a:rPr lang="en-US" sz="900" b="1" dirty="0">
+              <a:rPr lang="en-US" sz="900" b="1">
                 <a:solidFill>
                   <a:srgbClr val="9AA0A6"/>
                 </a:solidFill>
@@ -15869,7 +16024,7 @@
               </a:rPr>
               <a:t>18</a:t>
             </a:r>
-            <a:endParaRPr lang="en-US" sz="900" dirty="0"/>
+            <a:endParaRPr lang="en-US" sz="900"/>
           </a:p>
         </p:txBody>
       </p:sp>
@@ -15990,7 +16145,7 @@
               <a:buNone/>
             </a:pPr>
             <a:r>
-              <a:rPr lang="en-US" sz="1500" b="1" dirty="0">
+              <a:rPr lang="en-US" sz="1500" b="1">
                 <a:solidFill>
                   <a:srgbClr val="222222"/>
                 </a:solidFill>
@@ -16000,7 +16155,7 @@
               </a:rPr>
               <a:t>Why we refuse to extrapolate</a:t>
             </a:r>
-            <a:endParaRPr lang="en-US" sz="1500" dirty="0"/>
+            <a:endParaRPr lang="en-US" sz="1500"/>
           </a:p>
         </p:txBody>
       </p:sp>
@@ -16032,7 +16187,7 @@
               <a:buNone/>
             </a:pPr>
             <a:r>
-              <a:rPr lang="en-US" sz="1250" dirty="0">
+              <a:rPr lang="en-US" sz="1250">
                 <a:solidFill>
                   <a:srgbClr val="4A4A4A"/>
                 </a:solidFill>
@@ -16042,7 +16197,7 @@
               </a:rPr>
               <a:t>The panel behind −0.92 had a median of 142 reviews and 14 years hosting. 99% of underpriced short-stay listings fall short of that profile on reviews, tenure, or both.</a:t>
             </a:r>
-            <a:endParaRPr lang="en-US" sz="1250" dirty="0"/>
+            <a:endParaRPr lang="en-US" sz="1250"/>
           </a:p>
         </p:txBody>
       </p:sp>
@@ -16074,7 +16229,7 @@
               <a:buNone/>
             </a:pPr>
             <a:r>
-              <a:rPr lang="en-US" sz="1250" b="1" dirty="0">
+              <a:rPr lang="en-US" sz="1250" b="1">
                 <a:solidFill>
                   <a:srgbClr val="222222"/>
                 </a:solidFill>
@@ -16085,7 +16240,7 @@
               <a:t>At −1.0 the answer is zero by algebra. </a:t>
             </a:r>
             <a:r>
-              <a:rPr lang="en-US" sz="1250" dirty="0">
+              <a:rPr lang="en-US" sz="1250">
                 <a:solidFill>
                   <a:srgbClr val="4A4A4A"/>
                 </a:solidFill>
@@ -16095,7 +16250,7 @@
               </a:rPr>
               <a:t>Revenue elasticity is (1+β), so the price gain and the occupancy loss cancel exactly. We assume nothing; we claim nothing.</a:t>
             </a:r>
-            <a:endParaRPr lang="en-US" sz="1250" dirty="0"/>
+            <a:endParaRPr lang="en-US" sz="1250"/>
           </a:p>
         </p:txBody>
       </p:sp>
@@ -16310,7 +16465,7 @@
           <a:p>
             <a:pPr algn="l"/>
             <a:r>
-              <a:rPr sz="1100" b="0" dirty="0">
+              <a:rPr sz="1100" b="0">
                 <a:solidFill>
                   <a:srgbClr val="717171"/>
                 </a:solidFill>
@@ -16319,7 +16474,7 @@
               <a:t>measured elasticity</a:t>
             </a:r>
             <a:r>
-              <a:rPr lang="en-US" sz="1100" b="0" dirty="0">
+              <a:rPr lang="en-US" sz="1100" b="0">
                 <a:solidFill>
                   <a:srgbClr val="717171"/>
                 </a:solidFill>
@@ -16328,7 +16483,7 @@
               <a:t>, </a:t>
             </a:r>
             <a:r>
-              <a:rPr sz="1100" b="0" dirty="0">
+              <a:rPr sz="1100" b="0">
                 <a:solidFill>
                   <a:srgbClr val="717171"/>
                 </a:solidFill>
@@ -16550,7 +16705,7 @@
           <a:p>
             <a:pPr algn="l"/>
             <a:r>
-              <a:rPr sz="1100" b="0" dirty="0">
+              <a:rPr sz="1100" b="0">
                 <a:solidFill>
                   <a:srgbClr val="717171"/>
                 </a:solidFill>
@@ -16559,7 +16714,7 @@
               <a:t>underpriced short-stay listings</a:t>
             </a:r>
             <a:r>
-              <a:rPr lang="en-US" sz="1100" b="0" dirty="0">
+              <a:rPr lang="en-US" sz="1100" b="0">
                 <a:solidFill>
                   <a:srgbClr val="717171"/>
                 </a:solidFill>
@@ -16568,7 +16723,7 @@
               <a:t>, </a:t>
             </a:r>
             <a:r>
-              <a:rPr sz="1100" b="0" dirty="0">
+              <a:rPr sz="1100" b="0">
                 <a:solidFill>
                   <a:srgbClr val="717171"/>
                 </a:solidFill>
@@ -16638,7 +16793,7 @@
           <a:p>
             <a:pPr algn="l"/>
             <a:r>
-              <a:rPr sz="1100" b="0" dirty="0">
+              <a:rPr sz="1100" b="0">
                 <a:solidFill>
                   <a:srgbClr val="717171"/>
                 </a:solidFill>
@@ -16647,7 +16802,7 @@
               <a:t>breakeven assumed</a:t>
             </a:r>
             <a:r>
-              <a:rPr lang="en-US" sz="1100" b="0" dirty="0">
+              <a:rPr lang="en-US" sz="1100" b="0">
                 <a:solidFill>
                   <a:srgbClr val="717171"/>
                 </a:solidFill>
@@ -16656,7 +16811,7 @@
               <a:t>, </a:t>
             </a:r>
             <a:r>
-              <a:rPr sz="1100" b="0" dirty="0">
+              <a:rPr sz="1100" b="0">
                 <a:solidFill>
                   <a:srgbClr val="717171"/>
                 </a:solidFill>
@@ -16726,7 +16881,7 @@
           <a:p>
             <a:pPr algn="l"/>
             <a:r>
-              <a:rPr sz="1100" b="0" dirty="0">
+              <a:rPr sz="1100" b="0">
                 <a:solidFill>
                   <a:srgbClr val="717171"/>
                 </a:solidFill>
@@ -16735,7 +16890,7 @@
               <a:t>revenue contribution</a:t>
             </a:r>
             <a:r>
-              <a:rPr lang="en-US" sz="1100" b="0" dirty="0">
+              <a:rPr lang="en-US" sz="1100" b="0">
                 <a:solidFill>
                   <a:srgbClr val="717171"/>
                 </a:solidFill>
@@ -16744,7 +16899,7 @@
               <a:t>, </a:t>
             </a:r>
             <a:r>
-              <a:rPr sz="1100" b="0" dirty="0">
+              <a:rPr sz="1100" b="0">
                 <a:solidFill>
                   <a:srgbClr val="717171"/>
                 </a:solidFill>
@@ -16818,7 +16973,7 @@
               <a:buNone/>
             </a:pPr>
             <a:r>
-              <a:rPr lang="en-US" sz="1200" b="1" kern="0" spc="200" dirty="0">
+              <a:rPr lang="en-US" sz="1200" b="1" kern="0" spc="200">
                 <a:solidFill>
                   <a:srgbClr val="FF385C"/>
                 </a:solidFill>
@@ -16828,7 +16983,7 @@
               </a:rPr>
               <a:t>BACKUP B4 · REVENUE BY MODEL CONFIDENCE</a:t>
             </a:r>
-            <a:endParaRPr lang="en-US" sz="1200" dirty="0"/>
+            <a:endParaRPr lang="en-US" sz="1200"/>
           </a:p>
         </p:txBody>
       </p:sp>
@@ -16860,7 +17015,7 @@
               <a:buNone/>
             </a:pPr>
             <a:r>
-              <a:rPr lang="en-US" sz="2800" b="1" dirty="0">
+              <a:rPr lang="en-US" sz="2800" b="1">
                 <a:solidFill>
                   <a:srgbClr val="222222"/>
                 </a:solidFill>
@@ -16870,7 +17025,7 @@
               </a:rPr>
               <a:t>How much rests on a confident call</a:t>
             </a:r>
-            <a:endParaRPr lang="en-US" sz="2800" dirty="0"/>
+            <a:endParaRPr lang="en-US" sz="2800"/>
           </a:p>
         </p:txBody>
       </p:sp>
@@ -16902,7 +17057,7 @@
               <a:buNone/>
             </a:pPr>
             <a:r>
-              <a:rPr lang="en-US" sz="1450" dirty="0">
+              <a:rPr lang="en-US" sz="1450">
                 <a:solidFill>
                   <a:srgbClr val="717171"/>
                 </a:solidFill>
@@ -16912,7 +17067,7 @@
               </a:rPr>
               <a:t>The model gives a directional call on about one listing in five. Here is what each bucket is worth.</a:t>
             </a:r>
-            <a:endParaRPr lang="en-US" sz="1450" dirty="0"/>
+            <a:endParaRPr lang="en-US" sz="1450"/>
           </a:p>
         </p:txBody>
       </p:sp>
@@ -17019,7 +17174,7 @@
               <a:buNone/>
             </a:pPr>
             <a:r>
-              <a:rPr lang="en-US" sz="900" b="1" dirty="0">
+              <a:rPr lang="en-US" sz="900" b="1">
                 <a:solidFill>
                   <a:srgbClr val="9AA0A6"/>
                 </a:solidFill>
@@ -17029,7 +17184,7 @@
               </a:rPr>
               <a:t>19</a:t>
             </a:r>
-            <a:endParaRPr lang="en-US" sz="900" dirty="0"/>
+            <a:endParaRPr lang="en-US" sz="900"/>
           </a:p>
         </p:txBody>
       </p:sp>
@@ -17099,7 +17254,7 @@
               <a:buNone/>
             </a:pPr>
             <a:r>
-              <a:rPr lang="en-US" sz="1300" b="1" dirty="0">
+              <a:rPr lang="en-US" sz="1300" b="1">
                 <a:solidFill>
                   <a:srgbClr val="FF385C"/>
                 </a:solidFill>
@@ -17109,7 +17264,7 @@
               </a:rPr>
               <a:t>Confident: raise price</a:t>
             </a:r>
-            <a:endParaRPr lang="en-US" sz="1300" dirty="0"/>
+            <a:endParaRPr lang="en-US" sz="1300"/>
           </a:p>
         </p:txBody>
       </p:sp>
@@ -17141,7 +17296,7 @@
               <a:buNone/>
             </a:pPr>
             <a:r>
-              <a:rPr lang="en-US" sz="1080" dirty="0">
+              <a:rPr lang="en-US" sz="1080">
                 <a:solidFill>
                   <a:srgbClr val="4A4A4A"/>
                 </a:solidFill>
@@ -17151,7 +17306,7 @@
               </a:rPr>
               <a:t>449 listings: the model puts their price entirely below its calibrated band. Worth +$2.79M in host GBV.</a:t>
             </a:r>
-            <a:endParaRPr lang="en-US" sz="1080" dirty="0"/>
+            <a:endParaRPr lang="en-US" sz="1080"/>
           </a:p>
         </p:txBody>
       </p:sp>
@@ -17221,7 +17376,7 @@
               <a:buNone/>
             </a:pPr>
             <a:r>
-              <a:rPr lang="en-US" sz="1300" b="1" dirty="0">
+              <a:rPr lang="en-US" sz="1300" b="1">
                 <a:solidFill>
                   <a:srgbClr val="FF385C"/>
                 </a:solidFill>
@@ -17231,7 +17386,7 @@
               </a:rPr>
               <a:t>Confident: lower price</a:t>
             </a:r>
-            <a:endParaRPr lang="en-US" sz="1300" dirty="0"/>
+            <a:endParaRPr lang="en-US" sz="1300"/>
           </a:p>
         </p:txBody>
       </p:sp>
@@ -17263,7 +17418,7 @@
               <a:buNone/>
             </a:pPr>
             <a:r>
-              <a:rPr lang="en-US" sz="1080" dirty="0">
+              <a:rPr lang="en-US" sz="1080">
                 <a:solidFill>
                   <a:srgbClr val="4A4A4A"/>
                 </a:solidFill>
@@ -17273,7 +17428,7 @@
               </a:rPr>
               <a:t>94 listings priced entirely above the band. Worth −$0.45M in host GBV, and the nights they recover.</a:t>
             </a:r>
-            <a:endParaRPr lang="en-US" sz="1080" dirty="0"/>
+            <a:endParaRPr lang="en-US" sz="1080"/>
           </a:p>
         </p:txBody>
       </p:sp>
@@ -17343,7 +17498,7 @@
               <a:buNone/>
             </a:pPr>
             <a:r>
-              <a:rPr lang="en-US" sz="1300" b="1" dirty="0">
+              <a:rPr lang="en-US" sz="1300" b="1">
                 <a:solidFill>
                   <a:srgbClr val="FF385C"/>
                 </a:solidFill>
@@ -17353,7 +17508,7 @@
               </a:rPr>
               <a:t>Uncertain</a:t>
             </a:r>
-            <a:endParaRPr lang="en-US" sz="1300" dirty="0"/>
+            <a:endParaRPr lang="en-US" sz="1300"/>
           </a:p>
         </p:txBody>
       </p:sp>
@@ -17385,7 +17540,7 @@
               <a:buNone/>
             </a:pPr>
             <a:r>
-              <a:rPr lang="en-US" sz="1080" dirty="0">
+              <a:rPr lang="en-US" sz="1080">
                 <a:solidFill>
                   <a:srgbClr val="4A4A4A"/>
                 </a:solidFill>
@@ -17395,7 +17550,7 @@
               </a:rPr>
               <a:t>3,192 listings whose current price sits inside the band. Worth +$5.21M, 69% of the total.</a:t>
             </a:r>
-            <a:endParaRPr lang="en-US" sz="1080" dirty="0"/>
+            <a:endParaRPr lang="en-US" sz="1080"/>
           </a:p>
         </p:txBody>
       </p:sp>
@@ -17465,7 +17620,7 @@
               <a:buNone/>
             </a:pPr>
             <a:r>
-              <a:rPr lang="en-US" sz="1300" b="1" dirty="0">
+              <a:rPr lang="en-US" sz="1300" b="1">
                 <a:solidFill>
                   <a:srgbClr val="FF385C"/>
                 </a:solidFill>
@@ -17475,7 +17630,7 @@
               </a:rPr>
               <a:t>The confident subset alone</a:t>
             </a:r>
-            <a:endParaRPr lang="en-US" sz="1300" dirty="0"/>
+            <a:endParaRPr lang="en-US" sz="1300"/>
           </a:p>
         </p:txBody>
       </p:sp>
@@ -17507,7 +17662,7 @@
               <a:buNone/>
             </a:pPr>
             <a:r>
-              <a:rPr lang="en-US" sz="1080" dirty="0">
+              <a:rPr lang="en-US" sz="1080">
                 <a:solidFill>
                   <a:srgbClr val="4A4A4A"/>
                 </a:solidFill>
@@ -17517,7 +17672,7 @@
               </a:rPr>
               <a:t>$2.34M host GBV → $363K/yr in Airbnb fees at full adoption. A second, harder floor beneath the headline.</a:t>
             </a:r>
-            <a:endParaRPr lang="en-US" sz="1080" dirty="0"/>
+            <a:endParaRPr lang="en-US" sz="1080"/>
           </a:p>
         </p:txBody>
       </p:sp>
@@ -17587,7 +17742,7 @@
               <a:buNone/>
             </a:pPr>
             <a:r>
-              <a:rPr lang="en-US" sz="1300" b="1" dirty="0">
+              <a:rPr lang="en-US" sz="1300" b="1">
                 <a:solidFill>
                   <a:srgbClr val="FF385C"/>
                 </a:solidFill>
@@ -17597,7 +17752,7 @@
               </a:rPr>
               <a:t>It still funds itself</a:t>
             </a:r>
-            <a:endParaRPr lang="en-US" sz="1300" dirty="0"/>
+            <a:endParaRPr lang="en-US" sz="1300"/>
           </a:p>
         </p:txBody>
       </p:sp>
@@ -17629,7 +17784,7 @@
               <a:buNone/>
             </a:pPr>
             <a:r>
-              <a:rPr lang="en-US" sz="1080" dirty="0">
+              <a:rPr lang="en-US" sz="1080">
                 <a:solidFill>
                   <a:srgbClr val="4A4A4A"/>
                 </a:solidFill>
@@ -17639,7 +17794,7 @@
               </a:rPr>
               <a:t>$363K/yr against a $65K build and $30K/yr run. Net-positive in Year 1 even at 35% adoption.</a:t>
             </a:r>
-            <a:endParaRPr lang="en-US" sz="1080" dirty="0"/>
+            <a:endParaRPr lang="en-US" sz="1080"/>
           </a:p>
         </p:txBody>
       </p:sp>
@@ -17709,7 +17864,7 @@
               <a:buNone/>
             </a:pPr>
             <a:r>
-              <a:rPr lang="en-US" sz="1300" b="1" dirty="0">
+              <a:rPr lang="en-US" sz="1300" b="1">
                 <a:solidFill>
                   <a:srgbClr val="007A73"/>
                 </a:solidFill>
@@ -17719,7 +17874,7 @@
               </a:rPr>
               <a:t>What “Uncertain” means</a:t>
             </a:r>
-            <a:endParaRPr lang="en-US" sz="1300" dirty="0"/>
+            <a:endParaRPr lang="en-US" sz="1300"/>
           </a:p>
         </p:txBody>
       </p:sp>
@@ -17751,7 +17906,7 @@
               <a:buNone/>
             </a:pPr>
             <a:r>
-              <a:rPr lang="en-US" sz="1080" dirty="0">
+              <a:rPr lang="en-US" sz="1080">
                 <a:solidFill>
                   <a:srgbClr val="4A4A4A"/>
                 </a:solidFill>
@@ -17761,7 +17916,7 @@
               </a:rPr>
               <a:t>Not absence of signal. The price is inside the interval, but q50 remains the best point estimate, and the model-noise discount already haircuts it.</a:t>
             </a:r>
-            <a:endParaRPr lang="en-US" sz="1080" dirty="0"/>
+            <a:endParaRPr lang="en-US" sz="1080"/>
           </a:p>
         </p:txBody>
       </p:sp>
@@ -17828,7 +17983,7 @@
               <a:buNone/>
             </a:pPr>
             <a:r>
-              <a:rPr lang="en-US" sz="1200" b="1" kern="0" spc="200" dirty="0">
+              <a:rPr lang="en-US" sz="1200" b="1" kern="0" spc="200">
                 <a:solidFill>
                   <a:srgbClr val="FF385C"/>
                 </a:solidFill>
@@ -17838,7 +17993,7 @@
               </a:rPr>
               <a:t>01 · EXECUTIVE SUMMARY</a:t>
             </a:r>
-            <a:endParaRPr lang="en-US" sz="1200" dirty="0"/>
+            <a:endParaRPr lang="en-US" sz="1200"/>
           </a:p>
         </p:txBody>
       </p:sp>
@@ -17863,24 +18018,22 @@
           <a:bodyPr wrap="square" lIns="0" tIns="0" rIns="0" bIns="0" rtlCol="0" anchor="ctr"/>
           <a:lstStyle/>
           <a:p>
-            <a:pPr marL="0" indent="0">
+            <a:pPr>
               <a:lnSpc>
                 <a:spcPct val="102000"/>
               </a:lnSpc>
-              <a:buNone/>
             </a:pPr>
             <a:r>
-              <a:rPr lang="en-US" sz="2900" b="1" dirty="0">
+              <a:rPr lang="en-US" sz="2900" b="1">
                 <a:solidFill>
                   <a:srgbClr val="222222"/>
                 </a:solidFill>
-                <a:latin typeface="Poppins" pitchFamily="34" charset="0"/>
-                <a:ea typeface="Poppins" pitchFamily="34" charset="-122"/>
-                <a:cs typeface="Poppins" pitchFamily="34" charset="-120"/>
+                <a:latin typeface="Poppins"/>
+                <a:cs typeface="Poppins"/>
               </a:rPr>
               <a:t>$1.17M a year, for a $65K build</a:t>
             </a:r>
-            <a:endParaRPr lang="en-US" sz="2900" dirty="0"/>
+            <a:endParaRPr lang="en-US"/>
           </a:p>
         </p:txBody>
       </p:sp>
@@ -17912,7 +18065,7 @@
               <a:buNone/>
             </a:pPr>
             <a:r>
-              <a:rPr lang="en-US" sz="1450" dirty="0">
+              <a:rPr lang="en-US" sz="1450">
                 <a:solidFill>
                   <a:srgbClr val="717171"/>
                 </a:solidFill>
@@ -17922,7 +18075,7 @@
               </a:rPr>
               <a:t>Half of NYC’s listings are priced wrong. We show hosts by how much and why, and Airbnb earns on every correction.</a:t>
             </a:r>
-            <a:endParaRPr lang="en-US" sz="1450" dirty="0"/>
+            <a:endParaRPr lang="en-US" sz="1450"/>
           </a:p>
         </p:txBody>
       </p:sp>
@@ -18007,7 +18160,7 @@
               <a:buNone/>
             </a:pPr>
             <a:r>
-              <a:rPr lang="en-US" sz="950" b="1" kern="0" spc="100" dirty="0">
+              <a:rPr lang="en-US" sz="950" b="1" kern="0" spc="100">
                 <a:solidFill>
                   <a:srgbClr val="9AA0A6"/>
                 </a:solidFill>
@@ -18018,7 +18171,7 @@
               <a:t>PRESENTS  </a:t>
             </a:r>
             <a:r>
-              <a:rPr lang="en-US" sz="950" b="1" dirty="0">
+              <a:rPr lang="en-US" sz="950" b="1">
                 <a:solidFill>
                   <a:srgbClr val="222222"/>
                 </a:solidFill>
@@ -18028,7 +18181,7 @@
               </a:rPr>
               <a:t>Brendan</a:t>
             </a:r>
-            <a:endParaRPr lang="en-US" sz="950" dirty="0"/>
+            <a:endParaRPr lang="en-US" sz="950"/>
           </a:p>
         </p:txBody>
       </p:sp>
@@ -18135,7 +18288,7 @@
               <a:buNone/>
             </a:pPr>
             <a:r>
-              <a:rPr lang="en-US" sz="900" b="1" dirty="0">
+              <a:rPr lang="en-US" sz="900" b="1">
                 <a:solidFill>
                   <a:srgbClr val="9AA0A6"/>
                 </a:solidFill>
@@ -18145,7 +18298,7 @@
               </a:rPr>
               <a:t>2</a:t>
             </a:r>
-            <a:endParaRPr lang="en-US" sz="900" dirty="0"/>
+            <a:endParaRPr lang="en-US" sz="900"/>
           </a:p>
         </p:txBody>
       </p:sp>
@@ -18266,7 +18419,7 @@
               <a:buNone/>
             </a:pPr>
             <a:r>
-              <a:rPr lang="en-US" sz="1500" b="1" dirty="0">
+              <a:rPr lang="en-US" sz="1500" b="1">
                 <a:solidFill>
                   <a:srgbClr val="222222"/>
                 </a:solidFill>
@@ -18276,7 +18429,7 @@
               </a:rPr>
               <a:t>The problem</a:t>
             </a:r>
-            <a:endParaRPr lang="en-US" sz="1500" dirty="0"/>
+            <a:endParaRPr lang="en-US" sz="1500"/>
           </a:p>
         </p:txBody>
       </p:sp>
@@ -18301,24 +18454,48 @@
           <a:bodyPr wrap="square" lIns="0" tIns="0" rIns="0" bIns="0" rtlCol="0" anchor="t"/>
           <a:lstStyle/>
           <a:p>
-            <a:pPr marL="0" indent="0">
+            <a:pPr>
               <a:lnSpc>
                 <a:spcPct val="105000"/>
               </a:lnSpc>
-              <a:buNone/>
             </a:pPr>
             <a:r>
-              <a:rPr lang="en-US" sz="1200" dirty="0">
+              <a:rPr lang="en-US" sz="1200">
                 <a:solidFill>
                   <a:srgbClr val="4A4A4A"/>
                 </a:solidFill>
-                <a:latin typeface="Poppins" pitchFamily="34" charset="0"/>
-                <a:ea typeface="Poppins" pitchFamily="34" charset="-122"/>
-                <a:cs typeface="Poppins" pitchFamily="34" charset="-120"/>
+                <a:latin typeface="Poppins"/>
+                <a:ea typeface="Poppins" pitchFamily="34" charset="-122"/>
+                <a:cs typeface="Poppins"/>
               </a:rPr>
               <a:t>Smart Pricing hands hosts a number with no reasoning: no comparables, no drivers, nothing to explore. So hosts ignore it, or follow it blindly.</a:t>
             </a:r>
-            <a:endParaRPr lang="en-US" sz="1200" dirty="0"/>
+            <a:r>
+              <a:rPr lang="en-US" sz="1200" err="1">
+                <a:solidFill>
+                  <a:srgbClr val="4A4A4A"/>
+                </a:solidFill>
+                <a:latin typeface="Poppins"/>
+                <a:ea typeface="Poppins" pitchFamily="34" charset="-122"/>
+                <a:cs typeface="Poppins"/>
+              </a:rPr>
+              <a:t/>
+            </a:r>
+            <a:r>
+              <a:rPr lang="en-US" sz="1200">
+                <a:solidFill>
+                  <a:srgbClr val="4A4A4A"/>
+                </a:solidFill>
+                <a:latin typeface="Poppins"/>
+                <a:ea typeface="Poppins" pitchFamily="34" charset="-122"/>
+                <a:cs typeface="Poppins"/>
+              </a:rPr>
+              <a:t/>
+            </a:r>
+            <a:endParaRPr lang="en-US" sz="1200">
+              <a:latin typeface="Poppins"/>
+              <a:cs typeface="Poppins"/>
+            </a:endParaRPr>
           </a:p>
         </p:txBody>
       </p:sp>
@@ -18439,7 +18616,7 @@
               <a:buNone/>
             </a:pPr>
             <a:r>
-              <a:rPr lang="en-US" sz="1500" b="1" dirty="0">
+              <a:rPr lang="en-US" sz="1500" b="1">
                 <a:solidFill>
                   <a:srgbClr val="222222"/>
                 </a:solidFill>
@@ -18449,7 +18626,7 @@
               </a:rPr>
               <a:t>Our answer</a:t>
             </a:r>
-            <a:endParaRPr lang="en-US" sz="1500" dirty="0"/>
+            <a:endParaRPr lang="en-US" sz="1500"/>
           </a:p>
         </p:txBody>
       </p:sp>
@@ -18481,7 +18658,7 @@
               <a:buNone/>
             </a:pPr>
             <a:r>
-              <a:rPr lang="en-US" sz="1200" dirty="0">
+              <a:rPr lang="en-US" sz="1200">
                 <a:solidFill>
                   <a:srgbClr val="4A4A4A"/>
                 </a:solidFill>
@@ -18491,7 +18668,7 @@
               </a:rPr>
               <a:t>A fair price a host can actually interrogate: the comparable listings behind it, the amenity gaps against high performers, and a slider to test any price.</a:t>
             </a:r>
-            <a:endParaRPr lang="en-US" sz="1200" dirty="0"/>
+            <a:endParaRPr lang="en-US" sz="1200"/>
           </a:p>
         </p:txBody>
       </p:sp>
@@ -18561,7 +18738,7 @@
               <a:buNone/>
             </a:pPr>
             <a:r>
-              <a:rPr lang="en-US" sz="3000" b="1" dirty="0">
+              <a:rPr lang="en-US" sz="3000" b="1">
                 <a:solidFill>
                   <a:srgbClr val="222222"/>
                 </a:solidFill>
@@ -18571,7 +18748,7 @@
               </a:rPr>
               <a:t>$1.17M</a:t>
             </a:r>
-            <a:endParaRPr lang="en-US" sz="1500" dirty="0"/>
+            <a:endParaRPr lang="en-US" sz="1500"/>
           </a:p>
         </p:txBody>
       </p:sp>
@@ -18603,7 +18780,7 @@
               <a:buNone/>
             </a:pPr>
             <a:r>
-              <a:rPr lang="en-US" sz="1100" dirty="0" b="0">
+              <a:rPr lang="en-US" sz="1100" b="0">
                 <a:solidFill>
                   <a:srgbClr val="717171"/>
                 </a:solidFill>
@@ -18613,7 +18790,7 @@
               </a:rPr>
               <a:t>a year in new Airbnb fees, from the NYC pilot alone</a:t>
             </a:r>
-            <a:endParaRPr lang="en-US" sz="1100" dirty="0"/>
+            <a:endParaRPr lang="en-US" sz="1100"/>
           </a:p>
         </p:txBody>
       </p:sp>
@@ -18683,7 +18860,7 @@
               <a:buNone/>
             </a:pPr>
             <a:r>
-              <a:rPr lang="en-US" sz="3000" b="1" dirty="0">
+              <a:rPr lang="en-US" sz="3000" b="1">
                 <a:solidFill>
                   <a:srgbClr val="222222"/>
                 </a:solidFill>
@@ -18693,7 +18870,7 @@
               </a:rPr>
               <a:t>~3 months</a:t>
             </a:r>
-            <a:endParaRPr lang="en-US" sz="1500" dirty="0"/>
+            <a:endParaRPr lang="en-US" sz="1500"/>
           </a:p>
         </p:txBody>
       </p:sp>
@@ -18725,7 +18902,7 @@
               <a:buNone/>
             </a:pPr>
             <a:r>
-              <a:rPr lang="en-US" sz="1100" dirty="0" b="0">
+              <a:rPr lang="en-US" sz="1100" b="0">
                 <a:solidFill>
                   <a:srgbClr val="717171"/>
                 </a:solidFill>
@@ -18735,7 +18912,7 @@
               </a:rPr>
               <a:t>to pay the build back, at a realistic 35% adoption</a:t>
             </a:r>
-            <a:endParaRPr lang="en-US" sz="1100" dirty="0"/>
+            <a:endParaRPr lang="en-US" sz="1100"/>
           </a:p>
         </p:txBody>
       </p:sp>
@@ -18805,7 +18982,7 @@
               <a:buNone/>
             </a:pPr>
             <a:r>
-              <a:rPr lang="en-US" sz="3000" b="1" dirty="0">
+              <a:rPr lang="en-US" sz="3000" b="1">
                 <a:solidFill>
                   <a:srgbClr val="222222"/>
                 </a:solidFill>
@@ -18815,7 +18992,7 @@
               </a:rPr>
               <a:t>$65K</a:t>
             </a:r>
-            <a:endParaRPr lang="en-US" sz="1500" dirty="0"/>
+            <a:endParaRPr lang="en-US" sz="1500"/>
           </a:p>
         </p:txBody>
       </p:sp>
@@ -18847,7 +19024,7 @@
               <a:buNone/>
             </a:pPr>
             <a:r>
-              <a:rPr lang="en-US" sz="1100" dirty="0" b="0">
+              <a:rPr lang="en-US" sz="1100" b="0">
                 <a:solidFill>
                   <a:srgbClr val="717171"/>
                 </a:solidFill>
@@ -18857,7 +19034,7 @@
               </a:rPr>
               <a:t>one-time build, then $30K a year to run</a:t>
             </a:r>
-            <a:endParaRPr lang="en-US" sz="1100" dirty="0"/>
+            <a:endParaRPr lang="en-US" sz="1100"/>
           </a:p>
         </p:txBody>
       </p:sp>
@@ -18889,7 +19066,7 @@
               <a:buNone/>
             </a:pPr>
             <a:r>
-              <a:rPr lang="en-US" sz="1250" dirty="0" b="1" i="1">
+              <a:rPr lang="en-US" sz="1250" b="1" i="1">
                 <a:solidFill>
                   <a:srgbClr val="FF385C"/>
                 </a:solidFill>
@@ -18899,7 +19076,7 @@
               </a:rPr>
               <a:t>Every underpriced night costs the host and Airbnb both. We build on Smart Pricing, not replace it.</a:t>
             </a:r>
-            <a:endParaRPr lang="en-US" sz="1450" dirty="0"/>
+            <a:endParaRPr lang="en-US" sz="1450"/>
           </a:p>
         </p:txBody>
       </p:sp>
@@ -18961,7 +19138,7 @@
               <a:buNone/>
             </a:pPr>
             <a:r>
-              <a:rPr lang="en-US" sz="1200" b="1" kern="0" spc="200" dirty="0">
+              <a:rPr lang="en-US" sz="1200" b="1" kern="0" spc="200">
                 <a:solidFill>
                   <a:srgbClr val="FF385C"/>
                 </a:solidFill>
@@ -18971,7 +19148,7 @@
               </a:rPr>
               <a:t>BACKUP B5 · VALIDATION &amp; METHODOLOGY</a:t>
             </a:r>
-            <a:endParaRPr lang="en-US" sz="1200" dirty="0"/>
+            <a:endParaRPr lang="en-US" sz="1200"/>
           </a:p>
         </p:txBody>
       </p:sp>
@@ -19003,7 +19180,7 @@
               <a:buNone/>
             </a:pPr>
             <a:r>
-              <a:rPr lang="en-US" sz="2800" b="1" dirty="0">
+              <a:rPr lang="en-US" sz="2800" b="1">
                 <a:solidFill>
                   <a:srgbClr val="222222"/>
                 </a:solidFill>
@@ -19013,7 +19190,7 @@
               </a:rPr>
               <a:t>Why we trust the number</a:t>
             </a:r>
-            <a:endParaRPr lang="en-US" sz="2800" dirty="0"/>
+            <a:endParaRPr lang="en-US" sz="2800"/>
           </a:p>
         </p:txBody>
       </p:sp>
@@ -19045,7 +19222,7 @@
               <a:buNone/>
             </a:pPr>
             <a:r>
-              <a:rPr lang="en-US" sz="1450" dirty="0">
+              <a:rPr lang="en-US" sz="1450">
                 <a:solidFill>
                   <a:srgbClr val="717171"/>
                 </a:solidFill>
@@ -19055,7 +19232,7 @@
               </a:rPr>
               <a:t>The statistical guardrails behind the recommendation.</a:t>
             </a:r>
-            <a:endParaRPr lang="en-US" sz="1450" dirty="0"/>
+            <a:endParaRPr lang="en-US" sz="1450"/>
           </a:p>
         </p:txBody>
       </p:sp>
@@ -19162,7 +19339,7 @@
               <a:buNone/>
             </a:pPr>
             <a:r>
-              <a:rPr lang="en-US" sz="900" b="1" dirty="0">
+              <a:rPr lang="en-US" sz="900" b="1">
                 <a:solidFill>
                   <a:srgbClr val="9AA0A6"/>
                 </a:solidFill>
@@ -19172,7 +19349,7 @@
               </a:rPr>
               <a:t>20</a:t>
             </a:r>
-            <a:endParaRPr lang="en-US" sz="900" dirty="0"/>
+            <a:endParaRPr lang="en-US" sz="900"/>
           </a:p>
         </p:txBody>
       </p:sp>
@@ -19296,7 +19473,7 @@
               <a:buNone/>
             </a:pPr>
             <a:r>
-              <a:rPr lang="en-US" sz="1250" b="1" dirty="0">
+              <a:rPr lang="en-US" sz="1250" b="1">
                 <a:solidFill>
                   <a:srgbClr val="222222"/>
                 </a:solidFill>
@@ -19306,7 +19483,7 @@
               </a:rPr>
               <a:t>80/20 + 5-fold out-of-fold</a:t>
             </a:r>
-            <a:endParaRPr lang="en-US" sz="1250" dirty="0"/>
+            <a:endParaRPr lang="en-US" sz="1250"/>
           </a:p>
         </p:txBody>
       </p:sp>
@@ -19338,7 +19515,7 @@
               <a:buNone/>
             </a:pPr>
             <a:r>
-              <a:rPr lang="en-US" sz="1050" dirty="0">
+              <a:rPr lang="en-US" sz="1050">
                 <a:solidFill>
                   <a:srgbClr val="717171"/>
                 </a:solidFill>
@@ -19348,7 +19525,7 @@
               </a:rPr>
               <a:t>Every listing scored by a model that never trained on it, genuinely out-of-sample.</a:t>
             </a:r>
-            <a:endParaRPr lang="en-US" sz="1050" dirty="0"/>
+            <a:endParaRPr lang="en-US" sz="1050"/>
           </a:p>
         </p:txBody>
       </p:sp>
@@ -19472,7 +19649,7 @@
               <a:buNone/>
             </a:pPr>
             <a:r>
-              <a:rPr lang="en-US" sz="1250" b="1" dirty="0">
+              <a:rPr lang="en-US" sz="1250" b="1">
                 <a:solidFill>
                   <a:srgbClr val="222222"/>
                 </a:solidFill>
@@ -19482,7 +19659,7 @@
               </a:rPr>
               <a:t>Duan smearing correction</a:t>
             </a:r>
-            <a:endParaRPr lang="en-US" sz="1250" dirty="0"/>
+            <a:endParaRPr lang="en-US" sz="1250"/>
           </a:p>
         </p:txBody>
       </p:sp>
@@ -19514,7 +19691,7 @@
               <a:buNone/>
             </a:pPr>
             <a:r>
-              <a:rPr lang="en-US" sz="1050" dirty="0">
+              <a:rPr lang="en-US" sz="1050">
                 <a:solidFill>
                   <a:srgbClr val="717171"/>
                 </a:solidFill>
@@ -19524,7 +19701,7 @@
               </a:rPr>
               <a:t>Log predictions retransformed to unbiased dollars (factor ≈1.16).</a:t>
             </a:r>
-            <a:endParaRPr lang="en-US" sz="1050" dirty="0"/>
+            <a:endParaRPr lang="en-US" sz="1050"/>
           </a:p>
         </p:txBody>
       </p:sp>
@@ -19648,7 +19825,7 @@
               <a:buNone/>
             </a:pPr>
             <a:r>
-              <a:rPr lang="en-US" sz="1250" b="1" dirty="0">
+              <a:rPr lang="en-US" sz="1250" b="1">
                 <a:solidFill>
                   <a:srgbClr val="222222"/>
                 </a:solidFill>
@@ -19658,7 +19835,7 @@
               </a:rPr>
               <a:t>HC3 robust standard errors</a:t>
             </a:r>
-            <a:endParaRPr lang="en-US" sz="1250" dirty="0"/>
+            <a:endParaRPr lang="en-US" sz="1250"/>
           </a:p>
         </p:txBody>
       </p:sp>
@@ -19690,7 +19867,7 @@
               <a:buNone/>
             </a:pPr>
             <a:r>
-              <a:rPr lang="en-US" sz="1050" dirty="0">
+              <a:rPr lang="en-US" sz="1050">
                 <a:solidFill>
                   <a:srgbClr val="717171"/>
                 </a:solidFill>
@@ -19700,7 +19877,7 @@
               </a:rPr>
               <a:t>Heteroskedasticity-consistent errors on every coefficient.</a:t>
             </a:r>
-            <a:endParaRPr lang="en-US" sz="1050" dirty="0"/>
+            <a:endParaRPr lang="en-US" sz="1050"/>
           </a:p>
         </p:txBody>
       </p:sp>
@@ -19824,7 +20001,7 @@
               <a:buNone/>
             </a:pPr>
             <a:r>
-              <a:rPr lang="en-US" sz="1250" b="1" dirty="0">
+              <a:rPr lang="en-US" sz="1250" b="1">
                 <a:solidFill>
                   <a:srgbClr val="222222"/>
                 </a:solidFill>
@@ -19834,7 +20011,7 @@
               </a:rPr>
               <a:t>Ridge multicollinearity check</a:t>
             </a:r>
-            <a:endParaRPr lang="en-US" sz="1250" dirty="0"/>
+            <a:endParaRPr lang="en-US" sz="1250"/>
           </a:p>
         </p:txBody>
       </p:sp>
@@ -19866,7 +20043,7 @@
               <a:buNone/>
             </a:pPr>
             <a:r>
-              <a:rPr lang="en-US" sz="1050" dirty="0">
+              <a:rPr lang="en-US" sz="1050">
                 <a:solidFill>
                   <a:srgbClr val="717171"/>
                 </a:solidFill>
@@ -19876,7 +20053,7 @@
               </a:rPr>
               <a:t>Correlated review scores tested with a CV Ridge penalty; the fit stays stable.</a:t>
             </a:r>
-            <a:endParaRPr lang="en-US" sz="1050" dirty="0"/>
+            <a:endParaRPr lang="en-US" sz="1050"/>
           </a:p>
         </p:txBody>
       </p:sp>
@@ -20000,7 +20177,7 @@
               <a:buNone/>
             </a:pPr>
             <a:r>
-              <a:rPr lang="en-US" sz="1250" b="1" dirty="0">
+              <a:rPr lang="en-US" sz="1250" b="1">
                 <a:solidFill>
                   <a:srgbClr val="222222"/>
                 </a:solidFill>
@@ -20010,7 +20187,7 @@
               </a:rPr>
               <a:t>Segment split</a:t>
             </a:r>
-            <a:endParaRPr lang="en-US" sz="1250" dirty="0"/>
+            <a:endParaRPr lang="en-US" sz="1250"/>
           </a:p>
         </p:txBody>
       </p:sp>
@@ -20042,7 +20219,7 @@
               <a:buNone/>
             </a:pPr>
             <a:r>
-              <a:rPr lang="en-US" sz="1050" dirty="0">
+              <a:rPr lang="en-US" sz="1050">
                 <a:solidFill>
                   <a:srgbClr val="717171"/>
                 </a:solidFill>
@@ -20052,7 +20229,7 @@
               </a:rPr>
               <a:t>Short-stay ($376.82 mean) vs monthly ($162.73) modeled separately.</a:t>
             </a:r>
-            <a:endParaRPr lang="en-US" sz="1050" dirty="0"/>
+            <a:endParaRPr lang="en-US" sz="1050"/>
           </a:p>
         </p:txBody>
       </p:sp>
@@ -20176,7 +20353,7 @@
               <a:buNone/>
             </a:pPr>
             <a:r>
-              <a:rPr lang="en-US" sz="1250" b="1" dirty="0">
+              <a:rPr lang="en-US" sz="1250" b="1">
                 <a:solidFill>
                   <a:srgbClr val="222222"/>
                 </a:solidFill>
@@ -20186,7 +20363,7 @@
               </a:rPr>
               <a:t>Known limit</a:t>
             </a:r>
-            <a:endParaRPr lang="en-US" sz="1250" dirty="0"/>
+            <a:endParaRPr lang="en-US" sz="1250"/>
           </a:p>
         </p:txBody>
       </p:sp>
@@ -20218,7 +20395,7 @@
               <a:buNone/>
             </a:pPr>
             <a:r>
-              <a:rPr lang="en-US" sz="1050" dirty="0">
+              <a:rPr lang="en-US" sz="1050">
                 <a:solidFill>
                   <a:srgbClr val="717171"/>
                 </a:solidFill>
@@ -20228,7 +20405,7 @@
               </a:rPr>
               <a:t>Occupancy is a proxy; the residual is a conditional pricing gap, not proof of causal mispricing.</a:t>
             </a:r>
-            <a:endParaRPr lang="en-US" sz="1050" dirty="0"/>
+            <a:endParaRPr lang="en-US" sz="1050"/>
           </a:p>
         </p:txBody>
       </p:sp>
@@ -20290,7 +20467,7 @@
               <a:buNone/>
             </a:pPr>
             <a:r>
-              <a:rPr lang="en-US" sz="1200" b="1" kern="0" spc="200" dirty="0">
+              <a:rPr lang="en-US" sz="1200" b="1" kern="0" spc="200">
                 <a:solidFill>
                   <a:srgbClr val="FF385C"/>
                 </a:solidFill>
@@ -20300,7 +20477,7 @@
               </a:rPr>
               <a:t>02 · CONTEXT &amp; PROBLEM</a:t>
             </a:r>
-            <a:endParaRPr lang="en-US" sz="1200" dirty="0"/>
+            <a:endParaRPr lang="en-US" sz="1200"/>
           </a:p>
         </p:txBody>
       </p:sp>
@@ -20332,7 +20509,7 @@
               <a:buNone/>
             </a:pPr>
             <a:r>
-              <a:rPr lang="en-US" sz="2900" b="1" dirty="0">
+              <a:rPr lang="en-US" sz="2900" b="1">
                 <a:solidFill>
                   <a:srgbClr val="222222"/>
                 </a:solidFill>
@@ -20342,7 +20519,7 @@
               </a:rPr>
               <a:t>A huge marketplace with a transparency gap</a:t>
             </a:r>
-            <a:endParaRPr lang="en-US" sz="2900" dirty="0"/>
+            <a:endParaRPr lang="en-US" sz="2900"/>
           </a:p>
         </p:txBody>
       </p:sp>
@@ -20374,7 +20551,7 @@
               <a:buNone/>
             </a:pPr>
             <a:r>
-              <a:rPr lang="en-US" sz="1450" dirty="0">
+              <a:rPr lang="en-US" sz="1450">
                 <a:solidFill>
                   <a:srgbClr val="717171"/>
                 </a:solidFill>
@@ -20384,7 +20561,7 @@
               </a:rPr>
               <a:t>Airbnb connects millions of hosts and guests, and pricing moves both sides of the market.</a:t>
             </a:r>
-            <a:endParaRPr lang="en-US" sz="1450" dirty="0"/>
+            <a:endParaRPr lang="en-US" sz="1450"/>
           </a:p>
         </p:txBody>
       </p:sp>
@@ -20469,7 +20646,7 @@
               <a:buNone/>
             </a:pPr>
             <a:r>
-              <a:rPr lang="en-US" sz="950" b="1" kern="0" spc="100" dirty="0">
+              <a:rPr lang="en-US" sz="950" b="1" kern="0" spc="100">
                 <a:solidFill>
                   <a:srgbClr val="9AA0A6"/>
                 </a:solidFill>
@@ -20480,7 +20657,7 @@
               <a:t>PRESENTS  </a:t>
             </a:r>
             <a:r>
-              <a:rPr lang="en-US" sz="950" b="1" dirty="0">
+              <a:rPr lang="en-US" sz="950" b="1">
                 <a:solidFill>
                   <a:srgbClr val="222222"/>
                 </a:solidFill>
@@ -20490,7 +20667,7 @@
               </a:rPr>
               <a:t>Jai</a:t>
             </a:r>
-            <a:endParaRPr lang="en-US" sz="950" dirty="0"/>
+            <a:endParaRPr lang="en-US" sz="950"/>
           </a:p>
         </p:txBody>
       </p:sp>
@@ -20597,7 +20774,7 @@
               <a:buNone/>
             </a:pPr>
             <a:r>
-              <a:rPr lang="en-US" sz="900" b="1" dirty="0">
+              <a:rPr lang="en-US" sz="900" b="1">
                 <a:solidFill>
                   <a:srgbClr val="9AA0A6"/>
                 </a:solidFill>
@@ -20607,7 +20784,7 @@
               </a:rPr>
               <a:t>3</a:t>
             </a:r>
-            <a:endParaRPr lang="en-US" sz="900" dirty="0"/>
+            <a:endParaRPr lang="en-US" sz="900"/>
           </a:p>
         </p:txBody>
       </p:sp>
@@ -20701,7 +20878,7 @@
               <a:buNone/>
             </a:pPr>
             <a:r>
-              <a:rPr lang="en-US" sz="3000" b="1" dirty="0">
+              <a:rPr lang="en-US" sz="3000" b="1">
                 <a:solidFill>
                   <a:srgbClr val="FF385C"/>
                 </a:solidFill>
@@ -20711,7 +20888,7 @@
               </a:rPr>
               <a:t>$12.2B</a:t>
             </a:r>
-            <a:endParaRPr lang="en-US" sz="3000" dirty="0"/>
+            <a:endParaRPr lang="en-US" sz="3000"/>
           </a:p>
         </p:txBody>
       </p:sp>
@@ -20743,7 +20920,7 @@
               <a:buNone/>
             </a:pPr>
             <a:r>
-              <a:rPr lang="en-US" sz="1150" dirty="0">
+              <a:rPr lang="en-US" sz="1150">
                 <a:solidFill>
                   <a:srgbClr val="717171"/>
                 </a:solidFill>
@@ -20753,7 +20930,7 @@
               </a:rPr>
               <a:t>2025 revenue (+10% YoY)</a:t>
             </a:r>
-            <a:endParaRPr lang="en-US" sz="1150" dirty="0"/>
+            <a:endParaRPr lang="en-US" sz="1150"/>
           </a:p>
         </p:txBody>
       </p:sp>
@@ -20847,7 +21024,7 @@
               <a:buNone/>
             </a:pPr>
             <a:r>
-              <a:rPr lang="en-US" sz="3000" b="1" dirty="0">
+              <a:rPr lang="en-US" sz="3000" b="1">
                 <a:solidFill>
                   <a:srgbClr val="00A699"/>
                 </a:solidFill>
@@ -20857,7 +21034,7 @@
               </a:rPr>
               <a:t>8M+</a:t>
             </a:r>
-            <a:endParaRPr lang="en-US" sz="3000" dirty="0"/>
+            <a:endParaRPr lang="en-US" sz="3000"/>
           </a:p>
         </p:txBody>
       </p:sp>
@@ -20889,7 +21066,7 @@
               <a:buNone/>
             </a:pPr>
             <a:r>
-              <a:rPr lang="en-US" sz="1150" dirty="0">
+              <a:rPr lang="en-US" sz="1150">
                 <a:solidFill>
                   <a:srgbClr val="717171"/>
                 </a:solidFill>
@@ -20899,7 +21076,7 @@
               </a:rPr>
               <a:t>active listings worldwide</a:t>
             </a:r>
-            <a:endParaRPr lang="en-US" sz="1150" dirty="0"/>
+            <a:endParaRPr lang="en-US" sz="1150"/>
           </a:p>
         </p:txBody>
       </p:sp>
@@ -20993,7 +21170,7 @@
               <a:buNone/>
             </a:pPr>
             <a:r>
-              <a:rPr lang="en-US" sz="3000" b="1" dirty="0">
+              <a:rPr lang="en-US" sz="3000" b="1">
                 <a:solidFill>
                   <a:srgbClr val="FF385C"/>
                 </a:solidFill>
@@ -21003,7 +21180,7 @@
               </a:rPr>
               <a:t>5M+</a:t>
             </a:r>
-            <a:endParaRPr lang="en-US" sz="3000" dirty="0"/>
+            <a:endParaRPr lang="en-US" sz="3000"/>
           </a:p>
         </p:txBody>
       </p:sp>
@@ -21035,7 +21212,7 @@
               <a:buNone/>
             </a:pPr>
             <a:r>
-              <a:rPr lang="en-US" sz="1150" dirty="0">
+              <a:rPr lang="en-US" sz="1150">
                 <a:solidFill>
                   <a:srgbClr val="717171"/>
                 </a:solidFill>
@@ -21045,7 +21222,7 @@
               </a:rPr>
               <a:t>hosts on the platform</a:t>
             </a:r>
-            <a:endParaRPr lang="en-US" sz="1150" dirty="0"/>
+            <a:endParaRPr lang="en-US" sz="1150"/>
           </a:p>
         </p:txBody>
       </p:sp>
@@ -21139,7 +21316,7 @@
               <a:buNone/>
             </a:pPr>
             <a:r>
-              <a:rPr lang="en-US" sz="3000" b="1" dirty="0">
+              <a:rPr lang="en-US" sz="3000" b="1">
                 <a:solidFill>
                   <a:srgbClr val="FC642D"/>
                 </a:solidFill>
@@ -21149,7 +21326,7 @@
               </a:rPr>
               <a:t>15.5%</a:t>
             </a:r>
-            <a:endParaRPr lang="en-US" sz="3000" dirty="0"/>
+            <a:endParaRPr lang="en-US" sz="3000"/>
           </a:p>
         </p:txBody>
       </p:sp>
@@ -21181,7 +21358,7 @@
               <a:buNone/>
             </a:pPr>
             <a:r>
-              <a:rPr lang="en-US" sz="1150" dirty="0">
+              <a:rPr lang="en-US" sz="1150">
                 <a:solidFill>
                   <a:srgbClr val="717171"/>
                 </a:solidFill>
@@ -21191,7 +21368,7 @@
               </a:rPr>
               <a:t>host-only service fee</a:t>
             </a:r>
-            <a:endParaRPr lang="en-US" sz="1150" dirty="0"/>
+            <a:endParaRPr lang="en-US" sz="1150"/>
           </a:p>
         </p:txBody>
       </p:sp>
@@ -21203,7 +21380,7 @@
         </p:nvSpPr>
         <p:spPr>
           <a:xfrm>
-            <a:off x="502920" y="3947969"/>
+            <a:off x="753441" y="4062791"/>
             <a:ext cx="5468112" cy="2103120"/>
           </a:xfrm>
           <a:prstGeom prst="roundRect">
@@ -21312,7 +21489,7 @@
               <a:buNone/>
             </a:pPr>
             <a:r>
-              <a:rPr lang="en-US" sz="1500" b="1" dirty="0">
+              <a:rPr lang="en-US" sz="1500" b="1">
                 <a:solidFill>
                   <a:srgbClr val="222222"/>
                 </a:solidFill>
@@ -21322,7 +21499,7 @@
               </a:rPr>
               <a:t>The missing piece for hosts</a:t>
             </a:r>
-            <a:endParaRPr lang="en-US" sz="1500" dirty="0"/>
+            <a:endParaRPr lang="en-US" sz="1500"/>
           </a:p>
         </p:txBody>
       </p:sp>
@@ -21334,7 +21511,7 @@
         </p:nvSpPr>
         <p:spPr>
           <a:xfrm>
-            <a:off x="768096" y="4908089"/>
+            <a:off x="893356" y="4908089"/>
             <a:ext cx="4937760" cy="1005840"/>
           </a:xfrm>
           <a:prstGeom prst="rect">
@@ -21347,24 +21524,45 @@
           <a:bodyPr wrap="square" lIns="0" tIns="0" rIns="0" bIns="0" rtlCol="0" anchor="t"/>
           <a:lstStyle/>
           <a:p>
-            <a:pPr marL="0" indent="0">
+            <a:pPr>
               <a:lnSpc>
                 <a:spcPct val="108000"/>
               </a:lnSpc>
-              <a:buNone/>
             </a:pPr>
             <a:r>
-              <a:rPr lang="en-US" sz="1250" dirty="0">
+              <a:rPr lang="en-US" sz="1250">
                 <a:solidFill>
                   <a:srgbClr val="4A4A4A"/>
                 </a:solidFill>
-                <a:latin typeface="Poppins" pitchFamily="34" charset="0"/>
-                <a:ea typeface="Poppins" pitchFamily="34" charset="-122"/>
-                <a:cs typeface="Poppins" pitchFamily="34" charset="-120"/>
-              </a:rPr>
-              <a:t>You get a recommended price, but not where it came from. With little transparency, some hosts ignore it entirely and others follow it without knowing if it's right for their listing.</a:t>
-            </a:r>
-            <a:endParaRPr lang="en-US" sz="1250" dirty="0"/>
+                <a:latin typeface="Poppins"/>
+                <a:ea typeface="+mn-lt"/>
+                <a:cs typeface="Poppins"/>
+              </a:rPr>
+              <a:t>Smart Pricing recommends a nightly price but offers no explanation for how it got there. With no transparency into the logic, hosts either ignore the recommendation entirely or follow it blindly, with no way of knowing if it fits their listing.</a:t>
+            </a:r>
+            <a:endParaRPr lang="en-US" sz="1250">
+              <a:solidFill>
+                <a:srgbClr val="000000"/>
+              </a:solidFill>
+              <a:latin typeface="Poppins"/>
+              <a:ea typeface="+mn-lt"/>
+              <a:cs typeface="Poppins"/>
+            </a:endParaRPr>
+          </a:p>
+          <a:p>
+            <a:pPr>
+              <a:lnSpc>
+                <a:spcPct val="108000"/>
+              </a:lnSpc>
+            </a:pPr>
+            <a:endParaRPr lang="en-US" sz="1250">
+              <a:solidFill>
+                <a:srgbClr val="4A4A4A"/>
+              </a:solidFill>
+              <a:latin typeface="Poppins"/>
+              <a:ea typeface="Calibri" panose="020F0502020204030204"/>
+              <a:cs typeface="Poppins"/>
+            </a:endParaRPr>
           </a:p>
         </p:txBody>
       </p:sp>
@@ -21485,7 +21683,7 @@
               <a:buNone/>
             </a:pPr>
             <a:r>
-              <a:rPr lang="en-US" sz="1500" b="1" dirty="0">
+              <a:rPr lang="en-US" sz="1500" b="1">
                 <a:solidFill>
                   <a:srgbClr val="222222"/>
                 </a:solidFill>
@@ -21495,7 +21693,7 @@
               </a:rPr>
               <a:t>We reframed the question</a:t>
             </a:r>
-            <a:endParaRPr lang="en-US" sz="1500" dirty="0"/>
+            <a:endParaRPr lang="en-US" sz="1500"/>
           </a:p>
         </p:txBody>
       </p:sp>
@@ -21520,24 +21718,26 @@
           <a:bodyPr wrap="square" lIns="0" tIns="0" rIns="0" bIns="0" rtlCol="0" anchor="t"/>
           <a:lstStyle/>
           <a:p>
-            <a:pPr marL="0" indent="0">
+            <a:pPr>
               <a:lnSpc>
                 <a:spcPct val="108000"/>
               </a:lnSpc>
-              <a:buNone/>
             </a:pPr>
             <a:r>
-              <a:rPr lang="en-US" sz="1250" i="1" dirty="0">
+              <a:rPr lang="en-US" sz="1250" i="1">
                 <a:solidFill>
                   <a:srgbClr val="222222"/>
                 </a:solidFill>
-                <a:latin typeface="Poppins" pitchFamily="34" charset="0"/>
-                <a:ea typeface="Poppins" pitchFamily="34" charset="-122"/>
-                <a:cs typeface="Poppins" pitchFamily="34" charset="-120"/>
-              </a:rPr>
-              <a:t>Not “can we build another pricing model?” but “can we help hosts make better pricing decisions by combining accurate recommendations with clear explanations and real market comparisons?”</a:t>
-            </a:r>
-            <a:endParaRPr lang="en-US" sz="1250" dirty="0"/>
+                <a:latin typeface="Poppins"/>
+                <a:ea typeface="Poppins" pitchFamily="34" charset="-122"/>
+                <a:cs typeface="Poppins"/>
+              </a:rPr>
+              <a:t>Not “can we build another pricing model?” but “can we help hosts make smarter pricing decisions by combining accurate recommendations with clear explanations and real market comparisons?”</a:t>
+            </a:r>
+            <a:endParaRPr lang="en-US" sz="1250">
+              <a:latin typeface="Poppins"/>
+              <a:cs typeface="Poppins"/>
+            </a:endParaRPr>
           </a:p>
         </p:txBody>
       </p:sp>
@@ -21599,7 +21799,7 @@
               <a:buNone/>
             </a:pPr>
             <a:r>
-              <a:rPr lang="en-US" sz="1200" b="1" kern="0" spc="200" dirty="0">
+              <a:rPr lang="en-US" sz="1200" b="1" kern="0" spc="200">
                 <a:solidFill>
                   <a:srgbClr val="FF385C"/>
                 </a:solidFill>
@@ -21609,7 +21809,7 @@
               </a:rPr>
               <a:t>03 · THE DATASET</a:t>
             </a:r>
-            <a:endParaRPr lang="en-US" sz="1200" dirty="0"/>
+            <a:endParaRPr lang="en-US" sz="1200"/>
           </a:p>
         </p:txBody>
       </p:sp>
@@ -21634,24 +21834,30 @@
           <a:bodyPr wrap="square" lIns="0" tIns="0" rIns="0" bIns="0" rtlCol="0" anchor="ctr"/>
           <a:lstStyle/>
           <a:p>
-            <a:pPr marL="0" indent="0">
+            <a:pPr>
               <a:lnSpc>
                 <a:spcPct val="102000"/>
               </a:lnSpc>
-              <a:buNone/>
             </a:pPr>
             <a:r>
-              <a:rPr lang="en-US" sz="2900" b="1" dirty="0">
+              <a:rPr lang="en-US" sz="2900" b="1">
                 <a:solidFill>
                   <a:srgbClr val="222222"/>
                 </a:solidFill>
-                <a:latin typeface="Poppins" pitchFamily="34" charset="0"/>
-                <a:ea typeface="Poppins" pitchFamily="34" charset="-122"/>
-                <a:cs typeface="Poppins" pitchFamily="34" charset="-120"/>
-              </a:rPr>
-              <a:t>One market, done properly: New York City</a:t>
-            </a:r>
-            <a:endParaRPr lang="en-US" sz="2900" dirty="0"/>
+                <a:latin typeface="Poppins"/>
+                <a:ea typeface="+mn-lt"/>
+                <a:cs typeface="Poppins"/>
+              </a:rPr>
+              <a:t>New York City as a proving ground</a:t>
+            </a:r>
+            <a:endParaRPr lang="en-US" sz="2900" b="1">
+              <a:solidFill>
+                <a:srgbClr val="000000"/>
+              </a:solidFill>
+              <a:latin typeface="Poppins"/>
+              <a:ea typeface="Calibri"/>
+              <a:cs typeface="Poppins"/>
+            </a:endParaRPr>
           </a:p>
         </p:txBody>
       </p:sp>
@@ -21683,7 +21889,7 @@
               <a:buNone/>
             </a:pPr>
             <a:r>
-              <a:rPr lang="en-US" sz="1450" dirty="0">
+              <a:rPr lang="en-US" sz="1450">
                 <a:solidFill>
                   <a:srgbClr val="717171"/>
                 </a:solidFill>
@@ -21693,7 +21899,7 @@
               </a:rPr>
               <a:t>Inside Airbnb: public, open-source data. We chose one market to build, test and evaluate.</a:t>
             </a:r>
-            <a:endParaRPr lang="en-US" sz="1450" dirty="0"/>
+            <a:endParaRPr lang="en-US" sz="1450"/>
           </a:p>
         </p:txBody>
       </p:sp>
@@ -21778,7 +21984,7 @@
               <a:buNone/>
             </a:pPr>
             <a:r>
-              <a:rPr lang="en-US" sz="950" b="1" kern="0" spc="100" dirty="0">
+              <a:rPr lang="en-US" sz="950" b="1" kern="0" spc="100">
                 <a:solidFill>
                   <a:srgbClr val="9AA0A6"/>
                 </a:solidFill>
@@ -21789,7 +21995,7 @@
               <a:t>PRESENTS  </a:t>
             </a:r>
             <a:r>
-              <a:rPr lang="en-US" sz="950" b="1" dirty="0">
+              <a:rPr lang="en-US" sz="950" b="1">
                 <a:solidFill>
                   <a:srgbClr val="222222"/>
                 </a:solidFill>
@@ -21799,7 +22005,7 @@
               </a:rPr>
               <a:t>Jai</a:t>
             </a:r>
-            <a:endParaRPr lang="en-US" sz="950" dirty="0"/>
+            <a:endParaRPr lang="en-US" sz="950"/>
           </a:p>
         </p:txBody>
       </p:sp>
@@ -21906,7 +22112,7 @@
               <a:buNone/>
             </a:pPr>
             <a:r>
-              <a:rPr lang="en-US" sz="900" b="1" dirty="0">
+              <a:rPr lang="en-US" sz="900" b="1">
                 <a:solidFill>
                   <a:srgbClr val="9AA0A6"/>
                 </a:solidFill>
@@ -21916,7 +22122,7 @@
               </a:rPr>
               <a:t>4</a:t>
             </a:r>
-            <a:endParaRPr lang="en-US" sz="900" dirty="0"/>
+            <a:endParaRPr lang="en-US" sz="900"/>
           </a:p>
         </p:txBody>
       </p:sp>
@@ -21974,7 +22180,7 @@
               <a:buNone/>
             </a:pPr>
             <a:r>
-              <a:rPr lang="en-US" sz="3700" b="1" dirty="0">
+              <a:rPr lang="en-US" sz="3700" b="1">
                 <a:solidFill>
                   <a:srgbClr val="9AA0A6"/>
                 </a:solidFill>
@@ -21984,7 +22190,7 @@
               </a:rPr>
               <a:t>30,259</a:t>
             </a:r>
-            <a:endParaRPr lang="en-US" sz="3700" dirty="0"/>
+            <a:endParaRPr lang="en-US" sz="3700"/>
           </a:p>
         </p:txBody>
       </p:sp>
@@ -22013,7 +22219,7 @@
               <a:buNone/>
             </a:pPr>
             <a:r>
-              <a:rPr lang="en-US" sz="1200" dirty="0">
+              <a:rPr lang="en-US" sz="1200">
                 <a:solidFill>
                   <a:srgbClr val="4A4A4A"/>
                 </a:solidFill>
@@ -22023,7 +22229,7 @@
               </a:rPr>
               <a:t>raw listings scraped</a:t>
             </a:r>
-            <a:endParaRPr lang="en-US" sz="1200" dirty="0"/>
+            <a:endParaRPr lang="en-US" sz="1200"/>
           </a:p>
         </p:txBody>
       </p:sp>
@@ -22052,7 +22258,7 @@
               <a:buNone/>
             </a:pPr>
             <a:r>
-              <a:rPr lang="en-US" sz="2600" b="1" dirty="0">
+              <a:rPr lang="en-US" sz="2600" b="1">
                 <a:solidFill>
                   <a:srgbClr val="9AA0A6"/>
                 </a:solidFill>
@@ -22062,7 +22268,7 @@
               </a:rPr>
               <a:t>→</a:t>
             </a:r>
-            <a:endParaRPr lang="en-US" sz="2600" dirty="0"/>
+            <a:endParaRPr lang="en-US" sz="2600"/>
           </a:p>
         </p:txBody>
       </p:sp>
@@ -22120,7 +22326,7 @@
               <a:buNone/>
             </a:pPr>
             <a:r>
-              <a:rPr lang="en-US" sz="3700" b="1" dirty="0">
+              <a:rPr lang="en-US" sz="3700" b="1">
                 <a:solidFill>
                   <a:srgbClr val="FF385C"/>
                 </a:solidFill>
@@ -22130,7 +22336,7 @@
               </a:rPr>
               <a:t>9,752</a:t>
             </a:r>
-            <a:endParaRPr lang="en-US" sz="3700" dirty="0"/>
+            <a:endParaRPr lang="en-US" sz="3700"/>
           </a:p>
         </p:txBody>
       </p:sp>
@@ -22159,7 +22365,7 @@
               <a:buNone/>
             </a:pPr>
             <a:r>
-              <a:rPr lang="en-US" sz="1200" dirty="0">
+              <a:rPr lang="en-US" sz="1200">
                 <a:solidFill>
                   <a:srgbClr val="4A4A4A"/>
                 </a:solidFill>
@@ -22169,7 +22375,7 @@
               </a:rPr>
               <a:t>active listings (≈9,800)</a:t>
             </a:r>
-            <a:endParaRPr lang="en-US" sz="1200" dirty="0"/>
+            <a:endParaRPr lang="en-US" sz="1200"/>
           </a:p>
         </p:txBody>
       </p:sp>
@@ -22198,7 +22404,7 @@
               <a:buNone/>
             </a:pPr>
             <a:r>
-              <a:rPr lang="en-US" sz="2600" b="1" dirty="0">
+              <a:rPr lang="en-US" sz="2600" b="1">
                 <a:solidFill>
                   <a:srgbClr val="9AA0A6"/>
                 </a:solidFill>
@@ -22208,7 +22414,7 @@
               </a:rPr>
               <a:t>→</a:t>
             </a:r>
-            <a:endParaRPr lang="en-US" sz="2600" dirty="0"/>
+            <a:endParaRPr lang="en-US" sz="2600"/>
           </a:p>
         </p:txBody>
       </p:sp>
@@ -22266,7 +22472,7 @@
               <a:buNone/>
             </a:pPr>
             <a:r>
-              <a:rPr lang="en-US" sz="3700" b="1" dirty="0">
+              <a:rPr lang="en-US" sz="3700" b="1">
                 <a:solidFill>
                   <a:srgbClr val="007A73"/>
                 </a:solidFill>
@@ -22276,7 +22482,7 @@
               </a:rPr>
               <a:t>80</a:t>
             </a:r>
-            <a:endParaRPr lang="en-US" sz="3700" dirty="0"/>
+            <a:endParaRPr lang="en-US" sz="3700"/>
           </a:p>
         </p:txBody>
       </p:sp>
@@ -22305,7 +22511,7 @@
               <a:buNone/>
             </a:pPr>
             <a:r>
-              <a:rPr lang="en-US" sz="1200" dirty="0">
+              <a:rPr lang="en-US" sz="1200">
                 <a:solidFill>
                   <a:srgbClr val="4A4A4A"/>
                 </a:solidFill>
@@ -22315,7 +22521,7 @@
               </a:rPr>
               <a:t>engineered features</a:t>
             </a:r>
-            <a:endParaRPr lang="en-US" sz="1200" dirty="0"/>
+            <a:endParaRPr lang="en-US" sz="1200"/>
           </a:p>
         </p:txBody>
       </p:sp>
@@ -22344,7 +22550,7 @@
               <a:buNone/>
             </a:pPr>
             <a:r>
-              <a:rPr lang="en-US" sz="1250" b="1" dirty="0">
+              <a:rPr lang="en-US" sz="1250" b="1">
                 <a:solidFill>
                   <a:srgbClr val="222222"/>
                 </a:solidFill>
@@ -22355,7 +22561,7 @@
               <a:t>For each listing:  </a:t>
             </a:r>
             <a:r>
-              <a:rPr lang="en-US" sz="1250" dirty="0">
+              <a:rPr lang="en-US" sz="1250">
                 <a:solidFill>
                   <a:srgbClr val="4A4A4A"/>
                 </a:solidFill>
@@ -22365,7 +22571,7 @@
               </a:rPr>
               <a:t>nightly price · availability · reviews · amenities · location · host characteristics.</a:t>
             </a:r>
-            <a:endParaRPr lang="en-US" sz="1250" dirty="0"/>
+            <a:endParaRPr lang="en-US" sz="1250"/>
           </a:p>
         </p:txBody>
       </p:sp>
@@ -22486,7 +22692,7 @@
               <a:buNone/>
             </a:pPr>
             <a:r>
-              <a:rPr lang="en-US" sz="1350" b="1" dirty="0">
+              <a:rPr lang="en-US" sz="1350" b="1">
                 <a:solidFill>
                   <a:srgbClr val="222222"/>
                 </a:solidFill>
@@ -22496,7 +22702,7 @@
               </a:rPr>
               <a:t>Clean &amp; prepare</a:t>
             </a:r>
-            <a:endParaRPr lang="en-US" sz="1350" dirty="0"/>
+            <a:endParaRPr lang="en-US" sz="1350"/>
           </a:p>
         </p:txBody>
       </p:sp>
@@ -22528,7 +22734,7 @@
               <a:buNone/>
             </a:pPr>
             <a:r>
-              <a:rPr lang="en-US" sz="1100" dirty="0">
+              <a:rPr lang="en-US" sz="1100">
                 <a:solidFill>
                   <a:srgbClr val="717171"/>
                 </a:solidFill>
@@ -22538,7 +22744,7 @@
               </a:rPr>
               <a:t>Handle missing values, parse amenities, engineer features into a reliable modeling table.</a:t>
             </a:r>
-            <a:endParaRPr lang="en-US" sz="1100" dirty="0"/>
+            <a:endParaRPr lang="en-US" sz="1100"/>
           </a:p>
         </p:txBody>
       </p:sp>
@@ -22659,7 +22865,7 @@
               <a:buNone/>
             </a:pPr>
             <a:r>
-              <a:rPr lang="en-US" sz="1350" b="1" dirty="0">
+              <a:rPr lang="en-US" sz="1350" b="1">
                 <a:solidFill>
                   <a:srgbClr val="222222"/>
                 </a:solidFill>
@@ -22669,7 +22875,7 @@
               </a:rPr>
               <a:t>Understand first</a:t>
             </a:r>
-            <a:endParaRPr lang="en-US" sz="1350" dirty="0"/>
+            <a:endParaRPr lang="en-US" sz="1350"/>
           </a:p>
         </p:txBody>
       </p:sp>
@@ -22701,7 +22907,7 @@
               <a:buNone/>
             </a:pPr>
             <a:r>
-              <a:rPr lang="en-US" sz="1100" dirty="0">
+              <a:rPr lang="en-US" sz="1100">
                 <a:solidFill>
                   <a:srgbClr val="717171"/>
                 </a:solidFill>
@@ -22711,7 +22917,7 @@
               </a:rPr>
               <a:t>Before modeling: which variables matter, and what relationships already exist in the data?</a:t>
             </a:r>
-            <a:endParaRPr lang="en-US" sz="1100" dirty="0"/>
+            <a:endParaRPr lang="en-US" sz="1100"/>
           </a:p>
         </p:txBody>
       </p:sp>
@@ -22832,7 +23038,7 @@
               <a:buNone/>
             </a:pPr>
             <a:r>
-              <a:rPr lang="en-US" sz="1350" b="1" dirty="0">
+              <a:rPr lang="en-US" sz="1350" b="1">
                 <a:solidFill>
                   <a:srgbClr val="222222"/>
                 </a:solidFill>
@@ -22842,7 +23048,7 @@
               </a:rPr>
               <a:t>Then model</a:t>
             </a:r>
-            <a:endParaRPr lang="en-US" sz="1350" dirty="0"/>
+            <a:endParaRPr lang="en-US" sz="1350"/>
           </a:p>
         </p:txBody>
       </p:sp>
@@ -22874,7 +23080,7 @@
               <a:buNone/>
             </a:pPr>
             <a:r>
-              <a:rPr lang="en-US" sz="1100" dirty="0">
+              <a:rPr lang="en-US" sz="1100">
                 <a:solidFill>
                   <a:srgbClr val="717171"/>
                 </a:solidFill>
@@ -22884,7 +23090,7 @@
               </a:rPr>
               <a:t>Only once we understood the data did we move to machine learning, starting with EDA.</a:t>
             </a:r>
-            <a:endParaRPr lang="en-US" sz="1100" dirty="0"/>
+            <a:endParaRPr lang="en-US" sz="1100"/>
           </a:p>
         </p:txBody>
       </p:sp>
@@ -22946,7 +23152,7 @@
               <a:buNone/>
             </a:pPr>
             <a:r>
-              <a:rPr lang="en-US" sz="1200" b="1" kern="0" spc="200" dirty="0">
+              <a:rPr lang="en-US" sz="1200" b="1" kern="0" spc="200">
                 <a:solidFill>
                   <a:srgbClr val="FF385C"/>
                 </a:solidFill>
@@ -22956,7 +23162,7 @@
               </a:rPr>
               <a:t>04 · KEY VARIABLES (EDA)</a:t>
             </a:r>
-            <a:endParaRPr lang="en-US" sz="1200" dirty="0"/>
+            <a:endParaRPr lang="en-US" sz="1200"/>
           </a:p>
         </p:txBody>
       </p:sp>
@@ -22981,24 +23187,21 @@
           <a:bodyPr wrap="square" lIns="0" tIns="0" rIns="0" bIns="0" rtlCol="0" anchor="ctr"/>
           <a:lstStyle/>
           <a:p>
-            <a:pPr marL="0" indent="0">
+            <a:pPr>
               <a:lnSpc>
                 <a:spcPct val="102000"/>
               </a:lnSpc>
-              <a:buNone/>
             </a:pPr>
             <a:r>
-              <a:rPr lang="en-US" sz="2900" b="1" dirty="0">
+              <a:rPr lang="en-US" sz="2900" b="1">
                 <a:solidFill>
                   <a:srgbClr val="222222"/>
                 </a:solidFill>
-                <a:latin typeface="Poppins" pitchFamily="34" charset="0"/>
-                <a:ea typeface="Poppins" pitchFamily="34" charset="-122"/>
-                <a:cs typeface="Poppins" pitchFamily="34" charset="-120"/>
-              </a:rPr>
-              <a:t>One market, or two?</a:t>
-            </a:r>
-            <a:endParaRPr lang="en-US" sz="2900" dirty="0"/>
+                <a:latin typeface="Poppins"/>
+                <a:cs typeface="Poppins"/>
+              </a:rPr>
+              <a:t>One problem, two markets</a:t>
+            </a:r>
           </a:p>
         </p:txBody>
       </p:sp>
@@ -23030,17 +23233,20 @@
               <a:buNone/>
             </a:pPr>
             <a:r>
-              <a:rPr lang="en-US" sz="1450" dirty="0">
+              <a:rPr lang="en-US" sz="1450">
                 <a:solidFill>
                   <a:srgbClr val="717171"/>
                 </a:solidFill>
-                <a:latin typeface="Poppins" pitchFamily="34" charset="0"/>
-                <a:ea typeface="Poppins" pitchFamily="34" charset="-122"/>
-                <a:cs typeface="Poppins" pitchFamily="34" charset="-120"/>
-              </a:rPr>
-              <a:t>The dataset splits almost evenly, and the two halves behave nothing alike.</a:t>
-            </a:r>
-            <a:endParaRPr lang="en-US" sz="1450" dirty="0"/>
+                <a:latin typeface="Poppins"/>
+                <a:ea typeface="Poppins" pitchFamily="34" charset="-122"/>
+                <a:cs typeface="Poppins"/>
+              </a:rPr>
+              <a:t>The dataset splits almost evenly, and the two halves behave differently.</a:t>
+            </a:r>
+            <a:endParaRPr lang="en-US" sz="1450">
+              <a:latin typeface="Poppins"/>
+              <a:cs typeface="Poppins"/>
+            </a:endParaRPr>
           </a:p>
         </p:txBody>
       </p:sp>
@@ -23125,7 +23331,7 @@
               <a:buNone/>
             </a:pPr>
             <a:r>
-              <a:rPr lang="en-US" sz="950" b="1" kern="0" spc="100" dirty="0">
+              <a:rPr lang="en-US" sz="950" b="1" kern="0" spc="100">
                 <a:solidFill>
                   <a:srgbClr val="9AA0A6"/>
                 </a:solidFill>
@@ -23136,7 +23342,7 @@
               <a:t>PRESENTS  </a:t>
             </a:r>
             <a:r>
-              <a:rPr lang="en-US" sz="950" b="1" dirty="0">
+              <a:rPr lang="en-US" sz="950" b="1">
                 <a:solidFill>
                   <a:srgbClr val="222222"/>
                 </a:solidFill>
@@ -23146,7 +23352,7 @@
               </a:rPr>
               <a:t>Rachael</a:t>
             </a:r>
-            <a:endParaRPr lang="en-US" sz="950" dirty="0"/>
+            <a:endParaRPr lang="en-US" sz="950"/>
           </a:p>
         </p:txBody>
       </p:sp>
@@ -23253,7 +23459,7 @@
               <a:buNone/>
             </a:pPr>
             <a:r>
-              <a:rPr lang="en-US" sz="900" b="1" dirty="0">
+              <a:rPr lang="en-US" sz="900" b="1">
                 <a:solidFill>
                   <a:srgbClr val="9AA0A6"/>
                 </a:solidFill>
@@ -23263,48 +23469,7 @@
               </a:rPr>
               <a:t>5</a:t>
             </a:r>
-            <a:endParaRPr lang="en-US" sz="900" dirty="0"/>
-          </a:p>
-        </p:txBody>
-      </p:sp>
-      <p:sp>
-        <p:nvSpPr>
-          <p:cNvPr id="37" name="Shape 33"/>
-          <p:cNvSpPr/>
-          <p:nvPr/>
-        </p:nvSpPr>
-        <p:spPr>
-          <a:xfrm>
-            <a:off x="8001000" y="2286000"/>
-            <a:ext cx="3685032" cy="3657600"/>
-          </a:xfrm>
-          <a:prstGeom prst="roundRect">
-            <a:avLst>
-              <a:gd name="adj" fmla="val 3500"/>
-            </a:avLst>
-          </a:prstGeom>
-          <a:solidFill>
-            <a:srgbClr val="FFEEF2"/>
-          </a:solidFill>
-          <a:ln w="12700">
-            <a:solidFill>
-              <a:srgbClr val="EBEBEB"/>
-            </a:solidFill>
-            <a:prstDash val="solid"/>
-          </a:ln>
-          <a:effectLst>
-            <a:outerShdw blurRad="101600" dist="25400" dir="5400000" algn="bl" rotWithShape="0">
-              <a:srgbClr val="9AA0A6">
-                <a:alpha val="16000"/>
-              </a:srgbClr>
-            </a:outerShdw>
-          </a:effectLst>
-        </p:spPr>
-        <p:txBody>
-          <a:bodyPr/>
-          <a:lstStyle/>
-          <a:p>
-            <a:endParaRPr lang="en-US"/>
+            <a:endParaRPr lang="en-US" sz="900"/>
           </a:p>
         </p:txBody>
       </p:sp>
@@ -23351,7 +23516,7 @@
         </p:blipFill>
         <p:spPr>
           <a:xfrm>
-            <a:off x="8420161" y="2705161"/>
+            <a:off x="7960874" y="2778229"/>
             <a:ext cx="313822" cy="313822"/>
           </a:xfrm>
           <a:prstGeom prst="rect">
@@ -23367,8 +23532,8 @@
         </p:nvSpPr>
         <p:spPr>
           <a:xfrm>
-            <a:off x="9006840" y="2578608"/>
-            <a:ext cx="2560320" cy="365760"/>
+            <a:off x="8422290" y="2776937"/>
+            <a:ext cx="3531087" cy="470143"/>
           </a:xfrm>
           <a:prstGeom prst="rect">
             <a:avLst/>
@@ -23380,34 +23545,30 @@
           <a:bodyPr wrap="square" lIns="0" tIns="0" rIns="0" bIns="0" rtlCol="0" anchor="ctr"/>
           <a:lstStyle/>
           <a:p>
-            <a:pPr marL="0" indent="0">
-              <a:buNone/>
-            </a:pPr>
-            <a:r>
-              <a:rPr lang="en-US" sz="1500" b="1" dirty="0">
+            <a:r>
+              <a:rPr lang="en-US" b="1">
                 <a:solidFill>
                   <a:srgbClr val="222222"/>
                 </a:solidFill>
-                <a:latin typeface="Poppins" pitchFamily="34" charset="0"/>
-                <a:ea typeface="Poppins" pitchFamily="34" charset="-122"/>
-                <a:cs typeface="Poppins" pitchFamily="34" charset="-120"/>
-              </a:rPr>
-              <a:t>Why this decides everything</a:t>
-            </a:r>
-            <a:endParaRPr lang="en-US" sz="1500" dirty="0"/>
-          </a:p>
-        </p:txBody>
-      </p:sp>
-      <p:sp>
-        <p:nvSpPr>
-          <p:cNvPr id="41" name="Text 36"/>
-          <p:cNvSpPr/>
-          <p:nvPr/>
-        </p:nvSpPr>
-        <p:spPr>
-          <a:xfrm>
-            <a:off x="8275320" y="3383280"/>
-            <a:ext cx="3200400" cy="914400"/>
+                <a:latin typeface="Poppins"/>
+                <a:cs typeface="Poppins"/>
+              </a:rPr>
+              <a:t>Why two markets?</a:t>
+            </a:r>
+            <a:endParaRPr lang="en-US"/>
+          </a:p>
+        </p:txBody>
+      </p:sp>
+      <p:sp>
+        <p:nvSpPr>
+          <p:cNvPr id="42" name="Text 37"/>
+          <p:cNvSpPr/>
+          <p:nvPr/>
+        </p:nvSpPr>
+        <p:spPr>
+          <a:xfrm>
+            <a:off x="8285758" y="3161360"/>
+            <a:ext cx="3816262" cy="1945709"/>
           </a:xfrm>
           <a:prstGeom prst="rect">
             <a:avLst/>
@@ -23419,77 +23580,54 @@
           <a:bodyPr wrap="square" lIns="0" tIns="0" rIns="0" bIns="0" rtlCol="0" anchor="t"/>
           <a:lstStyle/>
           <a:p>
-            <a:pPr marL="0" indent="0">
+            <a:pPr>
               <a:lnSpc>
                 <a:spcPct val="106000"/>
               </a:lnSpc>
-              <a:buNone/>
             </a:pPr>
-            <a:r>
-              <a:rPr lang="en-US" sz="1250" dirty="0">
-                <a:solidFill>
-                  <a:srgbClr val="4A4A4A"/>
-                </a:solidFill>
-                <a:latin typeface="Poppins" pitchFamily="34" charset="0"/>
-                <a:ea typeface="Poppins" pitchFamily="34" charset="-122"/>
-                <a:cs typeface="Poppins" pitchFamily="34" charset="-120"/>
-              </a:rPr>
-              <a:t>A monthly renter commits to one property and barely shops on nightly rate. A weekend guest compares five listings in an hour.</a:t>
-            </a:r>
-            <a:endParaRPr lang="en-US" sz="1250" dirty="0"/>
-          </a:p>
-        </p:txBody>
-      </p:sp>
-      <p:sp>
-        <p:nvSpPr>
-          <p:cNvPr id="42" name="Text 37"/>
-          <p:cNvSpPr/>
-          <p:nvPr/>
-        </p:nvSpPr>
-        <p:spPr>
-          <a:xfrm>
-            <a:off x="8275320" y="4434840"/>
-            <a:ext cx="3200400" cy="1371600"/>
-          </a:xfrm>
-          <a:prstGeom prst="rect">
-            <a:avLst/>
-          </a:prstGeom>
-          <a:noFill/>
-          <a:ln/>
-        </p:spPr>
-        <p:txBody>
-          <a:bodyPr wrap="square" lIns="0" tIns="0" rIns="0" bIns="0" rtlCol="0" anchor="t"/>
-          <a:lstStyle/>
-          <a:p>
-            <a:pPr marL="0" indent="0">
-              <a:lnSpc>
-                <a:spcPct val="106000"/>
-              </a:lnSpc>
-              <a:buNone/>
-            </a:pPr>
-            <a:r>
-              <a:rPr lang="en-US" sz="1250" b="1" dirty="0">
-                <a:solidFill>
-                  <a:srgbClr val="222222"/>
-                </a:solidFill>
-                <a:latin typeface="Poppins" pitchFamily="34" charset="0"/>
-                <a:ea typeface="Poppins" pitchFamily="34" charset="-122"/>
-                <a:cs typeface="Poppins" pitchFamily="34" charset="-120"/>
-              </a:rPr>
-              <a:t>So we model them separately. </a:t>
-            </a:r>
-            <a:r>
-              <a:rPr lang="en-US" sz="1250" dirty="0">
-                <a:solidFill>
-                  <a:srgbClr val="4A4A4A"/>
-                </a:solidFill>
-                <a:latin typeface="Poppins" pitchFamily="34" charset="0"/>
-                <a:ea typeface="Poppins" pitchFamily="34" charset="-122"/>
-                <a:cs typeface="Poppins" pitchFamily="34" charset="-120"/>
-              </a:rPr>
-              <a:t>Two engines, two sets of comparables, two elasticities. Every number that follows is segment-aware.</a:t>
-            </a:r>
-            <a:endParaRPr lang="en-US" sz="1250" dirty="0"/>
+            <a:br>
+              <a:rPr lang="en-US" sz="1600">
+                <a:latin typeface="Poppins"/>
+                <a:ea typeface="Poppins" pitchFamily="34" charset="-122"/>
+                <a:cs typeface="Poppins"/>
+              </a:rPr>
+            </a:br>
+            <a:br>
+              <a:rPr lang="en-US" sz="1600">
+                <a:latin typeface="Poppins"/>
+                <a:cs typeface="Poppins"/>
+              </a:rPr>
+            </a:br>
+            <a:r>
+              <a:rPr lang="en-US" sz="1600" i="1">
+                <a:latin typeface="Poppins"/>
+                <a:ea typeface="+mn-lt"/>
+                <a:cs typeface="Poppins"/>
+              </a:rPr>
+              <a:t>Short-stay competes with hotels. Monthly competes with apartment sublets. Different alternatives, and only one responds measurably to price.</a:t>
+            </a:r>
+            <a:br>
+              <a:rPr lang="en-US" sz="1600" i="1">
+                <a:latin typeface="Poppins"/>
+                <a:ea typeface="+mn-lt"/>
+                <a:cs typeface="Poppins"/>
+              </a:rPr>
+            </a:br>
+            <a:br>
+              <a:rPr lang="en-US" sz="1600" i="1">
+                <a:latin typeface="Poppins"/>
+                <a:ea typeface="+mn-lt"/>
+                <a:cs typeface="Poppins"/>
+              </a:rPr>
+            </a:br>
+            <a:r>
+              <a:rPr lang="en-US" sz="1600" i="1">
+                <a:latin typeface="Poppins"/>
+                <a:ea typeface="+mn-lt"/>
+                <a:cs typeface="Poppins"/>
+              </a:rPr>
+              <a:t>One engine, calibrated separately for each market: its own comparables, its own elasticity. Every number that follows is market-aware.</a:t>
+            </a:r>
           </a:p>
         </p:txBody>
       </p:sp>
@@ -23774,7 +23912,7 @@
           <a:p>
             <a:pPr algn="l"/>
             <a:r>
-              <a:rPr sz="1100" b="0" dirty="0">
+              <a:rPr sz="1100" b="0">
                 <a:solidFill>
                   <a:srgbClr val="717171"/>
                 </a:solidFill>
@@ -23783,7 +23921,7 @@
               <a:t>price elasticity</a:t>
             </a:r>
             <a:r>
-              <a:rPr lang="en-US" sz="1100" b="0" dirty="0">
+              <a:rPr lang="en-US" sz="1100" b="0">
                 <a:solidFill>
                   <a:srgbClr val="717171"/>
                 </a:solidFill>
@@ -23792,7 +23930,7 @@
               <a:t>, </a:t>
             </a:r>
             <a:r>
-              <a:rPr sz="1100" b="0" dirty="0">
+              <a:rPr sz="1100" b="0">
                 <a:solidFill>
                   <a:srgbClr val="717171"/>
                 </a:solidFill>
@@ -24153,7 +24291,7 @@
               <a:buNone/>
             </a:pPr>
             <a:r>
-              <a:rPr lang="en-US" sz="1200" b="1" kern="0" spc="200" dirty="0">
+              <a:rPr lang="en-US" sz="1200" b="1" kern="0" spc="200">
                 <a:solidFill>
                   <a:srgbClr val="FF385C"/>
                 </a:solidFill>
@@ -24163,7 +24301,7 @@
               </a:rPr>
               <a:t>05 · A KEY RELATIONSHIP</a:t>
             </a:r>
-            <a:endParaRPr lang="en-US" sz="1200" dirty="0"/>
+            <a:endParaRPr lang="en-US" sz="1200"/>
           </a:p>
         </p:txBody>
       </p:sp>
@@ -24188,24 +24326,22 @@
           <a:bodyPr wrap="square" lIns="0" tIns="0" rIns="0" bIns="0" rtlCol="0" anchor="ctr"/>
           <a:lstStyle/>
           <a:p>
-            <a:pPr marL="0" indent="0">
+            <a:pPr>
               <a:lnSpc>
                 <a:spcPct val="102000"/>
               </a:lnSpc>
-              <a:buNone/>
             </a:pPr>
             <a:r>
-              <a:rPr lang="en-US" sz="2900" b="1" dirty="0">
+              <a:rPr lang="en-US" sz="2900" b="1">
                 <a:solidFill>
                   <a:srgbClr val="222222"/>
                 </a:solidFill>
-                <a:latin typeface="Poppins" pitchFamily="34" charset="0"/>
-                <a:ea typeface="Poppins" pitchFamily="34" charset="-122"/>
-                <a:cs typeface="Poppins" pitchFamily="34" charset="-120"/>
-              </a:rPr>
-              <a:t>Pricing isn't the only thing driving demand</a:t>
-            </a:r>
-            <a:endParaRPr lang="en-US" sz="2900" dirty="0"/>
+                <a:latin typeface="Poppins"/>
+                <a:cs typeface="Poppins"/>
+              </a:rPr>
+              <a:t>Two listings at $200 aren’t the same listing</a:t>
+            </a:r>
+            <a:endParaRPr lang="en-US"/>
           </a:p>
         </p:txBody>
       </p:sp>
@@ -24230,24 +24366,21 @@
           <a:bodyPr wrap="square" lIns="0" tIns="0" rIns="0" bIns="0" rtlCol="0" anchor="ctr"/>
           <a:lstStyle/>
           <a:p>
-            <a:pPr marL="0" indent="0">
+            <a:pPr>
               <a:lnSpc>
                 <a:spcPct val="105000"/>
               </a:lnSpc>
-              <a:buNone/>
             </a:pPr>
             <a:r>
-              <a:rPr lang="en-US" sz="1450" dirty="0">
+              <a:rPr lang="en-US" sz="1450">
                 <a:solidFill>
                   <a:srgbClr val="717171"/>
                 </a:solidFill>
-                <a:latin typeface="Poppins" pitchFamily="34" charset="0"/>
-                <a:ea typeface="Poppins" pitchFamily="34" charset="-122"/>
-                <a:cs typeface="Poppins" pitchFamily="34" charset="-120"/>
-              </a:rPr>
-              <a:t>Reputation and quality move occupancy too, so we shouldn't treat price as the only lever.</a:t>
-            </a:r>
-            <a:endParaRPr lang="en-US" sz="1450" dirty="0"/>
+                <a:latin typeface="Poppins"/>
+                <a:cs typeface="Poppins"/>
+              </a:rPr>
+              <a:t>Reputation moves occupancy on its own. Until you hold it constant, a price comparison tells you nothing.</a:t>
+            </a:r>
           </a:p>
         </p:txBody>
       </p:sp>
@@ -24332,7 +24465,7 @@
               <a:buNone/>
             </a:pPr>
             <a:r>
-              <a:rPr lang="en-US" sz="950" b="1" kern="0" spc="100" dirty="0">
+              <a:rPr lang="en-US" sz="950" b="1" kern="0" spc="100">
                 <a:solidFill>
                   <a:srgbClr val="9AA0A6"/>
                 </a:solidFill>
@@ -24343,7 +24476,7 @@
               <a:t>PRESENTS  </a:t>
             </a:r>
             <a:r>
-              <a:rPr lang="en-US" sz="950" b="1" dirty="0">
+              <a:rPr lang="en-US" sz="950" b="1">
                 <a:solidFill>
                   <a:srgbClr val="222222"/>
                 </a:solidFill>
@@ -24353,7 +24486,7 @@
               </a:rPr>
               <a:t>Rachael</a:t>
             </a:r>
-            <a:endParaRPr lang="en-US" sz="950" dirty="0"/>
+            <a:endParaRPr lang="en-US" sz="950"/>
           </a:p>
         </p:txBody>
       </p:sp>
@@ -24460,7 +24593,7 @@
               <a:buNone/>
             </a:pPr>
             <a:r>
-              <a:rPr lang="en-US" sz="900" b="1" dirty="0">
+              <a:rPr lang="en-US" sz="900" b="1">
                 <a:solidFill>
                   <a:srgbClr val="9AA0A6"/>
                 </a:solidFill>
@@ -24470,7 +24603,7 @@
               </a:rPr>
               <a:t>6</a:t>
             </a:r>
-            <a:endParaRPr lang="en-US" sz="900" dirty="0"/>
+            <a:endParaRPr lang="en-US" sz="900"/>
           </a:p>
         </p:txBody>
       </p:sp>
@@ -24540,7 +24673,7 @@
               <a:buNone/>
             </a:pPr>
             <a:r>
-              <a:rPr lang="en-US" sz="1350" b="1" dirty="0">
+              <a:rPr lang="en-US" sz="1350" b="1">
                 <a:solidFill>
                   <a:srgbClr val="222222"/>
                 </a:solidFill>
@@ -24548,9 +24681,9 @@
                 <a:ea typeface="Poppins" pitchFamily="34" charset="-122"/>
                 <a:cs typeface="Poppins" pitchFamily="34" charset="-120"/>
               </a:rPr>
-              <a:t>Occupancy rises with a host's track record</a:t>
-            </a:r>
-            <a:endParaRPr lang="en-US" sz="1350" dirty="0"/>
+              <a:t>Occupancy rises with review count</a:t>
+            </a:r>
+            <a:endParaRPr lang="en-US" sz="1350"/>
           </a:p>
         </p:txBody>
       </p:sp>
@@ -24608,7 +24741,7 @@
               <a:buNone/>
             </a:pPr>
             <a:r>
-              <a:rPr lang="en-US" sz="1200" b="1" dirty="0">
+              <a:rPr lang="en-US" sz="1200" b="1">
                 <a:solidFill>
                   <a:srgbClr val="222222"/>
                 </a:solidFill>
@@ -24618,7 +24751,7 @@
               </a:rPr>
               <a:t>34%</a:t>
             </a:r>
-            <a:endParaRPr lang="en-US" sz="1200" dirty="0"/>
+            <a:endParaRPr lang="en-US" sz="1200"/>
           </a:p>
         </p:txBody>
       </p:sp>
@@ -24650,7 +24783,7 @@
               <a:buNone/>
             </a:pPr>
             <a:r>
-              <a:rPr lang="en-US" sz="1050" dirty="0">
+              <a:rPr lang="en-US" sz="1050">
                 <a:solidFill>
                   <a:srgbClr val="717171"/>
                 </a:solidFill>
@@ -24660,7 +24793,7 @@
               </a:rPr>
               <a:t>0–10</a:t>
             </a:r>
-            <a:endParaRPr lang="en-US" sz="1050" dirty="0"/>
+            <a:endParaRPr lang="en-US" sz="1050"/>
           </a:p>
           <a:p>
             <a:pPr marL="0" indent="0" algn="ctr">
@@ -24670,7 +24803,7 @@
               <a:buNone/>
             </a:pPr>
             <a:r>
-              <a:rPr lang="en-US" sz="1050" dirty="0">
+              <a:rPr lang="en-US" sz="1050">
                 <a:solidFill>
                   <a:srgbClr val="717171"/>
                 </a:solidFill>
@@ -24680,7 +24813,7 @@
               </a:rPr>
               <a:t>reviews</a:t>
             </a:r>
-            <a:endParaRPr lang="en-US" sz="1050" dirty="0"/>
+            <a:endParaRPr lang="en-US" sz="1050"/>
           </a:p>
         </p:txBody>
       </p:sp>
@@ -24738,7 +24871,7 @@
               <a:buNone/>
             </a:pPr>
             <a:r>
-              <a:rPr lang="en-US" sz="1200" b="1" dirty="0">
+              <a:rPr lang="en-US" sz="1200" b="1">
                 <a:solidFill>
                   <a:srgbClr val="222222"/>
                 </a:solidFill>
@@ -24748,7 +24881,7 @@
               </a:rPr>
               <a:t>37%</a:t>
             </a:r>
-            <a:endParaRPr lang="en-US" sz="1200" dirty="0"/>
+            <a:endParaRPr lang="en-US" sz="1200"/>
           </a:p>
         </p:txBody>
       </p:sp>
@@ -24780,7 +24913,7 @@
               <a:buNone/>
             </a:pPr>
             <a:r>
-              <a:rPr lang="en-US" sz="1050" dirty="0">
+              <a:rPr lang="en-US" sz="1050">
                 <a:solidFill>
                   <a:srgbClr val="717171"/>
                 </a:solidFill>
@@ -24790,7 +24923,7 @@
               </a:rPr>
               <a:t>11–50</a:t>
             </a:r>
-            <a:endParaRPr lang="en-US" sz="1050" dirty="0"/>
+            <a:endParaRPr lang="en-US" sz="1050"/>
           </a:p>
           <a:p>
             <a:pPr marL="0" indent="0" algn="ctr">
@@ -24800,7 +24933,7 @@
               <a:buNone/>
             </a:pPr>
             <a:r>
-              <a:rPr lang="en-US" sz="1050" dirty="0">
+              <a:rPr lang="en-US" sz="1050">
                 <a:solidFill>
                   <a:srgbClr val="717171"/>
                 </a:solidFill>
@@ -24810,7 +24943,7 @@
               </a:rPr>
               <a:t>reviews</a:t>
             </a:r>
-            <a:endParaRPr lang="en-US" sz="1050" dirty="0"/>
+            <a:endParaRPr lang="en-US" sz="1050"/>
           </a:p>
         </p:txBody>
       </p:sp>
@@ -24868,7 +25001,7 @@
               <a:buNone/>
             </a:pPr>
             <a:r>
-              <a:rPr lang="en-US" sz="1200" b="1" dirty="0">
+              <a:rPr lang="en-US" sz="1200" b="1">
                 <a:solidFill>
                   <a:srgbClr val="222222"/>
                 </a:solidFill>
@@ -24878,7 +25011,7 @@
               </a:rPr>
               <a:t>42%</a:t>
             </a:r>
-            <a:endParaRPr lang="en-US" sz="1200" dirty="0"/>
+            <a:endParaRPr lang="en-US" sz="1200"/>
           </a:p>
         </p:txBody>
       </p:sp>
@@ -24910,7 +25043,7 @@
               <a:buNone/>
             </a:pPr>
             <a:r>
-              <a:rPr lang="en-US" sz="1050" dirty="0">
+              <a:rPr lang="en-US" sz="1050">
                 <a:solidFill>
                   <a:srgbClr val="717171"/>
                 </a:solidFill>
@@ -24920,7 +25053,7 @@
               </a:rPr>
               <a:t>51+</a:t>
             </a:r>
-            <a:endParaRPr lang="en-US" sz="1050" dirty="0"/>
+            <a:endParaRPr lang="en-US" sz="1050"/>
           </a:p>
           <a:p>
             <a:pPr marL="0" indent="0" algn="ctr">
@@ -24930,7 +25063,7 @@
               <a:buNone/>
             </a:pPr>
             <a:r>
-              <a:rPr lang="en-US" sz="1050" dirty="0">
+              <a:rPr lang="en-US" sz="1050">
                 <a:solidFill>
                   <a:srgbClr val="717171"/>
                 </a:solidFill>
@@ -24940,7 +25073,7 @@
               </a:rPr>
               <a:t>reviews</a:t>
             </a:r>
-            <a:endParaRPr lang="en-US" sz="1050" dirty="0"/>
+            <a:endParaRPr lang="en-US" sz="1050"/>
           </a:p>
         </p:txBody>
       </p:sp>
@@ -24969,7 +25102,7 @@
               <a:buNone/>
             </a:pPr>
             <a:r>
-              <a:rPr lang="en-US" sz="1050" i="1" dirty="0">
+              <a:rPr lang="en-US" sz="1050" i="1">
                 <a:solidFill>
                   <a:srgbClr val="717171"/>
                 </a:solidFill>
@@ -24977,9 +25110,9 @@
                 <a:ea typeface="Poppins" pitchFamily="34" charset="-122"/>
                 <a:cs typeface="Poppins" pitchFamily="34" charset="-120"/>
               </a:rPr>
-              <a:t>Superhosts average 39% occupancy vs 36% for regular hosts.</a:t>
-            </a:r>
-            <a:endParaRPr lang="en-US" sz="1050" dirty="0"/>
+              <a:t>Host tenure shows no such pattern: flat at 37–39%. It’s the reviews, not the years.</a:t>
+            </a:r>
+            <a:endParaRPr lang="en-US" sz="1050"/>
           </a:p>
         </p:txBody>
       </p:sp>
@@ -25096,21 +25229,17 @@
           <a:bodyPr wrap="square" lIns="0" tIns="0" rIns="0" bIns="0" rtlCol="0" anchor="ctr"/>
           <a:lstStyle/>
           <a:p>
-            <a:pPr marL="0" indent="0">
-              <a:buNone/>
-            </a:pPr>
-            <a:r>
-              <a:rPr lang="en-US" sz="1500" b="1" dirty="0">
+            <a:r>
+              <a:rPr lang="en-US" sz="1500" b="1">
                 <a:solidFill>
                   <a:srgbClr val="222222"/>
                 </a:solidFill>
-                <a:latin typeface="Poppins" pitchFamily="34" charset="0"/>
-                <a:ea typeface="Poppins" pitchFamily="34" charset="-122"/>
-                <a:cs typeface="Poppins" pitchFamily="34" charset="-120"/>
-              </a:rPr>
-              <a:t>Which raises the real question</a:t>
-            </a:r>
-            <a:endParaRPr lang="en-US" sz="1500" dirty="0"/>
+                <a:latin typeface="Poppins"/>
+                <a:cs typeface="Poppins"/>
+              </a:rPr>
+              <a:t>Which is why we built a model</a:t>
+            </a:r>
+            <a:endParaRPr lang="en-US"/>
           </a:p>
         </p:txBody>
       </p:sp>
@@ -25142,17 +25271,42 @@
               <a:buNone/>
             </a:pPr>
             <a:r>
-              <a:rPr lang="en-US" sz="1250" dirty="0">
+              <a:rPr lang="en-US" sz="1250">
                 <a:solidFill>
                   <a:srgbClr val="4A4A4A"/>
                 </a:solidFill>
-                <a:latin typeface="Poppins" pitchFamily="34" charset="0"/>
-                <a:ea typeface="Poppins" pitchFamily="34" charset="-122"/>
-                <a:cs typeface="Poppins" pitchFamily="34" charset="-120"/>
-              </a:rPr>
-              <a:t>Reviews, reputation and listing quality all shape whether guests book, not just price. And when we looked at the market, some listings sat close to what we'd expect while others were clearly above or below similar properties.</a:t>
-            </a:r>
-            <a:endParaRPr lang="en-US" sz="1250" dirty="0"/>
+                <a:latin typeface="Poppins"/>
+                <a:ea typeface="Poppins" pitchFamily="34" charset="-122"/>
+                <a:cs typeface="Poppins"/>
+              </a:rPr>
+              <a:t>Reviews move occupancy independently of price. So “is this listing expensive?” has no answer until you compare it to listings that match on reputation, location, size and amenities.</a:t>
+            </a:r>
+            <a:r>
+              <a:rPr lang="en-US" sz="1250" err="1">
+                <a:solidFill>
+                  <a:srgbClr val="4A4A4A"/>
+                </a:solidFill>
+                <a:latin typeface="Poppins"/>
+                <a:ea typeface="Poppins" pitchFamily="34" charset="-122"/>
+                <a:cs typeface="Poppins"/>
+              </a:rPr>
+              <a:t/>
+            </a:r>
+            <a:r>
+              <a:rPr lang="en-US" sz="1250">
+                <a:solidFill>
+                  <a:srgbClr val="4A4A4A"/>
+                </a:solidFill>
+                <a:latin typeface="Poppins"/>
+                <a:ea typeface="Poppins" pitchFamily="34" charset="-122"/>
+                <a:cs typeface="Poppins"/>
+              </a:rPr>
+              <a:t/>
+            </a:r>
+            <a:endParaRPr lang="en-US" sz="1250">
+              <a:latin typeface="Poppins"/>
+              <a:cs typeface="Poppins"/>
+            </a:endParaRPr>
           </a:p>
         </p:txBody>
       </p:sp>
@@ -25206,24 +25360,26 @@
           <a:bodyPr wrap="square" lIns="0" tIns="0" rIns="0" bIns="0" rtlCol="0" anchor="ctr"/>
           <a:lstStyle/>
           <a:p>
-            <a:pPr marL="0" indent="0">
+            <a:pPr>
               <a:lnSpc>
                 <a:spcPct val="105000"/>
               </a:lnSpc>
-              <a:buNone/>
             </a:pPr>
             <a:r>
-              <a:rPr lang="en-US" sz="1250" b="1" i="1" dirty="0">
+              <a:rPr lang="en-US" sz="1250" b="1" i="1">
                 <a:solidFill>
                   <a:srgbClr val="007A73"/>
                 </a:solidFill>
-                <a:latin typeface="Poppins" pitchFamily="34" charset="0"/>
-                <a:ea typeface="Poppins" pitchFamily="34" charset="-122"/>
-                <a:cs typeface="Poppins" pitchFamily="34" charset="-120"/>
-              </a:rPr>
-              <a:t>So instead of asking “is this listing expensive or cheap?”, we asked: “what should a fair market price actually be?”</a:t>
-            </a:r>
-            <a:endParaRPr lang="en-US" sz="1250" dirty="0"/>
+                <a:latin typeface="Poppins"/>
+                <a:ea typeface="Poppins" pitchFamily="34" charset="-122"/>
+                <a:cs typeface="Poppins"/>
+              </a:rPr>
+              <a:t>That’s the model’s whole job: a fair price against genuinely similar listings, not against the market average.</a:t>
+            </a:r>
+            <a:endParaRPr lang="en-US" sz="1250">
+              <a:latin typeface="Poppins"/>
+              <a:cs typeface="Poppins"/>
+            </a:endParaRPr>
           </a:p>
         </p:txBody>
       </p:sp>
@@ -25285,7 +25441,7 @@
               <a:buNone/>
             </a:pPr>
             <a:r>
-              <a:rPr lang="en-US" sz="1200" b="1" kern="0" spc="200" dirty="0">
+              <a:rPr lang="en-US" sz="1200" b="1" kern="0" spc="200">
                 <a:solidFill>
                   <a:srgbClr val="FF385C"/>
                 </a:solidFill>
@@ -25295,7 +25451,7 @@
               </a:rPr>
               <a:t>06 · THE SOLUTION</a:t>
             </a:r>
-            <a:endParaRPr lang="en-US" sz="1200" dirty="0"/>
+            <a:endParaRPr lang="en-US" sz="1200"/>
           </a:p>
         </p:txBody>
       </p:sp>
@@ -25327,7 +25483,7 @@
               <a:buNone/>
             </a:pPr>
             <a:r>
-              <a:rPr lang="en-US" sz="2900" b="1" dirty="0">
+              <a:rPr lang="en-US" sz="2900" b="1">
                 <a:solidFill>
                   <a:srgbClr val="222222"/>
                 </a:solidFill>
@@ -25337,7 +25493,7 @@
               </a:rPr>
               <a:t>Not another calculator: an explanation</a:t>
             </a:r>
-            <a:endParaRPr lang="en-US" sz="2900" dirty="0"/>
+            <a:endParaRPr lang="en-US" sz="2900"/>
           </a:p>
         </p:txBody>
       </p:sp>
@@ -25369,7 +25525,7 @@
               <a:buNone/>
             </a:pPr>
             <a:r>
-              <a:rPr lang="en-US" sz="1450" dirty="0">
+              <a:rPr lang="en-US" sz="1450">
                 <a:solidFill>
                   <a:srgbClr val="717171"/>
                 </a:solidFill>
@@ -25379,7 +25535,7 @@
               </a:rPr>
               <a:t>When someone tells you to change your price, your first question is “why?” Our product answers it.</a:t>
             </a:r>
-            <a:endParaRPr lang="en-US" sz="1450" dirty="0"/>
+            <a:endParaRPr lang="en-US" sz="1450"/>
           </a:p>
         </p:txBody>
       </p:sp>
@@ -25464,7 +25620,7 @@
               <a:buNone/>
             </a:pPr>
             <a:r>
-              <a:rPr lang="en-US" sz="950" b="1" kern="0" spc="100" dirty="0">
+              <a:rPr lang="en-US" sz="950" b="1" kern="0" spc="100">
                 <a:solidFill>
                   <a:srgbClr val="9AA0A6"/>
                 </a:solidFill>
@@ -25475,7 +25631,7 @@
               <a:t>PRESENTS  </a:t>
             </a:r>
             <a:r>
-              <a:rPr lang="en-US" sz="950" b="1" dirty="0">
+              <a:rPr lang="en-US" sz="950" b="1">
                 <a:solidFill>
                   <a:srgbClr val="222222"/>
                 </a:solidFill>
@@ -25485,7 +25641,7 @@
               </a:rPr>
               <a:t>Manas</a:t>
             </a:r>
-            <a:endParaRPr lang="en-US" sz="950" dirty="0"/>
+            <a:endParaRPr lang="en-US" sz="950"/>
           </a:p>
         </p:txBody>
       </p:sp>
@@ -25592,7 +25748,7 @@
               <a:buNone/>
             </a:pPr>
             <a:r>
-              <a:rPr lang="en-US" sz="900" b="1" dirty="0">
+              <a:rPr lang="en-US" sz="900" b="1">
                 <a:solidFill>
                   <a:srgbClr val="9AA0A6"/>
                 </a:solidFill>
@@ -25602,7 +25758,7 @@
               </a:rPr>
               <a:t>7</a:t>
             </a:r>
-            <a:endParaRPr lang="en-US" sz="900" dirty="0"/>
+            <a:endParaRPr lang="en-US" sz="900"/>
           </a:p>
         </p:txBody>
       </p:sp>
@@ -25726,7 +25882,7 @@
               <a:buNone/>
             </a:pPr>
             <a:r>
-              <a:rPr lang="en-US" sz="1300" b="1" dirty="0">
+              <a:rPr lang="en-US" sz="1300" b="1">
                 <a:solidFill>
                   <a:srgbClr val="222222"/>
                 </a:solidFill>
@@ -25736,7 +25892,7 @@
               </a:rPr>
               <a:t>A recommended fair value</a:t>
             </a:r>
-            <a:endParaRPr lang="en-US" sz="1300" dirty="0"/>
+            <a:endParaRPr lang="en-US" sz="1300"/>
           </a:p>
         </p:txBody>
       </p:sp>
@@ -25768,7 +25924,7 @@
               <a:buNone/>
             </a:pPr>
             <a:r>
-              <a:rPr lang="en-US" sz="1100" dirty="0">
+              <a:rPr lang="en-US" sz="1100">
                 <a:solidFill>
                   <a:srgbClr val="717171"/>
                 </a:solidFill>
@@ -25778,7 +25934,7 @@
               </a:rPr>
               <a:t>One clear number, calibrated to the listing.</a:t>
             </a:r>
-            <a:endParaRPr lang="en-US" sz="1100" dirty="0"/>
+            <a:endParaRPr lang="en-US" sz="1100"/>
           </a:p>
         </p:txBody>
       </p:sp>
@@ -25902,7 +26058,7 @@
               <a:buNone/>
             </a:pPr>
             <a:r>
-              <a:rPr lang="en-US" sz="1300" b="1" dirty="0">
+              <a:rPr lang="en-US" sz="1300" b="1">
                 <a:solidFill>
                   <a:srgbClr val="222222"/>
                 </a:solidFill>
@@ -25912,7 +26068,7 @@
               </a:rPr>
               <a:t>Comparable listings</a:t>
             </a:r>
-            <a:endParaRPr lang="en-US" sz="1300" dirty="0"/>
+            <a:endParaRPr lang="en-US" sz="1300"/>
           </a:p>
         </p:txBody>
       </p:sp>
@@ -25944,7 +26100,7 @@
               <a:buNone/>
             </a:pPr>
             <a:r>
-              <a:rPr lang="en-US" sz="1100" dirty="0">
+              <a:rPr lang="en-US" sz="1100">
                 <a:solidFill>
                   <a:srgbClr val="717171"/>
                 </a:solidFill>
@@ -25954,7 +26110,7 @@
               </a:rPr>
               <a:t>The real, similar properties that support it.</a:t>
             </a:r>
-            <a:endParaRPr lang="en-US" sz="1100" dirty="0"/>
+            <a:endParaRPr lang="en-US" sz="1100"/>
           </a:p>
         </p:txBody>
       </p:sp>
@@ -26078,7 +26234,7 @@
               <a:buNone/>
             </a:pPr>
             <a:r>
-              <a:rPr lang="en-US" sz="1300" b="1" dirty="0">
+              <a:rPr lang="en-US" sz="1300" b="1">
                 <a:solidFill>
                   <a:srgbClr val="222222"/>
                 </a:solidFill>
@@ -26088,7 +26244,7 @@
               </a:rPr>
               <a:t>Amenity differences</a:t>
             </a:r>
-            <a:endParaRPr lang="en-US" sz="1300" dirty="0"/>
+            <a:endParaRPr lang="en-US" sz="1300"/>
           </a:p>
         </p:txBody>
       </p:sp>
@@ -26120,7 +26276,7 @@
               <a:buNone/>
             </a:pPr>
             <a:r>
-              <a:rPr lang="en-US" sz="1100" dirty="0">
+              <a:rPr lang="en-US" sz="1100">
                 <a:solidFill>
                   <a:srgbClr val="717171"/>
                 </a:solidFill>
@@ -26130,7 +26286,7 @@
               </a:rPr>
               <a:t>What comparable high performers offer that you don't.</a:t>
             </a:r>
-            <a:endParaRPr lang="en-US" sz="1100" dirty="0"/>
+            <a:endParaRPr lang="en-US" sz="1100"/>
           </a:p>
         </p:txBody>
       </p:sp>
@@ -26254,7 +26410,7 @@
               <a:buNone/>
             </a:pPr>
             <a:r>
-              <a:rPr lang="en-US" sz="1300" b="1" dirty="0">
+              <a:rPr lang="en-US" sz="1300" b="1">
                 <a:solidFill>
                   <a:srgbClr val="222222"/>
                 </a:solidFill>
@@ -26264,7 +26420,7 @@
               </a:rPr>
               <a:t>A revenue what-if</a:t>
             </a:r>
-            <a:endParaRPr lang="en-US" sz="1300" dirty="0"/>
+            <a:endParaRPr lang="en-US" sz="1300"/>
           </a:p>
         </p:txBody>
       </p:sp>
@@ -26296,7 +26452,7 @@
               <a:buNone/>
             </a:pPr>
             <a:r>
-              <a:rPr lang="en-US" sz="1100" dirty="0">
+              <a:rPr lang="en-US" sz="1100">
                 <a:solidFill>
                   <a:srgbClr val="717171"/>
                 </a:solidFill>
@@ -26306,7 +26462,7 @@
               </a:rPr>
               <a:t>Explore how changing price could affect revenue.</a:t>
             </a:r>
-            <a:endParaRPr lang="en-US" sz="1100" dirty="0"/>
+            <a:endParaRPr lang="en-US" sz="1100"/>
           </a:p>
         </p:txBody>
       </p:sp>
@@ -26427,7 +26583,7 @@
               <a:buNone/>
             </a:pPr>
             <a:r>
-              <a:rPr lang="en-US" sz="1450" b="1" dirty="0">
+              <a:rPr lang="en-US" sz="1450" b="1">
                 <a:solidFill>
                   <a:srgbClr val="222222"/>
                 </a:solidFill>
@@ -26437,7 +26593,7 @@
               </a:rPr>
               <a:t>“Commander's Intent”</a:t>
             </a:r>
-            <a:endParaRPr lang="en-US" sz="1450" dirty="0"/>
+            <a:endParaRPr lang="en-US" sz="1450"/>
           </a:p>
         </p:txBody>
       </p:sp>
@@ -26469,7 +26625,7 @@
               <a:buNone/>
             </a:pPr>
             <a:r>
-              <a:rPr lang="en-US" sz="1250" dirty="0">
+              <a:rPr lang="en-US" sz="1250">
                 <a:solidFill>
                   <a:srgbClr val="4A4A4A"/>
                 </a:solidFill>
@@ -26479,7 +26635,7 @@
               </a:rPr>
               <a:t>An idea from our coach: people make better decisions when they understand the reasoning, not when they're simply told what to do.</a:t>
             </a:r>
-            <a:endParaRPr lang="en-US" sz="1250" dirty="0"/>
+            <a:endParaRPr lang="en-US" sz="1250"/>
           </a:p>
         </p:txBody>
       </p:sp>
@@ -26511,7 +26667,7 @@
               <a:buNone/>
             </a:pPr>
             <a:r>
-              <a:rPr lang="en-US" sz="1250" b="1" dirty="0">
+              <a:rPr lang="en-US" sz="1250" b="1">
                 <a:solidFill>
                   <a:srgbClr val="FF385C"/>
                 </a:solidFill>
@@ -26521,7 +26677,7 @@
               </a:rPr>
               <a:t>Hosts trust and act on a recommendation when they understand where it came from. So this is about pricing with confidence, not just predicting a price.</a:t>
             </a:r>
-            <a:endParaRPr lang="en-US" sz="1250" dirty="0"/>
+            <a:endParaRPr lang="en-US" sz="1250"/>
           </a:p>
         </p:txBody>
       </p:sp>
@@ -26583,7 +26739,7 @@
               <a:buNone/>
             </a:pPr>
             <a:r>
-              <a:rPr lang="en-US" sz="1200" b="1" kern="0" spc="200" dirty="0">
+              <a:rPr lang="en-US" sz="1200" b="1" kern="0" spc="200">
                 <a:solidFill>
                   <a:srgbClr val="FF385C"/>
                 </a:solidFill>
@@ -26593,7 +26749,7 @@
               </a:rPr>
               <a:t>07 · MODEL &amp; INSIGHTS</a:t>
             </a:r>
-            <a:endParaRPr lang="en-US" sz="1200" dirty="0"/>
+            <a:endParaRPr lang="en-US" sz="1200"/>
           </a:p>
         </p:txBody>
       </p:sp>
@@ -26625,7 +26781,7 @@
               <a:buNone/>
             </a:pPr>
             <a:r>
-              <a:rPr lang="en-US" sz="2700" b="1" dirty="0">
+              <a:rPr lang="en-US" sz="2700" b="1">
                 <a:solidFill>
                   <a:srgbClr val="222222"/>
                 </a:solidFill>
@@ -26635,7 +26791,7 @@
               </a:rPr>
               <a:t>A price you can trust, and the reason behind it</a:t>
             </a:r>
-            <a:endParaRPr lang="en-US" sz="2700" dirty="0"/>
+            <a:endParaRPr lang="en-US" sz="2700"/>
           </a:p>
         </p:txBody>
       </p:sp>
@@ -26667,7 +26823,7 @@
               <a:buNone/>
             </a:pPr>
             <a:r>
-              <a:rPr lang="en-US" sz="1450" dirty="0">
+              <a:rPr lang="en-US" sz="1450">
                 <a:solidFill>
                   <a:srgbClr val="717171"/>
                 </a:solidFill>
@@ -26677,7 +26833,7 @@
               </a:rPr>
               <a:t>A gradient-boosting model sets the fair price; a nearest-neighbor model explains it.</a:t>
             </a:r>
-            <a:endParaRPr lang="en-US" sz="1450" dirty="0"/>
+            <a:endParaRPr lang="en-US" sz="1450"/>
           </a:p>
         </p:txBody>
       </p:sp>
@@ -26762,7 +26918,7 @@
               <a:buNone/>
             </a:pPr>
             <a:r>
-              <a:rPr lang="en-US" sz="950" b="1" kern="0" spc="100" dirty="0">
+              <a:rPr lang="en-US" sz="950" b="1" kern="0" spc="100">
                 <a:solidFill>
                   <a:srgbClr val="9AA0A6"/>
                 </a:solidFill>
@@ -26773,7 +26929,7 @@
               <a:t>PRESENTS  </a:t>
             </a:r>
             <a:r>
-              <a:rPr lang="en-US" sz="950" b="1" dirty="0">
+              <a:rPr lang="en-US" sz="950" b="1">
                 <a:solidFill>
                   <a:srgbClr val="222222"/>
                 </a:solidFill>
@@ -26783,7 +26939,7 @@
               </a:rPr>
               <a:t>Manas</a:t>
             </a:r>
-            <a:endParaRPr lang="en-US" sz="950" dirty="0"/>
+            <a:endParaRPr lang="en-US" sz="950"/>
           </a:p>
         </p:txBody>
       </p:sp>
@@ -26890,7 +27046,7 @@
               <a:buNone/>
             </a:pPr>
             <a:r>
-              <a:rPr lang="en-US" sz="900" b="1" dirty="0">
+              <a:rPr lang="en-US" sz="900" b="1">
                 <a:solidFill>
                   <a:srgbClr val="9AA0A6"/>
                 </a:solidFill>
@@ -26900,7 +27056,7 @@
               </a:rPr>
               <a:t>8</a:t>
             </a:r>
-            <a:endParaRPr lang="en-US" sz="900" dirty="0"/>
+            <a:endParaRPr lang="en-US" sz="900"/>
           </a:p>
         </p:txBody>
       </p:sp>
@@ -26999,7 +27155,7 @@
               <a:buNone/>
             </a:pPr>
             <a:r>
-              <a:rPr lang="en-US" sz="1100" b="1" dirty="0">
+              <a:rPr lang="en-US" sz="1100" b="1">
                 <a:solidFill>
                   <a:srgbClr val="FFFFFF"/>
                 </a:solidFill>
@@ -27009,7 +27165,7 @@
               </a:rPr>
               <a:t>GBM</a:t>
             </a:r>
-            <a:endParaRPr lang="en-US" sz="1100" dirty="0"/>
+            <a:endParaRPr lang="en-US" sz="1100"/>
           </a:p>
         </p:txBody>
       </p:sp>
@@ -27062,7 +27218,7 @@
               <a:buNone/>
             </a:pPr>
             <a:r>
-              <a:rPr lang="en-US" sz="1500" b="1" dirty="0">
+              <a:rPr lang="en-US" sz="1500" b="1">
                 <a:solidFill>
                   <a:srgbClr val="222222"/>
                 </a:solidFill>
@@ -27072,7 +27228,7 @@
               </a:rPr>
               <a:t>Fair market value</a:t>
             </a:r>
-            <a:endParaRPr lang="en-US" sz="1500" dirty="0"/>
+            <a:endParaRPr lang="en-US" sz="1500"/>
           </a:p>
         </p:txBody>
       </p:sp>
@@ -27104,7 +27260,7 @@
               <a:buNone/>
             </a:pPr>
             <a:r>
-              <a:rPr lang="en-US" sz="1150" dirty="0">
+              <a:rPr lang="en-US" sz="1150">
                 <a:solidFill>
                   <a:srgbClr val="4A4A4A"/>
                 </a:solidFill>
@@ -27114,7 +27270,7 @@
               </a:rPr>
               <a:t>Gradient boosting captures nonlinear interactions between location, amenities, property type and host, then returns a fair price with a confidence interval.</a:t>
             </a:r>
-            <a:endParaRPr lang="en-US" sz="1150" dirty="0"/>
+            <a:endParaRPr lang="en-US" sz="1150"/>
           </a:p>
         </p:txBody>
       </p:sp>
@@ -27213,7 +27369,7 @@
               <a:buNone/>
             </a:pPr>
             <a:r>
-              <a:rPr lang="en-US" sz="1100" b="1" dirty="0">
+              <a:rPr lang="en-US" sz="1100" b="1">
                 <a:solidFill>
                   <a:srgbClr val="FFFFFF"/>
                 </a:solidFill>
@@ -27223,7 +27379,7 @@
               </a:rPr>
               <a:t>KNN</a:t>
             </a:r>
-            <a:endParaRPr lang="en-US" sz="1100" dirty="0"/>
+            <a:endParaRPr lang="en-US" sz="1100"/>
           </a:p>
         </p:txBody>
       </p:sp>
@@ -27276,7 +27432,7 @@
               <a:buNone/>
             </a:pPr>
             <a:r>
-              <a:rPr lang="en-US" sz="1500" b="1" dirty="0">
+              <a:rPr lang="en-US" sz="1500" b="1">
                 <a:solidFill>
                   <a:srgbClr val="222222"/>
                 </a:solidFill>
@@ -27286,7 +27442,7 @@
               </a:rPr>
               <a:t>Comparable listings</a:t>
             </a:r>
-            <a:endParaRPr lang="en-US" sz="1500" dirty="0"/>
+            <a:endParaRPr lang="en-US" sz="1500"/>
           </a:p>
         </p:txBody>
       </p:sp>
@@ -27318,7 +27474,7 @@
               <a:buNone/>
             </a:pPr>
             <a:r>
-              <a:rPr lang="en-US" sz="1150" dirty="0">
+              <a:rPr lang="en-US" sz="1150">
                 <a:solidFill>
                   <a:srgbClr val="4A4A4A"/>
                 </a:solidFill>
@@ -27328,7 +27484,7 @@
               </a:rPr>
               <a:t>The price isn't a black box: nearest-neighbors surfaces the similar listings, and their amenities, that stand behind each recommendation.</a:t>
             </a:r>
-            <a:endParaRPr lang="en-US" sz="1150" dirty="0"/>
+            <a:endParaRPr lang="en-US" sz="1150"/>
           </a:p>
         </p:txBody>
       </p:sp>
@@ -27398,7 +27554,7 @@
               <a:buNone/>
             </a:pPr>
             <a:r>
-              <a:rPr lang="en-US" sz="3400" b="1" dirty="0">
+              <a:rPr lang="en-US" sz="3400" b="1">
                 <a:solidFill>
                   <a:srgbClr val="FF385C"/>
                 </a:solidFill>
@@ -27408,7 +27564,7 @@
               </a:rPr>
               <a:t>19.2%</a:t>
             </a:r>
-            <a:endParaRPr lang="en-US" sz="3400" dirty="0"/>
+            <a:endParaRPr lang="en-US" sz="3400"/>
           </a:p>
         </p:txBody>
       </p:sp>
@@ -27440,7 +27596,7 @@
               <a:buNone/>
             </a:pPr>
             <a:r>
-              <a:rPr lang="en-US" sz="1050" dirty="0">
+              <a:rPr lang="en-US" sz="1050">
                 <a:solidFill>
                   <a:srgbClr val="717171"/>
                 </a:solidFill>
@@ -27450,7 +27606,7 @@
               </a:rPr>
               <a:t>median error, roughly half the error of a plain regression</a:t>
             </a:r>
-            <a:endParaRPr lang="en-US" sz="1050" dirty="0"/>
+            <a:endParaRPr lang="en-US" sz="1050"/>
           </a:p>
         </p:txBody>
       </p:sp>
@@ -27512,7 +27668,7 @@
               <a:buNone/>
             </a:pPr>
             <a:r>
-              <a:rPr lang="en-US" sz="1150" b="1" dirty="0">
+              <a:rPr lang="en-US" sz="1150" b="1">
                 <a:solidFill>
                   <a:srgbClr val="222222"/>
                 </a:solidFill>
@@ -27523,7 +27679,7 @@
               <a:t>Two halves, and both pay off differently.  </a:t>
             </a:r>
             <a:r>
-              <a:rPr lang="en-US" sz="1150" dirty="0">
+              <a:rPr lang="en-US" sz="1150">
                 <a:solidFill>
                   <a:srgbClr val="4A4A4A"/>
                 </a:solidFill>
@@ -27533,7 +27689,7 @@
               </a:rPr>
               <a:t>Roughly half of listings read underpriced against fair value and half overpriced. Raising an underpriced listing adds margin. Cutting an overpriced one adds volume: it fills nights that were sitting empty. Our number counts both.</a:t>
             </a:r>
-            <a:endParaRPr lang="en-US" sz="1150" dirty="0"/>
+            <a:endParaRPr lang="en-US" sz="1150"/>
           </a:p>
         </p:txBody>
       </p:sp>
@@ -27595,7 +27751,7 @@
               <a:buNone/>
             </a:pPr>
             <a:r>
-              <a:rPr lang="en-US" sz="1200" b="1" kern="0" spc="200" dirty="0">
+              <a:rPr lang="en-US" sz="1200" b="1" kern="0" spc="200">
                 <a:solidFill>
                   <a:srgbClr val="FF385C"/>
                 </a:solidFill>
@@ -27605,7 +27761,7 @@
               </a:rPr>
               <a:t>08 · PRODUCT WALKTHROUGH</a:t>
             </a:r>
-            <a:endParaRPr lang="en-US" sz="1200" dirty="0"/>
+            <a:endParaRPr lang="en-US" sz="1200"/>
           </a:p>
         </p:txBody>
       </p:sp>
@@ -27634,7 +27790,7 @@
               <a:buNone/>
             </a:pPr>
             <a:r>
-              <a:rPr lang="en-US" sz="3000" b="1" dirty="0">
+              <a:rPr lang="en-US" sz="3000" b="1">
                 <a:solidFill>
                   <a:srgbClr val="222222"/>
                 </a:solidFill>
@@ -27644,7 +27800,7 @@
               </a:rPr>
               <a:t>The dashboard, in three clicks</a:t>
             </a:r>
-            <a:endParaRPr lang="en-US" sz="3000" dirty="0"/>
+            <a:endParaRPr lang="en-US" sz="3000"/>
           </a:p>
         </p:txBody>
       </p:sp>
@@ -27729,7 +27885,7 @@
               <a:buNone/>
             </a:pPr>
             <a:r>
-              <a:rPr lang="en-US" sz="950" b="1" kern="0" spc="100" dirty="0">
+              <a:rPr lang="en-US" sz="950" b="1" kern="0" spc="100">
                 <a:solidFill>
                   <a:srgbClr val="9AA0A6"/>
                 </a:solidFill>
@@ -27740,7 +27896,7 @@
               <a:t>PRESENTS  </a:t>
             </a:r>
             <a:r>
-              <a:rPr lang="en-US" sz="950" b="1" dirty="0">
+              <a:rPr lang="en-US" sz="950" b="1">
                 <a:solidFill>
                   <a:srgbClr val="222222"/>
                 </a:solidFill>
@@ -27750,7 +27906,7 @@
               </a:rPr>
               <a:t>Manas</a:t>
             </a:r>
-            <a:endParaRPr lang="en-US" sz="950" dirty="0"/>
+            <a:endParaRPr lang="en-US" sz="950"/>
           </a:p>
         </p:txBody>
       </p:sp>
@@ -27927,7 +28083,7 @@
               <a:buNone/>
             </a:pPr>
             <a:r>
-              <a:rPr lang="en-US" sz="1300" b="1" dirty="0">
+              <a:rPr lang="en-US" sz="1300" b="1">
                 <a:solidFill>
                   <a:srgbClr val="FFFFFF"/>
                 </a:solidFill>
@@ -27937,7 +28093,7 @@
               </a:rPr>
               <a:t>Airbnb Pricing Intelligence</a:t>
             </a:r>
-            <a:endParaRPr lang="en-US" sz="1300" dirty="0"/>
+            <a:endParaRPr lang="en-US" sz="1300"/>
           </a:p>
         </p:txBody>
       </p:sp>
@@ -27966,7 +28122,7 @@
               <a:buNone/>
             </a:pPr>
             <a:r>
-              <a:rPr lang="en-US" sz="1050" dirty="0">
+              <a:rPr lang="en-US" sz="1050">
                 <a:solidFill>
                   <a:srgbClr val="FFFFFF"/>
                 </a:solidFill>
@@ -27976,7 +28132,7 @@
               </a:rPr>
               <a:t>Greenpoint Place · Entire home · Brooklyn</a:t>
             </a:r>
-            <a:endParaRPr lang="en-US" sz="1050" dirty="0"/>
+            <a:endParaRPr lang="en-US" sz="1050"/>
           </a:p>
         </p:txBody>
       </p:sp>
@@ -28005,7 +28161,7 @@
               <a:buNone/>
             </a:pPr>
             <a:r>
-              <a:rPr lang="en-US" sz="1000" b="1" kern="0" spc="100" dirty="0">
+              <a:rPr lang="en-US" sz="1000" b="1" kern="0" spc="100">
                 <a:solidFill>
                   <a:srgbClr val="9AA0A6"/>
                 </a:solidFill>
@@ -28015,7 +28171,7 @@
               </a:rPr>
               <a:t>RECOMMENDED FAIR VALUE</a:t>
             </a:r>
-            <a:endParaRPr lang="en-US" sz="1000" dirty="0"/>
+            <a:endParaRPr lang="en-US" sz="1000"/>
           </a:p>
         </p:txBody>
       </p:sp>
@@ -28044,7 +28200,7 @@
               <a:buNone/>
             </a:pPr>
             <a:r>
-              <a:rPr lang="en-US" sz="4400" b="1" dirty="0">
+              <a:rPr lang="en-US" sz="4400" b="1">
                 <a:solidFill>
                   <a:srgbClr val="222222"/>
                 </a:solidFill>
@@ -28055,7 +28211,7 @@
               <a:t>$222</a:t>
             </a:r>
             <a:r>
-              <a:rPr lang="en-US" sz="1400" dirty="0">
+              <a:rPr lang="en-US" sz="1400">
                 <a:solidFill>
                   <a:srgbClr val="717171"/>
                 </a:solidFill>
@@ -28065,7 +28221,7 @@
               </a:rPr>
               <a:t>  /night</a:t>
             </a:r>
-            <a:endParaRPr lang="en-US" sz="4400" dirty="0"/>
+            <a:endParaRPr lang="en-US" sz="4400"/>
           </a:p>
         </p:txBody>
       </p:sp>
@@ -28094,7 +28250,7 @@
               <a:buNone/>
             </a:pPr>
             <a:r>
-              <a:rPr lang="en-US" sz="1100" dirty="0">
+              <a:rPr lang="en-US" sz="1100">
                 <a:solidFill>
                   <a:srgbClr val="717171"/>
                 </a:solidFill>
@@ -28104,7 +28260,7 @@
               </a:rPr>
               <a:t>Confidence range $188 – $256</a:t>
             </a:r>
-            <a:endParaRPr lang="en-US" sz="1100" dirty="0"/>
+            <a:endParaRPr lang="en-US" sz="1100"/>
           </a:p>
         </p:txBody>
       </p:sp>
@@ -28162,7 +28318,7 @@
               <a:buNone/>
             </a:pPr>
             <a:r>
-              <a:rPr lang="en-US" sz="1100" b="1" dirty="0">
+              <a:rPr lang="en-US" sz="1100" b="1">
                 <a:solidFill>
                   <a:srgbClr val="222222"/>
                 </a:solidFill>
@@ -28172,7 +28328,7 @@
               </a:rPr>
               <a:t>YOUR PRICE $138</a:t>
             </a:r>
-            <a:endParaRPr lang="en-US" sz="1100" dirty="0"/>
+            <a:endParaRPr lang="en-US" sz="1100"/>
           </a:p>
         </p:txBody>
       </p:sp>
@@ -28201,7 +28357,7 @@
               <a:buNone/>
             </a:pPr>
             <a:r>
-              <a:rPr lang="en-US" sz="1600" b="1" dirty="0">
+              <a:rPr lang="en-US" sz="1600" b="1">
                 <a:solidFill>
                   <a:srgbClr val="FF385C"/>
                 </a:solidFill>
@@ -28211,7 +28367,7 @@
               </a:rPr>
               <a:t>38% below fair value</a:t>
             </a:r>
-            <a:endParaRPr lang="en-US" sz="1600" dirty="0"/>
+            <a:endParaRPr lang="en-US" sz="1600"/>
           </a:p>
         </p:txBody>
       </p:sp>
@@ -28240,7 +28396,7 @@
               <a:buNone/>
             </a:pPr>
             <a:r>
-              <a:rPr lang="en-US" sz="1000" b="1" kern="0" spc="100" dirty="0">
+              <a:rPr lang="en-US" sz="1000" b="1" kern="0" spc="100">
                 <a:solidFill>
                   <a:srgbClr val="9AA0A6"/>
                 </a:solidFill>
@@ -28250,7 +28406,7 @@
               </a:rPr>
               <a:t>PROJECTED REVENUE · DRAG TO EXPLORE</a:t>
             </a:r>
-            <a:endParaRPr lang="en-US" sz="1000" dirty="0"/>
+            <a:endParaRPr lang="en-US" sz="1000"/>
           </a:p>
         </p:txBody>
       </p:sp>
@@ -28398,7 +28554,7 @@
               <a:buNone/>
             </a:pPr>
             <a:r>
-              <a:rPr lang="en-US" sz="900" dirty="0">
+              <a:rPr lang="en-US" sz="900">
                 <a:solidFill>
                   <a:srgbClr val="717171"/>
                 </a:solidFill>
@@ -28408,7 +28564,7 @@
               </a:rPr>
               <a:t>At $138</a:t>
             </a:r>
-            <a:endParaRPr lang="en-US" sz="900" dirty="0"/>
+            <a:endParaRPr lang="en-US" sz="900"/>
           </a:p>
         </p:txBody>
       </p:sp>
@@ -28466,7 +28622,7 @@
               <a:buNone/>
             </a:pPr>
             <a:r>
-              <a:rPr lang="en-US" sz="900" dirty="0">
+              <a:rPr lang="en-US" sz="900">
                 <a:solidFill>
                   <a:srgbClr val="717171"/>
                 </a:solidFill>
@@ -28476,7 +28632,7 @@
               </a:rPr>
               <a:t>At $222 (fair)</a:t>
             </a:r>
-            <a:endParaRPr lang="en-US" sz="900" dirty="0"/>
+            <a:endParaRPr lang="en-US" sz="900"/>
           </a:p>
         </p:txBody>
       </p:sp>
@@ -28534,7 +28690,7 @@
               <a:buNone/>
             </a:pPr>
             <a:r>
-              <a:rPr lang="en-US" sz="900" dirty="0">
+              <a:rPr lang="en-US" sz="900">
                 <a:solidFill>
                   <a:srgbClr val="717171"/>
                 </a:solidFill>
@@ -28544,7 +28700,7 @@
               </a:rPr>
               <a:t>At $256 (max)</a:t>
             </a:r>
-            <a:endParaRPr lang="en-US" sz="900" dirty="0"/>
+            <a:endParaRPr lang="en-US" sz="900"/>
           </a:p>
         </p:txBody>
       </p:sp>
@@ -28614,7 +28770,7 @@
               <a:buNone/>
             </a:pPr>
             <a:r>
-              <a:rPr lang="en-US" sz="1050" b="1" kern="0" spc="100" dirty="0">
+              <a:rPr lang="en-US" sz="1050" b="1" kern="0" spc="100">
                 <a:solidFill>
                   <a:srgbClr val="9AA0A6"/>
                 </a:solidFill>
@@ -28624,7 +28780,7 @@
               </a:rPr>
               <a:t>COMPARABLE LISTINGS</a:t>
             </a:r>
-            <a:endParaRPr lang="en-US" sz="1050" dirty="0"/>
+            <a:endParaRPr lang="en-US" sz="1050"/>
           </a:p>
         </p:txBody>
       </p:sp>
@@ -28682,7 +28838,7 @@
               <a:buNone/>
             </a:pPr>
             <a:r>
-              <a:rPr lang="en-US" sz="1100" b="1" dirty="0">
+              <a:rPr lang="en-US" sz="1100" b="1">
                 <a:solidFill>
                   <a:srgbClr val="222222"/>
                 </a:solidFill>
@@ -28692,7 +28848,7 @@
               </a:rPr>
               <a:t>Sunny Greenpoint 1BR</a:t>
             </a:r>
-            <a:endParaRPr lang="en-US" sz="1100" dirty="0"/>
+            <a:endParaRPr lang="en-US" sz="1100"/>
           </a:p>
         </p:txBody>
       </p:sp>
@@ -28721,7 +28877,7 @@
               <a:buNone/>
             </a:pPr>
             <a:r>
-              <a:rPr lang="en-US" sz="1300" b="1" dirty="0">
+              <a:rPr lang="en-US" sz="1300" b="1">
                 <a:solidFill>
                   <a:srgbClr val="007A73"/>
                 </a:solidFill>
@@ -28731,7 +28887,7 @@
               </a:rPr>
               <a:t>$229</a:t>
             </a:r>
-            <a:endParaRPr lang="en-US" sz="1300" dirty="0"/>
+            <a:endParaRPr lang="en-US" sz="1300"/>
           </a:p>
         </p:txBody>
       </p:sp>
@@ -28789,7 +28945,7 @@
               <a:buNone/>
             </a:pPr>
             <a:r>
-              <a:rPr lang="en-US" sz="950" b="1" dirty="0">
+              <a:rPr lang="en-US" sz="950" b="1">
                 <a:solidFill>
                   <a:srgbClr val="FF385C"/>
                 </a:solidFill>
@@ -28799,7 +28955,7 @@
               </a:rPr>
               <a:t>+ Self check-in</a:t>
             </a:r>
-            <a:endParaRPr lang="en-US" sz="950" dirty="0"/>
+            <a:endParaRPr lang="en-US" sz="950"/>
           </a:p>
         </p:txBody>
       </p:sp>
@@ -28857,7 +29013,7 @@
               <a:buNone/>
             </a:pPr>
             <a:r>
-              <a:rPr lang="en-US" sz="1100" b="1" dirty="0">
+              <a:rPr lang="en-US" sz="1100" b="1">
                 <a:solidFill>
                   <a:srgbClr val="222222"/>
                 </a:solidFill>
@@ -28867,7 +29023,7 @@
               </a:rPr>
               <a:t>Bright Williamsburg flat</a:t>
             </a:r>
-            <a:endParaRPr lang="en-US" sz="1100" dirty="0"/>
+            <a:endParaRPr lang="en-US" sz="1100"/>
           </a:p>
         </p:txBody>
       </p:sp>
@@ -28896,7 +29052,7 @@
               <a:buNone/>
             </a:pPr>
             <a:r>
-              <a:rPr lang="en-US" sz="1300" b="1" dirty="0">
+              <a:rPr lang="en-US" sz="1300" b="1">
                 <a:solidFill>
                   <a:srgbClr val="007A73"/>
                 </a:solidFill>
@@ -28906,7 +29062,7 @@
               </a:rPr>
               <a:t>$241</a:t>
             </a:r>
-            <a:endParaRPr lang="en-US" sz="1300" dirty="0"/>
+            <a:endParaRPr lang="en-US" sz="1300"/>
           </a:p>
         </p:txBody>
       </p:sp>
@@ -28964,7 +29120,7 @@
               <a:buNone/>
             </a:pPr>
             <a:r>
-              <a:rPr lang="en-US" sz="950" b="1" dirty="0">
+              <a:rPr lang="en-US" sz="950" b="1">
                 <a:solidFill>
                   <a:srgbClr val="FF385C"/>
                 </a:solidFill>
@@ -28974,7 +29130,7 @@
               </a:rPr>
               <a:t>+ Dedicated workspace</a:t>
             </a:r>
-            <a:endParaRPr lang="en-US" sz="950" dirty="0"/>
+            <a:endParaRPr lang="en-US" sz="950"/>
           </a:p>
         </p:txBody>
       </p:sp>
@@ -29032,7 +29188,7 @@
               <a:buNone/>
             </a:pPr>
             <a:r>
-              <a:rPr lang="en-US" sz="1100" b="1" dirty="0">
+              <a:rPr lang="en-US" sz="1100" b="1">
                 <a:solidFill>
                   <a:srgbClr val="222222"/>
                 </a:solidFill>
@@ -29042,7 +29198,7 @@
               </a:rPr>
               <a:t>Modern McCarren loft</a:t>
             </a:r>
-            <a:endParaRPr lang="en-US" sz="1100" dirty="0"/>
+            <a:endParaRPr lang="en-US" sz="1100"/>
           </a:p>
         </p:txBody>
       </p:sp>
@@ -29071,7 +29227,7 @@
               <a:buNone/>
             </a:pPr>
             <a:r>
-              <a:rPr lang="en-US" sz="1300" b="1" dirty="0">
+              <a:rPr lang="en-US" sz="1300" b="1">
                 <a:solidFill>
                   <a:srgbClr val="007A73"/>
                 </a:solidFill>
@@ -29081,7 +29237,7 @@
               </a:rPr>
               <a:t>$208</a:t>
             </a:r>
-            <a:endParaRPr lang="en-US" sz="1300" dirty="0"/>
+            <a:endParaRPr lang="en-US" sz="1300"/>
           </a:p>
         </p:txBody>
       </p:sp>
@@ -29139,7 +29295,7 @@
               <a:buNone/>
             </a:pPr>
             <a:r>
-              <a:rPr lang="en-US" sz="950" b="1" dirty="0">
+              <a:rPr lang="en-US" sz="950" b="1">
                 <a:solidFill>
                   <a:srgbClr val="FF385C"/>
                 </a:solidFill>
@@ -29149,7 +29305,7 @@
               </a:rPr>
               <a:t>+ Air conditioning</a:t>
             </a:r>
-            <a:endParaRPr lang="en-US" sz="950" dirty="0"/>
+            <a:endParaRPr lang="en-US" sz="950"/>
           </a:p>
         </p:txBody>
       </p:sp>
@@ -29178,7 +29334,7 @@
               <a:buNone/>
             </a:pPr>
             <a:r>
-              <a:rPr lang="en-US" sz="950" i="1" dirty="0">
+              <a:rPr lang="en-US" sz="950" i="1">
                 <a:solidFill>
                   <a:srgbClr val="9AA0A6"/>
                 </a:solidFill>
@@ -29188,7 +29344,7 @@
               </a:rPr>
               <a:t>Illustrative product UI, shown as a short pre-recorded walkthrough (this slide mirrors it as a backup).</a:t>
             </a:r>
-            <a:endParaRPr lang="en-US" sz="950" dirty="0"/>
+            <a:endParaRPr lang="en-US" sz="950"/>
           </a:p>
         </p:txBody>
       </p:sp>
@@ -29295,7 +29451,7 @@
               <a:buNone/>
             </a:pPr>
             <a:r>
-              <a:rPr lang="en-US" sz="900" b="1" dirty="0">
+              <a:rPr lang="en-US" sz="900" b="1">
                 <a:solidFill>
                   <a:srgbClr val="9AA0A6"/>
                 </a:solidFill>
@@ -29305,7 +29461,7 @@
               </a:rPr>
               <a:t>9</a:t>
             </a:r>
-            <a:endParaRPr lang="en-US" sz="900" dirty="0"/>
+            <a:endParaRPr lang="en-US" sz="900"/>
           </a:p>
         </p:txBody>
       </p:sp>

--- a/Airbnb Pricing Deck.pptx
+++ b/Airbnb Pricing Deck.pptx
@@ -28,6 +28,7 @@
     <p:sldId id="277" r:id="rId19"/>
     <p:sldId id="278" r:id="rId20"/>
     <p:sldId id="276" r:id="rId21"/>
+    <p:sldId id="279" r:id="rId33"/>
   </p:sldIdLst>
   <p:sldSz cx="12192000" cy="6858000"/>
   <p:notesSz cx="6858000" cy="12192000"/>
@@ -443,6 +444,203 @@
 </pc:chgInfo>
 </file>
 
+<file path=ppt/charts/chart1.xml><?xml version="1.0" encoding="utf-8"?>
+<c:chartSpace xmlns:c="http://schemas.openxmlformats.org/drawingml/2006/chart" xmlns:a="http://schemas.openxmlformats.org/drawingml/2006/main" xmlns:r="http://schemas.openxmlformats.org/officeDocument/2006/relationships">
+  <c:date1904 val="0"/>
+  <c:chart>
+    <c:autoTitleDeleted val="1"/>
+    <c:plotArea>
+      <c:lineChart>
+        <c:grouping val="standard"/>
+        <c:varyColors val="0"/>
+        <c:ser>
+          <c:idx val="0"/>
+          <c:order val="0"/>
+          <c:tx>
+            <c:strRef>
+              <c:f>Sheet1!$B$1</c:f>
+              <c:strCache>
+                <c:ptCount val="1"/>
+                <c:pt idx="0">
+                  <c:v>Cumulative adoption</c:v>
+                </c:pt>
+              </c:strCache>
+            </c:strRef>
+          </c:tx>
+          <c:spPr>
+            <a:ln w="31750">
+              <a:solidFill>
+                <a:srgbClr val="FF385C"/>
+              </a:solidFill>
+            </a:ln>
+          </c:spPr>
+          <c:marker>
+            <c:spPr>
+              <a:solidFill>
+                <a:srgbClr val="FF385C"/>
+              </a:solidFill>
+              <a:ln>
+                <a:solidFill>
+                  <a:srgbClr val="FF385C"/>
+                </a:solidFill>
+              </a:ln>
+            </c:spPr>
+          </c:marker>
+          <c:cat>
+            <c:strRef>
+              <c:f>Sheet1!$A$2:$A$6</c:f>
+              <c:strCache>
+                <c:ptCount val="5"/>
+                <c:pt idx="0">
+                  <c:v>Year 1</c:v>
+                </c:pt>
+                <c:pt idx="1">
+                  <c:v>Year 2</c:v>
+                </c:pt>
+                <c:pt idx="2">
+                  <c:v>Year 3</c:v>
+                </c:pt>
+                <c:pt idx="3">
+                  <c:v>Year 4</c:v>
+                </c:pt>
+                <c:pt idx="4">
+                  <c:v>Year 5</c:v>
+                </c:pt>
+              </c:strCache>
+            </c:strRef>
+          </c:cat>
+          <c:val>
+            <c:numRef>
+              <c:f>Sheet1!$B$2:$B$6</c:f>
+              <c:numCache>
+                <c:formatCode>General</c:formatCode>
+                <c:ptCount val="5"/>
+                <c:pt idx="0">
+                  <c:v>10.0</c:v>
+                </c:pt>
+                <c:pt idx="1">
+                  <c:v>24.0</c:v>
+                </c:pt>
+                <c:pt idx="2">
+                  <c:v>38.0</c:v>
+                </c:pt>
+                <c:pt idx="3">
+                  <c:v>42.0</c:v>
+                </c:pt>
+                <c:pt idx="4">
+                  <c:v>42.0</c:v>
+                </c:pt>
+              </c:numCache>
+            </c:numRef>
+          </c:val>
+          <c:smooth val="0"/>
+        </c:ser>
+        <c:marker val="1"/>
+        <c:smooth val="0"/>
+        <c:axId val="2118791784"/>
+        <c:axId val="2140495176"/>
+      </c:lineChart>
+      <c:catAx>
+        <c:axId val="2118791784"/>
+        <c:scaling>
+          <c:orientation val="minMax"/>
+        </c:scaling>
+        <c:delete val="0"/>
+        <c:axPos val="b"/>
+        <c:majorTickMark val="out"/>
+        <c:minorTickMark val="none"/>
+        <c:tickLblPos val="nextTo"/>
+        <c:spPr>
+          <a:ln>
+            <a:solidFill>
+              <a:srgbClr val="E6E6E6"/>
+            </a:solidFill>
+          </a:ln>
+        </c:spPr>
+        <c:txPr>
+          <a:bodyPr/>
+          <a:lstStyle/>
+          <a:p>
+            <a:pPr>
+              <a:defRPr sz="1100">
+                <a:solidFill>
+                  <a:srgbClr val="717171"/>
+                </a:solidFill>
+              </a:defRPr>
+            </a:pPr>
+          </a:p>
+        </c:txPr>
+        <c:crossAx val="2140495176"/>
+        <c:crosses val="autoZero"/>
+        <c:auto val="1"/>
+        <c:lblAlgn val="ctr"/>
+        <c:lblOffset val="100"/>
+        <c:noMultiLvlLbl val="0"/>
+      </c:catAx>
+      <c:valAx>
+        <c:axId val="2140495176"/>
+        <c:scaling>
+          <c:max val="50.0"/>
+          <c:min val="0.0"/>
+        </c:scaling>
+        <c:delete val="0"/>
+        <c:axPos val="l"/>
+        <c:majorGridlines>
+          <c:spPr>
+            <a:ln w="9525">
+              <a:solidFill>
+                <a:srgbClr val="E6E6E6"/>
+              </a:solidFill>
+            </a:ln>
+          </c:spPr>
+        </c:majorGridlines>
+        <c:numFmt formatCode="0&quot;%&quot;" sourceLinked="0"/>
+        <c:majorTickMark val="out"/>
+        <c:minorTickMark val="none"/>
+        <c:tickLblPos val="nextTo"/>
+        <c:spPr>
+          <a:ln>
+            <a:noFill/>
+          </a:ln>
+        </c:spPr>
+        <c:txPr>
+          <a:bodyPr/>
+          <a:lstStyle/>
+          <a:p>
+            <a:pPr>
+              <a:defRPr sz="1100">
+                <a:solidFill>
+                  <a:srgbClr val="717171"/>
+                </a:solidFill>
+              </a:defRPr>
+            </a:pPr>
+          </a:p>
+        </c:txPr>
+        <c:crossAx val="2118791784"/>
+        <c:crosses val="autoZero"/>
+        <c:majorUnit val="10.0"/>
+      </c:valAx>
+    </c:plotArea>
+    <c:plotVisOnly val="1"/>
+    <c:dispBlanksAs val="gap"/>
+    <c:showDLblsOverMax val="0"/>
+  </c:chart>
+  <c:txPr>
+    <a:bodyPr/>
+    <a:lstStyle/>
+    <a:p>
+      <a:pPr>
+        <a:defRPr sz="1800"/>
+      </a:pPr>
+      <a:endParaRPr lang="en-US"/>
+    </a:p>
+  </c:txPr>
+  <c:externalData r:id="rId1">
+    <c:autoUpdate val="0"/>
+  </c:externalData>
+</c:chartSpace>
+</file>
+
 <file path=ppt/notesMasters/notesMaster1.xml><?xml version="1.0" encoding="utf-8"?>
 <p:notesMaster xmlns:a="http://schemas.openxmlformats.org/drawingml/2006/main" xmlns:r="http://schemas.openxmlformats.org/officeDocument/2006/relationships" xmlns:p="http://schemas.openxmlformats.org/presentationml/2006/main">
   <p:cSld>
@@ -2948,14 +3146,14 @@
       </p:sp>
       <p:sp>
         <p:nvSpPr>
-          <p:cNvPr id="9" name="Text 4"/>
-          <p:cNvSpPr/>
-          <p:nvPr/>
-        </p:nvSpPr>
-        <p:spPr>
-          <a:xfrm>
-            <a:off x="777240" y="3767328"/>
-            <a:ext cx="8046720" cy="457200"/>
+          <p:cNvPr id="10" name="Text 5"/>
+          <p:cNvSpPr/>
+          <p:nvPr/>
+        </p:nvSpPr>
+        <p:spPr>
+          <a:xfrm>
+            <a:off x="777240" y="4800600"/>
+            <a:ext cx="10607040" cy="320040"/>
           </a:xfrm>
           <a:prstGeom prst="rect">
             <a:avLst/>
@@ -2971,31 +3169,114 @@
               <a:buNone/>
             </a:pPr>
             <a:r>
-              <a:rPr lang="en-US" sz="1800">
+              <a:rPr lang="en-US" sz="1250" b="1">
+                <a:solidFill>
+                  <a:srgbClr val="FFFFFF"/>
+                </a:solidFill>
+                <a:latin typeface="Poppins" pitchFamily="34" charset="0"/>
+                <a:ea typeface="Poppins" pitchFamily="34" charset="-122"/>
+                <a:cs typeface="Poppins" pitchFamily="34" charset="-120"/>
+              </a:rPr>
+              <a:t>Brendan Meara </a:t>
+            </a:r>
+            <a:r>
+              <a:rPr lang="en-US" sz="1250">
                 <a:solidFill>
                   <a:srgbClr val="FFFFFF">
-                    <a:alpha val="94000"/>
+                    <a:alpha val="78000"/>
                   </a:srgbClr>
                 </a:solidFill>
                 <a:latin typeface="Poppins" pitchFamily="34" charset="0"/>
                 <a:ea typeface="Poppins" pitchFamily="34" charset="-122"/>
                 <a:cs typeface="Poppins" pitchFamily="34" charset="-120"/>
               </a:rPr>
-              <a:t>A fair-price tool hosts can actually understand and trust.</a:t>
-            </a:r>
-            <a:endParaRPr lang="en-US" sz="1800"/>
-          </a:p>
-        </p:txBody>
-      </p:sp>
-      <p:sp>
-        <p:nvSpPr>
-          <p:cNvPr id="10" name="Text 5"/>
-          <p:cNvSpPr/>
-          <p:nvPr/>
-        </p:nvSpPr>
-        <p:spPr>
-          <a:xfrm>
-            <a:off x="777240" y="4800600"/>
+              <a:t>(PM)     </a:t>
+            </a:r>
+            <a:r>
+              <a:rPr lang="en-US" sz="1250" b="1">
+                <a:solidFill>
+                  <a:srgbClr val="FFFFFF"/>
+                </a:solidFill>
+                <a:latin typeface="Poppins" pitchFamily="34" charset="0"/>
+                <a:ea typeface="Poppins" pitchFamily="34" charset="-122"/>
+                <a:cs typeface="Poppins" pitchFamily="34" charset="-120"/>
+              </a:rPr>
+              <a:t>Jai Manikandan </a:t>
+            </a:r>
+            <a:r>
+              <a:rPr lang="en-US" sz="1250">
+                <a:solidFill>
+                  <a:srgbClr val="FFFFFF">
+                    <a:alpha val="78000"/>
+                  </a:srgbClr>
+                </a:solidFill>
+                <a:latin typeface="Poppins" pitchFamily="34" charset="0"/>
+                <a:ea typeface="Poppins" pitchFamily="34" charset="-122"/>
+                <a:cs typeface="Poppins" pitchFamily="34" charset="-120"/>
+              </a:rPr>
+              <a:t>(Data)     </a:t>
+            </a:r>
+            <a:r>
+              <a:rPr lang="en-US" sz="1250" b="1">
+                <a:solidFill>
+                  <a:srgbClr val="FFFFFF"/>
+                </a:solidFill>
+                <a:latin typeface="Poppins" pitchFamily="34" charset="0"/>
+                <a:ea typeface="Poppins" pitchFamily="34" charset="-122"/>
+                <a:cs typeface="Poppins" pitchFamily="34" charset="-120"/>
+              </a:rPr>
+              <a:t>Manas Manu </a:t>
+            </a:r>
+            <a:r>
+              <a:rPr lang="en-US" sz="1250">
+                <a:solidFill>
+                  <a:srgbClr val="FFFFFF">
+                    <a:alpha val="78000"/>
+                  </a:srgbClr>
+                </a:solidFill>
+                <a:latin typeface="Poppins" pitchFamily="34" charset="0"/>
+                <a:ea typeface="Poppins" pitchFamily="34" charset="-122"/>
+                <a:cs typeface="Poppins" pitchFamily="34" charset="-120"/>
+              </a:rPr>
+              <a:t>(Modeling)     </a:t>
+            </a:r>
+            <a:r>
+              <a:rPr lang="en-US" sz="1250" b="1">
+                <a:solidFill>
+                  <a:srgbClr val="FFFFFF"/>
+                </a:solidFill>
+                <a:latin typeface="Poppins" pitchFamily="34" charset="0"/>
+                <a:ea typeface="Poppins" pitchFamily="34" charset="-122"/>
+                <a:cs typeface="Poppins" pitchFamily="34" charset="-120"/>
+              </a:rPr>
+              <a:t>Rachael Chin </a:t>
+            </a:r>
+            <a:r>
+              <a:rPr lang="en-US" sz="1250">
+                <a:solidFill>
+                  <a:srgbClr val="FFFFFF">
+                    <a:alpha val="78000"/>
+                  </a:srgbClr>
+                </a:solidFill>
+                <a:latin typeface="Poppins" pitchFamily="34" charset="0"/>
+                <a:ea typeface="Poppins" pitchFamily="34" charset="-122"/>
+                <a:cs typeface="Poppins" pitchFamily="34" charset="-120"/>
+              </a:rPr>
+              <a:t>(Visualization)</a:t>
+            </a:r>
+            <a:endParaRPr lang="en-US" sz="1250"/>
+          </a:p>
+        </p:txBody>
+      </p:sp>
+      <p:sp>
+        <p:nvSpPr>
+          <p:cNvPr id="11" name="Text 6"/>
+          <p:cNvSpPr/>
+          <p:nvPr/>
+        </p:nvSpPr>
+        <p:spPr>
+          <a:xfrm>
+            <a:off x="777240" y="5138928"/>
             <a:ext cx="10607040" cy="320040"/>
           </a:xfrm>
           <a:prstGeom prst="rect">
@@ -3020,7 +3301,7 @@
                 <a:ea typeface="Poppins" pitchFamily="34" charset="-122"/>
                 <a:cs typeface="Poppins" pitchFamily="34" charset="-120"/>
               </a:rPr>
-              <a:t>Brendan Meara </a:t>
+              <a:t>Francois Miaule </a:t>
             </a:r>
             <a:r>
               <a:rPr lang="en-US" sz="1250">
@@ -3033,7 +3314,7 @@
                 <a:ea typeface="Poppins" pitchFamily="34" charset="-122"/>
                 <a:cs typeface="Poppins" pitchFamily="34" charset="-120"/>
               </a:rPr>
-              <a:t>(PM)     </a:t>
+              <a:t>(Insights &amp; Presentation)      Industry Coach: </a:t>
             </a:r>
             <a:r>
               <a:rPr lang="en-US" sz="1250" b="1">
@@ -3044,174 +3325,9 @@
                 <a:ea typeface="Poppins" pitchFamily="34" charset="-122"/>
                 <a:cs typeface="Poppins" pitchFamily="34" charset="-120"/>
               </a:rPr>
-              <a:t>Jai Manikandan </a:t>
-            </a:r>
-            <a:r>
-              <a:rPr lang="en-US" sz="1250">
-                <a:solidFill>
-                  <a:srgbClr val="FFFFFF">
-                    <a:alpha val="78000"/>
-                  </a:srgbClr>
-                </a:solidFill>
-                <a:latin typeface="Poppins" pitchFamily="34" charset="0"/>
-                <a:ea typeface="Poppins" pitchFamily="34" charset="-122"/>
-                <a:cs typeface="Poppins" pitchFamily="34" charset="-120"/>
-              </a:rPr>
-              <a:t>(Data)     </a:t>
-            </a:r>
-            <a:r>
-              <a:rPr lang="en-US" sz="1250" b="1">
-                <a:solidFill>
-                  <a:srgbClr val="FFFFFF"/>
-                </a:solidFill>
-                <a:latin typeface="Poppins" pitchFamily="34" charset="0"/>
-                <a:ea typeface="Poppins" pitchFamily="34" charset="-122"/>
-                <a:cs typeface="Poppins" pitchFamily="34" charset="-120"/>
-              </a:rPr>
-              <a:t>Manas Manu </a:t>
-            </a:r>
-            <a:r>
-              <a:rPr lang="en-US" sz="1250">
-                <a:solidFill>
-                  <a:srgbClr val="FFFFFF">
-                    <a:alpha val="78000"/>
-                  </a:srgbClr>
-                </a:solidFill>
-                <a:latin typeface="Poppins" pitchFamily="34" charset="0"/>
-                <a:ea typeface="Poppins" pitchFamily="34" charset="-122"/>
-                <a:cs typeface="Poppins" pitchFamily="34" charset="-120"/>
-              </a:rPr>
-              <a:t>(Modeling)     </a:t>
-            </a:r>
-            <a:r>
-              <a:rPr lang="en-US" sz="1250" b="1">
-                <a:solidFill>
-                  <a:srgbClr val="FFFFFF"/>
-                </a:solidFill>
-                <a:latin typeface="Poppins" pitchFamily="34" charset="0"/>
-                <a:ea typeface="Poppins" pitchFamily="34" charset="-122"/>
-                <a:cs typeface="Poppins" pitchFamily="34" charset="-120"/>
-              </a:rPr>
-              <a:t>Rachael Chin </a:t>
-            </a:r>
-            <a:r>
-              <a:rPr lang="en-US" sz="1250">
-                <a:solidFill>
-                  <a:srgbClr val="FFFFFF">
-                    <a:alpha val="78000"/>
-                  </a:srgbClr>
-                </a:solidFill>
-                <a:latin typeface="Poppins" pitchFamily="34" charset="0"/>
-                <a:ea typeface="Poppins" pitchFamily="34" charset="-122"/>
-                <a:cs typeface="Poppins" pitchFamily="34" charset="-120"/>
-              </a:rPr>
-              <a:t>(Visualization)</a:t>
+              <a:t>Stan</a:t>
             </a:r>
             <a:endParaRPr lang="en-US" sz="1250"/>
-          </a:p>
-        </p:txBody>
-      </p:sp>
-      <p:sp>
-        <p:nvSpPr>
-          <p:cNvPr id="11" name="Text 6"/>
-          <p:cNvSpPr/>
-          <p:nvPr/>
-        </p:nvSpPr>
-        <p:spPr>
-          <a:xfrm>
-            <a:off x="777240" y="5138928"/>
-            <a:ext cx="10607040" cy="320040"/>
-          </a:xfrm>
-          <a:prstGeom prst="rect">
-            <a:avLst/>
-          </a:prstGeom>
-          <a:noFill/>
-          <a:ln/>
-        </p:spPr>
-        <p:txBody>
-          <a:bodyPr wrap="square" lIns="0" tIns="0" rIns="0" bIns="0" rtlCol="0" anchor="ctr"/>
-          <a:lstStyle/>
-          <a:p>
-            <a:pPr marL="0" indent="0">
-              <a:buNone/>
-            </a:pPr>
-            <a:r>
-              <a:rPr lang="en-US" sz="1250" b="1">
-                <a:solidFill>
-                  <a:srgbClr val="FFFFFF"/>
-                </a:solidFill>
-                <a:latin typeface="Poppins" pitchFamily="34" charset="0"/>
-                <a:ea typeface="Poppins" pitchFamily="34" charset="-122"/>
-                <a:cs typeface="Poppins" pitchFamily="34" charset="-120"/>
-              </a:rPr>
-              <a:t>Francois Miaule </a:t>
-            </a:r>
-            <a:r>
-              <a:rPr lang="en-US" sz="1250">
-                <a:solidFill>
-                  <a:srgbClr val="FFFFFF">
-                    <a:alpha val="78000"/>
-                  </a:srgbClr>
-                </a:solidFill>
-                <a:latin typeface="Poppins" pitchFamily="34" charset="0"/>
-                <a:ea typeface="Poppins" pitchFamily="34" charset="-122"/>
-                <a:cs typeface="Poppins" pitchFamily="34" charset="-120"/>
-              </a:rPr>
-              <a:t>(Insights &amp; Presentation)      Industry Coach: </a:t>
-            </a:r>
-            <a:r>
-              <a:rPr lang="en-US" sz="1250" b="1">
-                <a:solidFill>
-                  <a:srgbClr val="FFFFFF"/>
-                </a:solidFill>
-                <a:latin typeface="Poppins" pitchFamily="34" charset="0"/>
-                <a:ea typeface="Poppins" pitchFamily="34" charset="-122"/>
-                <a:cs typeface="Poppins" pitchFamily="34" charset="-120"/>
-              </a:rPr>
-              <a:t>Stan</a:t>
-            </a:r>
-            <a:endParaRPr lang="en-US" sz="1250"/>
-          </a:p>
-        </p:txBody>
-      </p:sp>
-      <p:sp>
-        <p:nvSpPr>
-          <p:cNvPr id="12" name="Text 7"/>
-          <p:cNvSpPr/>
-          <p:nvPr/>
-        </p:nvSpPr>
-        <p:spPr>
-          <a:xfrm>
-            <a:off x="777240" y="5650992"/>
-            <a:ext cx="10607040" cy="274320"/>
-          </a:xfrm>
-          <a:prstGeom prst="rect">
-            <a:avLst/>
-          </a:prstGeom>
-          <a:noFill/>
-          <a:ln/>
-        </p:spPr>
-        <p:txBody>
-          <a:bodyPr wrap="square" lIns="0" tIns="0" rIns="0" bIns="0" rtlCol="0" anchor="ctr"/>
-          <a:lstStyle/>
-          <a:p>
-            <a:pPr marL="0" indent="0">
-              <a:buNone/>
-            </a:pPr>
-            <a:r>
-              <a:rPr lang="en-US" sz="1150">
-                <a:solidFill>
-                  <a:srgbClr val="FFFFFF">
-                    <a:alpha val="88000"/>
-                  </a:srgbClr>
-                </a:solidFill>
-                <a:latin typeface="Poppins" pitchFamily="34" charset="0"/>
-                <a:ea typeface="Poppins" pitchFamily="34" charset="-122"/>
-                <a:cs typeface="Poppins" pitchFamily="34" charset="-120"/>
-              </a:rPr>
-              <a:t>Dataset: Inside Airbnb NYC  ·  9,752 active listings  ·  snapshot Jun 14, 2026</a:t>
-            </a:r>
-            <a:endParaRPr lang="en-US" sz="1150"/>
           </a:p>
         </p:txBody>
       </p:sp>
@@ -3364,7 +3480,7 @@
                 <a:ea typeface="Poppins" pitchFamily="34" charset="-122"/>
                 <a:cs typeface="Poppins" pitchFamily="34" charset="-120"/>
               </a:rPr>
-              <a:t>Does moving the price actually make money?</a:t>
+              <a:t>Does moving the price make money?</a:t>
             </a:r>
             <a:endParaRPr lang="en-US" sz="2700"/>
           </a:p>
@@ -5079,7 +5195,7 @@
                 <a:ea typeface="Poppins" pitchFamily="34" charset="-122"/>
                 <a:cs typeface="Poppins" pitchFamily="34" charset="-120"/>
               </a:rPr>
-              <a:t>~$7.6M</a:t>
+              <a:t>~$7.6M host GBV      ×15.5%  →      $1.17M / yr Airbnb fee, at full adoption</a:t>
             </a:r>
             <a:r>
               <a:rPr lang="en-US" sz="1300">
@@ -5090,7 +5206,7 @@
                 <a:ea typeface="Poppins" pitchFamily="34" charset="-122"/>
                 <a:cs typeface="Poppins" pitchFamily="34" charset="-120"/>
               </a:rPr>
-              <a:t> host GBV</a:t>
+              <a:t/>
             </a:r>
             <a:r>
               <a:rPr lang="en-US" sz="1250">
@@ -5101,7 +5217,7 @@
                 <a:ea typeface="Poppins" pitchFamily="34" charset="-122"/>
                 <a:cs typeface="Poppins" pitchFamily="34" charset="-120"/>
               </a:rPr>
-              <a:t>      ×15.5%  →      </a:t>
+              <a:t/>
             </a:r>
             <a:r>
               <a:rPr lang="en-US" sz="2900" b="1">
@@ -5112,7 +5228,7 @@
                 <a:ea typeface="Poppins" pitchFamily="34" charset="-122"/>
                 <a:cs typeface="Poppins" pitchFamily="34" charset="-120"/>
               </a:rPr>
-              <a:t>$1.17M</a:t>
+              <a:t/>
             </a:r>
             <a:r>
               <a:rPr lang="en-US" sz="1300">
@@ -5123,7 +5239,7 @@
                 <a:ea typeface="Poppins" pitchFamily="34" charset="-122"/>
                 <a:cs typeface="Poppins" pitchFamily="34" charset="-120"/>
               </a:rPr>
-              <a:t> / yr Airbnb fee</a:t>
+              <a:t/>
             </a:r>
             <a:endParaRPr lang="en-US" sz="2900"/>
           </a:p>
@@ -5775,7 +5891,7 @@
                 <a:ea typeface="Poppins" pitchFamily="34" charset="-122"/>
                 <a:cs typeface="Poppins" pitchFamily="34" charset="-120"/>
               </a:rPr>
-              <a:t>Payback in months, not years</a:t>
+              <a:t>Cash-positive in Year 1, on a modeled adoption ramp</a:t>
             </a:r>
             <a:endParaRPr lang="en-US" sz="2800"/>
           </a:p>
@@ -5817,7 +5933,7 @@
                 <a:ea typeface="Poppins" pitchFamily="34" charset="-122"/>
                 <a:cs typeface="Poppins" pitchFamily="34" charset="-120"/>
               </a:rPr>
-              <a:t>Adoption sensitivity on the $1.17M floor and the incremental cost. Even 15% adoption clears 300% ROI.</a:t>
+              <a:t>Modeled as an adoption ramp (Rogers' Diffusion of Innovation), not a single guess: about 10% adoption in Year 1, climbing to roughly 42% by Year 4.</a:t>
             </a:r>
             <a:endParaRPr lang="en-US" sz="1450"/>
           </a:p>
@@ -6099,6 +6215,74 @@
                 </a:gridCol>
               </a:tblGrid>
               <a:tr h="402336">
+                <a:tc>
+                  <a:txBody>
+                    <a:bodyPr/>
+                    <a:lstStyle/>
+                    <a:p>
+                      <a:pPr marL="0" indent="0" algn="ctr">
+                        <a:buNone/>
+                      </a:pPr>
+                      <a:r>
+                        <a:rPr lang="en-US" sz="1200" b="1">
+                          <a:solidFill>
+                            <a:srgbClr val="FFFFFF"/>
+                          </a:solidFill>
+                          <a:latin typeface="Poppins" pitchFamily="34" charset="0"/>
+                          <a:ea typeface="Poppins" pitchFamily="34" charset="-122"/>
+                          <a:cs typeface="Poppins" pitchFamily="34" charset="-120"/>
+                        </a:rPr>
+                        <a:t>Year</a:t>
+                      </a:r>
+                      <a:endParaRPr lang="en-US" sz="1200">
+                        <a:latin typeface="Poppins" charset="0"/>
+                        <a:ea typeface="Poppins" charset="0"/>
+                        <a:cs typeface="Poppins" charset="0"/>
+                      </a:endParaRPr>
+                    </a:p>
+                  </a:txBody>
+                  <a:tcPr marL="63500" marR="63500" marT="25400" marB="25400" anchor="ctr">
+                    <a:lnL w="12700" cap="flat" cmpd="sng" algn="ctr">
+                      <a:solidFill>
+                        <a:srgbClr val="EBEBEB"/>
+                      </a:solidFill>
+                      <a:prstDash val="solid"/>
+                      <a:round/>
+                      <a:headEnd type="none" w="med" len="med"/>
+                      <a:tailEnd type="none" w="med" len="med"/>
+                    </a:lnL>
+                    <a:lnR w="12700" cap="flat" cmpd="sng" algn="ctr">
+                      <a:solidFill>
+                        <a:srgbClr val="EBEBEB"/>
+                      </a:solidFill>
+                      <a:prstDash val="solid"/>
+                      <a:round/>
+                      <a:headEnd type="none" w="med" len="med"/>
+                      <a:tailEnd type="none" w="med" len="med"/>
+                    </a:lnR>
+                    <a:lnT w="12700" cap="flat" cmpd="sng" algn="ctr">
+                      <a:solidFill>
+                        <a:srgbClr val="EBEBEB"/>
+                      </a:solidFill>
+                      <a:prstDash val="solid"/>
+                      <a:round/>
+                      <a:headEnd type="none" w="med" len="med"/>
+                      <a:tailEnd type="none" w="med" len="med"/>
+                    </a:lnT>
+                    <a:lnB w="12700" cap="flat" cmpd="sng" algn="ctr">
+                      <a:solidFill>
+                        <a:srgbClr val="EBEBEB"/>
+                      </a:solidFill>
+                      <a:prstDash val="solid"/>
+                      <a:round/>
+                      <a:headEnd type="none" w="med" len="med"/>
+                      <a:tailEnd type="none" w="med" len="med"/>
+                    </a:lnB>
+                    <a:solidFill>
+                      <a:srgbClr val="222222"/>
+                    </a:solidFill>
+                  </a:tcPr>
+                </a:tc>
                 <a:tc>
                   <a:txBody>
                     <a:bodyPr/>
@@ -6184,7 +6368,7 @@
                           <a:ea typeface="Poppins" pitchFamily="34" charset="-122"/>
                           <a:cs typeface="Poppins" pitchFamily="34" charset="-120"/>
                         </a:rPr>
-                        <a:t>Airbnb fee / yr</a:t>
+                        <a:t>Airbnb Fee / yr</a:t>
                       </a:r>
                       <a:endParaRPr lang="en-US" sz="1200">
                         <a:latin typeface="Poppins" charset="0"/>
@@ -6252,75 +6436,7 @@
                           <a:ea typeface="Poppins" pitchFamily="34" charset="-122"/>
                           <a:cs typeface="Poppins" pitchFamily="34" charset="-120"/>
                         </a:rPr>
-                        <a:t>Payback</a:t>
-                      </a:r>
-                      <a:endParaRPr lang="en-US" sz="1200">
-                        <a:latin typeface="Poppins" charset="0"/>
-                        <a:ea typeface="Poppins" charset="0"/>
-                        <a:cs typeface="Poppins" charset="0"/>
-                      </a:endParaRPr>
-                    </a:p>
-                  </a:txBody>
-                  <a:tcPr marL="63500" marR="63500" marT="25400" marB="25400" anchor="ctr">
-                    <a:lnL w="12700" cap="flat" cmpd="sng" algn="ctr">
-                      <a:solidFill>
-                        <a:srgbClr val="EBEBEB"/>
-                      </a:solidFill>
-                      <a:prstDash val="solid"/>
-                      <a:round/>
-                      <a:headEnd type="none" w="med" len="med"/>
-                      <a:tailEnd type="none" w="med" len="med"/>
-                    </a:lnL>
-                    <a:lnR w="12700" cap="flat" cmpd="sng" algn="ctr">
-                      <a:solidFill>
-                        <a:srgbClr val="EBEBEB"/>
-                      </a:solidFill>
-                      <a:prstDash val="solid"/>
-                      <a:round/>
-                      <a:headEnd type="none" w="med" len="med"/>
-                      <a:tailEnd type="none" w="med" len="med"/>
-                    </a:lnR>
-                    <a:lnT w="12700" cap="flat" cmpd="sng" algn="ctr">
-                      <a:solidFill>
-                        <a:srgbClr val="EBEBEB"/>
-                      </a:solidFill>
-                      <a:prstDash val="solid"/>
-                      <a:round/>
-                      <a:headEnd type="none" w="med" len="med"/>
-                      <a:tailEnd type="none" w="med" len="med"/>
-                    </a:lnT>
-                    <a:lnB w="12700" cap="flat" cmpd="sng" algn="ctr">
-                      <a:solidFill>
-                        <a:srgbClr val="EBEBEB"/>
-                      </a:solidFill>
-                      <a:prstDash val="solid"/>
-                      <a:round/>
-                      <a:headEnd type="none" w="med" len="med"/>
-                      <a:tailEnd type="none" w="med" len="med"/>
-                    </a:lnB>
-                    <a:solidFill>
-                      <a:srgbClr val="222222"/>
-                    </a:solidFill>
-                  </a:tcPr>
-                </a:tc>
-                <a:tc>
-                  <a:txBody>
-                    <a:bodyPr/>
-                    <a:lstStyle/>
-                    <a:p>
-                      <a:pPr marL="0" indent="0" algn="ctr">
-                        <a:buNone/>
-                      </a:pPr>
-                      <a:r>
-                        <a:rPr lang="en-US" sz="1200" b="1">
-                          <a:solidFill>
-                            <a:srgbClr val="FFFFFF"/>
-                          </a:solidFill>
-                          <a:latin typeface="Poppins" pitchFamily="34" charset="0"/>
-                          <a:ea typeface="Poppins" pitchFamily="34" charset="-122"/>
-                          <a:cs typeface="Poppins" pitchFamily="34" charset="-120"/>
-                        </a:rPr>
-                        <a:t>5-yr ROI</a:t>
+                        <a:t>Cumulative Net (NPV @10%)</a:t>
                       </a:r>
                       <a:endParaRPr lang="en-US" sz="1200">
                         <a:latin typeface="Poppins" charset="0"/>
@@ -6395,7 +6511,7 @@
                           <a:ea typeface="Poppins" pitchFamily="34" charset="-122"/>
                           <a:cs typeface="Poppins" pitchFamily="34" charset="-120"/>
                         </a:rPr>
-                        <a:t>15%</a:t>
+                        <a:t>1</a:t>
                       </a:r>
                       <a:endParaRPr lang="en-US" sz="1200">
                         <a:latin typeface="Poppins" charset="0"/>
@@ -6463,7 +6579,7 @@
                           <a:ea typeface="Poppins" pitchFamily="34" charset="-122"/>
                           <a:cs typeface="Poppins" pitchFamily="34" charset="-120"/>
                         </a:rPr>
-                        <a:t>$176K</a:t>
+                        <a:t>10%</a:t>
                       </a:r>
                       <a:endParaRPr lang="en-US" sz="1200">
                         <a:latin typeface="Poppins" charset="0"/>
@@ -6531,7 +6647,7 @@
                           <a:ea typeface="Poppins" pitchFamily="34" charset="-122"/>
                           <a:cs typeface="Poppins" pitchFamily="34" charset="-120"/>
                         </a:rPr>
-                        <a:t>~6 mo</a:t>
+                        <a:t>$117K</a:t>
                       </a:r>
                       <a:endParaRPr lang="en-US" sz="1200">
                         <a:latin typeface="Poppins" charset="0"/>
@@ -6599,7 +6715,7 @@
                           <a:ea typeface="Poppins" pitchFamily="34" charset="-122"/>
                           <a:cs typeface="Poppins" pitchFamily="34" charset="-120"/>
                         </a:rPr>
-                        <a:t>308%</a:t>
+                        <a:t>+$20K</a:t>
                       </a:r>
                       <a:endParaRPr lang="en-US" sz="1200">
                         <a:latin typeface="Poppins" charset="0"/>
@@ -6674,7 +6790,7 @@
                           <a:ea typeface="Poppins" pitchFamily="34" charset="-122"/>
                           <a:cs typeface="Poppins" pitchFamily="34" charset="-120"/>
                         </a:rPr>
-                        <a:t>25%</a:t>
+                        <a:t>2</a:t>
                       </a:r>
                       <a:endParaRPr lang="en-US" sz="1200">
                         <a:latin typeface="Poppins" charset="0"/>
@@ -6742,7 +6858,7 @@
                           <a:ea typeface="Poppins" pitchFamily="34" charset="-122"/>
                           <a:cs typeface="Poppins" pitchFamily="34" charset="-120"/>
                         </a:rPr>
-                        <a:t>$292K</a:t>
+                        <a:t>24%</a:t>
                       </a:r>
                       <a:endParaRPr lang="en-US" sz="1200">
                         <a:latin typeface="Poppins" charset="0"/>
@@ -6810,7 +6926,7 @@
                           <a:ea typeface="Poppins" pitchFamily="34" charset="-122"/>
                           <a:cs typeface="Poppins" pitchFamily="34" charset="-120"/>
                         </a:rPr>
-                        <a:t>~4 mo</a:t>
+                        <a:t>$281K</a:t>
                       </a:r>
                       <a:endParaRPr lang="en-US" sz="1200">
                         <a:latin typeface="Poppins" charset="0"/>
@@ -6878,7 +6994,7 @@
                           <a:ea typeface="Poppins" pitchFamily="34" charset="-122"/>
                           <a:cs typeface="Poppins" pitchFamily="34" charset="-120"/>
                         </a:rPr>
-                        <a:t>580%</a:t>
+                        <a:t>+$227K</a:t>
                       </a:r>
                       <a:endParaRPr lang="en-US" sz="1200">
                         <a:latin typeface="Poppins" charset="0"/>
@@ -6953,7 +7069,7 @@
                           <a:ea typeface="Poppins" pitchFamily="34" charset="-122"/>
                           <a:cs typeface="Poppins" pitchFamily="34" charset="-120"/>
                         </a:rPr>
-                        <a:t>35%</a:t>
+                        <a:t>3</a:t>
                       </a:r>
                       <a:endParaRPr lang="en-US" sz="1200">
                         <a:latin typeface="Poppins" charset="0"/>
@@ -7021,7 +7137,7 @@
                           <a:ea typeface="Poppins" pitchFamily="34" charset="-122"/>
                           <a:cs typeface="Poppins" pitchFamily="34" charset="-120"/>
                         </a:rPr>
-                        <a:t>$410K</a:t>
+                        <a:t>38%</a:t>
                       </a:r>
                       <a:endParaRPr lang="en-US" sz="1200">
                         <a:latin typeface="Poppins" charset="0"/>
@@ -7089,7 +7205,7 @@
                           <a:ea typeface="Poppins" pitchFamily="34" charset="-122"/>
                           <a:cs typeface="Poppins" pitchFamily="34" charset="-120"/>
                         </a:rPr>
-                        <a:t>~3 mo</a:t>
+                        <a:t>$445K</a:t>
                       </a:r>
                       <a:endParaRPr lang="en-US" sz="1200">
                         <a:latin typeface="Poppins" charset="0"/>
@@ -7157,7 +7273,7 @@
                           <a:ea typeface="Poppins" pitchFamily="34" charset="-122"/>
                           <a:cs typeface="Poppins" pitchFamily="34" charset="-120"/>
                         </a:rPr>
-                        <a:t>852%</a:t>
+                        <a:t>+$539K</a:t>
                       </a:r>
                       <a:endParaRPr lang="en-US" sz="1200">
                         <a:latin typeface="Poppins" charset="0"/>
@@ -7232,7 +7348,7 @@
                           <a:ea typeface="Poppins" pitchFamily="34" charset="-122"/>
                           <a:cs typeface="Poppins" pitchFamily="34" charset="-120"/>
                         </a:rPr>
-                        <a:t>50%</a:t>
+                        <a:t>4</a:t>
                       </a:r>
                       <a:endParaRPr lang="en-US" sz="1200">
                         <a:latin typeface="Poppins" charset="0"/>
@@ -7300,7 +7416,7 @@
                           <a:ea typeface="Poppins" pitchFamily="34" charset="-122"/>
                           <a:cs typeface="Poppins" pitchFamily="34" charset="-120"/>
                         </a:rPr>
-                        <a:t>$585K</a:t>
+                        <a:t>42%</a:t>
                       </a:r>
                       <a:endParaRPr lang="en-US" sz="1200">
                         <a:latin typeface="Poppins" charset="0"/>
@@ -7368,7 +7484,7 @@
                           <a:ea typeface="Poppins" pitchFamily="34" charset="-122"/>
                           <a:cs typeface="Poppins" pitchFamily="34" charset="-120"/>
                         </a:rPr>
-                        <a:t>~2 mo</a:t>
+                        <a:t>$491K</a:t>
                       </a:r>
                       <a:endParaRPr lang="en-US" sz="1200">
                         <a:latin typeface="Poppins" charset="0"/>
@@ -7436,7 +7552,7 @@
                           <a:ea typeface="Poppins" pitchFamily="34" charset="-122"/>
                           <a:cs typeface="Poppins" pitchFamily="34" charset="-120"/>
                         </a:rPr>
-                        <a:t>1,260%</a:t>
+                        <a:t>+$854K</a:t>
                       </a:r>
                       <a:endParaRPr lang="en-US" sz="1200">
                         <a:latin typeface="Poppins" charset="0"/>
@@ -7511,7 +7627,7 @@
                           <a:ea typeface="Poppins" pitchFamily="34" charset="-122"/>
                           <a:cs typeface="Poppins" pitchFamily="34" charset="-120"/>
                         </a:rPr>
-                        <a:t>75%</a:t>
+                        <a:t>5</a:t>
                       </a:r>
                       <a:endParaRPr lang="en-US" sz="1200">
                         <a:latin typeface="Poppins" charset="0"/>
@@ -7579,7 +7695,7 @@
                           <a:ea typeface="Poppins" pitchFamily="34" charset="-122"/>
                           <a:cs typeface="Poppins" pitchFamily="34" charset="-120"/>
                         </a:rPr>
-                        <a:t>$878K</a:t>
+                        <a:t>42%</a:t>
                       </a:r>
                       <a:endParaRPr lang="en-US" sz="1200">
                         <a:latin typeface="Poppins" charset="0"/>
@@ -7647,7 +7763,7 @@
                           <a:ea typeface="Poppins" pitchFamily="34" charset="-122"/>
                           <a:cs typeface="Poppins" pitchFamily="34" charset="-120"/>
                         </a:rPr>
-                        <a:t>~1 mo</a:t>
+                        <a:t>$491K</a:t>
                       </a:r>
                       <a:endParaRPr lang="en-US" sz="1200">
                         <a:latin typeface="Poppins" charset="0"/>
@@ -7715,7 +7831,7 @@
                           <a:ea typeface="Poppins" pitchFamily="34" charset="-122"/>
                           <a:cs typeface="Poppins" pitchFamily="34" charset="-120"/>
                         </a:rPr>
-                        <a:t>1,941%</a:t>
+                        <a:t>+$1.14M</a:t>
                       </a:r>
                       <a:endParaRPr lang="en-US" sz="1200">
                         <a:latin typeface="Poppins" charset="0"/>
@@ -7809,7 +7925,7 @@
                 <a:ea typeface="Poppins" pitchFamily="34" charset="-122"/>
                 <a:cs typeface="Poppins" pitchFamily="34" charset="-120"/>
               </a:rPr>
-              <a:t>We headline the 25% and 35% rows: the conservative and expected cases.</a:t>
+              <a:t>We build the case on the ramp itself, not a single adoption row.</a:t>
             </a:r>
             <a:endParaRPr lang="en-US" sz="1050"/>
           </a:p>
@@ -7982,7 +8098,9 @@
                 <a:ea typeface="Poppins" pitchFamily="34" charset="-122"/>
                 <a:cs typeface="Poppins" pitchFamily="34" charset="-120"/>
               </a:rPr>
-              <a:t>Net-positive in Year 1</a:t>
+              <a:t>Net-positive in Year 1, on a modeled 10% first-year adoption.
+5-year cumulative net: $1.61M nominal → $1.14M NPV at a 10% discount (~29% haircut).
+We discount at 10% and show both, rather than present nominal sums under an NPV banner.</a:t>
             </a:r>
             <a:r>
               <a:rPr lang="en-US" sz="1150">
@@ -7993,8 +8111,7 @@
                 <a:ea typeface="Poppins" pitchFamily="34" charset="-122"/>
                 <a:cs typeface="Poppins" pitchFamily="34" charset="-120"/>
               </a:rPr>
-              <a:t>, even at 10% first-year adoption.
-5-year net: </a:t>
+              <a:t/>
             </a:r>
             <a:r>
               <a:rPr lang="en-US" sz="1150" b="1">
@@ -8005,7 +8122,7 @@
                 <a:ea typeface="Poppins" pitchFamily="34" charset="-122"/>
                 <a:cs typeface="Poppins" pitchFamily="34" charset="-120"/>
               </a:rPr>
-              <a:t>$5.63M nominal → $4.26M NPV</a:t>
+              <a:t/>
             </a:r>
             <a:r>
               <a:rPr lang="en-US" sz="1150">
@@ -8016,8 +8133,7 @@
                 <a:ea typeface="Poppins" pitchFamily="34" charset="-122"/>
                 <a:cs typeface="Poppins" pitchFamily="34" charset="-120"/>
               </a:rPr>
-              <a:t> at a 10% discount (~24% haircut).
-</a:t>
+              <a:t/>
             </a:r>
             <a:r>
               <a:rPr lang="en-US" sz="1150">
@@ -8028,7 +8144,7 @@
                 <a:ea typeface="Poppins" pitchFamily="34" charset="-122"/>
                 <a:cs typeface="Poppins" pitchFamily="34" charset="-120"/>
               </a:rPr>
-              <a:t>We discount at 10% and show both, rather than present nominal sums under an NPV banner.</a:t>
+              <a:t/>
             </a:r>
             <a:endParaRPr lang="en-US" sz="1150"/>
           </a:p>
@@ -10645,47 +10761,6 @@
       </p:sp>
       <p:sp>
         <p:nvSpPr>
-          <p:cNvPr id="8" name="Text 3"/>
-          <p:cNvSpPr/>
-          <p:nvPr/>
-        </p:nvSpPr>
-        <p:spPr>
-          <a:xfrm>
-            <a:off x="804672" y="3108960"/>
-            <a:ext cx="9601200" cy="457200"/>
-          </a:xfrm>
-          <a:prstGeom prst="rect">
-            <a:avLst/>
-          </a:prstGeom>
-          <a:noFill/>
-          <a:ln/>
-        </p:spPr>
-        <p:txBody>
-          <a:bodyPr wrap="square" lIns="0" tIns="0" rIns="0" bIns="0" rtlCol="0" anchor="ctr"/>
-          <a:lstStyle/>
-          <a:p>
-            <a:pPr marL="0" indent="0">
-              <a:buNone/>
-            </a:pPr>
-            <a:r>
-              <a:rPr lang="en-US" sz="1700">
-                <a:solidFill>
-                  <a:srgbClr val="FFFFFF">
-                    <a:alpha val="92000"/>
-                  </a:srgbClr>
-                </a:solidFill>
-                <a:latin typeface="Poppins" pitchFamily="34" charset="0"/>
-                <a:ea typeface="Poppins" pitchFamily="34" charset="-122"/>
-                <a:cs typeface="Poppins" pitchFamily="34" charset="-120"/>
-              </a:rPr>
-              <a:t>Not presented; held in reserve to answer questions. The full technical write-up lives in the appendix document.</a:t>
-            </a:r>
-            <a:endParaRPr lang="en-US" sz="1700"/>
-          </a:p>
-        </p:txBody>
-      </p:sp>
-      <p:sp>
-        <p:nvSpPr>
           <p:cNvPr id="9" name="Shape 4"/>
           <p:cNvSpPr/>
           <p:nvPr/>
@@ -11029,6 +11104,45 @@
                 <a:cs typeface="Poppins" pitchFamily="34" charset="-120"/>
               </a:rPr>
               <a:t>B5  Validation &amp; methodology</a:t>
+            </a:r>
+            <a:endParaRPr lang="en-US" sz="1100"/>
+          </a:p>
+        </p:txBody>
+      </p:sp>
+      <p:sp>
+        <p:nvSpPr>
+          <p:cNvPr id="18" name="Text 15"/>
+          <p:cNvSpPr/>
+          <p:nvPr/>
+        </p:nvSpPr>
+        <p:spPr>
+          <a:xfrm>
+            <a:off x="3685032" y="4590288"/>
+            <a:ext cx="2377440" cy="457200"/>
+          </a:xfrm>
+          <a:prstGeom prst="rect">
+            <a:avLst/>
+          </a:prstGeom>
+          <a:noFill/>
+          <a:ln/>
+        </p:spPr>
+        <p:txBody>
+          <a:bodyPr wrap="square" lIns="0" tIns="0" rIns="0" bIns="0" rtlCol="0" anchor="ctr"/>
+          <a:lstStyle/>
+          <a:p>
+            <a:pPr marL="0" indent="0">
+              <a:buNone/>
+            </a:pPr>
+            <a:r>
+              <a:rPr lang="en-US" sz="1100" b="1">
+                <a:solidFill>
+                  <a:srgbClr val="FFFFFF"/>
+                </a:solidFill>
+                <a:latin typeface="Poppins" pitchFamily="34" charset="0"/>
+                <a:ea typeface="Poppins" pitchFamily="34" charset="-122"/>
+                <a:cs typeface="Poppins" pitchFamily="34" charset="-120"/>
+              </a:rPr>
+              <a:t>B6  The adoption ramp</a:t>
             </a:r>
             <a:endParaRPr lang="en-US" sz="1100"/>
           </a:p>
@@ -15139,7 +15253,7 @@
                 <a:ea typeface="Poppins" pitchFamily="34" charset="-122"/>
                 <a:cs typeface="Poppins" pitchFamily="34" charset="-120"/>
               </a:rPr>
-              <a:t>Combined host GBV: underpriced +$8.27M less overpriced −$0.70M → ~$7.6M/yr. Measured −0.92 elasticity for established listings, breakeven below the 142-review panel median. Airbnb's 15.5% = ~$1.17M/yr.</a:t>
+              <a:t>Combined host GBV: underpriced +$8.27M less overpriced −$0.70M → ~$7.6M/yr. Measured −0.92 elasticity for established listings, breakeven below the 142-review panel median. Airbnb's 15.5% = ~$1.17M/yr at full adoption.</a:t>
             </a:r>
             <a:endParaRPr lang="en-US" sz="1080"/>
           </a:p>
@@ -15505,7 +15619,7 @@
                 <a:ea typeface="Poppins" pitchFamily="34" charset="-122"/>
                 <a:cs typeface="Poppins" pitchFamily="34" charset="-120"/>
               </a:rPr>
-              <a:t>On the $1.17M floor: 25% adoption → ~4 mo payback, 580% 5-yr ROI; 35% → ~3 mo, 852%. Even 15% pays back in ~6 mo and clears 300%.</a:t>
+              <a:t>Modeled as an adoption ramp (Rogers' Diffusion), not a flat guess: ~10% in Year 1 climbing to ~42% by Year 4. Cash-positive in Year 1, at $117K revenue against $95K cost.</a:t>
             </a:r>
             <a:endParaRPr lang="en-US" sz="1080"/>
           </a:p>
@@ -15627,7 +15741,7 @@
                 <a:ea typeface="Poppins" pitchFamily="34" charset="-122"/>
                 <a:cs typeface="Poppins" pitchFamily="34" charset="-120"/>
               </a:rPr>
-              <a:t>Discounted at 10% (CFI standard). 5-yr net $5.63M nominal → $4.26M NPV (~24% haircut), still net-positive in Year 1. We show both.</a:t>
+              <a:t>Discounted at 10% (CFI standard). 5-yr cumulative net $1.61M nominal → $1.14M NPV (~29% haircut), still net-positive in Year 1. We show both.</a:t>
             </a:r>
             <a:endParaRPr lang="en-US" sz="1080"/>
           </a:p>
@@ -18031,7 +18145,7 @@
                 <a:latin typeface="Poppins"/>
                 <a:cs typeface="Poppins"/>
               </a:rPr>
-              <a:t>$1.17M a year, for a $65K build</a:t>
+              <a:t>A $7.6M opportunity, a $65K build</a:t>
             </a:r>
             <a:endParaRPr lang="en-US"/>
           </a:p>
@@ -18746,7 +18860,7 @@
                 <a:ea typeface="Poppins" pitchFamily="34" charset="-122"/>
                 <a:cs typeface="Poppins" pitchFamily="34" charset="-120"/>
               </a:rPr>
-              <a:t>$1.17M</a:t>
+              <a:t>$7.6M</a:t>
             </a:r>
             <a:endParaRPr lang="en-US" sz="1500"/>
           </a:p>
@@ -18788,7 +18902,7 @@
                 <a:ea typeface="Poppins" pitchFamily="34" charset="-122"/>
                 <a:cs typeface="Poppins" pitchFamily="34" charset="-120"/>
               </a:rPr>
-              <a:t>a year in new Airbnb fees, from the NYC pilot alone</a:t>
+              <a:t>a year in host GBV if every mispriced listing is corrected. $1.17M in Airbnb fees.</a:t>
             </a:r>
             <a:endParaRPr lang="en-US" sz="1100"/>
           </a:p>
@@ -18868,7 +18982,7 @@
                 <a:ea typeface="Poppins" pitchFamily="34" charset="-122"/>
                 <a:cs typeface="Poppins" pitchFamily="34" charset="-120"/>
               </a:rPr>
-              <a:t>~3 months</a:t>
+              <a:t>Year 1</a:t>
             </a:r>
             <a:endParaRPr lang="en-US" sz="1500"/>
           </a:p>
@@ -18910,7 +19024,7 @@
                 <a:ea typeface="Poppins" pitchFamily="34" charset="-122"/>
                 <a:cs typeface="Poppins" pitchFamily="34" charset="-120"/>
               </a:rPr>
-              <a:t>to pay the build back, at a realistic 35% adoption</a:t>
+              <a:t>to turn cash-positive, on a modeled adoption ramp</a:t>
             </a:r>
             <a:endParaRPr lang="en-US" sz="1100"/>
           </a:p>
@@ -20417,6 +20531,315 @@
 </p:sld>
 </file>
 
+<file path=ppt/slides/slide21.xml><?xml version="1.0" encoding="utf-8"?>
+<p:sld xmlns:a="http://schemas.openxmlformats.org/drawingml/2006/main" xmlns:p="http://schemas.openxmlformats.org/presentationml/2006/main" xmlns:r="http://schemas.openxmlformats.org/officeDocument/2006/relationships">
+  <p:cSld>
+    <p:spTree>
+      <p:nvGrpSpPr>
+        <p:cNvPr id="1" name=""/>
+        <p:cNvGrpSpPr/>
+        <p:nvPr/>
+      </p:nvGrpSpPr>
+      <p:grpSpPr/>
+      <p:sp>
+        <p:nvSpPr>
+          <p:cNvPr id="2" name="Text 0"/>
+          <p:cNvSpPr/>
+          <p:nvPr/>
+        </p:nvSpPr>
+        <p:spPr>
+          <a:xfrm>
+            <a:off x="521208" y="475488"/>
+            <a:ext cx="8686800" cy="274320"/>
+          </a:xfrm>
+          <a:prstGeom prst="rect">
+            <a:avLst/>
+          </a:prstGeom>
+          <a:noFill/>
+          <a:ln/>
+        </p:spPr>
+        <p:txBody>
+          <a:bodyPr wrap="square" lIns="0" tIns="0" rIns="0" bIns="0" rtlCol="0" anchor="ctr"/>
+          <a:lstStyle/>
+          <a:p>
+            <a:pPr marL="0" indent="0">
+              <a:buNone/>
+            </a:pPr>
+            <a:r>
+              <a:rPr lang="en-US" sz="1200" b="1" kern="0" spc="200">
+                <a:solidFill>
+                  <a:srgbClr val="FF385C"/>
+                </a:solidFill>
+                <a:latin typeface="Poppins" pitchFamily="34" charset="0"/>
+                <a:ea typeface="Poppins" pitchFamily="34" charset="-122"/>
+                <a:cs typeface="Poppins" pitchFamily="34" charset="-120"/>
+              </a:rPr>
+              <a:t>BACKUP B6 · THE ADOPTION RAMP</a:t>
+            </a:r>
+            <a:endParaRPr lang="en-US" sz="1200"/>
+          </a:p>
+        </p:txBody>
+      </p:sp>
+      <p:sp>
+        <p:nvSpPr>
+          <p:cNvPr id="3" name="Text 1"/>
+          <p:cNvSpPr/>
+          <p:nvPr/>
+        </p:nvSpPr>
+        <p:spPr>
+          <a:xfrm>
+            <a:off x="493776" y="768096"/>
+            <a:ext cx="10881360" cy="868680"/>
+          </a:xfrm>
+          <a:prstGeom prst="rect">
+            <a:avLst/>
+          </a:prstGeom>
+          <a:noFill/>
+          <a:ln/>
+        </p:spPr>
+        <p:txBody>
+          <a:bodyPr wrap="square" lIns="0" tIns="0" rIns="0" bIns="0" rtlCol="0" anchor="ctr"/>
+          <a:lstStyle/>
+          <a:p>
+            <a:pPr marL="0" indent="0">
+              <a:lnSpc>
+                <a:spcPct val="102000"/>
+              </a:lnSpc>
+              <a:buNone/>
+            </a:pPr>
+            <a:r>
+              <a:rPr lang="en-US" sz="2800" b="1">
+                <a:solidFill>
+                  <a:srgbClr val="222222"/>
+                </a:solidFill>
+                <a:latin typeface="Poppins" pitchFamily="34" charset="0"/>
+                <a:ea typeface="Poppins" pitchFamily="34" charset="-122"/>
+                <a:cs typeface="Poppins" pitchFamily="34" charset="-120"/>
+              </a:rPr>
+              <a:t>Why we didn't assume 35% adoption on day one</a:t>
+            </a:r>
+            <a:endParaRPr lang="en-US" sz="2800"/>
+          </a:p>
+        </p:txBody>
+      </p:sp>
+      <p:sp>
+        <p:nvSpPr>
+          <p:cNvPr id="4" name="Text 2"/>
+          <p:cNvSpPr/>
+          <p:nvPr/>
+        </p:nvSpPr>
+        <p:spPr>
+          <a:xfrm>
+            <a:off x="521208" y="1591056"/>
+            <a:ext cx="10424160" cy="457200"/>
+          </a:xfrm>
+          <a:prstGeom prst="rect">
+            <a:avLst/>
+          </a:prstGeom>
+          <a:noFill/>
+          <a:ln/>
+        </p:spPr>
+        <p:txBody>
+          <a:bodyPr wrap="square" lIns="0" tIns="0" rIns="0" bIns="0" rtlCol="0" anchor="ctr"/>
+          <a:lstStyle/>
+          <a:p>
+            <a:pPr marL="0" indent="0">
+              <a:lnSpc>
+                <a:spcPct val="105000"/>
+              </a:lnSpc>
+              <a:buNone/>
+            </a:pPr>
+            <a:r>
+              <a:rPr lang="en-US" sz="1450">
+                <a:solidFill>
+                  <a:srgbClr val="717171"/>
+                </a:solidFill>
+                <a:latin typeface="Poppins" pitchFamily="34" charset="0"/>
+                <a:ea typeface="Poppins" pitchFamily="34" charset="-122"/>
+                <a:cs typeface="Poppins" pitchFamily="34" charset="-120"/>
+              </a:rPr>
+              <a:t>Modeled on Rogers' Diffusion of Innovation, recalibrated to real SaaS feature-adoption benchmarks (Product Metrics Benchmark Report 2024, 181 companies) rather than Bass's classical durable-goods parameters, which assume 10-15+ year adoption cycles, too slow for a digital tool.</a:t>
+            </a:r>
+            <a:endParaRPr lang="en-US" sz="1450"/>
+          </a:p>
+        </p:txBody>
+      </p:sp>
+      <p:sp>
+        <p:nvSpPr>
+          <p:cNvPr id="6" name="Shape 3"/>
+          <p:cNvSpPr/>
+          <p:nvPr/>
+        </p:nvSpPr>
+        <p:spPr>
+          <a:xfrm>
+            <a:off x="2041761" y="6430244"/>
+            <a:ext cx="0" cy="215433"/>
+          </a:xfrm>
+          <a:prstGeom prst="line">
+            <a:avLst/>
+          </a:prstGeom>
+          <a:noFill/>
+          <a:ln w="12700">
+            <a:solidFill>
+              <a:srgbClr val="D8D8D8"/>
+            </a:solidFill>
+            <a:prstDash val="solid"/>
+          </a:ln>
+        </p:spPr>
+        <p:txBody>
+          <a:bodyPr/>
+          <a:lstStyle/>
+          <a:p>
+            <a:endParaRPr lang="en-US"/>
+          </a:p>
+        </p:txBody>
+      </p:sp>
+      <p:sp>
+        <p:nvSpPr>
+          <p:cNvPr id="8" name="TextBox 7"/>
+          <p:cNvSpPr txBox="1"/>
+          <p:nvPr/>
+        </p:nvSpPr>
+        <p:spPr>
+          <a:xfrm>
+            <a:off x="502920" y="5650000"/>
+            <a:ext cx="10883112" cy="457200"/>
+          </a:xfrm>
+          <a:prstGeom prst="rect">
+            <a:avLst/>
+          </a:prstGeom>
+          <a:noFill/>
+        </p:spPr>
+        <p:txBody>
+          <a:bodyPr wrap="none">
+            <a:spAutoFit/>
+          </a:bodyPr>
+          <a:lstStyle/>
+          <a:p>
+            <a:r>
+              <a:rPr sz="1400">
+                <a:solidFill>
+                  <a:srgbClr val="717171"/>
+                </a:solidFill>
+              </a:rPr>
+              <a:t>Same ramp drives Slide 2, Slide 10, Slide 11, and Backup B2: one adoption curve, not a per-slide guess.</a:t>
+            </a:r>
+          </a:p>
+        </p:txBody>
+      </p:sp>
+      <p:graphicFrame>
+        <p:nvGraphicFramePr>
+          <p:cNvPr id="9" name="Chart 8"/>
+          <p:cNvGraphicFramePr>
+            <a:graphicFrameLocks noGrp="1"/>
+          </p:cNvGraphicFramePr>
+          <p:nvPr/>
+        </p:nvGraphicFramePr>
+        <p:xfrm>
+          <a:off x="502920" y="2249424"/>
+          <a:ext cx="10881360" cy="3300984"/>
+        </p:xfrm>
+        <a:graphic>
+          <a:graphicData uri="http://schemas.openxmlformats.org/drawingml/2006/chart">
+            <c:chart xmlns:c="http://schemas.openxmlformats.org/drawingml/2006/chart" r:id="rId2"/>
+          </a:graphicData>
+        </a:graphic>
+      </p:graphicFrame>
+      <p:pic>
+        <p:nvPicPr>
+          <p:cNvPr id="5" name="Image 0" descr="/sessions/dreamy-trusting-noether/mnt/outputs/build/assets/cornell_dark.png"/>
+          <p:cNvPicPr>
+            <a:picLocks noChangeAspect="1"/>
+          </p:cNvPicPr>
+          <p:nvPr/>
+        </p:nvPicPr>
+        <p:blipFill>
+          <a:blip r:embed="rId3"/>
+          <a:stretch>
+            <a:fillRect/>
+          </a:stretch>
+        </p:blipFill>
+        <p:spPr>
+          <a:xfrm>
+            <a:off x="502920" y="6451092"/>
+            <a:ext cx="1491064" cy="173736"/>
+          </a:xfrm>
+          <a:prstGeom prst="rect">
+            <a:avLst/>
+          </a:prstGeom>
+        </p:spPr>
+      </p:pic>
+      <p:pic>
+        <p:nvPicPr>
+          <p:cNvPr id="7" name="Image 1" descr="/sessions/dreamy-trusting-noether/mnt/outputs/build/assets/airbnb_logo.png"/>
+          <p:cNvPicPr>
+            <a:picLocks noChangeAspect="1"/>
+          </p:cNvPicPr>
+          <p:nvPr/>
+        </p:nvPicPr>
+        <p:blipFill>
+          <a:blip r:embed="rId4"/>
+          <a:stretch>
+            <a:fillRect/>
+          </a:stretch>
+        </p:blipFill>
+        <p:spPr>
+          <a:xfrm>
+            <a:off x="2089538" y="6425032"/>
+            <a:ext cx="225857" cy="225857"/>
+          </a:xfrm>
+          <a:prstGeom prst="rect">
+            <a:avLst/>
+          </a:prstGeom>
+        </p:spPr>
+      </p:pic>
+      <p:sp>
+        <p:nvSpPr>
+          <p:cNvPr id="8" name="Text 4"/>
+          <p:cNvSpPr/>
+          <p:nvPr/>
+        </p:nvSpPr>
+        <p:spPr>
+          <a:xfrm>
+            <a:off x="11338560" y="6428232"/>
+            <a:ext cx="365760" cy="219456"/>
+          </a:xfrm>
+          <a:prstGeom prst="rect">
+            <a:avLst/>
+          </a:prstGeom>
+          <a:noFill/>
+          <a:ln/>
+        </p:spPr>
+        <p:txBody>
+          <a:bodyPr wrap="square" lIns="0" tIns="0" rIns="0" bIns="0" rtlCol="0" anchor="ctr"/>
+          <a:lstStyle/>
+          <a:p>
+            <a:pPr marL="0" indent="0" algn="r">
+              <a:buNone/>
+            </a:pPr>
+            <a:r>
+              <a:rPr lang="en-US" sz="900" b="1">
+                <a:solidFill>
+                  <a:srgbClr val="9AA0A6"/>
+                </a:solidFill>
+                <a:latin typeface="Poppins" pitchFamily="34" charset="0"/>
+                <a:ea typeface="Poppins" pitchFamily="34" charset="-122"/>
+                <a:cs typeface="Poppins" pitchFamily="34" charset="-120"/>
+              </a:rPr>
+              <a:t>21</a:t>
+            </a:r>
+            <a:endParaRPr lang="en-US" sz="900"/>
+          </a:p>
+        </p:txBody>
+      </p:sp>
+    </p:spTree>
+  </p:cSld>
+  <p:clrMapOvr>
+    <a:masterClrMapping/>
+  </p:clrMapOvr>
+</p:sld>
+</file>
+
 <file path=ppt/slides/slide3.xml><?xml version="1.0" encoding="utf-8"?>
 <p:sld xmlns:a="http://schemas.openxmlformats.org/drawingml/2006/main" xmlns:r="http://schemas.openxmlformats.org/officeDocument/2006/relationships" xmlns:p="http://schemas.openxmlformats.org/presentationml/2006/main">
   <p:cSld name="Slide 3">
@@ -26675,7 +27098,7 @@
                 <a:ea typeface="Poppins" pitchFamily="34" charset="-122"/>
                 <a:cs typeface="Poppins" pitchFamily="34" charset="-120"/>
               </a:rPr>
-              <a:t>Hosts trust and act on a recommendation when they understand where it came from. So this is about pricing with confidence, not just predicting a price.</a:t>
+              <a:t>Hosts trust a recommendation when they understand where it came from. This is about pricing with confidence, not just predicting a price.</a:t>
             </a:r>
             <a:endParaRPr lang="en-US" sz="1250"/>
           </a:p>
@@ -27676,7 +28099,7 @@
                 <a:ea typeface="Poppins" pitchFamily="34" charset="-122"/>
                 <a:cs typeface="Poppins" pitchFamily="34" charset="-120"/>
               </a:rPr>
-              <a:t>Two halves, and both pay off differently.  </a:t>
+              <a:t>Two halves that pay off differently.  </a:t>
             </a:r>
             <a:r>
               <a:rPr lang="en-US" sz="1150">

--- a/Airbnb Pricing Deck.pptx
+++ b/Airbnb Pricing Deck.pptx
@@ -18145,7 +18145,7 @@
                 <a:latin typeface="Poppins"/>
                 <a:cs typeface="Poppins"/>
               </a:rPr>
-              <a:t>A $7.6M opportunity, a $65K build</a:t>
+              <a:t>$1.17M a year, for a $65K build</a:t>
             </a:r>
             <a:endParaRPr lang="en-US"/>
           </a:p>
@@ -20722,7 +20722,7 @@
                   <a:srgbClr val="717171"/>
                 </a:solidFill>
               </a:rPr>
-              <a:t>Same ramp drives Slide 2, Slide 10, Slide 11, and Backup B2: one adoption curve, not a per-slide guess.</a:t>
+              <a:t>Same ramp drives Slide 2, the financial slides, and Backup B2: one adoption curve, not a per-slide guess.</a:t>
             </a:r>
           </a:p>
         </p:txBody>
@@ -27056,7 +27056,7 @@
                 <a:ea typeface="Poppins" pitchFamily="34" charset="-122"/>
                 <a:cs typeface="Poppins" pitchFamily="34" charset="-120"/>
               </a:rPr>
-              <a:t>An idea from our coach: people make better decisions when they understand the reasoning, not when they're simply told what to do.</a:t>
+              <a:t>People make better decisions when they understand the reasoning, not when they’re simply told what to do.</a:t>
             </a:r>
             <a:endParaRPr lang="en-US" sz="1250"/>
           </a:p>

--- a/Airbnb Pricing Deck.pptx
+++ b/Airbnb Pricing Deck.pptx
@@ -5,7 +5,7 @@
     <p:sldMasterId id="2147483648" r:id="rId1"/>
   </p:sldMasterIdLst>
   <p:notesMasterIdLst>
-    <p:notesMasterId r:id="rId22"/>
+    <p:notesMasterId r:id="rId23"/>
   </p:notesMasterIdLst>
   <p:sldIdLst>
     <p:sldId id="256" r:id="rId2"/>
@@ -19,26 +19,26 @@
     <p:sldId id="264" r:id="rId10"/>
     <p:sldId id="265" r:id="rId11"/>
     <p:sldId id="266" r:id="rId12"/>
-    <p:sldId id="267" r:id="rId13"/>
+    <p:sldId id="271" r:id="rId13"/>
     <p:sldId id="268" r:id="rId14"/>
     <p:sldId id="269" r:id="rId15"/>
     <p:sldId id="270" r:id="rId16"/>
     <p:sldId id="272" r:id="rId17"/>
-    <p:sldId id="274" r:id="rId18"/>
-    <p:sldId id="277" r:id="rId19"/>
-    <p:sldId id="278" r:id="rId20"/>
+    <p:sldId id="273" r:id="rId18"/>
+    <p:sldId id="274" r:id="rId19"/>
+    <p:sldId id="275" r:id="rId20"/>
     <p:sldId id="276" r:id="rId21"/>
-    <p:sldId id="279" r:id="rId33"/>
+    <p:sldId id="277" r:id="rId22"/>
   </p:sldIdLst>
   <p:sldSz cx="12192000" cy="6858000"/>
   <p:notesSz cx="6858000" cy="12192000"/>
   <p:embeddedFontLst>
     <p:embeddedFont>
-      <p:font typeface="Poppins"/>
-      <p:regular r:id="rId23"/>
-      <p:bold r:id="rId24"/>
-      <p:italic r:id="rId25"/>
-      <p:boldItalic r:id="rId26"/>
+      <p:font typeface="Poppins" panose="00000500000000000000" pitchFamily="2" charset="0"/>
+      <p:regular r:id="rId24"/>
+      <p:bold r:id="rId25"/>
+      <p:italic r:id="rId26"/>
+      <p:boldItalic r:id="rId27"/>
     </p:embeddedFont>
   </p:embeddedFontLst>
   <p:defaultTextStyle>
@@ -136,320 +136,37 @@
 </p:presentation>
 </file>
 
+<file path=ppt/authors.xml><?xml version="1.0" encoding="utf-8"?>
+<p188:authorLst xmlns:a="http://schemas.openxmlformats.org/drawingml/2006/main" xmlns:r="http://schemas.openxmlformats.org/officeDocument/2006/relationships" xmlns:p188="http://schemas.microsoft.com/office/powerpoint/2018/8/main">
+  <p188:author id="{95582667-6102-27E7-ED8E-01A166EB4B6B}" name="Guest User" initials="GU" userId="Guest User" providerId="Windows Live"/>
+</p188:authorLst>
+</file>
+
 <file path=ppt/revisionInfo.xml><?xml version="1.0" encoding="utf-8"?>
 <p1510:revInfo xmlns:a="http://schemas.openxmlformats.org/drawingml/2006/main" xmlns:r="http://schemas.openxmlformats.org/officeDocument/2006/relationships" xmlns:p1510="http://schemas.microsoft.com/office/powerpoint/2015/10/main">
   <p1510:revLst>
-    <p1510:client id="{067ED431-A36E-5246-BA68-9A28E96FD5F9}" v="187" dt="2026-08-01T15:54:40.285"/>
-    <p1510:client id="{1190C936-1C69-D525-5532-20334E3615C6}" v="46" dt="2026-08-01T14:40:37.824"/>
-    <p1510:client id="{51B8CC3D-048D-53CB-B45F-0DB0D9AB71BE}" v="242" dt="2026-08-01T15:42:01.386"/>
-    <p1510:client id="{5966FAF6-CDAA-5149-9790-274323ABB908}" v="99" dt="2026-08-01T14:40:22.027"/>
-    <p1510:client id="{F4459766-7F3D-414A-BF06-80034270BD7A}" v="1" dt="2026-08-01T13:59:40.735"/>
+    <p1510:client id="{22A38BE6-CE12-937F-62CE-5CBB360A8BA3}" v="10" dt="2026-08-04T19:05:36.351"/>
+    <p1510:client id="{22FC9CA0-E74A-0259-7016-695696D0D4F7}" v="21" dt="2026-08-03T20:19:59.573"/>
+    <p1510:client id="{5A843C93-F080-BAD4-CDA5-730529A945E0}" v="5" dt="2026-08-04T19:04:29.312"/>
+    <p1510:client id="{65C5C6B6-2507-EFA5-C7F1-A4E286400DDE}" v="10" dt="2026-08-03T18:49:55.356"/>
+    <p1510:client id="{86CDB268-E137-6131-0ECF-87CB4E0FCCC9}" v="7" dt="2026-08-03T19:22:53.096"/>
+    <p1510:client id="{97B6D80A-E0E4-4D2A-0F3D-D0BFC22214D5}" v="5" dt="2026-08-04T18:33:46.672"/>
+    <p1510:client id="{EE451F02-41E5-FBCD-2321-2C073CBF2214}" v="58" dt="2026-08-03T20:33:03.883"/>
+    <p1510:client id="{FC31BC57-6B09-5C60-28EB-43B74E3B2984}" v="67" dt="2026-08-03T18:56:15.623"/>
   </p1510:revLst>
 </p1510:revInfo>
 </file>
 
-<file path=ppt/changesInfos/changesInfo1.xml><?xml version="1.0" encoding="utf-8"?>
-<pc:chgInfo xmlns:a="http://schemas.openxmlformats.org/drawingml/2006/main" xmlns:r="http://schemas.openxmlformats.org/officeDocument/2006/relationships" xmlns:ac="http://schemas.microsoft.com/office/drawing/2013/main/command" xmlns:pc="http://schemas.microsoft.com/office/powerpoint/2013/main/command">
-  <pc:docChgLst>
-    <pc:chgData name="Guest User" providerId="Windows Live" clId="Web-{5966FAF6-CDAA-5149-9790-274323ABB908}"/>
-    <pc:docChg chg="modSld">
-      <pc:chgData name="Guest User" userId="" providerId="Windows Live" clId="Web-{5966FAF6-CDAA-5149-9790-274323ABB908}" dt="2026-08-01T14:40:18.168" v="96" actId="20577"/>
-      <pc:docMkLst>
-        <pc:docMk/>
-      </pc:docMkLst>
-      <pc:sldChg chg="modSp">
-        <pc:chgData name="Guest User" userId="" providerId="Windows Live" clId="Web-{5966FAF6-CDAA-5149-9790-274323ABB908}" dt="2026-08-01T14:40:18.168" v="96" actId="20577"/>
-        <pc:sldMkLst>
-          <pc:docMk/>
-          <pc:sldMk cId="0" sldId="258"/>
-        </pc:sldMkLst>
-        <pc:spChg chg="mod">
-          <ac:chgData name="Guest User" userId="" providerId="Windows Live" clId="Web-{5966FAF6-CDAA-5149-9790-274323ABB908}" dt="2026-08-01T14:40:18.168" v="96" actId="20577"/>
-          <ac:spMkLst>
-            <pc:docMk/>
-            <pc:sldMk cId="0" sldId="258"/>
-            <ac:spMk id="32" creationId="{00000000-0000-0000-0000-000000000000}"/>
-          </ac:spMkLst>
-        </pc:spChg>
-      </pc:sldChg>
-    </pc:docChg>
-  </pc:docChgLst>
-  <pc:docChgLst>
-    <pc:chgData name="Guest User" providerId="Windows Live" clId="Web-{1190C936-1C69-D525-5532-20334E3615C6}"/>
-    <pc:docChg chg="modSld">
-      <pc:chgData name="Guest User" userId="" providerId="Windows Live" clId="Web-{1190C936-1C69-D525-5532-20334E3615C6}" dt="2026-08-01T14:40:37.824" v="44" actId="1076"/>
-      <pc:docMkLst>
-        <pc:docMk/>
-      </pc:docMkLst>
-      <pc:sldChg chg="delSp modSp">
-        <pc:chgData name="Guest User" userId="" providerId="Windows Live" clId="Web-{1190C936-1C69-D525-5532-20334E3615C6}" dt="2026-08-01T14:26:52.623" v="6"/>
-        <pc:sldMkLst>
-          <pc:docMk/>
-          <pc:sldMk cId="0" sldId="257"/>
-        </pc:sldMkLst>
-        <pc:spChg chg="mod">
-          <ac:chgData name="Guest User" userId="" providerId="Windows Live" clId="Web-{1190C936-1C69-D525-5532-20334E3615C6}" dt="2026-08-01T14:25:51.415" v="0" actId="20577"/>
-          <ac:spMkLst>
-            <pc:docMk/>
-            <pc:sldMk cId="0" sldId="257"/>
-            <ac:spMk id="3" creationId="{00000000-0000-0000-0000-000000000000}"/>
-          </ac:spMkLst>
-        </pc:spChg>
-        <pc:spChg chg="mod">
-          <ac:chgData name="Guest User" userId="" providerId="Windows Live" clId="Web-{1190C936-1C69-D525-5532-20334E3615C6}" dt="2026-08-01T14:26:46.888" v="5" actId="20577"/>
-          <ac:spMkLst>
-            <pc:docMk/>
-            <pc:sldMk cId="0" sldId="257"/>
-            <ac:spMk id="16" creationId="{00000000-0000-0000-0000-000000000000}"/>
-          </ac:spMkLst>
-        </pc:spChg>
-        <pc:spChg chg="del">
-          <ac:chgData name="Guest User" userId="" providerId="Windows Live" clId="Web-{1190C936-1C69-D525-5532-20334E3615C6}" dt="2026-08-01T14:26:52.623" v="6"/>
-          <ac:spMkLst>
-            <pc:docMk/>
-            <pc:sldMk cId="0" sldId="257"/>
-            <ac:spMk id="23" creationId="{00000000-0000-0000-0000-000000000000}"/>
-          </ac:spMkLst>
-        </pc:spChg>
-      </pc:sldChg>
-      <pc:sldChg chg="modSp">
-        <pc:chgData name="Guest User" userId="" providerId="Windows Live" clId="Web-{1190C936-1C69-D525-5532-20334E3615C6}" dt="2026-08-01T14:40:37.824" v="44" actId="1076"/>
-        <pc:sldMkLst>
-          <pc:docMk/>
-          <pc:sldMk cId="0" sldId="258"/>
-        </pc:sldMkLst>
-        <pc:spChg chg="mod">
-          <ac:chgData name="Guest User" userId="" providerId="Windows Live" clId="Web-{1190C936-1C69-D525-5532-20334E3615C6}" dt="2026-08-01T14:40:37.824" v="44" actId="1076"/>
-          <ac:spMkLst>
-            <pc:docMk/>
-            <pc:sldMk cId="0" sldId="258"/>
-            <ac:spMk id="28" creationId="{00000000-0000-0000-0000-000000000000}"/>
-          </ac:spMkLst>
-        </pc:spChg>
-        <pc:spChg chg="mod">
-          <ac:chgData name="Guest User" userId="" providerId="Windows Live" clId="Web-{1190C936-1C69-D525-5532-20334E3615C6}" dt="2026-08-01T14:40:14.571" v="43" actId="20577"/>
-          <ac:spMkLst>
-            <pc:docMk/>
-            <pc:sldMk cId="0" sldId="258"/>
-            <ac:spMk id="32" creationId="{00000000-0000-0000-0000-000000000000}"/>
-          </ac:spMkLst>
-        </pc:spChg>
-        <pc:spChg chg="mod">
-          <ac:chgData name="Guest User" userId="" providerId="Windows Live" clId="Web-{1190C936-1C69-D525-5532-20334E3615C6}" dt="2026-08-01T14:35:47.686" v="36" actId="20577"/>
-          <ac:spMkLst>
-            <pc:docMk/>
-            <pc:sldMk cId="0" sldId="258"/>
-            <ac:spMk id="37" creationId="{00000000-0000-0000-0000-000000000000}"/>
-          </ac:spMkLst>
-        </pc:spChg>
-      </pc:sldChg>
-    </pc:docChg>
-  </pc:docChgLst>
-  <pc:docChgLst>
-    <pc:chgData name="Guest User" providerId="Windows Live" clId="Web-{51B8CC3D-048D-53CB-B45F-0DB0D9AB71BE}"/>
-    <pc:docChg chg="modSld">
-      <pc:chgData name="Guest User" userId="" providerId="Windows Live" clId="Web-{51B8CC3D-048D-53CB-B45F-0DB0D9AB71BE}" dt="2026-08-01T15:42:01.386" v="240" actId="20577"/>
-      <pc:docMkLst>
-        <pc:docMk/>
-      </pc:docMkLst>
-      <pc:sldChg chg="modSp">
-        <pc:chgData name="Guest User" userId="" providerId="Windows Live" clId="Web-{51B8CC3D-048D-53CB-B45F-0DB0D9AB71BE}" dt="2026-08-01T14:42:45.200" v="24" actId="1076"/>
-        <pc:sldMkLst>
-          <pc:docMk/>
-          <pc:sldMk cId="0" sldId="258"/>
-        </pc:sldMkLst>
-        <pc:spChg chg="mod">
-          <ac:chgData name="Guest User" userId="" providerId="Windows Live" clId="Web-{51B8CC3D-048D-53CB-B45F-0DB0D9AB71BE}" dt="2026-08-01T14:42:45.200" v="24" actId="1076"/>
-          <ac:spMkLst>
-            <pc:docMk/>
-            <pc:sldMk cId="0" sldId="258"/>
-            <ac:spMk id="32" creationId="{00000000-0000-0000-0000-000000000000}"/>
-          </ac:spMkLst>
-        </pc:spChg>
-      </pc:sldChg>
-      <pc:sldChg chg="modSp">
-        <pc:chgData name="Guest User" userId="" providerId="Windows Live" clId="Web-{51B8CC3D-048D-53CB-B45F-0DB0D9AB71BE}" dt="2026-08-01T14:44:03.343" v="42" actId="20577"/>
-        <pc:sldMkLst>
-          <pc:docMk/>
-          <pc:sldMk cId="0" sldId="259"/>
-        </pc:sldMkLst>
-        <pc:spChg chg="mod">
-          <ac:chgData name="Guest User" userId="" providerId="Windows Live" clId="Web-{51B8CC3D-048D-53CB-B45F-0DB0D9AB71BE}" dt="2026-08-01T14:44:03.343" v="42" actId="20577"/>
-          <ac:spMkLst>
-            <pc:docMk/>
-            <pc:sldMk cId="0" sldId="259"/>
-            <ac:spMk id="3" creationId="{00000000-0000-0000-0000-000000000000}"/>
-          </ac:spMkLst>
-        </pc:spChg>
-      </pc:sldChg>
-      <pc:sldChg chg="delSp modSp">
-        <pc:chgData name="Guest User" userId="" providerId="Windows Live" clId="Web-{51B8CC3D-048D-53CB-B45F-0DB0D9AB71BE}" dt="2026-08-01T15:42:01.386" v="240" actId="20577"/>
-        <pc:sldMkLst>
-          <pc:docMk/>
-          <pc:sldMk cId="0" sldId="260"/>
-        </pc:sldMkLst>
-        <pc:spChg chg="mod">
-          <ac:chgData name="Guest User" userId="" providerId="Windows Live" clId="Web-{51B8CC3D-048D-53CB-B45F-0DB0D9AB71BE}" dt="2026-08-01T14:48:03.164" v="117" actId="20577"/>
-          <ac:spMkLst>
-            <pc:docMk/>
-            <pc:sldMk cId="0" sldId="260"/>
-            <ac:spMk id="3" creationId="{00000000-0000-0000-0000-000000000000}"/>
-          </ac:spMkLst>
-        </pc:spChg>
-        <pc:spChg chg="mod">
-          <ac:chgData name="Guest User" userId="" providerId="Windows Live" clId="Web-{51B8CC3D-048D-53CB-B45F-0DB0D9AB71BE}" dt="2026-08-01T15:37:26.469" v="200" actId="20577"/>
-          <ac:spMkLst>
-            <pc:docMk/>
-            <pc:sldMk cId="0" sldId="260"/>
-            <ac:spMk id="4" creationId="{00000000-0000-0000-0000-000000000000}"/>
-          </ac:spMkLst>
-        </pc:spChg>
-        <pc:spChg chg="del mod">
-          <ac:chgData name="Guest User" userId="" providerId="Windows Live" clId="Web-{51B8CC3D-048D-53CB-B45F-0DB0D9AB71BE}" dt="2026-08-01T15:40:32.149" v="233"/>
-          <ac:spMkLst>
-            <pc:docMk/>
-            <pc:sldMk cId="0" sldId="260"/>
-            <ac:spMk id="37" creationId="{00000000-0000-0000-0000-000000000000}"/>
-          </ac:spMkLst>
-        </pc:spChg>
-        <pc:spChg chg="del">
-          <ac:chgData name="Guest User" userId="" providerId="Windows Live" clId="Web-{51B8CC3D-048D-53CB-B45F-0DB0D9AB71BE}" dt="2026-08-01T15:37:34.235" v="202"/>
-          <ac:spMkLst>
-            <pc:docMk/>
-            <pc:sldMk cId="0" sldId="260"/>
-            <ac:spMk id="41" creationId="{00000000-0000-0000-0000-000000000000}"/>
-          </ac:spMkLst>
-        </pc:spChg>
-        <pc:spChg chg="mod">
-          <ac:chgData name="Guest User" userId="" providerId="Windows Live" clId="Web-{51B8CC3D-048D-53CB-B45F-0DB0D9AB71BE}" dt="2026-08-01T15:42:01.386" v="240" actId="20577"/>
-          <ac:spMkLst>
-            <pc:docMk/>
-            <pc:sldMk cId="0" sldId="260"/>
-            <ac:spMk id="42" creationId="{00000000-0000-0000-0000-000000000000}"/>
-          </ac:spMkLst>
-        </pc:spChg>
-      </pc:sldChg>
-      <pc:sldChg chg="modSp">
-        <pc:chgData name="Guest User" userId="" providerId="Windows Live" clId="Web-{51B8CC3D-048D-53CB-B45F-0DB0D9AB71BE}" dt="2026-08-01T15:26:14.365" v="160" actId="20577"/>
-        <pc:sldMkLst>
-          <pc:docMk/>
-          <pc:sldMk cId="0" sldId="261"/>
-        </pc:sldMkLst>
-        <pc:spChg chg="mod">
-          <ac:chgData name="Guest User" userId="" providerId="Windows Live" clId="Web-{51B8CC3D-048D-53CB-B45F-0DB0D9AB71BE}" dt="2026-08-01T15:26:14.365" v="160" actId="20577"/>
-          <ac:spMkLst>
-            <pc:docMk/>
-            <pc:sldMk cId="0" sldId="261"/>
-            <ac:spMk id="4" creationId="{00000000-0000-0000-0000-000000000000}"/>
-          </ac:spMkLst>
-        </pc:spChg>
-        <pc:spChg chg="mod">
-          <ac:chgData name="Guest User" userId="" providerId="Windows Live" clId="Web-{51B8CC3D-048D-53CB-B45F-0DB0D9AB71BE}" dt="2026-08-01T15:25:34.567" v="155" actId="20577"/>
-          <ac:spMkLst>
-            <pc:docMk/>
-            <pc:sldMk cId="0" sldId="261"/>
-            <ac:spMk id="28" creationId="{00000000-0000-0000-0000-000000000000}"/>
-          </ac:spMkLst>
-        </pc:spChg>
-      </pc:sldChg>
-    </pc:docChg>
-  </pc:docChgLst>
-  <pc:docChgLst>
-    <pc:chgData name="Guest User" providerId="Windows Live" clId="Web-{067ED431-A36E-5246-BA68-9A28E96FD5F9}"/>
-    <pc:docChg chg="modSld">
-      <pc:chgData name="Guest User" userId="" providerId="Windows Live" clId="Web-{067ED431-A36E-5246-BA68-9A28E96FD5F9}" dt="2026-08-01T15:54:40.285" v="185" actId="20577"/>
-      <pc:docMkLst>
-        <pc:docMk/>
-      </pc:docMkLst>
-      <pc:sldChg chg="addSp delSp modSp">
-        <pc:chgData name="Guest User" userId="" providerId="Windows Live" clId="Web-{067ED431-A36E-5246-BA68-9A28E96FD5F9}" dt="2026-08-01T15:45:18.609" v="47" actId="20577"/>
-        <pc:sldMkLst>
-          <pc:docMk/>
-          <pc:sldMk cId="0" sldId="260"/>
-        </pc:sldMkLst>
-        <pc:spChg chg="add del">
-          <ac:chgData name="Guest User" userId="" providerId="Windows Live" clId="Web-{067ED431-A36E-5246-BA68-9A28E96FD5F9}" dt="2026-08-01T15:42:58.729" v="4"/>
-          <ac:spMkLst>
-            <pc:docMk/>
-            <pc:sldMk cId="0" sldId="260"/>
-            <ac:spMk id="12" creationId="{4386B7B6-217F-B2A2-D7D0-DC7A7F3F890F}"/>
-          </ac:spMkLst>
-        </pc:spChg>
-        <pc:spChg chg="mod">
-          <ac:chgData name="Guest User" userId="" providerId="Windows Live" clId="Web-{067ED431-A36E-5246-BA68-9A28E96FD5F9}" dt="2026-08-01T15:44:27.404" v="36" actId="20577"/>
-          <ac:spMkLst>
-            <pc:docMk/>
-            <pc:sldMk cId="0" sldId="260"/>
-            <ac:spMk id="40" creationId="{00000000-0000-0000-0000-000000000000}"/>
-          </ac:spMkLst>
-        </pc:spChg>
-        <pc:spChg chg="mod">
-          <ac:chgData name="Guest User" userId="" providerId="Windows Live" clId="Web-{067ED431-A36E-5246-BA68-9A28E96FD5F9}" dt="2026-08-01T15:45:18.609" v="47" actId="20577"/>
-          <ac:spMkLst>
-            <pc:docMk/>
-            <pc:sldMk cId="0" sldId="260"/>
-            <ac:spMk id="42" creationId="{00000000-0000-0000-0000-000000000000}"/>
-          </ac:spMkLst>
-        </pc:spChg>
-        <pc:picChg chg="mod">
-          <ac:chgData name="Guest User" userId="" providerId="Windows Live" clId="Web-{067ED431-A36E-5246-BA68-9A28E96FD5F9}" dt="2026-08-01T15:44:30.514" v="37" actId="1076"/>
-          <ac:picMkLst>
-            <pc:docMk/>
-            <pc:sldMk cId="0" sldId="260"/>
-            <ac:picMk id="39" creationId="{00000000-0000-0000-0000-000000000000}"/>
-          </ac:picMkLst>
-        </pc:picChg>
-      </pc:sldChg>
-      <pc:sldChg chg="addSp delSp modSp">
-        <pc:chgData name="Guest User" userId="" providerId="Windows Live" clId="Web-{067ED431-A36E-5246-BA68-9A28E96FD5F9}" dt="2026-08-01T15:54:40.285" v="185" actId="20577"/>
-        <pc:sldMkLst>
-          <pc:docMk/>
-          <pc:sldMk cId="0" sldId="261"/>
-        </pc:sldMkLst>
-        <pc:spChg chg="mod">
-          <ac:chgData name="Guest User" userId="" providerId="Windows Live" clId="Web-{067ED431-A36E-5246-BA68-9A28E96FD5F9}" dt="2026-08-01T15:47:31.348" v="66" actId="1076"/>
-          <ac:spMkLst>
-            <pc:docMk/>
-            <pc:sldMk cId="0" sldId="261"/>
-            <ac:spMk id="3" creationId="{00000000-0000-0000-0000-000000000000}"/>
-          </ac:spMkLst>
-        </pc:spChg>
-        <pc:spChg chg="add del mod">
-          <ac:chgData name="Guest User" userId="" providerId="Windows Live" clId="Web-{067ED431-A36E-5246-BA68-9A28E96FD5F9}" dt="2026-08-01T15:52:35.218" v="148" actId="20577"/>
-          <ac:spMkLst>
-            <pc:docMk/>
-            <pc:sldMk cId="0" sldId="261"/>
-            <ac:spMk id="4" creationId="{00000000-0000-0000-0000-000000000000}"/>
-          </ac:spMkLst>
-        </pc:spChg>
-        <pc:spChg chg="mod">
-          <ac:chgData name="Guest User" userId="" providerId="Windows Live" clId="Web-{067ED431-A36E-5246-BA68-9A28E96FD5F9}" dt="2026-08-01T15:54:40.285" v="185" actId="20577"/>
-          <ac:spMkLst>
-            <pc:docMk/>
-            <pc:sldMk cId="0" sldId="261"/>
-            <ac:spMk id="27" creationId="{00000000-0000-0000-0000-000000000000}"/>
-          </ac:spMkLst>
-        </pc:spChg>
-        <pc:spChg chg="mod">
-          <ac:chgData name="Guest User" userId="" providerId="Windows Live" clId="Web-{067ED431-A36E-5246-BA68-9A28E96FD5F9}" dt="2026-08-01T15:54:06.644" v="173" actId="20577"/>
-          <ac:spMkLst>
-            <pc:docMk/>
-            <pc:sldMk cId="0" sldId="261"/>
-            <ac:spMk id="30" creationId="{00000000-0000-0000-0000-000000000000}"/>
-          </ac:spMkLst>
-        </pc:spChg>
-      </pc:sldChg>
-    </pc:docChg>
-  </pc:docChgLst>
-</pc:chgInfo>
-</file>
-
 <file path=ppt/charts/chart1.xml><?xml version="1.0" encoding="utf-8"?>
-<c:chartSpace xmlns:c="http://schemas.openxmlformats.org/drawingml/2006/chart" xmlns:a="http://schemas.openxmlformats.org/drawingml/2006/main" xmlns:r="http://schemas.openxmlformats.org/officeDocument/2006/relationships">
+<c:chartSpace xmlns:c="http://schemas.openxmlformats.org/drawingml/2006/chart" xmlns:a="http://schemas.openxmlformats.org/drawingml/2006/main" xmlns:r="http://schemas.openxmlformats.org/officeDocument/2006/relationships" xmlns:c16r2="http://schemas.microsoft.com/office/drawing/2015/06/chart">
   <c:date1904 val="0"/>
+  <c:lang val="en-US"/>
+  <c:roundedCorners val="1"/>
+  <c:style val="2"/>
   <c:chart>
     <c:autoTitleDeleted val="1"/>
     <c:plotArea>
+      <c:layout/>
       <c:lineChart>
         <c:grouping val="standard"/>
         <c:varyColors val="0"/>
@@ -516,25 +233,38 @@
                 <c:formatCode>General</c:formatCode>
                 <c:ptCount val="5"/>
                 <c:pt idx="0">
-                  <c:v>10.0</c:v>
+                  <c:v>10</c:v>
                 </c:pt>
                 <c:pt idx="1">
-                  <c:v>24.0</c:v>
+                  <c:v>24</c:v>
                 </c:pt>
                 <c:pt idx="2">
-                  <c:v>38.0</c:v>
+                  <c:v>38</c:v>
                 </c:pt>
                 <c:pt idx="3">
-                  <c:v>42.0</c:v>
+                  <c:v>42</c:v>
                 </c:pt>
                 <c:pt idx="4">
-                  <c:v>42.0</c:v>
+                  <c:v>42</c:v>
                 </c:pt>
               </c:numCache>
             </c:numRef>
           </c:val>
           <c:smooth val="0"/>
+          <c:extLst>
+            <c:ext xmlns:c16="http://schemas.microsoft.com/office/drawing/2014/chart" uri="{C3380CC4-5D6E-409C-BE32-E72D297353CC}">
+              <c16:uniqueId val="{00000000-9657-4599-841A-22D3118839C8}"/>
+            </c:ext>
+          </c:extLst>
         </c:ser>
+        <c:dLbls>
+          <c:showLegendKey val="0"/>
+          <c:showVal val="0"/>
+          <c:showCatName val="0"/>
+          <c:showSerName val="0"/>
+          <c:showPercent val="0"/>
+          <c:showBubbleSize val="0"/>
+        </c:dLbls>
         <c:marker val="1"/>
         <c:smooth val="0"/>
         <c:axId val="2118791784"/>
@@ -547,6 +277,7 @@
         </c:scaling>
         <c:delete val="0"/>
         <c:axPos val="b"/>
+        <c:numFmt formatCode="General" sourceLinked="0"/>
         <c:majorTickMark val="out"/>
         <c:minorTickMark val="none"/>
         <c:tickLblPos val="nextTo"/>
@@ -568,6 +299,7 @@
                 </a:solidFill>
               </a:defRPr>
             </a:pPr>
+            <a:endParaRPr lang="en-US"/>
           </a:p>
         </c:txPr>
         <c:crossAx val="2140495176"/>
@@ -580,8 +312,9 @@
       <c:valAx>
         <c:axId val="2140495176"/>
         <c:scaling>
-          <c:max val="50.0"/>
-          <c:min val="0.0"/>
+          <c:orientation val="minMax"/>
+          <c:max val="50"/>
+          <c:min val="0"/>
         </c:scaling>
         <c:delete val="0"/>
         <c:axPos val="l"/>
@@ -614,11 +347,13 @@
                 </a:solidFill>
               </a:defRPr>
             </a:pPr>
+            <a:endParaRPr lang="en-US"/>
           </a:p>
         </c:txPr>
         <c:crossAx val="2118791784"/>
         <c:crosses val="autoZero"/>
-        <c:majorUnit val="10.0"/>
+        <c:crossBetween val="between"/>
+        <c:majorUnit val="10"/>
       </c:valAx>
     </c:plotArea>
     <c:plotVisOnly val="1"/>
@@ -639,6 +374,32 @@
     <c:autoUpdate val="0"/>
   </c:externalData>
 </c:chartSpace>
+</file>
+
+<file path=ppt/comments/modernComment_109_0.xml><?xml version="1.0" encoding="utf-8"?>
+<p188:cmLst xmlns:a="http://schemas.openxmlformats.org/drawingml/2006/main" xmlns:r="http://schemas.openxmlformats.org/officeDocument/2006/relationships" xmlns:p188="http://schemas.microsoft.com/office/powerpoint/2018/8/main">
+  <p188:cm id="{1ADC5070-4608-4295-A114-87636FF0F4DD}" authorId="{95582667-6102-27E7-ED8E-01A166EB4B6B}" created="2026-08-03T19:17:26.709">
+    <ac:txMkLst xmlns:ac="http://schemas.microsoft.com/office/drawing/2013/main/command">
+      <pc:docMk xmlns:pc="http://schemas.microsoft.com/office/powerpoint/2013/main/command"/>
+      <pc:sldMk xmlns:pc="http://schemas.microsoft.com/office/powerpoint/2013/main/command" cId="0" sldId="265"/>
+      <ac:spMk id="22" creationId="{00000000-0000-0000-0000-000000000000}"/>
+      <ac:txMk cp="105">
+        <ac:context len="106" hash="2051895429"/>
+      </ac:txMk>
+    </ac:txMkLst>
+    <p188:pos x="2597020" y="225489"/>
+    <p188:txBody>
+      <a:bodyPr/>
+      <a:lstStyle/>
+      <a:p>
+        <a:r>
+          <a:rPr lang="en-US"/>
+          <a:t>change for overpriced vs. underpriced. </a:t>
+        </a:r>
+      </a:p>
+    </p188:txBody>
+  </p188:cm>
+</p188:cmLst>
 </file>
 
 <file path=ppt/notesMasters/notesMaster1.xml><?xml version="1.0" encoding="utf-8"?>
@@ -1103,7 +864,7 @@
           <a:p>
             <a:fld id="{F7021451-1387-4CA6-816F-3879F97B5CBC}" type="slidenum">
               <a:rPr lang="en-US"/>
-              <a:t>12</a:t>
+              <a:t>13</a:t>
             </a:fld>
             <a:endParaRPr lang="en-US"/>
           </a:p>
@@ -1258,7 +1019,55 @@
             <a:r>
               <a:rPr lang="en-US"/>
               <a:t>SPEAKER: Francois (~1.5 min), then team fields Q&amp;A.
-"Our recommendation isn't to replace Smart Pricing ,  it's to build on it. The opportunity isn't simply another price recommendation; it's helping hosts understand, trust and act on it. As a next step we'd launch this as a pilot in a single market, measuring how hosts interact with the platform, how often they adopt the recommendations, and how pricing changes influence occupancy and revenue. Those real-world results would let Airbnb keep improving the model before expanding to more cities. Looking back, the biggest lesson is that successful analytics isn't just about accurate models ,  it's about solving the right business problem and presenting insights people are willing to use. For us this project combined machine learning, product thinking, business strategy and data storytelling. Thank you for your time ,  we'd be happy to take questions."
+“Our recommendation is not to replace Smart Pricing. It is to build on it, in three steps. One: enhance, don’t replace – layer the explanations and the comparables onto the Smart Pricing hosts already know. Two: pilot in one market, measuring adoption and how pricing changes move both occupancy and revenue. Three: learn, then scale – use those real-world results to improve the model before expanding to more cities. </a:t>
+            </a:r>
+          </a:p>
+          <a:p>
+            <a:br>
+              <a:rPr lang="en-US"/>
+            </a:br>
+            <a:br>
+              <a:rPr lang="en-US"/>
+            </a:br>
+            <a:endParaRPr lang="en-US"/>
+          </a:p>
+          <a:p>
+            <a:r>
+              <a:rPr lang="en-US"/>
+              <a:t>“As a chess player, I’ve learned the value of the </a:t>
+            </a:r>
+            <a:r>
+              <a:rPr lang="en-US" i="1"/>
+              <a:t>why</a:t>
+            </a:r>
+            <a:r>
+              <a:rPr lang="en-US"/>
+              <a:t> behind every move. As Cornellians, our group learned to find the </a:t>
+            </a:r>
+            <a:r>
+              <a:rPr lang="en-US" i="1"/>
+              <a:t>why</a:t>
+            </a:r>
+            <a:r>
+              <a:rPr lang="en-US"/>
+              <a:t> behind every problem. And for Airbnb hosts, we built a way to finally see the </a:t>
+            </a:r>
+            <a:r>
+              <a:rPr lang="en-US" i="1"/>
+              <a:t>why</a:t>
+            </a:r>
+            <a:r>
+              <a:rPr lang="en-US"/>
+              <a:t> behind every price. Because the right answer can guide you once—but understanding why stays with you for every move that follows.”</a:t>
+            </a:r>
+          </a:p>
+          <a:p>
+            <a:br>
+              <a:rPr lang="en-US"/>
+            </a:br>
+            <a:r>
+              <a:rPr lang="en-US"/>
+              <a:t>
 Q&amp;A: Brendan moderates; each owner takes their section. Appendix has the model bake-off, coefficients, financial assumptions, methodology and glossary.</a:t>
             </a:r>
           </a:p>
@@ -2124,9 +1933,97 @@
           <a:lstStyle/>
           <a:p>
             <a:r>
+              <a:rPr lang="en-US" dirty="0"/>
+              <a:t>“</a:t>
+            </a:r>
+            <a:r>
+              <a:rPr lang="en-US" dirty="0" err="1"/>
+              <a:t>Thank you Jai</a:t>
+            </a:r>
+            <a:r>
+              <a:rPr lang="en-US" dirty="0"/>
+              <a:t>-- </a:t>
+            </a:r>
+          </a:p>
+          <a:p>
+            <a:endParaRPr lang="en-US"/>
+          </a:p>
+          <a:p>
+            <a:r>
+              <a:rPr lang="en-US" dirty="0" err="1"/>
+              <a:t>So</a:t>
+            </a:r>
+            <a:r>
+              <a:rPr lang="en-US" dirty="0"/>
+              <a:t> when looking at the data, The second thing the data told us is that this is not one market problem, it is two markets, and the dataset splits almost evenly between them. Between 4,008 listings, which is 41% of the market, are short-term stays, renting at a median price of 284 dollars/night. The other 5,744, or 59% of the market, are monthly rentals of 28 nights or longer, at a median price of 131 dollars. </a:t>
+            </a:r>
+          </a:p>
+          <a:p>
+            <a:endParaRPr lang="en-US"/>
+          </a:p>
+          <a:p>
+            <a:r>
+              <a:rPr lang="en-US" dirty="0"/>
+              <a:t>That is more than double the nightly rate, and the reason is that the two halves are not competing with the same thing. Short-term stay competes with hotels while monthly stays compete with apartment sublets. This shows us that only one of them responds measurably to price. We measured a price elasticity of negative 0.92 on short-term stay listings with the pilot </a:t>
+            </a:r>
+            <a:r>
+              <a:rPr lang="en-US" dirty="0" err="1"/>
+              <a:t>sample, and</a:t>
+            </a:r>
+            <a:r>
+              <a:rPr lang="en-US" dirty="0"/>
+              <a:t> detected no price response at all in the monthly segment. </a:t>
+            </a:r>
+          </a:p>
+          <a:p>
+            <a:endParaRPr lang="en-US"/>
+          </a:p>
+          <a:p>
+            <a:r>
               <a:rPr lang="en-US"/>
+              <a:t>Pooling them would have blurred both signals and distorted every coefficient, so instead we run one engine calibrated separately for each market with its own comparables and its own elasticity. Every number you see for the rest of this presentation is market-aware, because the market is.”</a:t>
+            </a:r>
+          </a:p>
+          <a:p>
+            <a:r>
+              <a:rPr lang="en-US" b="1"/>
+              <a:t>Transition:</a:t>
+            </a:r>
+            <a:r>
+              <a:rPr lang="en-US" dirty="0"/>
+              <a:t> </a:t>
+            </a:r>
+            <a:r>
+              <a:rPr lang="en-US" i="1"/>
+              <a:t>“That split shapes everything downstream. Next, what else moves demand besides price.”</a:t>
+            </a:r>
+            <a:endParaRPr lang="en-US"/>
+          </a:p>
+          <a:p>
+            <a:endParaRPr lang="en-US"/>
+          </a:p>
+          <a:p>
+            <a:r>
+              <a:rPr lang="en-US" dirty="0"/>
               <a:t>SPEAKER: Rachael (~1.5 min).
-"Before building any models, we wanted to understand what drives price. We looked at location, property type, bedrooms and bathrooms, amenities, host experience, review scores and availability. Some variables matter far more than others: Manhattan listings command much higher rates than the outer boroughs, entire homes price above private rooms, and quality signals like cleanliness and self check-in carry clear premiums. But the big realization was that no single feature explains price on its own ,  two listings can look almost identical and still charge very different prices. Pricing is driven by a combination of factors working together, which gave us confidence that a machine-learning approach would beat a simple formula."
+"Before building any models, we wanted to understand what drives price. We looked at location, property type, bedrooms and bathrooms, amenities, host experience, review scores and availability. Some variables matter far more than others: Manhattan listings command much higher rates than the outer boroughs, entire homes price above private rooms, and quality signals like cleanliness and </a:t>
+            </a:r>
+            <a:r>
+              <a:rPr lang="en-US" dirty="0" err="1"/>
+              <a:t>self check-in</a:t>
+            </a:r>
+            <a:r>
+              <a:rPr lang="en-US" dirty="0"/>
+              <a:t> carry clear premiums. But the big realization was that no single feature explains price on its own ,  two listings can look almost identical and still charge very different prices. Pricing is driven by a combination of factors working together, which gave us confidence that a machine-learning approach would beat a simple formula."</a:t>
+            </a:r>
+            <a:br>
+              <a:rPr lang="en-US">
+                <a:cs typeface="+mn-lt"/>
+              </a:rPr>
+            </a:br>
+            <a:r>
+              <a:rPr lang="en-US" dirty="0"/>
+              <a:t>
 TRANSITION: "Once we understood the variables, we wanted to see how hosts were actually performing." [Rachael continues to Slide 6]</a:t>
             </a:r>
           </a:p>
@@ -2215,9 +2112,72 @@
             <a:r>
               <a:rPr lang="en-US"/>
               <a:t>SPEAKER: Rachael (~1.5 min).
-"One of the most interesting relationships was between host quality and occupancy. More experienced, highly reviewed hosts maintain noticeably higher occupancy ,  listings with 51+ reviews average about 42% occupancy versus 34% for those with under ten, and superhosts run higher than regular hosts. That tells us pricing isn't the only thing driving demand ,  reviews, reputation and listing quality matter too, so we shouldn't treat price as the only lever. We also saw that some listings were priced close to what we'd expect while others were clearly above or below similar properties. That raised the real question: instead of asking whether a listing is expensive or cheap, could we estimate what a fair market price should be? Answering that became the focus of our model."
-TRANSITION: "So we moved from exploration to building the product itself. Over to Manas." [Hand to Manas]</a:t>
-            </a:r>
+“Here is the relationship that justifies the whole model, let's look at two listings at 200 dollars. These two listings are not the same listing. </a:t>
+            </a:r>
+          </a:p>
+          <a:p>
+            <a:endParaRPr lang="en-US"/>
+          </a:p>
+          <a:p>
+            <a:r>
+              <a:rPr lang="en-US"/>
+              <a:t>Occupancy rises with review count. Listings with zero to ten reviews average about 34% occupancy; 11 to 50 reviews, about 37%; 51 or more reviews, about 42%. </a:t>
+            </a:r>
+          </a:p>
+          <a:p>
+            <a:endParaRPr lang="en-US"/>
+          </a:p>
+          <a:p>
+            <a:r>
+              <a:rPr lang="en-US"/>
+              <a:t>It is worth being precise here, because we checked both – where host tenure shows no such pattern, it is flat at 37 to 39%. </a:t>
+            </a:r>
+            <a:r>
+              <a:rPr lang="en-US" err="1"/>
+              <a:t>Thus</a:t>
+            </a:r>
+            <a:r>
+              <a:rPr lang="en-US"/>
+              <a:t> It is the reviews driving this occupancy, not the tenure. It is  reputation </a:t>
+            </a:r>
+            <a:r>
+              <a:rPr lang="en-US" err="1"/>
+              <a:t>th</a:t>
+            </a:r>
+            <a:r>
+              <a:rPr lang="en-US"/>
+              <a:t>at moves occupancy on its own, independently of price. </a:t>
+            </a:r>
+          </a:p>
+          <a:p>
+            <a:endParaRPr lang="en-US"/>
+          </a:p>
+          <a:p>
+            <a:r>
+              <a:rPr lang="en-US"/>
+              <a:t>And that means the question ‘is this listing expensive?’ has no answer until you compare it against listings that match on reputation, location, size, and amenities. And this is what we explored in our model where a fair price is suggested against genuinely similar listings, not against the market average.”</a:t>
+            </a:r>
+          </a:p>
+          <a:p>
+            <a:endParaRPr lang="en-US"/>
+          </a:p>
+          <a:p>
+            <a:r>
+              <a:rPr lang="en-US" b="1"/>
+              <a:t>Handoff to Manas:</a:t>
+            </a:r>
+            <a:r>
+              <a:rPr lang="en-US"/>
+              <a:t> </a:t>
+            </a:r>
+            <a:r>
+              <a:rPr lang="en-US" i="1"/>
+              <a:t>“Now I will hand it to Manas to discuss how we moved from exploration to building the product itself. ”</a:t>
+            </a:r>
+            <a:endParaRPr lang="en-US"/>
+          </a:p>
+          <a:p>
+            <a:endParaRPr lang="en-US"/>
           </a:p>
         </p:txBody>
       </p:sp>
@@ -2304,7 +2264,13 @@
             <a:r>
               <a:rPr lang="en-US"/>
               <a:t>SPEAKER: Manas (~1.5 min).
-"Our goal wasn't to build another pricing calculator ,  Airbnb already has one. It was to help hosts understand the recommendation they're given. If someone tells you to change your price, your first question is usually 'why?' Our product answers that: instead of a single number, it gives a recommended fair value, shows comparable listings that support it, highlights amenity differences, and lets the host explore how changing price could affect revenue. One idea from our coach really shaped this ,  Commander's Intent: people make better decisions when they understand the reasoning, not when they're just told what to do. That applies perfectly here. So the product isn't only about predicting a price ,  it's about helping hosts price with confidence."
+Our goal was not to build another pricing calculator. Airbnb already has one. Our goal was to help hosts understand the recommendation they are given. The way we thought about it: if someone tells you to change your price, your first question is usually, why? Our product answers that. Instead of a single number, it gives hosts a recommended fair value, shows the comparable listings that support it, highlights differences in amenities, and lets the host explore how changing their price could affect potential revenue. One idea that really shaped our thinking came from our industry coach, Stan. He talked about Commander’s Intent, the idea that people make better decisions when they understand the reasoning behind them, not when they are simply told what to do. That applied perfectly here. Hosts are far more likely to trust and act on a recommendation when they understand where it came from.”</a:t>
+            </a:r>
+          </a:p>
+          <a:p>
+            <a:r>
+              <a:rPr lang="en-US"/>
+              <a:t>
 TRANSITION: "Of course, that only works if the recommendation is accurate ,  so next I'll walk through how we generated it." [Manas continues to Slide 8]</a:t>
             </a:r>
           </a:p>
@@ -2393,7 +2359,24 @@
             <a:r>
               <a:rPr lang="en-US"/>
               <a:t>SPEAKER: Manas (~2 min).
-"To estimate fair market value we used a Gradient Boosting Machine, a GBM, because it performs well when many variables interact. Unlike a simple regression it captures nonlinear relationships between location, amenities, property type and host, and for each listing it predicts a fair price with a confidence interval. We did not want a black box, so alongside it we used a K-nearest-neighbors model to find similar listings, which lets us show hosts the comparable properties and amenities behind the price. It is also about twice as accurate as a plain regression. One important nuance on the split: about half of listings read underpriced and about half overpriced, but the two halves are NOT symmetric. Because demand is close to unit-elastic, cutting price on the overpriced side is actually revenue-negative for the host, so we treat that half as a fairness and peer-benchmarking signal, not a second revenue lever. The real revenue opportunity is the underpriced side, and Jai will show the elasticity work that proves it."
+"To estimate fair market </a:t>
+            </a:r>
+            <a:r>
+              <a:rPr lang="en-US" err="1"/>
+              <a:t>value</a:t>
+            </a:r>
+            <a:r>
+              <a:rPr lang="en-US"/>
+              <a:t> we used a Gradient Boosting Machine, a GBM, because it performs well when many variables interact. Unlike a simple regression it captures nonlinear relationships between location, amenities, property type and host, and for each listing it predicts a fair price with a confidence interval. We did not want a black box, so alongside it we used a K-nearest-neighbors model to find similar listings, which lets us show hosts the comparable properties and amenities behind the price. It is also about twice as accurate as a plain regression.  One more thing to note, half of listings read underpriced against fair value and about half overpriced, and our number counts both, but they pay off differently. Raising an underpriced listing adds margin. Cutting an overpriced one adds volume – it fills nights that were sitting empty. Jai will show the elasticity work behind both.”</a:t>
+            </a:r>
+          </a:p>
+          <a:p>
+            <a:br>
+              <a:rPr lang="en-US"/>
+            </a:br>
+            <a:r>
+              <a:rPr lang="en-US"/>
+              <a:t>"
 TRANSITION: "First let me walk you through the dashboard itself." [Manas continues to Slide 9]</a:t>
             </a:r>
           </a:p>
@@ -3146,14 +3129,14 @@
       </p:sp>
       <p:sp>
         <p:nvSpPr>
-          <p:cNvPr id="10" name="Text 5"/>
-          <p:cNvSpPr/>
-          <p:nvPr/>
-        </p:nvSpPr>
-        <p:spPr>
-          <a:xfrm>
-            <a:off x="777240" y="4800600"/>
-            <a:ext cx="10607040" cy="320040"/>
+          <p:cNvPr id="9" name="Text 4"/>
+          <p:cNvSpPr/>
+          <p:nvPr/>
+        </p:nvSpPr>
+        <p:spPr>
+          <a:xfrm>
+            <a:off x="777240" y="3767328"/>
+            <a:ext cx="8046720" cy="457200"/>
           </a:xfrm>
           <a:prstGeom prst="rect">
             <a:avLst/>
@@ -3169,6 +3152,47 @@
               <a:buNone/>
             </a:pPr>
             <a:r>
+              <a:rPr lang="en-US" sz="1800">
+                <a:solidFill>
+                  <a:srgbClr val="FFFFFF">
+                    <a:alpha val="94000"/>
+                  </a:srgbClr>
+                </a:solidFill>
+                <a:latin typeface="Poppins" pitchFamily="34" charset="0"/>
+                <a:ea typeface="Poppins" pitchFamily="34" charset="-122"/>
+                <a:cs typeface="Poppins" pitchFamily="34" charset="-120"/>
+              </a:rPr>
+              <a:t>A fair-price tool hosts can actually understand and trust.</a:t>
+            </a:r>
+            <a:endParaRPr lang="en-US" sz="1800"/>
+          </a:p>
+        </p:txBody>
+      </p:sp>
+      <p:sp>
+        <p:nvSpPr>
+          <p:cNvPr id="10" name="Text 5"/>
+          <p:cNvSpPr/>
+          <p:nvPr/>
+        </p:nvSpPr>
+        <p:spPr>
+          <a:xfrm>
+            <a:off x="777240" y="4800600"/>
+            <a:ext cx="10607040" cy="320040"/>
+          </a:xfrm>
+          <a:prstGeom prst="rect">
+            <a:avLst/>
+          </a:prstGeom>
+          <a:noFill/>
+          <a:ln/>
+        </p:spPr>
+        <p:txBody>
+          <a:bodyPr wrap="square" lIns="0" tIns="0" rIns="0" bIns="0" rtlCol="0" anchor="ctr"/>
+          <a:lstStyle/>
+          <a:p>
+            <a:pPr marL="0" indent="0">
+              <a:buNone/>
+            </a:pPr>
+            <a:r>
               <a:rPr lang="en-US" sz="1250" b="1">
                 <a:solidFill>
                   <a:srgbClr val="FFFFFF"/>
@@ -3289,45 +3313,105 @@
           <a:bodyPr wrap="square" lIns="0" tIns="0" rIns="0" bIns="0" rtlCol="0" anchor="ctr"/>
           <a:lstStyle/>
           <a:p>
+            <a:r>
+              <a:rPr lang="en-US" sz="1250" b="1">
+                <a:solidFill>
+                  <a:srgbClr val="FFFFFF"/>
+                </a:solidFill>
+                <a:latin typeface="Poppins"/>
+                <a:ea typeface="Poppins" pitchFamily="34" charset="-122"/>
+                <a:cs typeface="Poppins"/>
+              </a:rPr>
+              <a:t>Francois </a:t>
+            </a:r>
+            <a:r>
+              <a:rPr lang="en-US" sz="1250" b="1" err="1">
+                <a:solidFill>
+                  <a:srgbClr val="FFFFFF"/>
+                </a:solidFill>
+                <a:latin typeface="Poppins"/>
+                <a:ea typeface="Poppins" pitchFamily="34" charset="-122"/>
+                <a:cs typeface="Poppins"/>
+              </a:rPr>
+              <a:t>Miaule</a:t>
+            </a:r>
+            <a:r>
+              <a:rPr lang="en-US" sz="1250" b="1">
+                <a:solidFill>
+                  <a:srgbClr val="FFFFFF"/>
+                </a:solidFill>
+                <a:latin typeface="Poppins"/>
+                <a:ea typeface="Poppins" pitchFamily="34" charset="-122"/>
+                <a:cs typeface="Poppins"/>
+              </a:rPr>
+              <a:t> </a:t>
+            </a:r>
+            <a:r>
+              <a:rPr lang="en-US" sz="1250">
+                <a:solidFill>
+                  <a:srgbClr val="FFFFFF">
+                    <a:alpha val="78000"/>
+                  </a:srgbClr>
+                </a:solidFill>
+                <a:latin typeface="Poppins"/>
+                <a:ea typeface="Poppins" pitchFamily="34" charset="-122"/>
+                <a:cs typeface="Poppins"/>
+              </a:rPr>
+              <a:t>(Insights &amp; Presentation)      Industry Coach: </a:t>
+            </a:r>
+            <a:r>
+              <a:rPr lang="en-US" sz="1250" b="1">
+                <a:solidFill>
+                  <a:srgbClr val="FFFFFF"/>
+                </a:solidFill>
+                <a:latin typeface="Poppins"/>
+                <a:ea typeface="Poppins" pitchFamily="34" charset="-122"/>
+                <a:cs typeface="Poppins"/>
+              </a:rPr>
+              <a:t>Stan Benarick</a:t>
+            </a:r>
+            <a:endParaRPr lang="en-US" sz="1250"/>
+          </a:p>
+        </p:txBody>
+      </p:sp>
+      <p:sp>
+        <p:nvSpPr>
+          <p:cNvPr id="12" name="Text 7"/>
+          <p:cNvSpPr/>
+          <p:nvPr/>
+        </p:nvSpPr>
+        <p:spPr>
+          <a:xfrm>
+            <a:off x="777240" y="5650992"/>
+            <a:ext cx="10607040" cy="274320"/>
+          </a:xfrm>
+          <a:prstGeom prst="rect">
+            <a:avLst/>
+          </a:prstGeom>
+          <a:noFill/>
+          <a:ln/>
+        </p:spPr>
+        <p:txBody>
+          <a:bodyPr wrap="square" lIns="0" tIns="0" rIns="0" bIns="0" rtlCol="0" anchor="ctr"/>
+          <a:lstStyle/>
+          <a:p>
             <a:pPr marL="0" indent="0">
               <a:buNone/>
             </a:pPr>
             <a:r>
-              <a:rPr lang="en-US" sz="1250" b="1">
-                <a:solidFill>
-                  <a:srgbClr val="FFFFFF"/>
+              <a:rPr lang="en-US" sz="1150">
+                <a:solidFill>
+                  <a:srgbClr val="FFFFFF">
+                    <a:alpha val="88000"/>
+                  </a:srgbClr>
                 </a:solidFill>
                 <a:latin typeface="Poppins" pitchFamily="34" charset="0"/>
                 <a:ea typeface="Poppins" pitchFamily="34" charset="-122"/>
                 <a:cs typeface="Poppins" pitchFamily="34" charset="-120"/>
               </a:rPr>
-              <a:t>Francois Miaule </a:t>
-            </a:r>
-            <a:r>
-              <a:rPr lang="en-US" sz="1250">
-                <a:solidFill>
-                  <a:srgbClr val="FFFFFF">
-                    <a:alpha val="78000"/>
-                  </a:srgbClr>
-                </a:solidFill>
-                <a:latin typeface="Poppins" pitchFamily="34" charset="0"/>
-                <a:ea typeface="Poppins" pitchFamily="34" charset="-122"/>
-                <a:cs typeface="Poppins" pitchFamily="34" charset="-120"/>
-              </a:rPr>
-              <a:t>(Insights &amp; Presentation)      Industry Coach: </a:t>
-            </a:r>
-            <a:r>
-              <a:rPr lang="en-US" sz="1250" b="1">
-                <a:solidFill>
-                  <a:srgbClr val="FFFFFF"/>
-                </a:solidFill>
-                <a:latin typeface="Poppins" pitchFamily="34" charset="0"/>
-                <a:ea typeface="Poppins" pitchFamily="34" charset="-122"/>
-                <a:cs typeface="Poppins" pitchFamily="34" charset="-120"/>
-              </a:rPr>
-              <a:t>Stan</a:t>
-            </a:r>
-            <a:endParaRPr lang="en-US" sz="1250"/>
+              <a:t>Dataset: Inside Airbnb NYC  ·  9,752 active listings  ·  snapshot Jun 14, 2026</a:t>
+            </a:r>
+            <a:endParaRPr lang="en-US" sz="1150"/>
           </a:p>
         </p:txBody>
       </p:sp>
@@ -3643,7 +3727,7 @@
           <p:nvPr/>
         </p:nvPicPr>
         <p:blipFill>
-          <a:blip r:embed="rId3"/>
+          <a:blip r:embed="rId4"/>
           <a:stretch>
             <a:fillRect/>
           </a:stretch>
@@ -3697,7 +3781,7 @@
           <p:nvPr/>
         </p:nvPicPr>
         <p:blipFill>
-          <a:blip r:embed="rId4"/>
+          <a:blip r:embed="rId5"/>
           <a:stretch>
             <a:fillRect/>
           </a:stretch>
@@ -3759,7 +3843,7 @@
         </p:nvSpPr>
         <p:spPr>
           <a:xfrm>
-            <a:off x="502920" y="2194560"/>
+            <a:off x="475488" y="2171700"/>
             <a:ext cx="5468112" cy="1783080"/>
           </a:xfrm>
           <a:prstGeom prst="roundRect">
@@ -3800,7 +3884,7 @@
         </p:nvSpPr>
         <p:spPr>
           <a:xfrm>
-            <a:off x="777240" y="2450592"/>
+            <a:off x="656795" y="2235708"/>
             <a:ext cx="548640" cy="548640"/>
           </a:xfrm>
           <a:prstGeom prst="ellipse">
@@ -3828,14 +3912,14 @@
           <p:nvPr/>
         </p:nvPicPr>
         <p:blipFill>
-          <a:blip r:embed="rId5"/>
+          <a:blip r:embed="rId6"/>
           <a:stretch>
             <a:fillRect/>
           </a:stretch>
         </p:blipFill>
         <p:spPr>
           <a:xfrm>
-            <a:off x="908914" y="2582266"/>
+            <a:off x="788468" y="2344521"/>
             <a:ext cx="285293" cy="285293"/>
           </a:xfrm>
           <a:prstGeom prst="rect">
@@ -4023,7 +4107,7 @@
         </p:nvSpPr>
         <p:spPr>
           <a:xfrm>
-            <a:off x="6492240" y="2450592"/>
+            <a:off x="6391656" y="2212848"/>
             <a:ext cx="548640" cy="548640"/>
           </a:xfrm>
           <a:prstGeom prst="ellipse">
@@ -4051,14 +4135,14 @@
           <p:nvPr/>
         </p:nvPicPr>
         <p:blipFill>
-          <a:blip r:embed="rId6"/>
+          <a:blip r:embed="rId7"/>
           <a:stretch>
             <a:fillRect/>
           </a:stretch>
         </p:blipFill>
         <p:spPr>
           <a:xfrm>
-            <a:off x="6623914" y="2582266"/>
+            <a:off x="6523329" y="2355534"/>
             <a:ext cx="285293" cy="285293"/>
           </a:xfrm>
           <a:prstGeom prst="rect">
@@ -4087,19 +4171,16 @@
           <a:bodyPr wrap="square" lIns="0" tIns="0" rIns="0" bIns="0" rtlCol="0" anchor="ctr"/>
           <a:lstStyle/>
           <a:p>
-            <a:pPr marL="0" indent="0">
-              <a:buNone/>
-            </a:pPr>
             <a:r>
               <a:rPr lang="en-US" sz="1050" b="1" kern="0" spc="100">
                 <a:solidFill>
                   <a:srgbClr val="FF385C"/>
                 </a:solidFill>
-                <a:latin typeface="Poppins" pitchFamily="34" charset="0"/>
-                <a:ea typeface="Poppins" pitchFamily="34" charset="-122"/>
-                <a:cs typeface="Poppins" pitchFamily="34" charset="-120"/>
-              </a:rPr>
-              <a:t>WHAT IT MEANS FOR REVENUE</a:t>
+                <a:latin typeface="Poppins"/>
+                <a:ea typeface="Poppins" pitchFamily="34" charset="-122"/>
+                <a:cs typeface="Poppins"/>
+              </a:rPr>
+              <a:t>WHAT IT MEANS FOR Increasing Revenue</a:t>
             </a:r>
             <a:endParaRPr lang="en-US" sz="1050"/>
           </a:p>
@@ -4113,7 +4194,7 @@
         </p:nvSpPr>
         <p:spPr>
           <a:xfrm>
-            <a:off x="6492240" y="2852928"/>
+            <a:off x="6492240" y="3202826"/>
             <a:ext cx="4965192" cy="457200"/>
           </a:xfrm>
           <a:prstGeom prst="rect">
@@ -4126,63 +4207,58 @@
           <a:bodyPr wrap="square" lIns="0" tIns="0" rIns="0" bIns="0" rtlCol="0" anchor="ctr"/>
           <a:lstStyle/>
           <a:p>
-            <a:pPr marL="0" indent="0">
-              <a:buNone/>
-            </a:pPr>
-            <a:r>
-              <a:rPr lang="en-US" sz="2000" b="1">
+            <a:r>
+              <a:rPr lang="en-US" sz="1600" b="1">
                 <a:solidFill>
                   <a:srgbClr val="FF385C"/>
                 </a:solidFill>
-                <a:latin typeface="Poppins" pitchFamily="34" charset="0"/>
-                <a:ea typeface="Poppins" pitchFamily="34" charset="-122"/>
-                <a:cs typeface="Poppins" pitchFamily="34" charset="-120"/>
-              </a:rPr>
-              <a:t>revenue elasticity = 1 + β ≈ 0.08</a:t>
-            </a:r>
-            <a:endParaRPr lang="en-US" sz="2000"/>
-          </a:p>
-        </p:txBody>
-      </p:sp>
-      <p:sp>
-        <p:nvSpPr>
-          <p:cNvPr id="23" name="Text 17"/>
-          <p:cNvSpPr/>
-          <p:nvPr/>
-        </p:nvSpPr>
-        <p:spPr>
-          <a:xfrm>
-            <a:off x="6492240" y="3310128"/>
-            <a:ext cx="4919472" cy="603504"/>
-          </a:xfrm>
-          <a:prstGeom prst="rect">
-            <a:avLst/>
-          </a:prstGeom>
-          <a:noFill/>
-          <a:ln/>
-        </p:spPr>
-        <p:txBody>
-          <a:bodyPr wrap="square" lIns="0" tIns="0" rIns="0" bIns="0" rtlCol="0" anchor="t"/>
-          <a:lstStyle/>
-          <a:p>
-            <a:pPr marL="0" indent="0">
-              <a:lnSpc>
-                <a:spcPct val="104000"/>
-              </a:lnSpc>
-              <a:buNone/>
-            </a:pPr>
-            <a:r>
-              <a:rPr lang="en-US" sz="1100">
-                <a:solidFill>
-                  <a:srgbClr val="4A4A4A"/>
-                </a:solidFill>
-                <a:latin typeface="Poppins" pitchFamily="34" charset="0"/>
-                <a:ea typeface="Poppins" pitchFamily="34" charset="-122"/>
-                <a:cs typeface="Poppins" pitchFamily="34" charset="-120"/>
-              </a:rPr>
-              <a:t>Revenue barely moves with price at the margin. Breakeven is β = −1.0: cutting price only wins if demand is more elastic than that. So the real lift is raising underpriced listings; cutting overpriced ones is near revenue-neutral for the host.</a:t>
-            </a:r>
-            <a:endParaRPr lang="en-US" sz="1100"/>
+                <a:latin typeface="Poppins"/>
+                <a:ea typeface="+mn-lt"/>
+                <a:cs typeface="Poppins"/>
+              </a:rPr>
+              <a:t>Underpriced → raise price → wins when β &gt; −1 (inelastic)</a:t>
+            </a:r>
+            <a:endParaRPr lang="en-US" sz="1600">
+              <a:ea typeface="Calibri"/>
+              <a:cs typeface="Calibri"/>
+            </a:endParaRPr>
+          </a:p>
+          <a:p>
+            <a:endParaRPr lang="en-US" sz="1600" b="1">
+              <a:solidFill>
+                <a:srgbClr val="FF385C"/>
+              </a:solidFill>
+              <a:latin typeface="Poppins"/>
+              <a:ea typeface="+mn-lt"/>
+              <a:cs typeface="Poppins"/>
+            </a:endParaRPr>
+          </a:p>
+          <a:p>
+            <a:r>
+              <a:rPr lang="en-US" sz="1600" b="1">
+                <a:solidFill>
+                  <a:srgbClr val="FF385C"/>
+                </a:solidFill>
+                <a:latin typeface="Poppins"/>
+                <a:ea typeface="+mn-lt"/>
+                <a:cs typeface="Poppins"/>
+              </a:rPr>
+              <a:t>Overpriced → cut price → wins β &lt; −1 (elastic)</a:t>
+            </a:r>
+            <a:endParaRPr lang="en-US" sz="1600">
+              <a:ea typeface="Calibri"/>
+              <a:cs typeface="Calibri"/>
+            </a:endParaRPr>
+          </a:p>
+          <a:p>
+            <a:endParaRPr lang="en-US" sz="2000" b="1">
+              <a:solidFill>
+                <a:srgbClr val="FF385C"/>
+              </a:solidFill>
+              <a:latin typeface="Poppins"/>
+              <a:ea typeface="Calibri"/>
+              <a:cs typeface="Poppins"/>
+            </a:endParaRPr>
           </a:p>
         </p:txBody>
       </p:sp>
@@ -4697,7 +4773,29 @@
                 <a:ea typeface="Poppins" pitchFamily="34" charset="-122"/>
                 <a:cs typeface="Poppins" pitchFamily="34" charset="-120"/>
               </a:rPr>
-              <a:t>measured on a 64-listing short-stay pilot of established listings (median 142 reviews). The monthly segment came back statistically insignificant (β=+0.084, p=0.73), so we hold it occupancy-neutral. Broadening this across every segment is exactly our AirROI data ask.</a:t>
+              <a:t>measured on a 64-listing short-stay pilot of established listings (median 142 reviews). The monthly segment came back statistically insignificant (β=+0.084, p=0.73), so we hold it occupancy-neutral. Broadening this across every segment is exactly our </a:t>
+            </a:r>
+            <a:r>
+              <a:rPr lang="en-US" sz="950" i="1" err="1">
+                <a:solidFill>
+                  <a:srgbClr val="9AA0A6"/>
+                </a:solidFill>
+                <a:latin typeface="Poppins" pitchFamily="34" charset="0"/>
+                <a:ea typeface="Poppins" pitchFamily="34" charset="-122"/>
+                <a:cs typeface="Poppins" pitchFamily="34" charset="-120"/>
+              </a:rPr>
+              <a:t>AirROI</a:t>
+            </a:r>
+            <a:r>
+              <a:rPr lang="en-US" sz="950" i="1">
+                <a:solidFill>
+                  <a:srgbClr val="9AA0A6"/>
+                </a:solidFill>
+                <a:latin typeface="Poppins" pitchFamily="34" charset="0"/>
+                <a:ea typeface="Poppins" pitchFamily="34" charset="-122"/>
+                <a:cs typeface="Poppins" pitchFamily="34" charset="-120"/>
+              </a:rPr>
+              <a:t> data ask.</a:t>
             </a:r>
             <a:endParaRPr lang="en-US" sz="950"/>
           </a:p>
@@ -4708,6 +4806,11 @@
   <p:clrMapOvr>
     <a:masterClrMapping/>
   </p:clrMapOvr>
+  <p:extLst>
+    <p:ext uri="{6950BFC3-D8DA-4A85-94F7-54DA5524770B}">
+      <p188:commentRel xmlns:p188="http://schemas.microsoft.com/office/powerpoint/2018/8/main" r:id="rId3"/>
+    </p:ext>
+  </p:extLst>
 </p:sld>
 </file>
 
@@ -5195,7 +5298,7 @@
                 <a:ea typeface="Poppins" pitchFamily="34" charset="-122"/>
                 <a:cs typeface="Poppins" pitchFamily="34" charset="-120"/>
               </a:rPr>
-              <a:t>~$7.6M host GBV      ×15.5%  →      $1.17M / yr Airbnb fee, at full adoption</a:t>
+              <a:t>~$7.6M</a:t>
             </a:r>
             <a:r>
               <a:rPr lang="en-US" sz="1300">
@@ -5206,7 +5309,7 @@
                 <a:ea typeface="Poppins" pitchFamily="34" charset="-122"/>
                 <a:cs typeface="Poppins" pitchFamily="34" charset="-120"/>
               </a:rPr>
-              <a:t/>
+              <a:t> host GBV</a:t>
             </a:r>
             <a:r>
               <a:rPr lang="en-US" sz="1250">
@@ -5217,7 +5320,7 @@
                 <a:ea typeface="Poppins" pitchFamily="34" charset="-122"/>
                 <a:cs typeface="Poppins" pitchFamily="34" charset="-120"/>
               </a:rPr>
-              <a:t/>
+              <a:t>      ×15.5%  →      </a:t>
             </a:r>
             <a:r>
               <a:rPr lang="en-US" sz="2900" b="1">
@@ -5228,7 +5331,7 @@
                 <a:ea typeface="Poppins" pitchFamily="34" charset="-122"/>
                 <a:cs typeface="Poppins" pitchFamily="34" charset="-120"/>
               </a:rPr>
-              <a:t/>
+              <a:t>$1.17M</a:t>
             </a:r>
             <a:r>
               <a:rPr lang="en-US" sz="1300">
@@ -5239,7 +5342,7 @@
                 <a:ea typeface="Poppins" pitchFamily="34" charset="-122"/>
                 <a:cs typeface="Poppins" pitchFamily="34" charset="-120"/>
               </a:rPr>
-              <a:t/>
+              <a:t> / yr Airbnb fee</a:t>
             </a:r>
             <a:endParaRPr lang="en-US" sz="2900"/>
           </a:p>
@@ -6168,17 +6271,11 @@
           <p:cNvGraphicFramePr>
             <a:graphicFrameLocks noGrp="1"/>
           </p:cNvGraphicFramePr>
-          <p:nvPr>
-            <p:extLst>
-              <p:ext uri="{D42A27DB-BD31-4B8C-83A1-F6EECF244321}">
-                <p14:modId xmlns:p14="http://schemas.microsoft.com/office/powerpoint/2010/main" val="1579011935"/>
-              </p:ext>
-            </p:extLst>
-          </p:nvPr>
+          <p:nvPr/>
         </p:nvGraphicFramePr>
         <p:xfrm>
           <a:off x="502920" y="2377440"/>
-          <a:ext cx="6858000" cy="2688336"/>
+          <a:ext cx="6858000" cy="2702560"/>
         </p:xfrm>
         <a:graphic>
           <a:graphicData uri="http://schemas.openxmlformats.org/drawingml/2006/table">
@@ -8102,50 +8199,6 @@
 5-year cumulative net: $1.61M nominal → $1.14M NPV at a 10% discount (~29% haircut).
 We discount at 10% and show both, rather than present nominal sums under an NPV banner.</a:t>
             </a:r>
-            <a:r>
-              <a:rPr lang="en-US" sz="1150">
-                <a:solidFill>
-                  <a:srgbClr val="4A4A4A"/>
-                </a:solidFill>
-                <a:latin typeface="Poppins" pitchFamily="34" charset="0"/>
-                <a:ea typeface="Poppins" pitchFamily="34" charset="-122"/>
-                <a:cs typeface="Poppins" pitchFamily="34" charset="-120"/>
-              </a:rPr>
-              <a:t/>
-            </a:r>
-            <a:r>
-              <a:rPr lang="en-US" sz="1150" b="1">
-                <a:solidFill>
-                  <a:srgbClr val="222222"/>
-                </a:solidFill>
-                <a:latin typeface="Poppins" pitchFamily="34" charset="0"/>
-                <a:ea typeface="Poppins" pitchFamily="34" charset="-122"/>
-                <a:cs typeface="Poppins" pitchFamily="34" charset="-120"/>
-              </a:rPr>
-              <a:t/>
-            </a:r>
-            <a:r>
-              <a:rPr lang="en-US" sz="1150">
-                <a:solidFill>
-                  <a:srgbClr val="4A4A4A"/>
-                </a:solidFill>
-                <a:latin typeface="Poppins" pitchFamily="34" charset="0"/>
-                <a:ea typeface="Poppins" pitchFamily="34" charset="-122"/>
-                <a:cs typeface="Poppins" pitchFamily="34" charset="-120"/>
-              </a:rPr>
-              <a:t/>
-            </a:r>
-            <a:r>
-              <a:rPr lang="en-US" sz="1150">
-                <a:solidFill>
-                  <a:srgbClr val="717171"/>
-                </a:solidFill>
-                <a:latin typeface="Poppins" pitchFamily="34" charset="0"/>
-                <a:ea typeface="Poppins" pitchFamily="34" charset="-122"/>
-                <a:cs typeface="Poppins" pitchFamily="34" charset="-120"/>
-              </a:rPr>
-              <a:t/>
-            </a:r>
             <a:endParaRPr lang="en-US" sz="1150"/>
           </a:p>
         </p:txBody>
@@ -8204,6 +8257,11 @@
         </p:txBody>
       </p:sp>
     </p:spTree>
+    <p:extLst>
+      <p:ext uri="{BB962C8B-B14F-4D97-AF65-F5344CB8AC3E}">
+        <p14:creationId xmlns:p14="http://schemas.microsoft.com/office/powerpoint/2010/main" val="3092064443"/>
+      </p:ext>
+    </p:extLst>
   </p:cSld>
   <p:clrMapOvr>
     <a:masterClrMapping/>
@@ -8283,8 +8341,8 @@
         </p:nvSpPr>
         <p:spPr>
           <a:xfrm>
-            <a:off x="493776" y="768096"/>
-            <a:ext cx="10881360" cy="868680"/>
+            <a:off x="502920" y="836864"/>
+            <a:ext cx="10936529" cy="868680"/>
           </a:xfrm>
           <a:prstGeom prst="rect">
             <a:avLst/>
@@ -9527,9 +9585,9 @@
                 <a:solidFill>
                   <a:srgbClr val="9AA0A6"/>
                 </a:solidFill>
-                <a:latin typeface="Poppins" pitchFamily="34" charset="0"/>
-                <a:ea typeface="Poppins" pitchFamily="34" charset="-122"/>
-                <a:cs typeface="Poppins" pitchFamily="34" charset="-120"/>
+                <a:latin typeface="Poppins"/>
+                <a:ea typeface="Poppins" pitchFamily="34" charset="-122"/>
+                <a:cs typeface="Poppins"/>
               </a:rPr>
               <a:t>PRESENTS  </a:t>
             </a:r>
@@ -9538,13 +9596,20 @@
                 <a:solidFill>
                   <a:srgbClr val="222222"/>
                 </a:solidFill>
-                <a:latin typeface="Poppins" pitchFamily="34" charset="0"/>
-                <a:ea typeface="Poppins" pitchFamily="34" charset="-122"/>
-                <a:cs typeface="Poppins" pitchFamily="34" charset="-120"/>
-              </a:rPr>
-              <a:t>Francois</a:t>
-            </a:r>
-            <a:endParaRPr lang="en-US" sz="950"/>
+                <a:latin typeface="Poppins"/>
+                <a:ea typeface="Poppins" pitchFamily="34" charset="-122"/>
+                <a:cs typeface="Poppins"/>
+              </a:rPr>
+              <a:t>Manas</a:t>
+            </a:r>
+            <a:endParaRPr lang="en-US" sz="950">
+              <a:solidFill>
+                <a:srgbClr val="000000"/>
+              </a:solidFill>
+              <a:latin typeface="Calibri"/>
+              <a:ea typeface="Calibri"/>
+              <a:cs typeface="Calibri"/>
+            </a:endParaRPr>
           </a:p>
         </p:txBody>
       </p:sp>
@@ -10756,6 +10821,47 @@
               <a:t>BACKUP</a:t>
             </a:r>
             <a:endParaRPr lang="en-US" sz="6000"/>
+          </a:p>
+        </p:txBody>
+      </p:sp>
+      <p:sp>
+        <p:nvSpPr>
+          <p:cNvPr id="8" name="Text 3"/>
+          <p:cNvSpPr/>
+          <p:nvPr/>
+        </p:nvSpPr>
+        <p:spPr>
+          <a:xfrm>
+            <a:off x="804672" y="3108960"/>
+            <a:ext cx="9601200" cy="457200"/>
+          </a:xfrm>
+          <a:prstGeom prst="rect">
+            <a:avLst/>
+          </a:prstGeom>
+          <a:noFill/>
+          <a:ln/>
+        </p:spPr>
+        <p:txBody>
+          <a:bodyPr wrap="square" lIns="0" tIns="0" rIns="0" bIns="0" rtlCol="0" anchor="ctr"/>
+          <a:lstStyle/>
+          <a:p>
+            <a:pPr marL="0" indent="0">
+              <a:buNone/>
+            </a:pPr>
+            <a:r>
+              <a:rPr lang="en-US" sz="1700">
+                <a:solidFill>
+                  <a:srgbClr val="FFFFFF">
+                    <a:alpha val="92000"/>
+                  </a:srgbClr>
+                </a:solidFill>
+                <a:latin typeface="Poppins" pitchFamily="34" charset="0"/>
+                <a:ea typeface="Poppins" pitchFamily="34" charset="-122"/>
+                <a:cs typeface="Poppins" pitchFamily="34" charset="-120"/>
+              </a:rPr>
+              <a:t>Not presented; held in reserve to answer questions. The full technical write-up lives in the appendix document.</a:t>
+            </a:r>
+            <a:endParaRPr lang="en-US" sz="1700"/>
           </a:p>
         </p:txBody>
       </p:sp>
@@ -11427,13 +11533,7 @@
           <p:cNvGraphicFramePr>
             <a:graphicFrameLocks noGrp="1"/>
           </p:cNvGraphicFramePr>
-          <p:nvPr>
-            <p:extLst>
-              <p:ext uri="{D42A27DB-BD31-4B8C-83A1-F6EECF244321}">
-                <p14:modId xmlns:p14="http://schemas.microsoft.com/office/powerpoint/2010/main" val="1579011935"/>
-              </p:ext>
-            </p:extLst>
-          </p:nvPr>
+          <p:nvPr/>
         </p:nvGraphicFramePr>
         <p:xfrm>
           <a:off x="502920" y="2331720"/>
@@ -14865,6 +14965,11 @@
         </p:txBody>
       </p:sp>
     </p:spTree>
+    <p:extLst>
+      <p:ext uri="{BB962C8B-B14F-4D97-AF65-F5344CB8AC3E}">
+        <p14:creationId xmlns:p14="http://schemas.microsoft.com/office/powerpoint/2010/main" val="1273462884"/>
+      </p:ext>
+    </p:extLst>
   </p:cSld>
   <p:clrMapOvr>
     <a:masterClrMapping/>
@@ -15870,6 +15975,11 @@
         </p:txBody>
       </p:sp>
     </p:spTree>
+    <p:extLst>
+      <p:ext uri="{BB962C8B-B14F-4D97-AF65-F5344CB8AC3E}">
+        <p14:creationId xmlns:p14="http://schemas.microsoft.com/office/powerpoint/2010/main" val="626923852"/>
+      </p:ext>
+    </p:extLst>
   </p:cSld>
   <p:clrMapOvr>
     <a:masterClrMapping/>
@@ -18584,28 +18694,6 @@
               </a:rPr>
               <a:t>Smart Pricing hands hosts a number with no reasoning: no comparables, no drivers, nothing to explore. So hosts ignore it, or follow it blindly.</a:t>
             </a:r>
-            <a:r>
-              <a:rPr lang="en-US" sz="1200" err="1">
-                <a:solidFill>
-                  <a:srgbClr val="4A4A4A"/>
-                </a:solidFill>
-                <a:latin typeface="Poppins"/>
-                <a:ea typeface="Poppins" pitchFamily="34" charset="-122"/>
-                <a:cs typeface="Poppins"/>
-              </a:rPr>
-              <a:t/>
-            </a:r>
-            <a:r>
-              <a:rPr lang="en-US" sz="1200">
-                <a:solidFill>
-                  <a:srgbClr val="4A4A4A"/>
-                </a:solidFill>
-                <a:latin typeface="Poppins"/>
-                <a:ea typeface="Poppins" pitchFamily="34" charset="-122"/>
-                <a:cs typeface="Poppins"/>
-              </a:rPr>
-              <a:t/>
-            </a:r>
             <a:endParaRPr lang="en-US" sz="1200">
               <a:latin typeface="Poppins"/>
               <a:cs typeface="Poppins"/>
@@ -19154,7 +19242,7 @@
       </p:sp>
       <p:sp>
         <p:nvSpPr>
-          <p:cNvPr id="4" name="Text 28"/>
+          <p:cNvPr id="23" name="Text 28"/>
           <p:cNvSpPr/>
           <p:nvPr/>
         </p:nvSpPr>
@@ -20524,6 +20612,11 @@
         </p:txBody>
       </p:sp>
     </p:spTree>
+    <p:extLst>
+      <p:ext uri="{BB962C8B-B14F-4D97-AF65-F5344CB8AC3E}">
+        <p14:creationId xmlns:p14="http://schemas.microsoft.com/office/powerpoint/2010/main" val="2258413205"/>
+      </p:ext>
+    </p:extLst>
   </p:cSld>
   <p:clrMapOvr>
     <a:masterClrMapping/>
@@ -20532,7 +20625,7 @@
 </file>
 
 <file path=ppt/slides/slide21.xml><?xml version="1.0" encoding="utf-8"?>
-<p:sld xmlns:a="http://schemas.openxmlformats.org/drawingml/2006/main" xmlns:p="http://schemas.openxmlformats.org/presentationml/2006/main" xmlns:r="http://schemas.openxmlformats.org/officeDocument/2006/relationships">
+<p:sld xmlns:a="http://schemas.openxmlformats.org/drawingml/2006/main" xmlns:r="http://schemas.openxmlformats.org/officeDocument/2006/relationships" xmlns:p="http://schemas.openxmlformats.org/presentationml/2006/main">
   <p:cSld>
     <p:spTree>
       <p:nvGrpSpPr>
@@ -20540,7 +20633,14 @@
         <p:cNvGrpSpPr/>
         <p:nvPr/>
       </p:nvGrpSpPr>
-      <p:grpSpPr/>
+      <p:grpSpPr>
+        <a:xfrm>
+          <a:off x="0" y="0"/>
+          <a:ext cx="0" cy="0"/>
+          <a:chOff x="0" y="0"/>
+          <a:chExt cx="0" cy="0"/>
+        </a:xfrm>
+      </p:grpSpPr>
       <p:sp>
         <p:nvSpPr>
           <p:cNvPr id="2" name="Text 0"/>
@@ -20741,7 +20841,7 @@
         </p:xfrm>
         <a:graphic>
           <a:graphicData uri="http://schemas.openxmlformats.org/drawingml/2006/chart">
-            <c:chart xmlns:c="http://schemas.openxmlformats.org/drawingml/2006/chart" r:id="rId2"/>
+            <c:chart xmlns:c="http://schemas.openxmlformats.org/drawingml/2006/chart" xmlns:r="http://schemas.openxmlformats.org/officeDocument/2006/relationships" r:id="rId2"/>
           </a:graphicData>
         </a:graphic>
       </p:graphicFrame>
@@ -20795,7 +20895,7 @@
       </p:pic>
       <p:sp>
         <p:nvSpPr>
-          <p:cNvPr id="8" name="Text 4"/>
+          <p:cNvPr id="10" name="Text 4"/>
           <p:cNvSpPr/>
           <p:nvPr/>
         </p:nvSpPr>
@@ -20833,6 +20933,11 @@
         </p:txBody>
       </p:sp>
     </p:spTree>
+    <p:extLst>
+      <p:ext uri="{BB962C8B-B14F-4D97-AF65-F5344CB8AC3E}">
+        <p14:creationId xmlns:p14="http://schemas.microsoft.com/office/powerpoint/2010/main" val="2242550695"/>
+      </p:ext>
+    </p:extLst>
   </p:cSld>
   <p:clrMapOvr>
     <a:masterClrMapping/>
@@ -23904,7 +24009,7 @@
         </p:nvSpPr>
         <p:spPr>
           <a:xfrm>
-            <a:off x="8275320" y="2560320"/>
+            <a:off x="8027515" y="1569100"/>
             <a:ext cx="603504" cy="603504"/>
           </a:xfrm>
           <a:prstGeom prst="ellipse">
@@ -23939,7 +24044,7 @@
         </p:blipFill>
         <p:spPr>
           <a:xfrm>
-            <a:off x="7960874" y="2778229"/>
+            <a:off x="7713069" y="1787010"/>
             <a:ext cx="313822" cy="313822"/>
           </a:xfrm>
           <a:prstGeom prst="rect">
@@ -23955,7 +24060,7 @@
         </p:nvSpPr>
         <p:spPr>
           <a:xfrm>
-            <a:off x="8422290" y="2776937"/>
+            <a:off x="8174485" y="1785718"/>
             <a:ext cx="3531087" cy="470143"/>
           </a:xfrm>
           <a:prstGeom prst="rect">
@@ -23990,7 +24095,7 @@
         </p:nvSpPr>
         <p:spPr>
           <a:xfrm>
-            <a:off x="8285758" y="3161360"/>
+            <a:off x="8037953" y="2170141"/>
             <a:ext cx="3816262" cy="1945709"/>
           </a:xfrm>
           <a:prstGeom prst="rect">
@@ -24762,7 +24867,7 @@
                 <a:latin typeface="Poppins"/>
                 <a:cs typeface="Poppins"/>
               </a:rPr>
-              <a:t>Two listings at $200 aren’t the same listing</a:t>
+              <a:t>Two listings at $200 are NOT the same listing</a:t>
             </a:r>
             <a:endParaRPr lang="en-US"/>
           </a:p>
@@ -25547,8 +25652,8 @@
         </p:nvSpPr>
         <p:spPr>
           <a:xfrm>
-            <a:off x="6263640" y="2240280"/>
-            <a:ext cx="5422392" cy="3794760"/>
+            <a:off x="6426033" y="2342131"/>
+            <a:ext cx="5569596" cy="3799089"/>
           </a:xfrm>
           <a:prstGeom prst="roundRect">
             <a:avLst>
@@ -25674,8 +25779,8 @@
         </p:nvSpPr>
         <p:spPr>
           <a:xfrm>
-            <a:off x="6537960" y="3246120"/>
-            <a:ext cx="4892040" cy="1371600"/>
+            <a:off x="6683815" y="3454081"/>
+            <a:ext cx="4463487" cy="541393"/>
           </a:xfrm>
           <a:prstGeom prst="rect">
             <a:avLst/>
@@ -25687,14 +25792,13 @@
           <a:bodyPr wrap="square" lIns="0" tIns="0" rIns="0" bIns="0" rtlCol="0" anchor="t"/>
           <a:lstStyle/>
           <a:p>
-            <a:pPr marL="0" indent="0">
+            <a:pPr>
               <a:lnSpc>
                 <a:spcPct val="107000"/>
               </a:lnSpc>
-              <a:buNone/>
             </a:pPr>
             <a:r>
-              <a:rPr lang="en-US" sz="1250">
+              <a:rPr lang="en-US">
                 <a:solidFill>
                   <a:srgbClr val="4A4A4A"/>
                 </a:solidFill>
@@ -25702,31 +25806,12 @@
                 <a:ea typeface="Poppins" pitchFamily="34" charset="-122"/>
                 <a:cs typeface="Poppins"/>
               </a:rPr>
-              <a:t>Reviews move occupancy independently of price. So “is this listing expensive?” has no answer until you compare it to listings that match on reputation, location, size and amenities.</a:t>
-            </a:r>
-            <a:r>
-              <a:rPr lang="en-US" sz="1250" err="1">
-                <a:solidFill>
-                  <a:srgbClr val="4A4A4A"/>
-                </a:solidFill>
-                <a:latin typeface="Poppins"/>
-                <a:ea typeface="Poppins" pitchFamily="34" charset="-122"/>
-                <a:cs typeface="Poppins"/>
-              </a:rPr>
-              <a:t/>
-            </a:r>
-            <a:r>
-              <a:rPr lang="en-US" sz="1250">
-                <a:solidFill>
-                  <a:srgbClr val="4A4A4A"/>
-                </a:solidFill>
-                <a:latin typeface="Poppins"/>
-                <a:ea typeface="Poppins" pitchFamily="34" charset="-122"/>
-                <a:cs typeface="Poppins"/>
-              </a:rPr>
-              <a:t/>
-            </a:r>
-            <a:endParaRPr lang="en-US" sz="1250">
+              <a:t>Is this listing expensive? --&gt; No answer until...</a:t>
+            </a:r>
+            <a:endParaRPr lang="en-US">
+              <a:solidFill>
+                <a:srgbClr val="4A4A4A"/>
+              </a:solidFill>
               <a:latin typeface="Poppins"/>
               <a:cs typeface="Poppins"/>
             </a:endParaRPr>
@@ -25741,8 +25826,8 @@
         </p:nvSpPr>
         <p:spPr>
           <a:xfrm>
-            <a:off x="6537960" y="4800600"/>
-            <a:ext cx="4892040" cy="960120"/>
+            <a:off x="6556696" y="4300928"/>
+            <a:ext cx="4854567" cy="1453547"/>
           </a:xfrm>
           <a:prstGeom prst="roundRect">
             <a:avLst>
@@ -25770,8 +25855,8 @@
         </p:nvSpPr>
         <p:spPr>
           <a:xfrm>
-            <a:off x="6766560" y="4937760"/>
-            <a:ext cx="4434840" cy="731520"/>
+            <a:off x="6997657" y="4350646"/>
+            <a:ext cx="4428595" cy="1468536"/>
           </a:xfrm>
           <a:prstGeom prst="rect">
             <a:avLst/>
@@ -25797,7 +25882,7 @@
                 <a:ea typeface="Poppins" pitchFamily="34" charset="-122"/>
                 <a:cs typeface="Poppins"/>
               </a:rPr>
-              <a:t>That’s the model’s whole job: a fair price against genuinely similar listings, not against the market average.</a:t>
+              <a:t>Why our model? --&gt; A fair price against similar listings, not against the market average.</a:t>
             </a:r>
             <a:endParaRPr lang="en-US" sz="1250">
               <a:latin typeface="Poppins"/>
@@ -28466,7 +28551,7 @@
           <p:nvPr/>
         </p:nvPicPr>
         <p:blipFill>
-          <a:blip r:embed="rId3"/>
+          <a:blip r:embed="rId5"/>
           <a:stretch>
             <a:fillRect/>
           </a:stretch>
@@ -29129,611 +29214,6 @@
       </p:sp>
       <p:sp>
         <p:nvSpPr>
-          <p:cNvPr id="30" name="Shape 27"/>
-          <p:cNvSpPr/>
-          <p:nvPr/>
-        </p:nvSpPr>
-        <p:spPr>
-          <a:xfrm>
-            <a:off x="8046720" y="1600200"/>
-            <a:ext cx="3639312" cy="4160520"/>
-          </a:xfrm>
-          <a:prstGeom prst="roundRect">
-            <a:avLst>
-              <a:gd name="adj" fmla="val 4020"/>
-            </a:avLst>
-          </a:prstGeom>
-          <a:solidFill>
-            <a:srgbClr val="FFFFFF"/>
-          </a:solidFill>
-          <a:ln w="12700">
-            <a:solidFill>
-              <a:srgbClr val="EBEBEB"/>
-            </a:solidFill>
-            <a:prstDash val="solid"/>
-          </a:ln>
-          <a:effectLst>
-            <a:outerShdw blurRad="127000" dist="25400" dir="5400000" algn="bl" rotWithShape="0">
-              <a:srgbClr val="9AA0A6">
-                <a:alpha val="18000"/>
-              </a:srgbClr>
-            </a:outerShdw>
-          </a:effectLst>
-        </p:spPr>
-        <p:txBody>
-          <a:bodyPr/>
-          <a:lstStyle/>
-          <a:p>
-            <a:endParaRPr lang="en-US"/>
-          </a:p>
-        </p:txBody>
-      </p:sp>
-      <p:sp>
-        <p:nvSpPr>
-          <p:cNvPr id="31" name="Text 28"/>
-          <p:cNvSpPr/>
-          <p:nvPr/>
-        </p:nvSpPr>
-        <p:spPr>
-          <a:xfrm>
-            <a:off x="8302752" y="1819656"/>
-            <a:ext cx="3182112" cy="274320"/>
-          </a:xfrm>
-          <a:prstGeom prst="rect">
-            <a:avLst/>
-          </a:prstGeom>
-          <a:noFill/>
-          <a:ln/>
-        </p:spPr>
-        <p:txBody>
-          <a:bodyPr wrap="square" lIns="0" tIns="0" rIns="0" bIns="0" rtlCol="0" anchor="ctr"/>
-          <a:lstStyle/>
-          <a:p>
-            <a:pPr marL="0" indent="0">
-              <a:buNone/>
-            </a:pPr>
-            <a:r>
-              <a:rPr lang="en-US" sz="1050" b="1" kern="0" spc="100">
-                <a:solidFill>
-                  <a:srgbClr val="9AA0A6"/>
-                </a:solidFill>
-                <a:latin typeface="Poppins" pitchFamily="34" charset="0"/>
-                <a:ea typeface="Poppins" pitchFamily="34" charset="-122"/>
-                <a:cs typeface="Poppins" pitchFamily="34" charset="-120"/>
-              </a:rPr>
-              <a:t>COMPARABLE LISTINGS</a:t>
-            </a:r>
-            <a:endParaRPr lang="en-US" sz="1050"/>
-          </a:p>
-        </p:txBody>
-      </p:sp>
-      <p:sp>
-        <p:nvSpPr>
-          <p:cNvPr id="32" name="Shape 29"/>
-          <p:cNvSpPr/>
-          <p:nvPr/>
-        </p:nvSpPr>
-        <p:spPr>
-          <a:xfrm>
-            <a:off x="8266176" y="2203704"/>
-            <a:ext cx="3200400" cy="914400"/>
-          </a:xfrm>
-          <a:prstGeom prst="roundRect">
-            <a:avLst>
-              <a:gd name="adj" fmla="val 10000"/>
-            </a:avLst>
-          </a:prstGeom>
-          <a:solidFill>
-            <a:srgbClr val="F7F7F7"/>
-          </a:solidFill>
-          <a:ln/>
-        </p:spPr>
-        <p:txBody>
-          <a:bodyPr/>
-          <a:lstStyle/>
-          <a:p>
-            <a:endParaRPr lang="en-US"/>
-          </a:p>
-        </p:txBody>
-      </p:sp>
-      <p:sp>
-        <p:nvSpPr>
-          <p:cNvPr id="33" name="Text 30"/>
-          <p:cNvSpPr/>
-          <p:nvPr/>
-        </p:nvSpPr>
-        <p:spPr>
-          <a:xfrm>
-            <a:off x="8430768" y="2313432"/>
-            <a:ext cx="2450592" cy="320040"/>
-          </a:xfrm>
-          <a:prstGeom prst="rect">
-            <a:avLst/>
-          </a:prstGeom>
-          <a:noFill/>
-          <a:ln/>
-        </p:spPr>
-        <p:txBody>
-          <a:bodyPr wrap="square" lIns="0" tIns="0" rIns="0" bIns="0" rtlCol="0" anchor="ctr"/>
-          <a:lstStyle/>
-          <a:p>
-            <a:pPr marL="0" indent="0">
-              <a:buNone/>
-            </a:pPr>
-            <a:r>
-              <a:rPr lang="en-US" sz="1100" b="1">
-                <a:solidFill>
-                  <a:srgbClr val="222222"/>
-                </a:solidFill>
-                <a:latin typeface="Poppins" pitchFamily="34" charset="0"/>
-                <a:ea typeface="Poppins" pitchFamily="34" charset="-122"/>
-                <a:cs typeface="Poppins" pitchFamily="34" charset="-120"/>
-              </a:rPr>
-              <a:t>Sunny Greenpoint 1BR</a:t>
-            </a:r>
-            <a:endParaRPr lang="en-US" sz="1100"/>
-          </a:p>
-        </p:txBody>
-      </p:sp>
-      <p:sp>
-        <p:nvSpPr>
-          <p:cNvPr id="34" name="Text 31"/>
-          <p:cNvSpPr/>
-          <p:nvPr/>
-        </p:nvSpPr>
-        <p:spPr>
-          <a:xfrm>
-            <a:off x="10634472" y="2313432"/>
-            <a:ext cx="822960" cy="320040"/>
-          </a:xfrm>
-          <a:prstGeom prst="rect">
-            <a:avLst/>
-          </a:prstGeom>
-          <a:noFill/>
-          <a:ln/>
-        </p:spPr>
-        <p:txBody>
-          <a:bodyPr wrap="square" lIns="0" tIns="0" rIns="0" bIns="0" rtlCol="0" anchor="ctr"/>
-          <a:lstStyle/>
-          <a:p>
-            <a:pPr marL="0" indent="0" algn="r">
-              <a:buNone/>
-            </a:pPr>
-            <a:r>
-              <a:rPr lang="en-US" sz="1300" b="1">
-                <a:solidFill>
-                  <a:srgbClr val="007A73"/>
-                </a:solidFill>
-                <a:latin typeface="Poppins" pitchFamily="34" charset="0"/>
-                <a:ea typeface="Poppins" pitchFamily="34" charset="-122"/>
-                <a:cs typeface="Poppins" pitchFamily="34" charset="-120"/>
-              </a:rPr>
-              <a:t>$229</a:t>
-            </a:r>
-            <a:endParaRPr lang="en-US" sz="1300"/>
-          </a:p>
-        </p:txBody>
-      </p:sp>
-      <p:sp>
-        <p:nvSpPr>
-          <p:cNvPr id="35" name="Shape 32"/>
-          <p:cNvSpPr/>
-          <p:nvPr/>
-        </p:nvSpPr>
-        <p:spPr>
-          <a:xfrm>
-            <a:off x="8430768" y="2706624"/>
-            <a:ext cx="2651760" cy="310896"/>
-          </a:xfrm>
-          <a:prstGeom prst="roundRect">
-            <a:avLst>
-              <a:gd name="adj" fmla="val 50000"/>
-            </a:avLst>
-          </a:prstGeom>
-          <a:solidFill>
-            <a:srgbClr val="FFEEF2"/>
-          </a:solidFill>
-          <a:ln/>
-        </p:spPr>
-        <p:txBody>
-          <a:bodyPr/>
-          <a:lstStyle/>
-          <a:p>
-            <a:endParaRPr lang="en-US"/>
-          </a:p>
-        </p:txBody>
-      </p:sp>
-      <p:sp>
-        <p:nvSpPr>
-          <p:cNvPr id="36" name="Text 33"/>
-          <p:cNvSpPr/>
-          <p:nvPr/>
-        </p:nvSpPr>
-        <p:spPr>
-          <a:xfrm>
-            <a:off x="8430768" y="2706624"/>
-            <a:ext cx="2651760" cy="310896"/>
-          </a:xfrm>
-          <a:prstGeom prst="rect">
-            <a:avLst/>
-          </a:prstGeom>
-          <a:noFill/>
-          <a:ln/>
-        </p:spPr>
-        <p:txBody>
-          <a:bodyPr wrap="square" lIns="0" tIns="0" rIns="0" bIns="0" rtlCol="0" anchor="ctr"/>
-          <a:lstStyle/>
-          <a:p>
-            <a:pPr marL="0" indent="0" algn="ctr">
-              <a:buNone/>
-            </a:pPr>
-            <a:r>
-              <a:rPr lang="en-US" sz="950" b="1">
-                <a:solidFill>
-                  <a:srgbClr val="FF385C"/>
-                </a:solidFill>
-                <a:latin typeface="Poppins" pitchFamily="34" charset="0"/>
-                <a:ea typeface="Poppins" pitchFamily="34" charset="-122"/>
-                <a:cs typeface="Poppins" pitchFamily="34" charset="-120"/>
-              </a:rPr>
-              <a:t>+ Self check-in</a:t>
-            </a:r>
-            <a:endParaRPr lang="en-US" sz="950"/>
-          </a:p>
-        </p:txBody>
-      </p:sp>
-      <p:sp>
-        <p:nvSpPr>
-          <p:cNvPr id="37" name="Shape 34"/>
-          <p:cNvSpPr/>
-          <p:nvPr/>
-        </p:nvSpPr>
-        <p:spPr>
-          <a:xfrm>
-            <a:off x="8266176" y="3282696"/>
-            <a:ext cx="3200400" cy="914400"/>
-          </a:xfrm>
-          <a:prstGeom prst="roundRect">
-            <a:avLst>
-              <a:gd name="adj" fmla="val 10000"/>
-            </a:avLst>
-          </a:prstGeom>
-          <a:solidFill>
-            <a:srgbClr val="F7F7F7"/>
-          </a:solidFill>
-          <a:ln/>
-        </p:spPr>
-        <p:txBody>
-          <a:bodyPr/>
-          <a:lstStyle/>
-          <a:p>
-            <a:endParaRPr lang="en-US"/>
-          </a:p>
-        </p:txBody>
-      </p:sp>
-      <p:sp>
-        <p:nvSpPr>
-          <p:cNvPr id="38" name="Text 35"/>
-          <p:cNvSpPr/>
-          <p:nvPr/>
-        </p:nvSpPr>
-        <p:spPr>
-          <a:xfrm>
-            <a:off x="8430768" y="3392424"/>
-            <a:ext cx="2450592" cy="320040"/>
-          </a:xfrm>
-          <a:prstGeom prst="rect">
-            <a:avLst/>
-          </a:prstGeom>
-          <a:noFill/>
-          <a:ln/>
-        </p:spPr>
-        <p:txBody>
-          <a:bodyPr wrap="square" lIns="0" tIns="0" rIns="0" bIns="0" rtlCol="0" anchor="ctr"/>
-          <a:lstStyle/>
-          <a:p>
-            <a:pPr marL="0" indent="0">
-              <a:buNone/>
-            </a:pPr>
-            <a:r>
-              <a:rPr lang="en-US" sz="1100" b="1">
-                <a:solidFill>
-                  <a:srgbClr val="222222"/>
-                </a:solidFill>
-                <a:latin typeface="Poppins" pitchFamily="34" charset="0"/>
-                <a:ea typeface="Poppins" pitchFamily="34" charset="-122"/>
-                <a:cs typeface="Poppins" pitchFamily="34" charset="-120"/>
-              </a:rPr>
-              <a:t>Bright Williamsburg flat</a:t>
-            </a:r>
-            <a:endParaRPr lang="en-US" sz="1100"/>
-          </a:p>
-        </p:txBody>
-      </p:sp>
-      <p:sp>
-        <p:nvSpPr>
-          <p:cNvPr id="39" name="Text 36"/>
-          <p:cNvSpPr/>
-          <p:nvPr/>
-        </p:nvSpPr>
-        <p:spPr>
-          <a:xfrm>
-            <a:off x="10634472" y="3392424"/>
-            <a:ext cx="822960" cy="320040"/>
-          </a:xfrm>
-          <a:prstGeom prst="rect">
-            <a:avLst/>
-          </a:prstGeom>
-          <a:noFill/>
-          <a:ln/>
-        </p:spPr>
-        <p:txBody>
-          <a:bodyPr wrap="square" lIns="0" tIns="0" rIns="0" bIns="0" rtlCol="0" anchor="ctr"/>
-          <a:lstStyle/>
-          <a:p>
-            <a:pPr marL="0" indent="0" algn="r">
-              <a:buNone/>
-            </a:pPr>
-            <a:r>
-              <a:rPr lang="en-US" sz="1300" b="1">
-                <a:solidFill>
-                  <a:srgbClr val="007A73"/>
-                </a:solidFill>
-                <a:latin typeface="Poppins" pitchFamily="34" charset="0"/>
-                <a:ea typeface="Poppins" pitchFamily="34" charset="-122"/>
-                <a:cs typeface="Poppins" pitchFamily="34" charset="-120"/>
-              </a:rPr>
-              <a:t>$241</a:t>
-            </a:r>
-            <a:endParaRPr lang="en-US" sz="1300"/>
-          </a:p>
-        </p:txBody>
-      </p:sp>
-      <p:sp>
-        <p:nvSpPr>
-          <p:cNvPr id="40" name="Shape 37"/>
-          <p:cNvSpPr/>
-          <p:nvPr/>
-        </p:nvSpPr>
-        <p:spPr>
-          <a:xfrm>
-            <a:off x="8430768" y="3785616"/>
-            <a:ext cx="2651760" cy="310896"/>
-          </a:xfrm>
-          <a:prstGeom prst="roundRect">
-            <a:avLst>
-              <a:gd name="adj" fmla="val 50000"/>
-            </a:avLst>
-          </a:prstGeom>
-          <a:solidFill>
-            <a:srgbClr val="FFEEF2"/>
-          </a:solidFill>
-          <a:ln/>
-        </p:spPr>
-        <p:txBody>
-          <a:bodyPr/>
-          <a:lstStyle/>
-          <a:p>
-            <a:endParaRPr lang="en-US"/>
-          </a:p>
-        </p:txBody>
-      </p:sp>
-      <p:sp>
-        <p:nvSpPr>
-          <p:cNvPr id="41" name="Text 38"/>
-          <p:cNvSpPr/>
-          <p:nvPr/>
-        </p:nvSpPr>
-        <p:spPr>
-          <a:xfrm>
-            <a:off x="8430768" y="3785616"/>
-            <a:ext cx="2651760" cy="310896"/>
-          </a:xfrm>
-          <a:prstGeom prst="rect">
-            <a:avLst/>
-          </a:prstGeom>
-          <a:noFill/>
-          <a:ln/>
-        </p:spPr>
-        <p:txBody>
-          <a:bodyPr wrap="square" lIns="0" tIns="0" rIns="0" bIns="0" rtlCol="0" anchor="ctr"/>
-          <a:lstStyle/>
-          <a:p>
-            <a:pPr marL="0" indent="0" algn="ctr">
-              <a:buNone/>
-            </a:pPr>
-            <a:r>
-              <a:rPr lang="en-US" sz="950" b="1">
-                <a:solidFill>
-                  <a:srgbClr val="FF385C"/>
-                </a:solidFill>
-                <a:latin typeface="Poppins" pitchFamily="34" charset="0"/>
-                <a:ea typeface="Poppins" pitchFamily="34" charset="-122"/>
-                <a:cs typeface="Poppins" pitchFamily="34" charset="-120"/>
-              </a:rPr>
-              <a:t>+ Dedicated workspace</a:t>
-            </a:r>
-            <a:endParaRPr lang="en-US" sz="950"/>
-          </a:p>
-        </p:txBody>
-      </p:sp>
-      <p:sp>
-        <p:nvSpPr>
-          <p:cNvPr id="42" name="Shape 39"/>
-          <p:cNvSpPr/>
-          <p:nvPr/>
-        </p:nvSpPr>
-        <p:spPr>
-          <a:xfrm>
-            <a:off x="8266176" y="4361688"/>
-            <a:ext cx="3200400" cy="914400"/>
-          </a:xfrm>
-          <a:prstGeom prst="roundRect">
-            <a:avLst>
-              <a:gd name="adj" fmla="val 10000"/>
-            </a:avLst>
-          </a:prstGeom>
-          <a:solidFill>
-            <a:srgbClr val="F7F7F7"/>
-          </a:solidFill>
-          <a:ln/>
-        </p:spPr>
-        <p:txBody>
-          <a:bodyPr/>
-          <a:lstStyle/>
-          <a:p>
-            <a:endParaRPr lang="en-US"/>
-          </a:p>
-        </p:txBody>
-      </p:sp>
-      <p:sp>
-        <p:nvSpPr>
-          <p:cNvPr id="43" name="Text 40"/>
-          <p:cNvSpPr/>
-          <p:nvPr/>
-        </p:nvSpPr>
-        <p:spPr>
-          <a:xfrm>
-            <a:off x="8430768" y="4471416"/>
-            <a:ext cx="2450592" cy="320040"/>
-          </a:xfrm>
-          <a:prstGeom prst="rect">
-            <a:avLst/>
-          </a:prstGeom>
-          <a:noFill/>
-          <a:ln/>
-        </p:spPr>
-        <p:txBody>
-          <a:bodyPr wrap="square" lIns="0" tIns="0" rIns="0" bIns="0" rtlCol="0" anchor="ctr"/>
-          <a:lstStyle/>
-          <a:p>
-            <a:pPr marL="0" indent="0">
-              <a:buNone/>
-            </a:pPr>
-            <a:r>
-              <a:rPr lang="en-US" sz="1100" b="1">
-                <a:solidFill>
-                  <a:srgbClr val="222222"/>
-                </a:solidFill>
-                <a:latin typeface="Poppins" pitchFamily="34" charset="0"/>
-                <a:ea typeface="Poppins" pitchFamily="34" charset="-122"/>
-                <a:cs typeface="Poppins" pitchFamily="34" charset="-120"/>
-              </a:rPr>
-              <a:t>Modern McCarren loft</a:t>
-            </a:r>
-            <a:endParaRPr lang="en-US" sz="1100"/>
-          </a:p>
-        </p:txBody>
-      </p:sp>
-      <p:sp>
-        <p:nvSpPr>
-          <p:cNvPr id="44" name="Text 41"/>
-          <p:cNvSpPr/>
-          <p:nvPr/>
-        </p:nvSpPr>
-        <p:spPr>
-          <a:xfrm>
-            <a:off x="10634472" y="4471416"/>
-            <a:ext cx="822960" cy="320040"/>
-          </a:xfrm>
-          <a:prstGeom prst="rect">
-            <a:avLst/>
-          </a:prstGeom>
-          <a:noFill/>
-          <a:ln/>
-        </p:spPr>
-        <p:txBody>
-          <a:bodyPr wrap="square" lIns="0" tIns="0" rIns="0" bIns="0" rtlCol="0" anchor="ctr"/>
-          <a:lstStyle/>
-          <a:p>
-            <a:pPr marL="0" indent="0" algn="r">
-              <a:buNone/>
-            </a:pPr>
-            <a:r>
-              <a:rPr lang="en-US" sz="1300" b="1">
-                <a:solidFill>
-                  <a:srgbClr val="007A73"/>
-                </a:solidFill>
-                <a:latin typeface="Poppins" pitchFamily="34" charset="0"/>
-                <a:ea typeface="Poppins" pitchFamily="34" charset="-122"/>
-                <a:cs typeface="Poppins" pitchFamily="34" charset="-120"/>
-              </a:rPr>
-              <a:t>$208</a:t>
-            </a:r>
-            <a:endParaRPr lang="en-US" sz="1300"/>
-          </a:p>
-        </p:txBody>
-      </p:sp>
-      <p:sp>
-        <p:nvSpPr>
-          <p:cNvPr id="45" name="Shape 42"/>
-          <p:cNvSpPr/>
-          <p:nvPr/>
-        </p:nvSpPr>
-        <p:spPr>
-          <a:xfrm>
-            <a:off x="8430768" y="4864608"/>
-            <a:ext cx="2651760" cy="310896"/>
-          </a:xfrm>
-          <a:prstGeom prst="roundRect">
-            <a:avLst>
-              <a:gd name="adj" fmla="val 50000"/>
-            </a:avLst>
-          </a:prstGeom>
-          <a:solidFill>
-            <a:srgbClr val="FFEEF2"/>
-          </a:solidFill>
-          <a:ln/>
-        </p:spPr>
-        <p:txBody>
-          <a:bodyPr/>
-          <a:lstStyle/>
-          <a:p>
-            <a:endParaRPr lang="en-US"/>
-          </a:p>
-        </p:txBody>
-      </p:sp>
-      <p:sp>
-        <p:nvSpPr>
-          <p:cNvPr id="46" name="Text 43"/>
-          <p:cNvSpPr/>
-          <p:nvPr/>
-        </p:nvSpPr>
-        <p:spPr>
-          <a:xfrm>
-            <a:off x="8430768" y="4864608"/>
-            <a:ext cx="2651760" cy="310896"/>
-          </a:xfrm>
-          <a:prstGeom prst="rect">
-            <a:avLst/>
-          </a:prstGeom>
-          <a:noFill/>
-          <a:ln/>
-        </p:spPr>
-        <p:txBody>
-          <a:bodyPr wrap="square" lIns="0" tIns="0" rIns="0" bIns="0" rtlCol="0" anchor="ctr"/>
-          <a:lstStyle/>
-          <a:p>
-            <a:pPr marL="0" indent="0" algn="ctr">
-              <a:buNone/>
-            </a:pPr>
-            <a:r>
-              <a:rPr lang="en-US" sz="950" b="1">
-                <a:solidFill>
-                  <a:srgbClr val="FF385C"/>
-                </a:solidFill>
-                <a:latin typeface="Poppins" pitchFamily="34" charset="0"/>
-                <a:ea typeface="Poppins" pitchFamily="34" charset="-122"/>
-                <a:cs typeface="Poppins" pitchFamily="34" charset="-120"/>
-              </a:rPr>
-              <a:t>+ Air conditioning</a:t>
-            </a:r>
-            <a:endParaRPr lang="en-US" sz="950"/>
-          </a:p>
-        </p:txBody>
-      </p:sp>
-      <p:sp>
-        <p:nvSpPr>
           <p:cNvPr id="47" name="Text 44"/>
           <p:cNvSpPr/>
           <p:nvPr/>
@@ -29780,7 +29260,7 @@
           <p:nvPr/>
         </p:nvPicPr>
         <p:blipFill>
-          <a:blip r:embed="rId4"/>
+          <a:blip r:embed="rId6"/>
           <a:stretch>
             <a:fillRect/>
           </a:stretch>
@@ -29834,7 +29314,7 @@
           <p:nvPr/>
         </p:nvPicPr>
         <p:blipFill>
-          <a:blip r:embed="rId3"/>
+          <a:blip r:embed="rId5"/>
           <a:stretch>
             <a:fillRect/>
           </a:stretch>
@@ -29885,6 +29365,51 @@
               <a:t>9</a:t>
             </a:r>
             <a:endParaRPr lang="en-US" sz="900"/>
+          </a:p>
+        </p:txBody>
+      </p:sp>
+      <p:sp>
+        <p:nvSpPr>
+          <p:cNvPr id="52" name="TextBox 51"/>
+          <p:cNvSpPr txBox="1"/>
+          <p:nvPr/>
+        </p:nvSpPr>
+        <p:spPr>
+          <a:xfrm>
+            <a:off x="8016240" y="3077938"/>
+            <a:ext cx="4041648" cy="1097280"/>
+          </a:xfrm>
+          <a:prstGeom prst="rect">
+            <a:avLst/>
+          </a:prstGeom>
+          <a:noFill/>
+        </p:spPr>
+        <p:txBody>
+          <a:bodyPr wrap="square">
+            <a:spAutoFit/>
+          </a:bodyPr>
+          <a:lstStyle/>
+          <a:p>
+            <a:pPr algn="ctr"/>
+            <a:r>
+              <a:rPr sz="1300" b="1">
+                <a:solidFill>
+                  <a:srgbClr val="FF385C"/>
+                </a:solidFill>
+              </a:rPr>
+              <a:t>Recorded product demo</a:t>
+            </a:r>
+          </a:p>
+          <a:p>
+            <a:pPr algn="ctr"/>
+            <a:r>
+              <a:rPr sz="1000">
+                <a:solidFill>
+                  <a:srgbClr val="717171"/>
+                </a:solidFill>
+              </a:rPr>
+              <a:t>Embedded in the presentation file. Too large for the repository; the link is in the README.</a:t>
+            </a:r>
           </a:p>
         </p:txBody>
       </p:sp>
@@ -29893,6 +29418,13 @@
   <p:clrMapOvr>
     <a:masterClrMapping/>
   </p:clrMapOvr>
+  <p:timing>
+    <p:tnLst>
+      <p:par>
+        <p:cTn id="1" dur="indefinite" restart="never" nodeType="tmRoot"/>
+      </p:par>
+    </p:tnLst>
+  </p:timing>
 </p:sld>
 </file>
 

--- a/Airbnb Pricing Deck.pptx
+++ b/Airbnb Pricing Deck.pptx
@@ -152,6 +152,7 @@
 <file path=ppt/revisionInfo.xml><?xml version="1.0" encoding="utf-8"?>
 <p1510:revInfo xmlns:a="http://schemas.openxmlformats.org/drawingml/2006/main" xmlns:r="http://schemas.openxmlformats.org/officeDocument/2006/relationships" xmlns:p1510="http://schemas.microsoft.com/office/powerpoint/2015/10/main">
   <p1510:revLst>
+    <p1510:client id="{20E617F0-D388-4A3E-81F6-AB7DD8B2A2BB}" v="12" dt="2026-08-06T19:46:24.617"/>
     <p1510:client id="{4952E4C5-3B12-48E9-9698-CFBB749B17E5}" v="7" dt="2026-08-06T18:18:43.380"/>
   </p1510:revLst>
 </p1510:revInfo>
@@ -161,8 +162,8 @@
 <pc:chgInfo xmlns:a="http://schemas.openxmlformats.org/drawingml/2006/main" xmlns:r="http://schemas.openxmlformats.org/officeDocument/2006/relationships" xmlns:ac="http://schemas.microsoft.com/office/drawing/2013/main/command" xmlns:pc="http://schemas.microsoft.com/office/powerpoint/2013/main/command">
   <pc:docChgLst>
     <pc:chgData name="Brendan Meara" userId="8c30799446d3e4f6" providerId="LiveId" clId="{B34053D7-44A3-4929-810D-8317594B30B9}"/>
-    <pc:docChg chg="undo custSel addSld delSld modSld">
-      <pc:chgData name="Brendan Meara" userId="8c30799446d3e4f6" providerId="LiveId" clId="{B34053D7-44A3-4929-810D-8317594B30B9}" dt="2026-08-06T18:20:42.661" v="227" actId="47"/>
+    <pc:docChg chg="undo redo custSel addSld delSld modSld">
+      <pc:chgData name="Brendan Meara" userId="8c30799446d3e4f6" providerId="LiveId" clId="{B34053D7-44A3-4929-810D-8317594B30B9}" dt="2026-08-06T19:47:19.222" v="1097" actId="20577"/>
       <pc:docMkLst>
         <pc:docMk/>
       </pc:docMkLst>
@@ -180,6 +181,170 @@
             <ac:spMk id="32" creationId="{00000000-0000-0000-0000-000000000000}"/>
           </ac:spMkLst>
         </pc:spChg>
+      </pc:sldChg>
+      <pc:sldChg chg="modSp mod">
+        <pc:chgData name="Brendan Meara" userId="8c30799446d3e4f6" providerId="LiveId" clId="{B34053D7-44A3-4929-810D-8317594B30B9}" dt="2026-08-06T19:35:25.735" v="520" actId="20577"/>
+        <pc:sldMkLst>
+          <pc:docMk/>
+          <pc:sldMk cId="0" sldId="259"/>
+        </pc:sldMkLst>
+        <pc:spChg chg="mod">
+          <ac:chgData name="Brendan Meara" userId="8c30799446d3e4f6" providerId="LiveId" clId="{B34053D7-44A3-4929-810D-8317594B30B9}" dt="2026-08-06T19:32:40.419" v="270" actId="20577"/>
+          <ac:spMkLst>
+            <pc:docMk/>
+            <pc:sldMk cId="0" sldId="259"/>
+            <ac:spMk id="3" creationId="{00000000-0000-0000-0000-000000000000}"/>
+          </ac:spMkLst>
+        </pc:spChg>
+        <pc:spChg chg="mod">
+          <ac:chgData name="Brendan Meara" userId="8c30799446d3e4f6" providerId="LiveId" clId="{B34053D7-44A3-4929-810D-8317594B30B9}" dt="2026-08-06T19:35:25.735" v="520" actId="20577"/>
+          <ac:spMkLst>
+            <pc:docMk/>
+            <pc:sldMk cId="0" sldId="259"/>
+            <ac:spMk id="4" creationId="{00000000-0000-0000-0000-000000000000}"/>
+          </ac:spMkLst>
+        </pc:spChg>
+        <pc:spChg chg="mod">
+          <ac:chgData name="Brendan Meara" userId="8c30799446d3e4f6" providerId="LiveId" clId="{B34053D7-44A3-4929-810D-8317594B30B9}" dt="2026-08-06T19:33:03.711" v="287" actId="20577"/>
+          <ac:spMkLst>
+            <pc:docMk/>
+            <pc:sldMk cId="0" sldId="259"/>
+            <ac:spMk id="32" creationId="{00000000-0000-0000-0000-000000000000}"/>
+          </ac:spMkLst>
+        </pc:spChg>
+        <pc:spChg chg="mod">
+          <ac:chgData name="Brendan Meara" userId="8c30799446d3e4f6" providerId="LiveId" clId="{B34053D7-44A3-4929-810D-8317594B30B9}" dt="2026-08-06T19:33:31.509" v="363" actId="20577"/>
+          <ac:spMkLst>
+            <pc:docMk/>
+            <pc:sldMk cId="0" sldId="259"/>
+            <ac:spMk id="33" creationId="{00000000-0000-0000-0000-000000000000}"/>
+          </ac:spMkLst>
+        </pc:spChg>
+        <pc:spChg chg="mod">
+          <ac:chgData name="Brendan Meara" userId="8c30799446d3e4f6" providerId="LiveId" clId="{B34053D7-44A3-4929-810D-8317594B30B9}" dt="2026-08-06T19:33:43.848" v="365" actId="1076"/>
+          <ac:spMkLst>
+            <pc:docMk/>
+            <pc:sldMk cId="0" sldId="259"/>
+            <ac:spMk id="34" creationId="{00000000-0000-0000-0000-000000000000}"/>
+          </ac:spMkLst>
+        </pc:spChg>
+        <pc:spChg chg="mod">
+          <ac:chgData name="Brendan Meara" userId="8c30799446d3e4f6" providerId="LiveId" clId="{B34053D7-44A3-4929-810D-8317594B30B9}" dt="2026-08-06T19:33:54.776" v="393" actId="20577"/>
+          <ac:spMkLst>
+            <pc:docMk/>
+            <pc:sldMk cId="0" sldId="259"/>
+            <ac:spMk id="37" creationId="{00000000-0000-0000-0000-000000000000}"/>
+          </ac:spMkLst>
+        </pc:spChg>
+        <pc:spChg chg="mod">
+          <ac:chgData name="Brendan Meara" userId="8c30799446d3e4f6" providerId="LiveId" clId="{B34053D7-44A3-4929-810D-8317594B30B9}" dt="2026-08-06T19:34:14.357" v="455" actId="20577"/>
+          <ac:spMkLst>
+            <pc:docMk/>
+            <pc:sldMk cId="0" sldId="259"/>
+            <ac:spMk id="38" creationId="{00000000-0000-0000-0000-000000000000}"/>
+          </ac:spMkLst>
+        </pc:spChg>
+      </pc:sldChg>
+      <pc:sldChg chg="addSp delSp modSp mod modNotesTx">
+        <pc:chgData name="Brendan Meara" userId="8c30799446d3e4f6" providerId="LiveId" clId="{B34053D7-44A3-4929-810D-8317594B30B9}" dt="2026-08-06T19:42:55.893" v="841" actId="20577"/>
+        <pc:sldMkLst>
+          <pc:docMk/>
+          <pc:sldMk cId="0" sldId="260"/>
+        </pc:sldMkLst>
+        <pc:spChg chg="mod">
+          <ac:chgData name="Brendan Meara" userId="8c30799446d3e4f6" providerId="LiveId" clId="{B34053D7-44A3-4929-810D-8317594B30B9}" dt="2026-08-06T19:38:12.972" v="638" actId="20577"/>
+          <ac:spMkLst>
+            <pc:docMk/>
+            <pc:sldMk cId="0" sldId="260"/>
+            <ac:spMk id="3" creationId="{00000000-0000-0000-0000-000000000000}"/>
+          </ac:spMkLst>
+        </pc:spChg>
+        <pc:spChg chg="add del">
+          <ac:chgData name="Brendan Meara" userId="8c30799446d3e4f6" providerId="LiveId" clId="{B34053D7-44A3-4929-810D-8317594B30B9}" dt="2026-08-06T19:37:45.540" v="614" actId="478"/>
+          <ac:spMkLst>
+            <pc:docMk/>
+            <pc:sldMk cId="0" sldId="260"/>
+            <ac:spMk id="4" creationId="{00000000-0000-0000-0000-000000000000}"/>
+          </ac:spMkLst>
+        </pc:spChg>
+        <pc:spChg chg="add del mod">
+          <ac:chgData name="Brendan Meara" userId="8c30799446d3e4f6" providerId="LiveId" clId="{B34053D7-44A3-4929-810D-8317594B30B9}" dt="2026-08-06T19:39:46.339" v="830"/>
+          <ac:spMkLst>
+            <pc:docMk/>
+            <pc:sldMk cId="0" sldId="260"/>
+            <ac:spMk id="12" creationId="{56978516-BCA9-6F18-1B4C-F160A07055D0}"/>
+          </ac:spMkLst>
+        </pc:spChg>
+        <pc:spChg chg="mod">
+          <ac:chgData name="Brendan Meara" userId="8c30799446d3e4f6" providerId="LiveId" clId="{B34053D7-44A3-4929-810D-8317594B30B9}" dt="2026-08-06T19:39:43.098" v="827" actId="20577"/>
+          <ac:spMkLst>
+            <pc:docMk/>
+            <pc:sldMk cId="0" sldId="260"/>
+            <ac:spMk id="42" creationId="{00000000-0000-0000-0000-000000000000}"/>
+          </ac:spMkLst>
+        </pc:spChg>
+      </pc:sldChg>
+      <pc:sldChg chg="delSp modSp mod modNotesTx">
+        <pc:chgData name="Brendan Meara" userId="8c30799446d3e4f6" providerId="LiveId" clId="{B34053D7-44A3-4929-810D-8317594B30B9}" dt="2026-08-06T19:47:19.222" v="1097" actId="20577"/>
+        <pc:sldMkLst>
+          <pc:docMk/>
+          <pc:sldMk cId="0" sldId="261"/>
+        </pc:sldMkLst>
+        <pc:spChg chg="mod">
+          <ac:chgData name="Brendan Meara" userId="8c30799446d3e4f6" providerId="LiveId" clId="{B34053D7-44A3-4929-810D-8317594B30B9}" dt="2026-08-06T19:43:54.168" v="911" actId="20577"/>
+          <ac:spMkLst>
+            <pc:docMk/>
+            <pc:sldMk cId="0" sldId="261"/>
+            <ac:spMk id="3" creationId="{00000000-0000-0000-0000-000000000000}"/>
+          </ac:spMkLst>
+        </pc:spChg>
+        <pc:spChg chg="del">
+          <ac:chgData name="Brendan Meara" userId="8c30799446d3e4f6" providerId="LiveId" clId="{B34053D7-44A3-4929-810D-8317594B30B9}" dt="2026-08-06T19:44:02.022" v="912" actId="478"/>
+          <ac:spMkLst>
+            <pc:docMk/>
+            <pc:sldMk cId="0" sldId="261"/>
+            <ac:spMk id="4" creationId="{00000000-0000-0000-0000-000000000000}"/>
+          </ac:spMkLst>
+        </pc:spChg>
+        <pc:spChg chg="mod">
+          <ac:chgData name="Brendan Meara" userId="8c30799446d3e4f6" providerId="LiveId" clId="{B34053D7-44A3-4929-810D-8317594B30B9}" dt="2026-08-06T19:44:41.697" v="984" actId="5793"/>
+          <ac:spMkLst>
+            <pc:docMk/>
+            <pc:sldMk cId="0" sldId="261"/>
+            <ac:spMk id="28" creationId="{00000000-0000-0000-0000-000000000000}"/>
+          </ac:spMkLst>
+        </pc:spChg>
+        <pc:spChg chg="mod">
+          <ac:chgData name="Brendan Meara" userId="8c30799446d3e4f6" providerId="LiveId" clId="{B34053D7-44A3-4929-810D-8317594B30B9}" dt="2026-08-06T19:45:33.742" v="1086" actId="20577"/>
+          <ac:spMkLst>
+            <pc:docMk/>
+            <pc:sldMk cId="0" sldId="261"/>
+            <ac:spMk id="30" creationId="{00000000-0000-0000-0000-000000000000}"/>
+          </ac:spMkLst>
+        </pc:spChg>
+      </pc:sldChg>
+      <pc:sldChg chg="addSp delSp modSp mod modAnim">
+        <pc:chgData name="Brendan Meara" userId="8c30799446d3e4f6" providerId="LiveId" clId="{B34053D7-44A3-4929-810D-8317594B30B9}" dt="2026-08-06T18:47:28.814" v="241" actId="1076"/>
+        <pc:sldMkLst>
+          <pc:docMk/>
+          <pc:sldMk cId="0" sldId="264"/>
+        </pc:sldMkLst>
+        <pc:spChg chg="del">
+          <ac:chgData name="Brendan Meara" userId="8c30799446d3e4f6" providerId="LiveId" clId="{B34053D7-44A3-4929-810D-8317594B30B9}" dt="2026-08-06T18:46:16.346" v="232" actId="478"/>
+          <ac:spMkLst>
+            <pc:docMk/>
+            <pc:sldMk cId="0" sldId="264"/>
+            <ac:spMk id="55" creationId="{00000000-0000-0000-0000-000000000000}"/>
+          </ac:spMkLst>
+        </pc:spChg>
+        <pc:picChg chg="add mod">
+          <ac:chgData name="Brendan Meara" userId="8c30799446d3e4f6" providerId="LiveId" clId="{B34053D7-44A3-4929-810D-8317594B30B9}" dt="2026-08-06T18:47:28.814" v="241" actId="1076"/>
+          <ac:picMkLst>
+            <pc:docMk/>
+            <pc:sldMk cId="0" sldId="264"/>
+            <ac:picMk id="30" creationId="{AD2507CA-B7CA-A075-5763-8F9308C7BF8B}"/>
+          </ac:picMkLst>
+        </pc:picChg>
       </pc:sldChg>
       <pc:sldChg chg="addSp delSp modSp mod">
         <pc:chgData name="Brendan Meara" userId="8c30799446d3e4f6" providerId="LiveId" clId="{B34053D7-44A3-4929-810D-8317594B30B9}" dt="2026-08-06T18:20:09.981" v="226" actId="1038"/>
@@ -700,11 +865,25 @@
           <a:lstStyle/>
           <a:p>
             <a:r>
-              <a:rPr lang="en-US"/>
+              <a:rPr lang="en-US" dirty="0"/>
               <a:t>SPEAKER: Brendan (~45s).
-"Good afternoon everyone, and thank you for being here. We're Team 6, and today we'll present our capstone project, Airbnb Pricing Intelligence. Over the past few months we've looked at one question that sounds simple but is genuinely hard: how do you know if an Airbnb listing is priced correctly? The deeper we dug, the clearer it got that this isn't only a machine-learning problem ,  it's a business problem and a trust problem. Today we'll walk you through what we found, how we approached it, the product we built, and the impact it could have for Airbnb and its hosts."
-TRANSITION: "So let's start with the problem we set out to solve." [Brendan continues to Slide 2]</a:t>
-            </a:r>
+</a:t>
+            </a:r>
+            <a:r>
+              <a:rPr lang="en-US" sz="1200" kern="1200" dirty="0">
+                <a:solidFill>
+                  <a:schemeClr val="tx1"/>
+                </a:solidFill>
+                <a:effectLst/>
+                <a:latin typeface="+mn-lt"/>
+                <a:ea typeface="+mn-ea"/>
+                <a:cs typeface="+mn-cs"/>
+              </a:rPr>
+              <a:t>“Good afternoon, everyone, and thank you for being here. We are Team 6, and today we are presenting our capstone project, Airbnb Pricing Intelligence. Over the past few months we have focused on one question that sounds simple but is actually hard: As a host, how do you know if an Airbnb listing is priced correctly? Are you maximizing your revenue? We posed as an internal Airbnb team tasked to analyze this problem and make a recommendation. We will walk you through what we found, how we approached it, the product we built, and the impact it could have for Airbnb and its hosts.”</a:t>
+            </a:r>
+          </a:p>
+          <a:p>
+            <a:endParaRPr lang="en-US" dirty="0"/>
           </a:p>
         </p:txBody>
       </p:sp>
@@ -1710,10 +1889,63 @@
           <a:lstStyle/>
           <a:p>
             <a:r>
-              <a:rPr lang="en-US"/>
-              <a:t>SPEAKER: Brendan (~1.5 min).
-"Most Airbnb hosts want to maximize revenue, but pricing isn't easy. Some price on experience, some copy nearby listings, some use Airbnb's Smart Pricing. The catch: Smart Pricing gives a recommendation but doesn't really explain why ,  you're expected to trust a number without knowing which comparable listings were used, what features drove it, or whether you have room to charge more. So we asked: could we build a pricing tool that not only predicts a fair price, but helps hosts understand and trust it? Our answer combines machine learning with comparable listings, pricing insights, and an interactive dashboard. The goal isn't to replace Smart Pricing ,  it's to make it transparent and easy to act on."
-TRANSITION: "Before we show how we built it, let's look at why this problem exists. I'll hand to Jai." [Hand to Jai]</a:t>
+              <a:rPr lang="en-US" sz="1200" b="1" kern="1200" dirty="0">
+                <a:solidFill>
+                  <a:schemeClr val="tx1"/>
+                </a:solidFill>
+                <a:effectLst/>
+                <a:latin typeface="+mn-lt"/>
+                <a:ea typeface="+mn-ea"/>
+                <a:cs typeface="+mn-cs"/>
+              </a:rPr>
+              <a:t>Slide 2: Executive Summary</a:t>
+            </a:r>
+            <a:endParaRPr lang="en-US" sz="1200" kern="1200" dirty="0">
+              <a:solidFill>
+                <a:schemeClr val="tx1"/>
+              </a:solidFill>
+              <a:effectLst/>
+              <a:latin typeface="+mn-lt"/>
+              <a:ea typeface="+mn-ea"/>
+              <a:cs typeface="+mn-cs"/>
+            </a:endParaRPr>
+          </a:p>
+          <a:p>
+            <a:r>
+              <a:rPr lang="en-US" sz="1200" kern="1200" dirty="0">
+                <a:solidFill>
+                  <a:schemeClr val="tx1"/>
+                </a:solidFill>
+                <a:effectLst/>
+                <a:latin typeface="+mn-lt"/>
+                <a:ea typeface="+mn-ea"/>
+                <a:cs typeface="+mn-cs"/>
+              </a:rPr>
+              <a:t>"Half the active listings in the five boroughs of New York are priced wrong against comparable listings, and we can now say by how much, and why. If every one of those listings moved to fair market value, that's a $7.6 million a year opportunity in host bookings, and since </a:t>
+            </a:r>
+            <a:r>
+              <a:rPr lang="en-US" sz="1200" kern="1200" dirty="0" err="1">
+                <a:solidFill>
+                  <a:schemeClr val="tx1"/>
+                </a:solidFill>
+                <a:effectLst/>
+                <a:latin typeface="+mn-lt"/>
+                <a:ea typeface="+mn-ea"/>
+                <a:cs typeface="+mn-cs"/>
+              </a:rPr>
+              <a:t>AirBnB</a:t>
+            </a:r>
+            <a:r>
+              <a:rPr lang="en-US" sz="1200" kern="1200" dirty="0">
+                <a:solidFill>
+                  <a:schemeClr val="tx1"/>
+                </a:solidFill>
+                <a:effectLst/>
+                <a:latin typeface="+mn-lt"/>
+                <a:ea typeface="+mn-ea"/>
+                <a:cs typeface="+mn-cs"/>
+              </a:rPr>
+              <a:t> takes a flat 15.5% of host bookings, that’s $1.17 million a year for Airbnb in the NYC pilot market. This gap exists because our existing Smart Pricing tool hands the hosts a number with no reasoning attached. There's nothing behind it for them to check, so hosts either ignore the number or just follow it blindly. What we built gives them a price they can actually question: the comparable listings behind it, and where their amenities fall short against top performers similar to them. They can also slide the price up or down and see the tradeoff with expected occupancy before committing. It is the same recommendation Smart Pricing already gives, now with the reasoning attached."</a:t>
             </a:r>
           </a:p>
         </p:txBody>
@@ -2062,97 +2294,55 @@
           <a:p>
             <a:r>
               <a:rPr lang="en-US" dirty="0"/>
-              <a:t>“</a:t>
-            </a:r>
-            <a:r>
-              <a:rPr lang="en-US" dirty="0" err="1"/>
-              <a:t>Thank you Jai</a:t>
-            </a:r>
+              <a:t>“Thank you Jai-- ​​</a:t>
+            </a:r>
+          </a:p>
+          <a:p>
+            <a:endParaRPr lang="en-US" dirty="0"/>
+          </a:p>
+          <a:p>
             <a:r>
               <a:rPr lang="en-US" dirty="0"/>
-              <a:t>-- </a:t>
-            </a:r>
-          </a:p>
-          <a:p>
-            <a:endParaRPr lang="en-US"/>
-          </a:p>
-          <a:p>
-            <a:r>
-              <a:rPr lang="en-US" dirty="0" err="1"/>
-              <a:t>So</a:t>
-            </a:r>
+              <a:t>So when looking at the data, The second thing the data told us is that this is not one market problem, it is two markets, and the dataset splits almost evenly between them. Between 4,008 listings, which is 41% of the market, are short-term stays, renting at a median price of 284 dollars/night. The other 5,744, or 59% of the market, are monthly rentals of 28 nights or longer, at a median price of 131 dollars. ​​</a:t>
+            </a:r>
+          </a:p>
+          <a:p>
+            <a:endParaRPr lang="en-US" dirty="0"/>
+          </a:p>
+          <a:p>
             <a:r>
               <a:rPr lang="en-US" dirty="0"/>
-              <a:t> when looking at the data, The second thing the data told us is that this is not one market problem, it is two markets, and the dataset splits almost evenly between them. Between 4,008 listings, which is 41% of the market, are short-term stays, renting at a median price of 284 dollars/night. The other 5,744, or 59% of the market, are monthly rentals of 28 nights or longer, at a median price of 131 dollars. </a:t>
-            </a:r>
-          </a:p>
-          <a:p>
-            <a:endParaRPr lang="en-US"/>
+              <a:t>That is more than double the nightly rate, and the reason is that the two halves are not competing with the same thing. Short-term stay competes with hotels while monthly stays compete with apartment sublets. </a:t>
+            </a:r>
+          </a:p>
+          <a:p>
+            <a:endParaRPr lang="en-US" dirty="0"/>
           </a:p>
           <a:p>
             <a:r>
               <a:rPr lang="en-US" dirty="0"/>
-              <a:t>That is more than double the nightly rate, and the reason is that the two halves are not competing with the same thing. Short-term stay competes with hotels while monthly stays compete with apartment sublets. This shows us that only one of them responds measurably to price. We measured a price elasticity of negative 0.92 on short-term stay listings with the pilot </a:t>
-            </a:r>
-            <a:r>
-              <a:rPr lang="en-US" dirty="0" err="1"/>
-              <a:t>sample, and</a:t>
-            </a:r>
+              <a:t>This shows us that only one of them responds measurably to price. We measured a price elasticity of negative 0.92 on short-term stay listings with the pilot sample, and detected no price response at all in the monthly segment.</a:t>
+            </a:r>
+          </a:p>
+          <a:p>
+            <a:endParaRPr lang="en-US" dirty="0"/>
+          </a:p>
+          <a:p>
+            <a:endParaRPr lang="en-US" dirty="0"/>
+          </a:p>
+          <a:p>
             <a:r>
               <a:rPr lang="en-US" dirty="0"/>
-              <a:t> detected no price response at all in the monthly segment. </a:t>
-            </a:r>
-          </a:p>
-          <a:p>
-            <a:endParaRPr lang="en-US"/>
-          </a:p>
-          <a:p>
-            <a:r>
-              <a:rPr lang="en-US"/>
-              <a:t>Pooling them would have blurred both signals and distorted every coefficient, so instead we run one engine calibrated separately for each market with its own comparables and its own elasticity. Every number you see for the rest of this presentation is market-aware, because the market is.”</a:t>
-            </a:r>
-          </a:p>
-          <a:p>
-            <a:r>
-              <a:rPr lang="en-US" b="1"/>
-              <a:t>Transition:</a:t>
-            </a:r>
+              <a:t> ​​Pooling them would have blurred both signals and distorted every coefficient, so instead we run one model calibrated separately for each market with its own comparables and its own elasticity. Every number you see for the rest of this presentation is market-aware, because the market is.”</a:t>
+            </a:r>
+          </a:p>
+          <a:p>
+            <a:endParaRPr lang="en-US" dirty="0"/>
+          </a:p>
+          <a:p>
             <a:r>
               <a:rPr lang="en-US" dirty="0"/>
-              <a:t> </a:t>
-            </a:r>
-            <a:r>
-              <a:rPr lang="en-US" i="1"/>
-              <a:t>“That split shapes everything downstream. Next, what else moves demand besides price.”</a:t>
-            </a:r>
-            <a:endParaRPr lang="en-US"/>
-          </a:p>
-          <a:p>
-            <a:endParaRPr lang="en-US"/>
-          </a:p>
-          <a:p>
-            <a:r>
-              <a:rPr lang="en-US" dirty="0"/>
-              <a:t>SPEAKER: Rachael (~1.5 min).
-"Before building any models, we wanted to understand what drives price. We looked at location, property type, bedrooms and bathrooms, amenities, host experience, review scores and availability. Some variables matter far more than others: Manhattan listings command much higher rates than the outer boroughs, entire homes price above private rooms, and quality signals like cleanliness and </a:t>
-            </a:r>
-            <a:r>
-              <a:rPr lang="en-US" dirty="0" err="1"/>
-              <a:t>self check-in</a:t>
-            </a:r>
-            <a:r>
-              <a:rPr lang="en-US" dirty="0"/>
-              <a:t> carry clear premiums. But the big realization was that no single feature explains price on its own ,  two listings can look almost identical and still charge very different prices. Pricing is driven by a combination of factors working together, which gave us confidence that a machine-learning approach would beat a simple formula."</a:t>
-            </a:r>
-            <a:br>
-              <a:rPr lang="en-US">
-                <a:cs typeface="+mn-lt"/>
-              </a:rPr>
-            </a:br>
-            <a:r>
-              <a:rPr lang="en-US" dirty="0"/>
-              <a:t>
-TRANSITION: "Once we understood the variables, we wanted to see how hosts were actually performing." [Rachael continues to Slide 6]</a:t>
+              <a:t>​Transition: “That split shapes everything downstream. Next, what else moves demand besides price.”</a:t>
             </a:r>
           </a:p>
         </p:txBody>
@@ -2238,74 +2428,58 @@
           <a:lstStyle/>
           <a:p>
             <a:r>
+              <a:rPr lang="en-US" dirty="0"/>
+              <a:t>SPEAKER: Rachael (~1.5 min).​“</a:t>
+            </a:r>
+          </a:p>
+          <a:p>
+            <a:endParaRPr lang="en-US" dirty="0"/>
+          </a:p>
+          <a:p>
+            <a:r>
+              <a:rPr lang="en-US" dirty="0"/>
+              <a:t>Here is the relationship that justifies the whole model, let's look at two listings at 200 dollars. These two listings are not the same listing. ​​</a:t>
+            </a:r>
+          </a:p>
+          <a:p>
+            <a:endParaRPr lang="en-US" dirty="0"/>
+          </a:p>
+          <a:p>
+            <a:r>
+              <a:rPr lang="en-US" dirty="0"/>
+              <a:t>Occupancy rises with review count. Listings with zero to ten reviews average about 34% occupancy; 11 to 50 reviews, about 37%; 51 or more reviews, about 42%. </a:t>
+            </a:r>
+          </a:p>
+          <a:p>
+            <a:endParaRPr lang="en-US" dirty="0"/>
+          </a:p>
+          <a:p>
+            <a:r>
+              <a:rPr lang="en-US" dirty="0"/>
+              <a:t>​​It is worth being precise here, because we checked both – host tenure and review count where host tenure shows no such pattern, it is flat at 37 to 39%. Thus It is the reviews driving this occupancy, not the tenure. It is  reputation that moves occupancy on its own, independently of price. ​​</a:t>
+            </a:r>
+          </a:p>
+          <a:p>
+            <a:endParaRPr lang="en-US" dirty="0"/>
+          </a:p>
+          <a:p>
+            <a:r>
+              <a:rPr lang="en-US" dirty="0"/>
+              <a:t>And that means the question ‘is this listing expensive?’ has no answer until you compare it against listings that match on reputation, location, size, and amenities. And this is what we explored in our model where a fair price is suggested against genuinely similar listings, not against the market average.</a:t>
+            </a:r>
+          </a:p>
+          <a:p>
+            <a:endParaRPr lang="en-US"/>
+          </a:p>
+          <a:p>
+            <a:r>
               <a:rPr lang="en-US"/>
-              <a:t>SPEAKER: Rachael (~1.5 min).
-“Here is the relationship that justifies the whole model, let's look at two listings at 200 dollars. These two listings are not the same listing. </a:t>
-            </a:r>
-          </a:p>
-          <a:p>
-            <a:endParaRPr lang="en-US"/>
-          </a:p>
-          <a:p>
-            <a:r>
-              <a:rPr lang="en-US"/>
-              <a:t>Occupancy rises with review count. Listings with zero to ten reviews average about 34% occupancy; 11 to 50 reviews, about 37%; 51 or more reviews, about 42%. </a:t>
-            </a:r>
-          </a:p>
-          <a:p>
-            <a:endParaRPr lang="en-US"/>
-          </a:p>
-          <a:p>
-            <a:r>
-              <a:rPr lang="en-US"/>
-              <a:t>It is worth being precise here, because we checked both – where host tenure shows no such pattern, it is flat at 37 to 39%. </a:t>
-            </a:r>
-            <a:r>
-              <a:rPr lang="en-US" err="1"/>
-              <a:t>Thus</a:t>
-            </a:r>
-            <a:r>
-              <a:rPr lang="en-US"/>
-              <a:t> It is the reviews driving this occupancy, not the tenure. It is  reputation </a:t>
-            </a:r>
-            <a:r>
-              <a:rPr lang="en-US" err="1"/>
-              <a:t>th</a:t>
-            </a:r>
-            <a:r>
-              <a:rPr lang="en-US"/>
-              <a:t>at moves occupancy on its own, independently of price. </a:t>
-            </a:r>
-          </a:p>
-          <a:p>
-            <a:endParaRPr lang="en-US"/>
-          </a:p>
-          <a:p>
-            <a:r>
-              <a:rPr lang="en-US"/>
-              <a:t>And that means the question ‘is this listing expensive?’ has no answer until you compare it against listings that match on reputation, location, size, and amenities. And this is what we explored in our model where a fair price is suggested against genuinely similar listings, not against the market average.”</a:t>
-            </a:r>
-          </a:p>
-          <a:p>
-            <a:endParaRPr lang="en-US"/>
-          </a:p>
-          <a:p>
-            <a:r>
-              <a:rPr lang="en-US" b="1"/>
-              <a:t>Handoff to Manas:</a:t>
-            </a:r>
-            <a:r>
-              <a:rPr lang="en-US"/>
-              <a:t> </a:t>
-            </a:r>
-            <a:r>
-              <a:rPr lang="en-US" i="1"/>
-              <a:t>“Now I will hand it to Manas to discuss how we moved from exploration to building the product itself. ”</a:t>
-            </a:r>
-            <a:endParaRPr lang="en-US"/>
-          </a:p>
-          <a:p>
-            <a:endParaRPr lang="en-US"/>
+              <a:t>”</a:t>
+            </a:r>
+            <a:r>
+              <a:rPr lang="en-US" dirty="0"/>
+              <a:t>​​Handoff to Manas: “Now I will hand it to Manas to discuss how we moved from exploration to building the product itself. ”</a:t>
+            </a:r>
           </a:p>
         </p:txBody>
       </p:sp>
@@ -21302,7 +21476,7 @@
               <a:buNone/>
             </a:pPr>
             <a:r>
-              <a:rPr lang="en-US" sz="1650">
+              <a:rPr lang="en-US" sz="1650" dirty="0">
                 <a:solidFill>
                   <a:srgbClr val="717171"/>
                 </a:solidFill>
@@ -21312,7 +21486,7 @@
               </a:rPr>
               <a:t>Smart Pricing could do this. It does not.</a:t>
             </a:r>
-            <a:endParaRPr lang="en-US" sz="1450"/>
+            <a:endParaRPr lang="en-US" sz="1450" dirty="0"/>
           </a:p>
         </p:txBody>
       </p:sp>
@@ -21541,7 +21715,7 @@
               <a:buNone/>
             </a:pPr>
             <a:r>
-              <a:rPr lang="en-US" sz="1500">
+              <a:rPr lang="en-US" sz="1500" dirty="0">
                 <a:solidFill>
                   <a:srgbClr val="484848"/>
                 </a:solidFill>
@@ -21549,9 +21723,31 @@
                 <a:ea typeface="Poppins" pitchFamily="34" charset="-122"/>
                 <a:cs typeface="Poppins" pitchFamily="34" charset="-120"/>
               </a:rPr>
-              <a:t>Smart Pricing optimises occupancy and conversion, not host revenue.</a:t>
-            </a:r>
-            <a:endParaRPr lang="en-US" sz="1080"/>
+              <a:t>Smart Pricing </a:t>
+            </a:r>
+            <a:r>
+              <a:rPr lang="en-US" sz="1500" dirty="0" err="1">
+                <a:solidFill>
+                  <a:srgbClr val="484848"/>
+                </a:solidFill>
+                <a:latin typeface="Poppins" pitchFamily="34" charset="0"/>
+                <a:ea typeface="Poppins" pitchFamily="34" charset="-122"/>
+                <a:cs typeface="Poppins" pitchFamily="34" charset="-120"/>
+              </a:rPr>
+              <a:t>optimises</a:t>
+            </a:r>
+            <a:r>
+              <a:rPr lang="en-US" sz="1500" dirty="0">
+                <a:solidFill>
+                  <a:srgbClr val="484848"/>
+                </a:solidFill>
+                <a:latin typeface="Poppins" pitchFamily="34" charset="0"/>
+                <a:ea typeface="Poppins" pitchFamily="34" charset="-122"/>
+                <a:cs typeface="Poppins" pitchFamily="34" charset="-120"/>
+              </a:rPr>
+              <a:t> occupancy and conversion, not host revenue.</a:t>
+            </a:r>
+            <a:endParaRPr lang="en-US" sz="1080" dirty="0"/>
           </a:p>
         </p:txBody>
       </p:sp>
@@ -21663,7 +21859,7 @@
               <a:buNone/>
             </a:pPr>
             <a:r>
-              <a:rPr lang="en-US" sz="1500">
+              <a:rPr lang="en-US" sz="1500" dirty="0">
                 <a:solidFill>
                   <a:srgbClr val="484848"/>
                 </a:solidFill>
@@ -21673,7 +21869,7 @@
               </a:rPr>
               <a:t>Published logic can be disputed, and reverse-engineered.</a:t>
             </a:r>
-            <a:endParaRPr lang="en-US" sz="1080"/>
+            <a:endParaRPr lang="en-US" sz="1080" dirty="0"/>
           </a:p>
         </p:txBody>
       </p:sp>
@@ -24009,7 +24205,7 @@
               </a:lnSpc>
             </a:pPr>
             <a:r>
-              <a:rPr lang="en-US" sz="3400" b="1">
+              <a:rPr lang="en-US" sz="3400" b="1" dirty="0">
                 <a:solidFill>
                   <a:srgbClr val="222222"/>
                 </a:solidFill>
@@ -24017,9 +24213,9 @@
                 <a:ea typeface="+mn-lt"/>
                 <a:cs typeface="Poppins"/>
               </a:rPr>
-              <a:t>One market, 9,752 listings</a:t>
-            </a:r>
-            <a:endParaRPr lang="en-US" sz="2900" b="1">
+              <a:t>NYC as a proving ground</a:t>
+            </a:r>
+            <a:endParaRPr lang="en-US" sz="2900" b="1" dirty="0">
               <a:solidFill>
                 <a:srgbClr val="000000"/>
               </a:solidFill>
@@ -24051,14 +24247,13 @@
           <a:bodyPr wrap="square" lIns="0" tIns="0" rIns="0" bIns="0" rtlCol="0" anchor="ctr"/>
           <a:lstStyle/>
           <a:p>
-            <a:pPr marL="0" indent="0">
+            <a:pPr>
               <a:lnSpc>
                 <a:spcPct val="105000"/>
               </a:lnSpc>
-              <a:buNone/>
             </a:pPr>
             <a:r>
-              <a:rPr lang="en-US" sz="2000">
+              <a:rPr lang="en-US" sz="2000" dirty="0">
                 <a:solidFill>
                   <a:srgbClr val="484848"/>
                 </a:solidFill>
@@ -24066,9 +24261,9 @@
                 <a:ea typeface="Poppins" pitchFamily="34" charset="-122"/>
                 <a:cs typeface="Poppins" pitchFamily="34" charset="-120"/>
               </a:rPr>
-              <a:t>Inside Airbnb, public data, June 2026.</a:t>
-            </a:r>
-            <a:endParaRPr lang="en-US" sz="1450"/>
+              <a:t>One Market to build, test, and evaluate. Inside Airbnb, public data, June 2026. </a:t>
+            </a:r>
+            <a:endParaRPr lang="en-US" sz="1450" dirty="0"/>
           </a:p>
         </p:txBody>
       </p:sp>
@@ -24729,7 +24924,7 @@
               <a:buNone/>
             </a:pPr>
             <a:r>
-              <a:rPr lang="en-US" sz="1800" b="1">
+              <a:rPr lang="en-US" sz="1800" b="1" dirty="0">
                 <a:solidFill>
                   <a:srgbClr val="484848"/>
                 </a:solidFill>
@@ -24740,7 +24935,7 @@
               <a:t>For each listing:  </a:t>
             </a:r>
             <a:r>
-              <a:rPr lang="en-US" sz="1800">
+              <a:rPr lang="en-US" sz="1800" dirty="0">
                 <a:solidFill>
                   <a:srgbClr val="484848"/>
                 </a:solidFill>
@@ -24750,7 +24945,7 @@
               </a:rPr>
               <a:t>nightly price · availability · reviews · amenities · location · host characteristics.</a:t>
             </a:r>
-            <a:endParaRPr lang="en-US" sz="1250"/>
+            <a:endParaRPr lang="en-US" sz="1250" dirty="0"/>
           </a:p>
         </p:txBody>
       </p:sp>
@@ -24942,7 +25137,7 @@
               <a:buNone/>
             </a:pPr>
             <a:r>
-              <a:rPr lang="en-US" sz="2000" b="1">
+              <a:rPr lang="en-US" sz="2000" b="1" dirty="0">
                 <a:solidFill>
                   <a:srgbClr val="222222"/>
                 </a:solidFill>
@@ -24950,9 +25145,9 @@
                 <a:ea typeface="Poppins" pitchFamily="34" charset="-122"/>
                 <a:cs typeface="Poppins" pitchFamily="34" charset="-120"/>
               </a:rPr>
-              <a:t>Understand first</a:t>
-            </a:r>
-            <a:endParaRPr lang="en-US" sz="1350"/>
+              <a:t>Large Limitations</a:t>
+            </a:r>
+            <a:endParaRPr lang="en-US" sz="1350" dirty="0"/>
           </a:p>
         </p:txBody>
       </p:sp>
@@ -24984,7 +25179,7 @@
               <a:buNone/>
             </a:pPr>
             <a:r>
-              <a:rPr lang="en-US" sz="1800">
+              <a:rPr lang="en-US" sz="1800" dirty="0">
                 <a:solidFill>
                   <a:srgbClr val="484848"/>
                 </a:solidFill>
@@ -24992,9 +25187,9 @@
                 <a:ea typeface="Poppins" pitchFamily="34" charset="-122"/>
                 <a:cs typeface="Poppins" pitchFamily="34" charset="-120"/>
               </a:rPr>
-              <a:t>Which variables matter, and what relationships already exist.</a:t>
-            </a:r>
-            <a:endParaRPr lang="en-US" sz="1100"/>
+              <a:t>Missing nightly price and occupancy rates from Kaggle dataset.</a:t>
+            </a:r>
+            <a:endParaRPr lang="en-US" sz="1100" dirty="0"/>
           </a:p>
         </p:txBody>
       </p:sp>
@@ -25064,17 +25259,16 @@
               <a:buNone/>
             </a:pPr>
             <a:r>
-              <a:rPr lang="en-US" sz="2000" b="1">
+              <a:rPr lang="en-US" sz="2000" b="1" dirty="0">
                 <a:solidFill>
                   <a:srgbClr val="222222"/>
                 </a:solidFill>
                 <a:latin typeface="Poppins" pitchFamily="34" charset="0"/>
-                <a:ea typeface="Poppins" pitchFamily="34" charset="-122"/>
-                <a:cs typeface="Poppins" pitchFamily="34" charset="-120"/>
-              </a:rPr>
-              <a:t>Then model</a:t>
-            </a:r>
-            <a:endParaRPr lang="en-US" sz="1350"/>
+                <a:cs typeface="Poppins" pitchFamily="34" charset="-120"/>
+              </a:rPr>
+              <a:t>300 Listing Sample</a:t>
+            </a:r>
+            <a:endParaRPr lang="en-US" sz="1350" dirty="0"/>
           </a:p>
         </p:txBody>
       </p:sp>
@@ -25106,7 +25300,7 @@
               <a:buNone/>
             </a:pPr>
             <a:r>
-              <a:rPr lang="en-US" sz="1800">
+              <a:rPr lang="en-US" sz="1800" dirty="0" err="1">
                 <a:solidFill>
                   <a:srgbClr val="484848"/>
                 </a:solidFill>
@@ -25114,9 +25308,42 @@
                 <a:ea typeface="Poppins" pitchFamily="34" charset="-122"/>
                 <a:cs typeface="Poppins" pitchFamily="34" charset="-120"/>
               </a:rPr>
-              <a:t>Only then machine learning, starting with EDA.</a:t>
-            </a:r>
-            <a:endParaRPr lang="en-US" sz="1100"/>
+              <a:t>AirROI</a:t>
+            </a:r>
+            <a:r>
+              <a:rPr lang="en-US" sz="1800" dirty="0">
+                <a:solidFill>
+                  <a:srgbClr val="484848"/>
+                </a:solidFill>
+                <a:latin typeface="Poppins" pitchFamily="34" charset="0"/>
+                <a:ea typeface="Poppins" pitchFamily="34" charset="-122"/>
+                <a:cs typeface="Poppins" pitchFamily="34" charset="-120"/>
+              </a:rPr>
+              <a:t> included a small sample of night rates/</a:t>
+            </a:r>
+            <a:r>
+              <a:rPr lang="en-US" sz="1800" dirty="0" err="1">
+                <a:solidFill>
+                  <a:srgbClr val="484848"/>
+                </a:solidFill>
+                <a:latin typeface="Poppins" pitchFamily="34" charset="0"/>
+                <a:ea typeface="Poppins" pitchFamily="34" charset="-122"/>
+                <a:cs typeface="Poppins" pitchFamily="34" charset="-120"/>
+              </a:rPr>
+              <a:t>occupany</a:t>
+            </a:r>
+            <a:r>
+              <a:rPr lang="en-US" sz="1800" dirty="0">
+                <a:solidFill>
+                  <a:srgbClr val="484848"/>
+                </a:solidFill>
+                <a:latin typeface="Poppins" pitchFamily="34" charset="0"/>
+                <a:ea typeface="Poppins" pitchFamily="34" charset="-122"/>
+                <a:cs typeface="Poppins" pitchFamily="34" charset="-120"/>
+              </a:rPr>
+              <a:t>.</a:t>
+            </a:r>
+            <a:endParaRPr lang="en-US" sz="1100" dirty="0"/>
           </a:p>
         </p:txBody>
       </p:sp>
@@ -25253,8 +25480,8 @@
         </p:nvSpPr>
         <p:spPr>
           <a:xfrm>
-            <a:off x="493776" y="768096"/>
-            <a:ext cx="10881360" cy="868680"/>
+            <a:off x="493775" y="768096"/>
+            <a:ext cx="11140135" cy="868680"/>
           </a:xfrm>
           <a:prstGeom prst="rect">
             <a:avLst/>
@@ -25272,60 +25499,15 @@
               </a:lnSpc>
             </a:pPr>
             <a:r>
-              <a:rPr lang="en-US" sz="3400" b="1">
+              <a:rPr lang="en-US" sz="3400" b="1" dirty="0">
                 <a:solidFill>
                   <a:srgbClr val="222222"/>
                 </a:solidFill>
                 <a:latin typeface="Poppins"/>
                 <a:cs typeface="Poppins"/>
               </a:rPr>
-              <a:t>One problem, two markets</a:t>
-            </a:r>
-          </a:p>
-        </p:txBody>
-      </p:sp>
-      <p:sp>
-        <p:nvSpPr>
-          <p:cNvPr id="4" name="Text 2"/>
-          <p:cNvSpPr/>
-          <p:nvPr/>
-        </p:nvSpPr>
-        <p:spPr>
-          <a:xfrm>
-            <a:off x="521208" y="1591056"/>
-            <a:ext cx="10424160" cy="457200"/>
-          </a:xfrm>
-          <a:prstGeom prst="rect">
-            <a:avLst/>
-          </a:prstGeom>
-          <a:noFill/>
-          <a:ln/>
-        </p:spPr>
-        <p:txBody>
-          <a:bodyPr wrap="square" lIns="0" tIns="0" rIns="0" bIns="0" rtlCol="0" anchor="ctr"/>
-          <a:lstStyle/>
-          <a:p>
-            <a:pPr marL="0" indent="0">
-              <a:lnSpc>
-                <a:spcPct val="105000"/>
-              </a:lnSpc>
-              <a:buNone/>
-            </a:pPr>
-            <a:r>
-              <a:rPr lang="en-US" sz="2000">
-                <a:solidFill>
-                  <a:srgbClr val="484848"/>
-                </a:solidFill>
-                <a:latin typeface="Poppins"/>
-                <a:ea typeface="Poppins" pitchFamily="34" charset="-122"/>
-                <a:cs typeface="Poppins"/>
-              </a:rPr>
-              <a:t>They split almost evenly, and behave differently.</a:t>
-            </a:r>
-            <a:endParaRPr lang="en-US" sz="1450">
-              <a:latin typeface="Poppins"/>
-              <a:cs typeface="Poppins"/>
-            </a:endParaRPr>
+              <a:t>One problem, two markets that behave differently</a:t>
+            </a:r>
           </a:p>
         </p:txBody>
       </p:sp>
@@ -25642,20 +25824,13 @@
               </a:lnSpc>
             </a:pPr>
             <a:br>
-              <a:rPr lang="en-US" sz="1600">
-                <a:latin typeface="Poppins"/>
-                <a:ea typeface="Poppins" pitchFamily="34" charset="-122"/>
-                <a:cs typeface="Poppins"/>
-              </a:rPr>
-            </a:br>
-            <a:br>
-              <a:rPr lang="en-US" sz="1600">
+              <a:rPr lang="en-US" sz="1600" dirty="0">
                 <a:latin typeface="Poppins"/>
                 <a:cs typeface="Poppins"/>
               </a:rPr>
             </a:br>
             <a:r>
-              <a:rPr lang="en-US" sz="1800" i="1">
+              <a:rPr lang="en-US" sz="1800" i="1" dirty="0">
                 <a:solidFill>
                   <a:srgbClr val="484848"/>
                 </a:solidFill>
@@ -25663,23 +25838,54 @@
                 <a:ea typeface="+mn-lt"/>
                 <a:cs typeface="Poppins"/>
               </a:rPr>
-              <a:t>Short-stay competes with hotels. Monthly competes with apartment sublets. Only one responds measurably to price. One engine, calibrated separately for each market.</a:t>
+              <a:t>Short-stay and monthly stays compete with different alternatives and only one responds measurably to price.</a:t>
             </a:r>
             <a:br>
-              <a:rPr lang="en-US" sz="1600" i="1">
+              <a:rPr lang="en-US" sz="1800" i="1" dirty="0">
+                <a:solidFill>
+                  <a:srgbClr val="484848"/>
+                </a:solidFill>
                 <a:latin typeface="Poppins"/>
                 <a:ea typeface="+mn-lt"/>
                 <a:cs typeface="Poppins"/>
               </a:rPr>
             </a:br>
             <a:br>
-              <a:rPr lang="en-US" sz="1600" i="1">
+              <a:rPr lang="en-US" sz="1800" i="1" dirty="0">
+                <a:solidFill>
+                  <a:srgbClr val="484848"/>
+                </a:solidFill>
                 <a:latin typeface="Poppins"/>
                 <a:ea typeface="+mn-lt"/>
                 <a:cs typeface="Poppins"/>
               </a:rPr>
             </a:br>
-            <a:endParaRPr lang="en-US" sz="1600" i="1">
+            <a:r>
+              <a:rPr lang="en-US" sz="1800" i="1" dirty="0">
+                <a:solidFill>
+                  <a:srgbClr val="484848"/>
+                </a:solidFill>
+                <a:latin typeface="Poppins"/>
+                <a:ea typeface="+mn-lt"/>
+                <a:cs typeface="Poppins"/>
+              </a:rPr>
+              <a:t>One model, calibrated separately for each market</a:t>
+            </a:r>
+            <a:br>
+              <a:rPr lang="en-US" sz="1600" i="1" dirty="0">
+                <a:latin typeface="Poppins"/>
+                <a:ea typeface="+mn-lt"/>
+                <a:cs typeface="Poppins"/>
+              </a:rPr>
+            </a:br>
+            <a:br>
+              <a:rPr lang="en-US" sz="1600" i="1" dirty="0">
+                <a:latin typeface="Poppins"/>
+                <a:ea typeface="+mn-lt"/>
+                <a:cs typeface="Poppins"/>
+              </a:rPr>
+            </a:br>
+            <a:endParaRPr lang="en-US" sz="1600" i="1" dirty="0">
               <a:latin typeface="Poppins"/>
               <a:ea typeface="+mn-lt"/>
               <a:cs typeface="Poppins"/>
@@ -26443,55 +26649,16 @@
               </a:lnSpc>
             </a:pPr>
             <a:r>
-              <a:rPr lang="en-US" sz="3400" b="1">
+              <a:rPr lang="en-US" sz="3400" b="1" dirty="0">
                 <a:solidFill>
                   <a:srgbClr val="222222"/>
                 </a:solidFill>
                 <a:latin typeface="Poppins"/>
                 <a:cs typeface="Poppins"/>
               </a:rPr>
-              <a:t>Reputation drives occupancy</a:t>
-            </a:r>
-            <a:endParaRPr lang="en-US"/>
-          </a:p>
-        </p:txBody>
-      </p:sp>
-      <p:sp>
-        <p:nvSpPr>
-          <p:cNvPr id="4" name="Text 2"/>
-          <p:cNvSpPr/>
-          <p:nvPr/>
-        </p:nvSpPr>
-        <p:spPr>
-          <a:xfrm>
-            <a:off x="521208" y="1591056"/>
-            <a:ext cx="10424160" cy="457200"/>
-          </a:xfrm>
-          <a:prstGeom prst="rect">
-            <a:avLst/>
-          </a:prstGeom>
-          <a:noFill/>
-          <a:ln/>
-        </p:spPr>
-        <p:txBody>
-          <a:bodyPr wrap="square" lIns="0" tIns="0" rIns="0" bIns="0" rtlCol="0" anchor="ctr"/>
-          <a:lstStyle/>
-          <a:p>
-            <a:pPr>
-              <a:lnSpc>
-                <a:spcPct val="105000"/>
-              </a:lnSpc>
-            </a:pPr>
-            <a:r>
-              <a:rPr lang="en-US" sz="1550">
-                <a:solidFill>
-                  <a:srgbClr val="484848"/>
-                </a:solidFill>
-                <a:latin typeface="Poppins"/>
-                <a:cs typeface="Poppins"/>
-              </a:rPr>
-              <a:t>Review count tracks occupancy. Host tenure does not.</a:t>
-            </a:r>
+              <a:t>Two listings priced at $200 are NOT comparable</a:t>
+            </a:r>
+            <a:endParaRPr lang="en-US" dirty="0"/>
           </a:p>
         </p:txBody>
       </p:sp>
@@ -27330,17 +27497,27 @@
               </a:lnSpc>
             </a:pPr>
             <a:r>
-              <a:rPr lang="en-US" sz="1800">
+              <a:rPr lang="en-US" dirty="0">
                 <a:solidFill>
                   <a:srgbClr val="484848"/>
                 </a:solidFill>
                 <a:latin typeface="Poppins"/>
-                <a:ea typeface="Poppins" pitchFamily="34" charset="-122"/>
                 <a:cs typeface="Poppins"/>
               </a:rPr>
-              <a:t>Price alone cannot tell you. You need peers matched on reputation, location, size and amenities.</a:t>
-            </a:r>
-            <a:endParaRPr lang="en-US">
+              <a:t>Host:  “is this listing expensive?” </a:t>
+            </a:r>
+            <a:r>
+              <a:rPr lang="en-US" dirty="0">
+                <a:solidFill>
+                  <a:srgbClr val="484848"/>
+                </a:solidFill>
+                <a:latin typeface="Poppins"/>
+                <a:cs typeface="Poppins"/>
+                <a:sym typeface="Wingdings" panose="05000000000000000000" pitchFamily="2" charset="2"/>
+              </a:rPr>
+              <a:t> no answer until…</a:t>
+            </a:r>
+            <a:endParaRPr lang="en-US" dirty="0">
               <a:solidFill>
                 <a:srgbClr val="4A4A4A"/>
               </a:solidFill>
@@ -27411,7 +27588,7 @@
               </a:lnSpc>
             </a:pPr>
             <a:r>
-              <a:rPr lang="en-US" sz="1800" b="1" i="1">
+              <a:rPr lang="en-US" sz="1800" b="1" i="1" dirty="0">
                 <a:solidFill>
                   <a:srgbClr val="00A699"/>
                 </a:solidFill>
@@ -27419,9 +27596,21 @@
                 <a:ea typeface="Poppins" pitchFamily="34" charset="-122"/>
                 <a:cs typeface="Poppins"/>
               </a:rPr>
-              <a:t>A fair price against genuine peers, not the market average.</a:t>
-            </a:r>
-            <a:endParaRPr lang="en-US" sz="1250">
+              <a:t>Why our model? </a:t>
+            </a:r>
+            <a:r>
+              <a:rPr lang="en-US" b="1" i="1" dirty="0">
+                <a:solidFill>
+                  <a:srgbClr val="00A699"/>
+                </a:solidFill>
+                <a:latin typeface="Poppins"/>
+                <a:ea typeface="Poppins" pitchFamily="34" charset="-122"/>
+                <a:cs typeface="Poppins"/>
+                <a:sym typeface="Wingdings" panose="05000000000000000000" pitchFamily="2" charset="2"/>
+              </a:rPr>
+              <a:t> a fair price against similar listing, not against the market average. </a:t>
+            </a:r>
+            <a:endParaRPr lang="en-US" sz="1250" dirty="0">
               <a:latin typeface="Poppins"/>
               <a:cs typeface="Poppins"/>
             </a:endParaRPr>
@@ -30758,59 +30947,6 @@
       </p:sp>
       <p:sp>
         <p:nvSpPr>
-          <p:cNvPr id="52" name="TextBox 51"/>
-          <p:cNvSpPr txBox="1"/>
-          <p:nvPr/>
-        </p:nvSpPr>
-        <p:spPr>
-          <a:xfrm>
-            <a:off x="8016240" y="3077938"/>
-            <a:ext cx="4041648" cy="1097280"/>
-          </a:xfrm>
-          <a:prstGeom prst="rect">
-            <a:avLst/>
-          </a:prstGeom>
-          <a:noFill/>
-        </p:spPr>
-        <p:txBody>
-          <a:bodyPr wrap="square">
-            <a:spAutoFit/>
-          </a:bodyPr>
-          <a:lstStyle/>
-          <a:p>
-            <a:pPr algn="ctr"/>
-            <a:r>
-              <a:rPr sz="1500" b="1" dirty="0">
-                <a:solidFill>
-                  <a:srgbClr val="FF385C"/>
-                </a:solidFill>
-              </a:rPr>
-              <a:t>Recorded product demo</a:t>
-            </a:r>
-          </a:p>
-          <a:p>
-            <a:pPr algn="ctr"/>
-            <a:r>
-              <a:rPr sz="1500" dirty="0">
-                <a:solidFill>
-                  <a:srgbClr val="717171"/>
-                </a:solidFill>
-              </a:rPr>
-              <a:t>Embedded in the presentation file. </a:t>
-            </a:r>
-            <a:r>
-              <a:rPr sz="1500">
-                <a:solidFill>
-                  <a:srgbClr val="717171"/>
-                </a:solidFill>
-              </a:rPr>
-              <a:t>Too large for the repository; the link is in the README.</a:t>
-            </a:r>
-          </a:p>
-        </p:txBody>
-      </p:sp>
-      <p:sp>
-        <p:nvSpPr>
           <p:cNvPr id="53" name="Accent Bar"/>
           <p:cNvSpPr/>
           <p:nvPr/>
@@ -30859,6 +30995,51 @@
           <a:p>
             <a:pPr algn="ctr"/>
             <a:endParaRPr/>
+          </a:p>
+        </p:txBody>
+      </p:sp>
+      <p:sp>
+        <p:nvSpPr>
+          <p:cNvPr id="54" name="TextBox 51"/>
+          <p:cNvSpPr txBox="1"/>
+          <p:nvPr/>
+        </p:nvSpPr>
+        <p:spPr>
+          <a:xfrm>
+            <a:off x="8019288" y="3081528"/>
+            <a:ext cx="4041648" cy="1097280"/>
+          </a:xfrm>
+          <a:prstGeom prst="rect">
+            <a:avLst/>
+          </a:prstGeom>
+          <a:noFill/>
+        </p:spPr>
+        <p:txBody>
+          <a:bodyPr wrap="square">
+            <a:spAutoFit/>
+          </a:bodyPr>
+          <a:lstStyle/>
+          <a:p>
+            <a:pPr algn="ctr"/>
+            <a:r>
+              <a:rPr sz="1500" b="1">
+                <a:solidFill>
+                  <a:srgbClr val="FF385C"/>
+                </a:solidFill>
+              </a:rPr>
+              <a:t>Recorded product demo</a:t>
+            </a:r>
+          </a:p>
+          <a:p>
+            <a:pPr algn="ctr"/>
+            <a:r>
+              <a:rPr sz="1500">
+                <a:solidFill>
+                  <a:srgbClr val="717171"/>
+                </a:solidFill>
+              </a:rPr>
+              <a:t>Embedded in the presentation file. Too large for the repository; the link is in the README.</a:t>
+            </a:r>
           </a:p>
         </p:txBody>
       </p:sp>

--- a/Airbnb Pricing Deck.pptx
+++ b/Airbnb Pricing Deck.pptx
@@ -25330,7 +25330,7 @@
                 <a:ea typeface="Poppins" pitchFamily="34" charset="-122"/>
                 <a:cs typeface="Poppins" pitchFamily="34" charset="-120"/>
               </a:rPr>
-              <a:t>occupany</a:t>
+              <a:t>occupancy</a:t>
             </a:r>
             <a:r>
               <a:rPr lang="en-US" sz="1800" dirty="0">
